--- a/Phase-1_Technical Seminar.pptx
+++ b/Phase-1_Technical Seminar.pptx
@@ -5,20 +5,20 @@
     <p:sldMasterId id="2147483648" r:id="rId2"/>
     <p:sldMasterId id="2147483650" r:id="rId3"/>
     <p:sldMasterId id="2147483652" r:id="rId4"/>
+    <p:sldMasterId id="2147483654" r:id="rId5"/>
   </p:sldMasterIdLst>
   <p:sldIdLst>
-    <p:sldId id="256" r:id="rId5"/>
-    <p:sldId id="257" r:id="rId6"/>
-    <p:sldId id="258" r:id="rId7"/>
-    <p:sldId id="259" r:id="rId8"/>
-    <p:sldId id="260" r:id="rId9"/>
-    <p:sldId id="261" r:id="rId10"/>
-    <p:sldId id="262" r:id="rId11"/>
-    <p:sldId id="263" r:id="rId12"/>
-    <p:sldId id="264" r:id="rId13"/>
-    <p:sldId id="265" r:id="rId14"/>
-    <p:sldId id="266" r:id="rId15"/>
-    <p:sldId id="267" r:id="rId16"/>
+    <p:sldId id="256" r:id="rId6"/>
+    <p:sldId id="257" r:id="rId7"/>
+    <p:sldId id="258" r:id="rId8"/>
+    <p:sldId id="259" r:id="rId9"/>
+    <p:sldId id="260" r:id="rId10"/>
+    <p:sldId id="261" r:id="rId11"/>
+    <p:sldId id="262" r:id="rId12"/>
+    <p:sldId id="263" r:id="rId13"/>
+    <p:sldId id="264" r:id="rId14"/>
+    <p:sldId id="265" r:id="rId15"/>
+    <p:sldId id="266" r:id="rId16"/>
   </p:sldIdLst>
   <p:sldSz cx="9144000" cy="5143500"/>
   <p:notesSz cx="7559675" cy="10691813"/>
@@ -26,8 +26,90 @@
 </file>
 
 <file path=ppt/slideLayouts/slideLayout1.xml><?xml version="1.0" encoding="utf-8"?>
+<p:sldLayout xmlns:a="http://schemas.openxmlformats.org/drawingml/2006/main" xmlns:p="http://schemas.openxmlformats.org/presentationml/2006/main" xmlns:r="http://schemas.openxmlformats.org/officeDocument/2006/relationships" xmlns:p14="http://schemas.microsoft.com/office/powerpoint/2010/main" xmlns:p15="http://schemas.microsoft.com/office/powerpoint/2012/main" xmlns:mc="http://schemas.openxmlformats.org/markup-compatibility/2006" type="titleOnly" preserve="1">
+  <p:cSld name="BIG_NUMBER">
+    <p:spTree>
+      <p:nvGrpSpPr>
+        <p:cNvPr id="1" name=""/>
+        <p:cNvGrpSpPr/>
+        <p:nvPr/>
+      </p:nvGrpSpPr>
+      <p:grpSpPr>
+        <a:xfrm>
+          <a:off x="0" y="0"/>
+          <a:ext cx="0" cy="0"/>
+          <a:chOff x="0" y="0"/>
+          <a:chExt cx="0" cy="0"/>
+        </a:xfrm>
+      </p:grpSpPr>
+      <p:sp>
+        <p:nvSpPr>
+          <p:cNvPr id="3" name="PlaceHolder 1"/>
+          <p:cNvSpPr>
+            <a:spLocks noGrp="1"/>
+          </p:cNvSpPr>
+          <p:nvPr>
+            <p:ph type="title"/>
+          </p:nvPr>
+        </p:nvSpPr>
+        <p:spPr>
+          <a:xfrm>
+            <a:off x="391680" y="749880"/>
+            <a:ext cx="8516880" cy="625320"/>
+          </a:xfrm>
+          <a:prstGeom prst="rect">
+            <a:avLst/>
+          </a:prstGeom>
+          <a:noFill/>
+          <a:ln w="0">
+            <a:noFill/>
+          </a:ln>
+        </p:spPr>
+        <p:txBody>
+          <a:bodyPr lIns="0" rIns="0" tIns="0" bIns="0" anchor="ctr">
+            <a:noAutofit/>
+          </a:bodyPr>
+          <a:p>
+            <a:pPr indent="0" algn="ctr">
+              <a:buNone/>
+            </a:pPr>
+            <a:endParaRPr b="0" lang="en-US" sz="4400" spc="-1" strike="noStrike">
+              <a:solidFill>
+                <a:srgbClr val="000000"/>
+              </a:solidFill>
+              <a:latin typeface="Arial"/>
+            </a:endParaRPr>
+          </a:p>
+        </p:txBody>
+      </p:sp>
+      <p:sp>
+        <p:nvSpPr>
+          <p:cNvPr id="3" name="PlaceHolder 2"/>
+          <p:cNvSpPr>
+            <a:spLocks noGrp="1"/>
+          </p:cNvSpPr>
+          <p:nvPr>
+            <p:ph type="sldNum" idx="1"/>
+          </p:nvPr>
+        </p:nvSpPr>
+        <p:spPr/>
+        <p:txBody>
+          <a:bodyPr/>
+          <a:p>
+            <a:fld id="{1138A9FD-20E6-4FF2-9FC0-9B1720375443}" type="slidenum">
+              <a:t>&lt;#&gt;</a:t>
+            </a:fld>
+          </a:p>
+        </p:txBody>
+      </p:sp>
+    </p:spTree>
+  </p:cSld>
+</p:sldLayout>
+</file>
+
+<file path=ppt/slideLayouts/slideLayout2.xml><?xml version="1.0" encoding="utf-8"?>
 <p:sldLayout xmlns:a="http://schemas.openxmlformats.org/drawingml/2006/main" xmlns:p="http://schemas.openxmlformats.org/presentationml/2006/main" xmlns:r="http://schemas.openxmlformats.org/officeDocument/2006/relationships" xmlns:p14="http://schemas.microsoft.com/office/powerpoint/2010/main" xmlns:p15="http://schemas.microsoft.com/office/powerpoint/2012/main" xmlns:mc="http://schemas.openxmlformats.org/markup-compatibility/2006" type="blank" preserve="1">
-  <p:cSld name="BIG_NUMBER">
+  <p:cSld name="Default">
     <p:spTree>
       <p:nvGrpSpPr>
         <p:cNvPr id="1" name=""/>
@@ -49,14 +131,14 @@
             <a:spLocks noGrp="1"/>
           </p:cNvSpPr>
           <p:nvPr>
-            <p:ph type="sldNum" idx="1"/>
+            <p:ph type="sldNum" idx="2"/>
           </p:nvPr>
         </p:nvSpPr>
         <p:spPr/>
         <p:txBody>
           <a:bodyPr/>
           <a:p>
-            <a:fld id="{F61C1CC9-73C9-4F5F-BF09-507E1F06B60E}" type="slidenum">
+            <a:fld id="{7F7E0DBF-8ACE-493E-98D1-F8C0544FB4BE}" type="slidenum">
               <a:t>&lt;#&gt;</a:t>
             </a:fld>
           </a:p>
@@ -67,7 +149,129 @@
 </p:sldLayout>
 </file>
 
-<file path=ppt/slideLayouts/slideLayout2.xml><?xml version="1.0" encoding="utf-8"?>
+<file path=ppt/slideLayouts/slideLayout3.xml><?xml version="1.0" encoding="utf-8"?>
+<p:sldLayout xmlns:a="http://schemas.openxmlformats.org/drawingml/2006/main" xmlns:p="http://schemas.openxmlformats.org/presentationml/2006/main" xmlns:r="http://schemas.openxmlformats.org/officeDocument/2006/relationships" xmlns:p14="http://schemas.microsoft.com/office/powerpoint/2010/main" xmlns:p15="http://schemas.microsoft.com/office/powerpoint/2012/main" xmlns:mc="http://schemas.openxmlformats.org/markup-compatibility/2006" type="title" preserve="1">
+  <p:cSld name="Default 1">
+    <p:spTree>
+      <p:nvGrpSpPr>
+        <p:cNvPr id="1" name=""/>
+        <p:cNvGrpSpPr/>
+        <p:nvPr/>
+      </p:nvGrpSpPr>
+      <p:grpSpPr>
+        <a:xfrm>
+          <a:off x="0" y="0"/>
+          <a:ext cx="0" cy="0"/>
+          <a:chOff x="0" y="0"/>
+          <a:chExt cx="0" cy="0"/>
+        </a:xfrm>
+      </p:grpSpPr>
+      <p:sp>
+        <p:nvSpPr>
+          <p:cNvPr id="12" name="PlaceHolder 1"/>
+          <p:cNvSpPr>
+            <a:spLocks noGrp="1"/>
+          </p:cNvSpPr>
+          <p:nvPr>
+            <p:ph type="title"/>
+          </p:nvPr>
+        </p:nvSpPr>
+        <p:spPr>
+          <a:xfrm>
+            <a:off x="391680" y="749880"/>
+            <a:ext cx="8516880" cy="625320"/>
+          </a:xfrm>
+          <a:prstGeom prst="rect">
+            <a:avLst/>
+          </a:prstGeom>
+          <a:noFill/>
+          <a:ln w="0">
+            <a:noFill/>
+          </a:ln>
+        </p:spPr>
+        <p:txBody>
+          <a:bodyPr lIns="0" rIns="0" tIns="0" bIns="0" anchor="ctr">
+            <a:noAutofit/>
+          </a:bodyPr>
+          <a:p>
+            <a:pPr indent="0" algn="ctr">
+              <a:buNone/>
+            </a:pPr>
+            <a:endParaRPr b="0" lang="en-US" sz="4400" spc="-1" strike="noStrike">
+              <a:solidFill>
+                <a:srgbClr val="000000"/>
+              </a:solidFill>
+              <a:latin typeface="Arial"/>
+            </a:endParaRPr>
+          </a:p>
+        </p:txBody>
+      </p:sp>
+      <p:sp>
+        <p:nvSpPr>
+          <p:cNvPr id="13" name="PlaceHolder 2"/>
+          <p:cNvSpPr>
+            <a:spLocks noGrp="1"/>
+          </p:cNvSpPr>
+          <p:nvPr>
+            <p:ph type="subTitle"/>
+          </p:nvPr>
+        </p:nvSpPr>
+        <p:spPr>
+          <a:xfrm>
+            <a:off x="457200" y="1203480"/>
+            <a:ext cx="8229240" cy="2982960"/>
+          </a:xfrm>
+          <a:prstGeom prst="rect">
+            <a:avLst/>
+          </a:prstGeom>
+          <a:noFill/>
+          <a:ln w="0">
+            <a:noFill/>
+          </a:ln>
+        </p:spPr>
+        <p:txBody>
+          <a:bodyPr lIns="0" rIns="0" tIns="0" bIns="0" anchor="ctr">
+            <a:noAutofit/>
+          </a:bodyPr>
+          <a:p>
+            <a:pPr indent="0" algn="ctr">
+              <a:buNone/>
+            </a:pPr>
+            <a:endParaRPr b="0" lang="en-US" sz="3200" spc="-1" strike="noStrike">
+              <a:solidFill>
+                <a:srgbClr val="000000"/>
+              </a:solidFill>
+              <a:latin typeface="Arial"/>
+            </a:endParaRPr>
+          </a:p>
+        </p:txBody>
+      </p:sp>
+      <p:sp>
+        <p:nvSpPr>
+          <p:cNvPr id="4" name="PlaceHolder 3"/>
+          <p:cNvSpPr>
+            <a:spLocks noGrp="1"/>
+          </p:cNvSpPr>
+          <p:nvPr>
+            <p:ph type="sldNum" idx="3"/>
+          </p:nvPr>
+        </p:nvSpPr>
+        <p:spPr/>
+        <p:txBody>
+          <a:bodyPr/>
+          <a:p>
+            <a:fld id="{CDE4894D-2664-472C-AB58-172DB9B38E06}" type="slidenum">
+              <a:t>&lt;#&gt;</a:t>
+            </a:fld>
+          </a:p>
+        </p:txBody>
+      </p:sp>
+    </p:spTree>
+  </p:cSld>
+</p:sldLayout>
+</file>
+
+<file path=ppt/slideLayouts/slideLayout4.xml><?xml version="1.0" encoding="utf-8"?>
 <p:sldLayout xmlns:a="http://schemas.openxmlformats.org/drawingml/2006/main" xmlns:p="http://schemas.openxmlformats.org/presentationml/2006/main" xmlns:r="http://schemas.openxmlformats.org/officeDocument/2006/relationships" xmlns:p14="http://schemas.microsoft.com/office/powerpoint/2010/main" xmlns:p15="http://schemas.microsoft.com/office/powerpoint/2012/main" xmlns:mc="http://schemas.openxmlformats.org/markup-compatibility/2006" type="titleOnly" preserve="1">
   <p:cSld name="TITLE_ONLY">
     <p:spTree>
@@ -86,7 +290,7 @@
       </p:grpSpPr>
       <p:sp>
         <p:nvSpPr>
-          <p:cNvPr id="8" name="PlaceHolder 1"/>
+          <p:cNvPr id="18" name="PlaceHolder 1"/>
           <p:cNvSpPr>
             <a:spLocks noGrp="1"/>
           </p:cNvSpPr>
@@ -97,7 +301,7 @@
         <p:spPr>
           <a:xfrm>
             <a:off x="391680" y="749880"/>
-            <a:ext cx="8518320" cy="625320"/>
+            <a:ext cx="8516880" cy="625320"/>
           </a:xfrm>
           <a:prstGeom prst="rect">
             <a:avLst/>
@@ -131,56 +335,14 @@
             <a:spLocks noGrp="1"/>
           </p:cNvSpPr>
           <p:nvPr>
-            <p:ph type="sldNum" idx="2"/>
+            <p:ph type="sldNum" idx="4"/>
           </p:nvPr>
         </p:nvSpPr>
         <p:spPr/>
         <p:txBody>
           <a:bodyPr/>
           <a:p>
-            <a:fld id="{DC4FD553-AF17-4041-90A2-F9748AB97AE4}" type="slidenum">
-              <a:t>&lt;#&gt;</a:t>
-            </a:fld>
-          </a:p>
-        </p:txBody>
-      </p:sp>
-    </p:spTree>
-  </p:cSld>
-</p:sldLayout>
-</file>
-
-<file path=ppt/slideLayouts/slideLayout3.xml><?xml version="1.0" encoding="utf-8"?>
-<p:sldLayout xmlns:a="http://schemas.openxmlformats.org/drawingml/2006/main" xmlns:p="http://schemas.openxmlformats.org/presentationml/2006/main" xmlns:r="http://schemas.openxmlformats.org/officeDocument/2006/relationships" xmlns:p14="http://schemas.microsoft.com/office/powerpoint/2010/main" xmlns:p15="http://schemas.microsoft.com/office/powerpoint/2012/main" xmlns:mc="http://schemas.openxmlformats.org/markup-compatibility/2006" type="blank" preserve="1">
-  <p:cSld name="CAPTION_ONLY">
-    <p:spTree>
-      <p:nvGrpSpPr>
-        <p:cNvPr id="1" name=""/>
-        <p:cNvGrpSpPr/>
-        <p:nvPr/>
-      </p:nvGrpSpPr>
-      <p:grpSpPr>
-        <a:xfrm>
-          <a:off x="0" y="0"/>
-          <a:ext cx="0" cy="0"/>
-          <a:chOff x="0" y="0"/>
-          <a:chExt cx="0" cy="0"/>
-        </a:xfrm>
-      </p:grpSpPr>
-      <p:sp>
-        <p:nvSpPr>
-          <p:cNvPr id="2" name="PlaceHolder 1"/>
-          <p:cNvSpPr>
-            <a:spLocks noGrp="1"/>
-          </p:cNvSpPr>
-          <p:nvPr>
-            <p:ph type="sldNum" idx="3"/>
-          </p:nvPr>
-        </p:nvSpPr>
-        <p:spPr/>
-        <p:txBody>
-          <a:bodyPr/>
-          <a:p>
-            <a:fld id="{9312FCF9-C6F5-4FC6-ACE3-40AA7F8919EA}" type="slidenum">
+            <a:fld id="{AE8769E8-D3D2-4695-8933-EAFAD6B84300}" type="slidenum">
               <a:t>&lt;#&gt;</a:t>
             </a:fld>
           </a:p>
@@ -229,7 +391,7 @@
         <p:spPr>
           <a:xfrm>
             <a:off x="216000" y="216000"/>
-            <a:ext cx="1505520" cy="645840"/>
+            <a:ext cx="1504080" cy="644400"/>
           </a:xfrm>
           <a:prstGeom prst="rect">
             <a:avLst/>
@@ -246,13 +408,125 @@
             <a:spLocks noGrp="1"/>
           </p:cNvSpPr>
           <p:nvPr>
+            <p:ph type="title"/>
+          </p:nvPr>
+        </p:nvSpPr>
+        <p:spPr>
+          <a:xfrm>
+            <a:off x="391680" y="749880"/>
+            <a:ext cx="8516880" cy="624960"/>
+          </a:xfrm>
+          <a:prstGeom prst="rect">
+            <a:avLst/>
+          </a:prstGeom>
+          <a:noFill/>
+          <a:ln w="0">
+            <a:noFill/>
+          </a:ln>
+        </p:spPr>
+        <p:txBody>
+          <a:bodyPr lIns="0" rIns="0" tIns="0" bIns="0" anchor="ctr">
+            <a:noAutofit/>
+          </a:bodyPr>
+          <a:p>
+            <a:pPr indent="0">
+              <a:buNone/>
+            </a:pPr>
+            <a:r>
+              <a:rPr b="0" lang="en-US" sz="1800" spc="-1" strike="noStrike">
+                <a:solidFill>
+                  <a:srgbClr val="000000"/>
+                </a:solidFill>
+                <a:latin typeface="Arial"/>
+              </a:rPr>
+              <a:t>Clic</a:t>
+            </a:r>
+            <a:r>
+              <a:rPr b="0" lang="en-US" sz="1800" spc="-1" strike="noStrike">
+                <a:solidFill>
+                  <a:srgbClr val="000000"/>
+                </a:solidFill>
+                <a:latin typeface="Arial"/>
+              </a:rPr>
+              <a:t>k to </a:t>
+            </a:r>
+            <a:r>
+              <a:rPr b="0" lang="en-US" sz="1800" spc="-1" strike="noStrike">
+                <a:solidFill>
+                  <a:srgbClr val="000000"/>
+                </a:solidFill>
+                <a:latin typeface="Arial"/>
+              </a:rPr>
+              <a:t>edit </a:t>
+            </a:r>
+            <a:r>
+              <a:rPr b="0" lang="en-US" sz="1800" spc="-1" strike="noStrike">
+                <a:solidFill>
+                  <a:srgbClr val="000000"/>
+                </a:solidFill>
+                <a:latin typeface="Arial"/>
+              </a:rPr>
+              <a:t>the </a:t>
+            </a:r>
+            <a:r>
+              <a:rPr b="0" lang="en-US" sz="1800" spc="-1" strike="noStrike">
+                <a:solidFill>
+                  <a:srgbClr val="000000"/>
+                </a:solidFill>
+                <a:latin typeface="Arial"/>
+              </a:rPr>
+              <a:t>title </a:t>
+            </a:r>
+            <a:r>
+              <a:rPr b="0" lang="en-US" sz="1800" spc="-1" strike="noStrike">
+                <a:solidFill>
+                  <a:srgbClr val="000000"/>
+                </a:solidFill>
+                <a:latin typeface="Arial"/>
+              </a:rPr>
+              <a:t>text </a:t>
+            </a:r>
+            <a:r>
+              <a:rPr b="0" lang="en-US" sz="1800" spc="-1" strike="noStrike">
+                <a:solidFill>
+                  <a:srgbClr val="000000"/>
+                </a:solidFill>
+                <a:latin typeface="Arial"/>
+              </a:rPr>
+              <a:t>form</a:t>
+            </a:r>
+            <a:r>
+              <a:rPr b="0" lang="en-US" sz="1800" spc="-1" strike="noStrike">
+                <a:solidFill>
+                  <a:srgbClr val="000000"/>
+                </a:solidFill>
+                <a:latin typeface="Arial"/>
+              </a:rPr>
+              <a:t>at</a:t>
+            </a:r>
+            <a:endParaRPr b="0" lang="en-US" sz="1800" spc="-1" strike="noStrike">
+              <a:solidFill>
+                <a:srgbClr val="000000"/>
+              </a:solidFill>
+              <a:latin typeface="Arial"/>
+            </a:endParaRPr>
+          </a:p>
+        </p:txBody>
+      </p:sp>
+      <p:sp>
+        <p:nvSpPr>
+          <p:cNvPr id="2" name="PlaceHolder 2"/>
+          <p:cNvSpPr>
+            <a:spLocks noGrp="1"/>
+          </p:cNvSpPr>
+          <p:nvPr>
             <p:ph type="sldNum" idx="1"/>
           </p:nvPr>
         </p:nvSpPr>
         <p:spPr>
           <a:xfrm>
             <a:off x="8472600" y="4663080"/>
-            <a:ext cx="546480" cy="391320"/>
+            <a:ext cx="545040" cy="389880"/>
           </a:xfrm>
           <a:prstGeom prst="rect">
             <a:avLst/>
@@ -294,7 +568,7 @@
                 <a:tab algn="l" pos="0"/>
               </a:tabLst>
             </a:pPr>
-            <a:fld id="{BB81D84D-26FA-442A-AFC9-58F8F5375760}" type="slidenum">
+            <a:fld id="{75BF9B94-133B-441D-BB6B-A3D9CE86049D}" type="slidenum">
               <a:rPr b="0" lang="en-IN" sz="1000" spc="-1" strike="noStrike">
                 <a:solidFill>
                   <a:schemeClr val="dk2"/>
@@ -302,314 +576,13 @@
                 <a:latin typeface="Arial"/>
                 <a:ea typeface="Arial"/>
               </a:rPr>
-              <a:t>1</a:t>
+              <a:t>&lt;number&gt;</a:t>
             </a:fld>
             <a:endParaRPr b="0" lang="en-US" sz="1000" spc="-1" strike="noStrike">
               <a:solidFill>
                 <a:srgbClr val="000000"/>
               </a:solidFill>
               <a:latin typeface="Times New Roman"/>
-            </a:endParaRPr>
-          </a:p>
-        </p:txBody>
-      </p:sp>
-      <p:sp>
-        <p:nvSpPr>
-          <p:cNvPr id="2" name="PlaceHolder 2"/>
-          <p:cNvSpPr>
-            <a:spLocks noGrp="1"/>
-          </p:cNvSpPr>
-          <p:nvPr>
-            <p:ph type="title"/>
-          </p:nvPr>
-        </p:nvSpPr>
-        <p:spPr>
-          <a:xfrm>
-            <a:off x="457200" y="205200"/>
-            <a:ext cx="8229240" cy="858600"/>
-          </a:xfrm>
-          <a:prstGeom prst="rect">
-            <a:avLst/>
-          </a:prstGeom>
-          <a:noFill/>
-          <a:ln w="0">
-            <a:noFill/>
-          </a:ln>
-        </p:spPr>
-        <p:txBody>
-          <a:bodyPr lIns="0" rIns="0" tIns="0" bIns="0" anchor="ctr">
-            <a:noAutofit/>
-          </a:bodyPr>
-          <a:p>
-            <a:pPr indent="0" algn="ctr">
-              <a:buNone/>
-            </a:pPr>
-            <a:r>
-              <a:rPr b="0" lang="en-US" sz="4400" spc="-1" strike="noStrike">
-                <a:solidFill>
-                  <a:srgbClr val="000000"/>
-                </a:solidFill>
-                <a:latin typeface="Arial"/>
-              </a:rPr>
-              <a:t>Click to </a:t>
-            </a:r>
-            <a:r>
-              <a:rPr b="0" lang="en-US" sz="4400" spc="-1" strike="noStrike">
-                <a:solidFill>
-                  <a:srgbClr val="000000"/>
-                </a:solidFill>
-                <a:latin typeface="Arial"/>
-              </a:rPr>
-              <a:t>edit the </a:t>
-            </a:r>
-            <a:r>
-              <a:rPr b="0" lang="en-US" sz="4400" spc="-1" strike="noStrike">
-                <a:solidFill>
-                  <a:srgbClr val="000000"/>
-                </a:solidFill>
-                <a:latin typeface="Arial"/>
-              </a:rPr>
-              <a:t>title text </a:t>
-            </a:r>
-            <a:r>
-              <a:rPr b="0" lang="en-US" sz="4400" spc="-1" strike="noStrike">
-                <a:solidFill>
-                  <a:srgbClr val="000000"/>
-                </a:solidFill>
-                <a:latin typeface="Arial"/>
-              </a:rPr>
-              <a:t>format</a:t>
-            </a:r>
-            <a:endParaRPr b="0" lang="en-US" sz="4400" spc="-1" strike="noStrike">
-              <a:solidFill>
-                <a:srgbClr val="000000"/>
-              </a:solidFill>
-              <a:latin typeface="Arial"/>
-            </a:endParaRPr>
-          </a:p>
-        </p:txBody>
-      </p:sp>
-      <p:sp>
-        <p:nvSpPr>
-          <p:cNvPr id="3" name="PlaceHolder 3"/>
-          <p:cNvSpPr>
-            <a:spLocks noGrp="1"/>
-          </p:cNvSpPr>
-          <p:nvPr>
-            <p:ph type="body"/>
-          </p:nvPr>
-        </p:nvSpPr>
-        <p:spPr>
-          <a:xfrm>
-            <a:off x="457200" y="1203480"/>
-            <a:ext cx="8229240" cy="2982960"/>
-          </a:xfrm>
-          <a:prstGeom prst="rect">
-            <a:avLst/>
-          </a:prstGeom>
-          <a:noFill/>
-          <a:ln w="0">
-            <a:noFill/>
-          </a:ln>
-        </p:spPr>
-        <p:txBody>
-          <a:bodyPr lIns="0" rIns="0" tIns="0" bIns="0" anchor="t">
-            <a:normAutofit/>
-          </a:bodyPr>
-          <a:p>
-            <a:pPr marL="432000" indent="-324000">
-              <a:spcBef>
-                <a:spcPts val="1417"/>
-              </a:spcBef>
-              <a:buClr>
-                <a:srgbClr val="000000"/>
-              </a:buClr>
-              <a:buSzPct val="45000"/>
-              <a:buFont typeface="Wingdings" charset="2"/>
-              <a:buChar char=""/>
-            </a:pPr>
-            <a:r>
-              <a:rPr b="0" lang="en-US" sz="3200" spc="-1" strike="noStrike">
-                <a:solidFill>
-                  <a:srgbClr val="000000"/>
-                </a:solidFill>
-                <a:latin typeface="Arial"/>
-              </a:rPr>
-              <a:t>Click to edit the outline text format</a:t>
-            </a:r>
-            <a:endParaRPr b="0" lang="en-US" sz="3200" spc="-1" strike="noStrike">
-              <a:solidFill>
-                <a:srgbClr val="000000"/>
-              </a:solidFill>
-              <a:latin typeface="Arial"/>
-            </a:endParaRPr>
-          </a:p>
-          <a:p>
-            <a:pPr lvl="1" marL="864000" indent="-324000">
-              <a:spcBef>
-                <a:spcPts val="1134"/>
-              </a:spcBef>
-              <a:buClr>
-                <a:srgbClr val="000000"/>
-              </a:buClr>
-              <a:buSzPct val="75000"/>
-              <a:buFont typeface="Symbol" charset="2"/>
-              <a:buChar char=""/>
-            </a:pPr>
-            <a:r>
-              <a:rPr b="0" lang="en-US" sz="2800" spc="-1" strike="noStrike">
-                <a:solidFill>
-                  <a:srgbClr val="000000"/>
-                </a:solidFill>
-                <a:latin typeface="Arial"/>
-              </a:rPr>
-              <a:t>Second Outline Level</a:t>
-            </a:r>
-            <a:endParaRPr b="0" lang="en-US" sz="2800" spc="-1" strike="noStrike">
-              <a:solidFill>
-                <a:srgbClr val="000000"/>
-              </a:solidFill>
-              <a:latin typeface="Arial"/>
-            </a:endParaRPr>
-          </a:p>
-          <a:p>
-            <a:pPr lvl="2" marL="1296000" indent="-288000">
-              <a:spcBef>
-                <a:spcPts val="850"/>
-              </a:spcBef>
-              <a:buClr>
-                <a:srgbClr val="000000"/>
-              </a:buClr>
-              <a:buSzPct val="45000"/>
-              <a:buFont typeface="Wingdings" charset="2"/>
-              <a:buChar char=""/>
-            </a:pPr>
-            <a:r>
-              <a:rPr b="0" lang="en-US" sz="2400" spc="-1" strike="noStrike">
-                <a:solidFill>
-                  <a:srgbClr val="000000"/>
-                </a:solidFill>
-                <a:latin typeface="Arial"/>
-              </a:rPr>
-              <a:t>Third Outline Level</a:t>
-            </a:r>
-            <a:endParaRPr b="0" lang="en-US" sz="2400" spc="-1" strike="noStrike">
-              <a:solidFill>
-                <a:srgbClr val="000000"/>
-              </a:solidFill>
-              <a:latin typeface="Arial"/>
-            </a:endParaRPr>
-          </a:p>
-          <a:p>
-            <a:pPr lvl="3" marL="1728000" indent="-216000">
-              <a:spcBef>
-                <a:spcPts val="567"/>
-              </a:spcBef>
-              <a:buClr>
-                <a:srgbClr val="000000"/>
-              </a:buClr>
-              <a:buSzPct val="75000"/>
-              <a:buFont typeface="Symbol" charset="2"/>
-              <a:buChar char=""/>
-            </a:pPr>
-            <a:r>
-              <a:rPr b="0" lang="en-US" sz="2000" spc="-1" strike="noStrike">
-                <a:solidFill>
-                  <a:srgbClr val="000000"/>
-                </a:solidFill>
-                <a:latin typeface="Arial"/>
-              </a:rPr>
-              <a:t>Fourth Outline Level</a:t>
-            </a:r>
-            <a:endParaRPr b="0" lang="en-US" sz="2000" spc="-1" strike="noStrike">
-              <a:solidFill>
-                <a:srgbClr val="000000"/>
-              </a:solidFill>
-              <a:latin typeface="Arial"/>
-            </a:endParaRPr>
-          </a:p>
-          <a:p>
-            <a:pPr lvl="4" marL="2160000" indent="-216000">
-              <a:spcBef>
-                <a:spcPts val="283"/>
-              </a:spcBef>
-              <a:buClr>
-                <a:srgbClr val="000000"/>
-              </a:buClr>
-              <a:buSzPct val="45000"/>
-              <a:buFont typeface="Wingdings" charset="2"/>
-              <a:buChar char=""/>
-            </a:pPr>
-            <a:r>
-              <a:rPr b="0" lang="en-US" sz="2000" spc="-1" strike="noStrike">
-                <a:solidFill>
-                  <a:srgbClr val="000000"/>
-                </a:solidFill>
-                <a:latin typeface="Arial"/>
-              </a:rPr>
-              <a:t>Fifth Outline Level</a:t>
-            </a:r>
-            <a:endParaRPr b="0" lang="en-US" sz="2000" spc="-1" strike="noStrike">
-              <a:solidFill>
-                <a:srgbClr val="000000"/>
-              </a:solidFill>
-              <a:latin typeface="Arial"/>
-            </a:endParaRPr>
-          </a:p>
-          <a:p>
-            <a:pPr lvl="5" marL="2592000" indent="-216000">
-              <a:spcBef>
-                <a:spcPts val="283"/>
-              </a:spcBef>
-              <a:buClr>
-                <a:srgbClr val="000000"/>
-              </a:buClr>
-              <a:buSzPct val="45000"/>
-              <a:buFont typeface="Wingdings" charset="2"/>
-              <a:buChar char=""/>
-            </a:pPr>
-            <a:r>
-              <a:rPr b="0" lang="en-US" sz="2000" spc="-1" strike="noStrike">
-                <a:solidFill>
-                  <a:srgbClr val="000000"/>
-                </a:solidFill>
-                <a:latin typeface="Arial"/>
-              </a:rPr>
-              <a:t>Sixth Outline Level</a:t>
-            </a:r>
-            <a:endParaRPr b="0" lang="en-US" sz="2000" spc="-1" strike="noStrike">
-              <a:solidFill>
-                <a:srgbClr val="000000"/>
-              </a:solidFill>
-              <a:latin typeface="Arial"/>
-            </a:endParaRPr>
-          </a:p>
-          <a:p>
-            <a:pPr lvl="6" marL="3024000" indent="-216000">
-              <a:spcBef>
-                <a:spcPts val="283"/>
-              </a:spcBef>
-              <a:buClr>
-                <a:srgbClr val="000000"/>
-              </a:buClr>
-              <a:buSzPct val="45000"/>
-              <a:buFont typeface="Wingdings" charset="2"/>
-              <a:buChar char=""/>
-            </a:pPr>
-            <a:r>
-              <a:rPr b="0" lang="en-US" sz="2000" spc="-1" strike="noStrike">
-                <a:solidFill>
-                  <a:srgbClr val="000000"/>
-                </a:solidFill>
-                <a:latin typeface="Arial"/>
-              </a:rPr>
-              <a:t>Seventh Outline Level</a:t>
-            </a:r>
-            <a:endParaRPr b="0" lang="en-US" sz="2000" spc="-1" strike="noStrike">
-              <a:solidFill>
-                <a:srgbClr val="000000"/>
-              </a:solidFill>
-              <a:latin typeface="Arial"/>
             </a:endParaRPr>
           </a:p>
         </p:txBody>
@@ -661,7 +634,7 @@
         <p:spPr>
           <a:xfrm>
             <a:off x="216000" y="216000"/>
-            <a:ext cx="1505520" cy="645840"/>
+            <a:ext cx="1504080" cy="644400"/>
           </a:xfrm>
           <a:prstGeom prst="rect">
             <a:avLst/>
@@ -678,71 +651,13 @@
             <a:spLocks noGrp="1"/>
           </p:cNvSpPr>
           <p:nvPr>
-            <p:ph type="title"/>
-          </p:nvPr>
-        </p:nvSpPr>
-        <p:spPr>
-          <a:xfrm>
-            <a:off x="391680" y="749880"/>
-            <a:ext cx="8518320" cy="624960"/>
-          </a:xfrm>
-          <a:prstGeom prst="rect">
-            <a:avLst/>
-          </a:prstGeom>
-          <a:noFill/>
-          <a:ln w="0">
-            <a:noFill/>
-          </a:ln>
-        </p:spPr>
-        <p:txBody>
-          <a:bodyPr lIns="0" rIns="0" tIns="0" bIns="0" anchor="ctr">
-            <a:noAutofit/>
-          </a:bodyPr>
-          <a:p>
-            <a:pPr indent="0">
-              <a:buNone/>
-            </a:pPr>
-            <a:r>
-              <a:rPr b="0" lang="en-US" sz="1800" spc="-1" strike="noStrike">
-                <a:solidFill>
-                  <a:srgbClr val="000000"/>
-                </a:solidFill>
-                <a:latin typeface="Arial"/>
-              </a:rPr>
-              <a:t>Click to edit the title </a:t>
-            </a:r>
-            <a:r>
-              <a:rPr b="0" lang="en-US" sz="1800" spc="-1" strike="noStrike">
-                <a:solidFill>
-                  <a:srgbClr val="000000"/>
-                </a:solidFill>
-                <a:latin typeface="Arial"/>
-              </a:rPr>
-              <a:t>text format</a:t>
-            </a:r>
-            <a:endParaRPr b="0" lang="en-US" sz="1800" spc="-1" strike="noStrike">
-              <a:solidFill>
-                <a:srgbClr val="000000"/>
-              </a:solidFill>
-              <a:latin typeface="Arial"/>
-            </a:endParaRPr>
-          </a:p>
-        </p:txBody>
-      </p:sp>
-      <p:sp>
-        <p:nvSpPr>
-          <p:cNvPr id="6" name="PlaceHolder 2"/>
-          <p:cNvSpPr>
-            <a:spLocks noGrp="1"/>
-          </p:cNvSpPr>
-          <p:nvPr>
             <p:ph type="sldNum" idx="2"/>
           </p:nvPr>
         </p:nvSpPr>
         <p:spPr>
           <a:xfrm>
             <a:off x="8472600" y="4663080"/>
-            <a:ext cx="546480" cy="391320"/>
+            <a:ext cx="545040" cy="389880"/>
           </a:xfrm>
           <a:prstGeom prst="rect">
             <a:avLst/>
@@ -784,7 +699,7 @@
                 <a:tab algn="l" pos="0"/>
               </a:tabLst>
             </a:pPr>
-            <a:fld id="{A7B1736A-E1C7-4C55-9F1F-3AA55AB7BA0A}" type="slidenum">
+            <a:fld id="{5251C7FB-6156-41D4-AD8E-9F3051C6B77C}" type="slidenum">
               <a:rPr b="0" lang="en-IN" sz="1000" spc="-1" strike="noStrike">
                 <a:solidFill>
                   <a:schemeClr val="dk2"/>
@@ -799,6 +714,208 @@
                 <a:srgbClr val="000000"/>
               </a:solidFill>
               <a:latin typeface="Times New Roman"/>
+            </a:endParaRPr>
+          </a:p>
+        </p:txBody>
+      </p:sp>
+      <p:sp>
+        <p:nvSpPr>
+          <p:cNvPr id="6" name="PlaceHolder 2"/>
+          <p:cNvSpPr>
+            <a:spLocks noGrp="1"/>
+          </p:cNvSpPr>
+          <p:nvPr>
+            <p:ph type="title"/>
+          </p:nvPr>
+        </p:nvSpPr>
+        <p:spPr>
+          <a:xfrm>
+            <a:off x="457200" y="205200"/>
+            <a:ext cx="8229240" cy="858600"/>
+          </a:xfrm>
+          <a:prstGeom prst="rect">
+            <a:avLst/>
+          </a:prstGeom>
+          <a:noFill/>
+          <a:ln w="0">
+            <a:noFill/>
+          </a:ln>
+        </p:spPr>
+        <p:txBody>
+          <a:bodyPr lIns="0" rIns="0" tIns="0" bIns="0" anchor="ctr">
+            <a:noAutofit/>
+          </a:bodyPr>
+          <a:p>
+            <a:pPr indent="0" algn="ctr">
+              <a:buNone/>
+            </a:pPr>
+            <a:r>
+              <a:rPr b="0" lang="en-US" sz="4400" spc="-1" strike="noStrike">
+                <a:solidFill>
+                  <a:srgbClr val="000000"/>
+                </a:solidFill>
+                <a:latin typeface="Arial"/>
+              </a:rPr>
+              <a:t>C</a:t>
+            </a:r>
+            <a:r>
+              <a:rPr b="0" lang="en-US" sz="4400" spc="-1" strike="noStrike">
+                <a:solidFill>
+                  <a:srgbClr val="000000"/>
+                </a:solidFill>
+                <a:latin typeface="Arial"/>
+              </a:rPr>
+              <a:t>li</a:t>
+            </a:r>
+            <a:r>
+              <a:rPr b="0" lang="en-US" sz="4400" spc="-1" strike="noStrike">
+                <a:solidFill>
+                  <a:srgbClr val="000000"/>
+                </a:solidFill>
+                <a:latin typeface="Arial"/>
+              </a:rPr>
+              <a:t>c</a:t>
+            </a:r>
+            <a:r>
+              <a:rPr b="0" lang="en-US" sz="4400" spc="-1" strike="noStrike">
+                <a:solidFill>
+                  <a:srgbClr val="000000"/>
+                </a:solidFill>
+                <a:latin typeface="Arial"/>
+              </a:rPr>
+              <a:t>k </a:t>
+            </a:r>
+            <a:r>
+              <a:rPr b="0" lang="en-US" sz="4400" spc="-1" strike="noStrike">
+                <a:solidFill>
+                  <a:srgbClr val="000000"/>
+                </a:solidFill>
+                <a:latin typeface="Arial"/>
+              </a:rPr>
+              <a:t>to </a:t>
+            </a:r>
+            <a:r>
+              <a:rPr b="0" lang="en-US" sz="4400" spc="-1" strike="noStrike">
+                <a:solidFill>
+                  <a:srgbClr val="000000"/>
+                </a:solidFill>
+                <a:latin typeface="Arial"/>
+              </a:rPr>
+              <a:t>e</a:t>
+            </a:r>
+            <a:r>
+              <a:rPr b="0" lang="en-US" sz="4400" spc="-1" strike="noStrike">
+                <a:solidFill>
+                  <a:srgbClr val="000000"/>
+                </a:solidFill>
+                <a:latin typeface="Arial"/>
+              </a:rPr>
+              <a:t>di</a:t>
+            </a:r>
+            <a:r>
+              <a:rPr b="0" lang="en-US" sz="4400" spc="-1" strike="noStrike">
+                <a:solidFill>
+                  <a:srgbClr val="000000"/>
+                </a:solidFill>
+                <a:latin typeface="Arial"/>
+              </a:rPr>
+              <a:t>t </a:t>
+            </a:r>
+            <a:r>
+              <a:rPr b="0" lang="en-US" sz="4400" spc="-1" strike="noStrike">
+                <a:solidFill>
+                  <a:srgbClr val="000000"/>
+                </a:solidFill>
+                <a:latin typeface="Arial"/>
+              </a:rPr>
+              <a:t>th</a:t>
+            </a:r>
+            <a:r>
+              <a:rPr b="0" lang="en-US" sz="4400" spc="-1" strike="noStrike">
+                <a:solidFill>
+                  <a:srgbClr val="000000"/>
+                </a:solidFill>
+                <a:latin typeface="Arial"/>
+              </a:rPr>
+              <a:t>e </a:t>
+            </a:r>
+            <a:r>
+              <a:rPr b="0" lang="en-US" sz="4400" spc="-1" strike="noStrike">
+                <a:solidFill>
+                  <a:srgbClr val="000000"/>
+                </a:solidFill>
+                <a:latin typeface="Arial"/>
+              </a:rPr>
+              <a:t>tit</a:t>
+            </a:r>
+            <a:r>
+              <a:rPr b="0" lang="en-US" sz="4400" spc="-1" strike="noStrike">
+                <a:solidFill>
+                  <a:srgbClr val="000000"/>
+                </a:solidFill>
+                <a:latin typeface="Arial"/>
+              </a:rPr>
+              <a:t>le </a:t>
+            </a:r>
+            <a:r>
+              <a:rPr b="0" lang="en-US" sz="4400" spc="-1" strike="noStrike">
+                <a:solidFill>
+                  <a:srgbClr val="000000"/>
+                </a:solidFill>
+                <a:latin typeface="Arial"/>
+              </a:rPr>
+              <a:t>te</a:t>
+            </a:r>
+            <a:r>
+              <a:rPr b="0" lang="en-US" sz="4400" spc="-1" strike="noStrike">
+                <a:solidFill>
+                  <a:srgbClr val="000000"/>
+                </a:solidFill>
+                <a:latin typeface="Arial"/>
+              </a:rPr>
+              <a:t>xt </a:t>
+            </a:r>
+            <a:r>
+              <a:rPr b="0" lang="en-US" sz="4400" spc="-1" strike="noStrike">
+                <a:solidFill>
+                  <a:srgbClr val="000000"/>
+                </a:solidFill>
+                <a:latin typeface="Arial"/>
+              </a:rPr>
+              <a:t>fo</a:t>
+            </a:r>
+            <a:r>
+              <a:rPr b="0" lang="en-US" sz="4400" spc="-1" strike="noStrike">
+                <a:solidFill>
+                  <a:srgbClr val="000000"/>
+                </a:solidFill>
+                <a:latin typeface="Arial"/>
+              </a:rPr>
+              <a:t>r</a:t>
+            </a:r>
+            <a:r>
+              <a:rPr b="0" lang="en-US" sz="4400" spc="-1" strike="noStrike">
+                <a:solidFill>
+                  <a:srgbClr val="000000"/>
+                </a:solidFill>
+                <a:latin typeface="Arial"/>
+              </a:rPr>
+              <a:t>m</a:t>
+            </a:r>
+            <a:r>
+              <a:rPr b="0" lang="en-US" sz="4400" spc="-1" strike="noStrike">
+                <a:solidFill>
+                  <a:srgbClr val="000000"/>
+                </a:solidFill>
+                <a:latin typeface="Arial"/>
+              </a:rPr>
+              <a:t>at</a:t>
+            </a:r>
+            <a:endParaRPr b="0" lang="en-US" sz="4400" spc="-1" strike="noStrike">
+              <a:solidFill>
+                <a:srgbClr val="000000"/>
+              </a:solidFill>
+              <a:latin typeface="Arial"/>
             </a:endParaRPr>
           </a:p>
         </p:txBody>
@@ -1064,7 +1181,7 @@
       </p:grpSpPr>
       <p:pic>
         <p:nvPicPr>
-          <p:cNvPr id="9" name="Google Shape;9;p11" descr=""/>
+          <p:cNvPr id="8" name="Google Shape;9;p11" descr=""/>
           <p:cNvPicPr/>
           <p:nvPr/>
         </p:nvPicPr>
@@ -1075,7 +1192,7 @@
         <p:spPr>
           <a:xfrm>
             <a:off x="216000" y="216000"/>
-            <a:ext cx="1505520" cy="645840"/>
+            <a:ext cx="1504080" cy="644400"/>
           </a:xfrm>
           <a:prstGeom prst="rect">
             <a:avLst/>
@@ -1087,7 +1204,119 @@
       </p:pic>
       <p:sp>
         <p:nvSpPr>
-          <p:cNvPr id="10" name="PlaceHolder 1"/>
+          <p:cNvPr id="9" name="PlaceHolder 1"/>
+          <p:cNvSpPr>
+            <a:spLocks noGrp="1"/>
+          </p:cNvSpPr>
+          <p:nvPr>
+            <p:ph type="title"/>
+          </p:nvPr>
+        </p:nvSpPr>
+        <p:spPr>
+          <a:xfrm>
+            <a:off x="391680" y="749880"/>
+            <a:ext cx="8516880" cy="624960"/>
+          </a:xfrm>
+          <a:prstGeom prst="rect">
+            <a:avLst/>
+          </a:prstGeom>
+          <a:noFill/>
+          <a:ln w="0">
+            <a:noFill/>
+          </a:ln>
+        </p:spPr>
+        <p:txBody>
+          <a:bodyPr lIns="0" rIns="0" tIns="0" bIns="0" anchor="ctr">
+            <a:noAutofit/>
+          </a:bodyPr>
+          <a:p>
+            <a:pPr indent="0">
+              <a:buNone/>
+            </a:pPr>
+            <a:r>
+              <a:rPr b="0" lang="en-US" sz="1800" spc="-1" strike="noStrike">
+                <a:solidFill>
+                  <a:srgbClr val="000000"/>
+                </a:solidFill>
+                <a:latin typeface="Arial"/>
+              </a:rPr>
+              <a:t>Clic</a:t>
+            </a:r>
+            <a:r>
+              <a:rPr b="0" lang="en-US" sz="1800" spc="-1" strike="noStrike">
+                <a:solidFill>
+                  <a:srgbClr val="000000"/>
+                </a:solidFill>
+                <a:latin typeface="Arial"/>
+              </a:rPr>
+              <a:t>k to </a:t>
+            </a:r>
+            <a:r>
+              <a:rPr b="0" lang="en-US" sz="1800" spc="-1" strike="noStrike">
+                <a:solidFill>
+                  <a:srgbClr val="000000"/>
+                </a:solidFill>
+                <a:latin typeface="Arial"/>
+              </a:rPr>
+              <a:t>edit </a:t>
+            </a:r>
+            <a:r>
+              <a:rPr b="0" lang="en-US" sz="1800" spc="-1" strike="noStrike">
+                <a:solidFill>
+                  <a:srgbClr val="000000"/>
+                </a:solidFill>
+                <a:latin typeface="Arial"/>
+              </a:rPr>
+              <a:t>the </a:t>
+            </a:r>
+            <a:r>
+              <a:rPr b="0" lang="en-US" sz="1800" spc="-1" strike="noStrike">
+                <a:solidFill>
+                  <a:srgbClr val="000000"/>
+                </a:solidFill>
+                <a:latin typeface="Arial"/>
+              </a:rPr>
+              <a:t>title </a:t>
+            </a:r>
+            <a:r>
+              <a:rPr b="0" lang="en-US" sz="1800" spc="-1" strike="noStrike">
+                <a:solidFill>
+                  <a:srgbClr val="000000"/>
+                </a:solidFill>
+                <a:latin typeface="Arial"/>
+              </a:rPr>
+              <a:t>text </a:t>
+            </a:r>
+            <a:r>
+              <a:rPr b="0" lang="en-US" sz="1800" spc="-1" strike="noStrike">
+                <a:solidFill>
+                  <a:srgbClr val="000000"/>
+                </a:solidFill>
+                <a:latin typeface="Arial"/>
+              </a:rPr>
+              <a:t>form</a:t>
+            </a:r>
+            <a:r>
+              <a:rPr b="0" lang="en-US" sz="1800" spc="-1" strike="noStrike">
+                <a:solidFill>
+                  <a:srgbClr val="000000"/>
+                </a:solidFill>
+                <a:latin typeface="Arial"/>
+              </a:rPr>
+              <a:t>at</a:t>
+            </a:r>
+            <a:endParaRPr b="0" lang="en-US" sz="1800" spc="-1" strike="noStrike">
+              <a:solidFill>
+                <a:srgbClr val="000000"/>
+              </a:solidFill>
+              <a:latin typeface="Arial"/>
+            </a:endParaRPr>
+          </a:p>
+        </p:txBody>
+      </p:sp>
+      <p:sp>
+        <p:nvSpPr>
+          <p:cNvPr id="10" name="PlaceHolder 2"/>
           <p:cNvSpPr>
             <a:spLocks noGrp="1"/>
           </p:cNvSpPr>
@@ -1098,7 +1327,7 @@
         <p:spPr>
           <a:xfrm>
             <a:off x="8472600" y="4663080"/>
-            <a:ext cx="546480" cy="391320"/>
+            <a:ext cx="545040" cy="389880"/>
           </a:xfrm>
           <a:prstGeom prst="rect">
             <a:avLst/>
@@ -1140,7 +1369,7 @@
                 <a:tab algn="l" pos="0"/>
               </a:tabLst>
             </a:pPr>
-            <a:fld id="{E0F9236E-70CA-4DC9-88C5-677950A01366}" type="slidenum">
+            <a:fld id="{9C502480-A9AF-46E1-92CB-CCF39A8AC0A8}" type="slidenum">
               <a:rPr b="0" lang="en-IN" sz="1000" spc="-1" strike="noStrike">
                 <a:solidFill>
                   <a:schemeClr val="dk2"/>
@@ -1155,6 +1384,231 @@
                 <a:srgbClr val="000000"/>
               </a:solidFill>
               <a:latin typeface="Times New Roman"/>
+            </a:endParaRPr>
+          </a:p>
+        </p:txBody>
+      </p:sp>
+      <p:sp>
+        <p:nvSpPr>
+          <p:cNvPr id="11" name="PlaceHolder 3"/>
+          <p:cNvSpPr>
+            <a:spLocks noGrp="1"/>
+          </p:cNvSpPr>
+          <p:nvPr>
+            <p:ph type="body"/>
+          </p:nvPr>
+        </p:nvSpPr>
+        <p:spPr>
+          <a:xfrm>
+            <a:off x="457200" y="1203480"/>
+            <a:ext cx="8229240" cy="2982960"/>
+          </a:xfrm>
+          <a:prstGeom prst="rect">
+            <a:avLst/>
+          </a:prstGeom>
+          <a:noFill/>
+          <a:ln w="0">
+            <a:noFill/>
+          </a:ln>
+        </p:spPr>
+        <p:txBody>
+          <a:bodyPr lIns="0" rIns="0" tIns="0" bIns="0" anchor="t">
+            <a:normAutofit/>
+          </a:bodyPr>
+          <a:p>
+            <a:pPr marL="432000" indent="-324000">
+              <a:spcBef>
+                <a:spcPts val="1417"/>
+              </a:spcBef>
+              <a:buClr>
+                <a:srgbClr val="000000"/>
+              </a:buClr>
+              <a:buSzPct val="45000"/>
+              <a:buFont typeface="Wingdings" charset="2"/>
+              <a:buChar char=""/>
+            </a:pPr>
+            <a:r>
+              <a:rPr b="0" lang="en-US" sz="3200" spc="-1" strike="noStrike">
+                <a:solidFill>
+                  <a:srgbClr val="000000"/>
+                </a:solidFill>
+                <a:latin typeface="Arial"/>
+              </a:rPr>
+              <a:t>Click to edit the outline text format</a:t>
+            </a:r>
+            <a:endParaRPr b="0" lang="en-US" sz="3200" spc="-1" strike="noStrike">
+              <a:solidFill>
+                <a:srgbClr val="000000"/>
+              </a:solidFill>
+              <a:latin typeface="Arial"/>
+            </a:endParaRPr>
+          </a:p>
+          <a:p>
+            <a:pPr lvl="1" marL="864000" indent="-324000">
+              <a:spcBef>
+                <a:spcPts val="1134"/>
+              </a:spcBef>
+              <a:buClr>
+                <a:srgbClr val="000000"/>
+              </a:buClr>
+              <a:buSzPct val="75000"/>
+              <a:buFont typeface="Symbol" charset="2"/>
+              <a:buChar char=""/>
+            </a:pPr>
+            <a:r>
+              <a:rPr b="0" lang="en-US" sz="2800" spc="-1" strike="noStrike">
+                <a:solidFill>
+                  <a:srgbClr val="000000"/>
+                </a:solidFill>
+                <a:latin typeface="Arial"/>
+              </a:rPr>
+              <a:t>Second Outline Level</a:t>
+            </a:r>
+            <a:endParaRPr b="0" lang="en-US" sz="2800" spc="-1" strike="noStrike">
+              <a:solidFill>
+                <a:srgbClr val="000000"/>
+              </a:solidFill>
+              <a:latin typeface="Arial"/>
+            </a:endParaRPr>
+          </a:p>
+          <a:p>
+            <a:pPr lvl="2" marL="1296000" indent="-288000">
+              <a:spcBef>
+                <a:spcPts val="850"/>
+              </a:spcBef>
+              <a:buClr>
+                <a:srgbClr val="000000"/>
+              </a:buClr>
+              <a:buSzPct val="45000"/>
+              <a:buFont typeface="Wingdings" charset="2"/>
+              <a:buChar char=""/>
+            </a:pPr>
+            <a:r>
+              <a:rPr b="0" lang="en-US" sz="2400" spc="-1" strike="noStrike">
+                <a:solidFill>
+                  <a:srgbClr val="000000"/>
+                </a:solidFill>
+                <a:latin typeface="Arial"/>
+              </a:rPr>
+              <a:t>Third Outline Level</a:t>
+            </a:r>
+            <a:endParaRPr b="0" lang="en-US" sz="2400" spc="-1" strike="noStrike">
+              <a:solidFill>
+                <a:srgbClr val="000000"/>
+              </a:solidFill>
+              <a:latin typeface="Arial"/>
+            </a:endParaRPr>
+          </a:p>
+          <a:p>
+            <a:pPr lvl="3" marL="1728000" indent="-216000">
+              <a:spcBef>
+                <a:spcPts val="567"/>
+              </a:spcBef>
+              <a:buClr>
+                <a:srgbClr val="000000"/>
+              </a:buClr>
+              <a:buSzPct val="75000"/>
+              <a:buFont typeface="Symbol" charset="2"/>
+              <a:buChar char=""/>
+            </a:pPr>
+            <a:r>
+              <a:rPr b="0" lang="en-US" sz="2000" spc="-1" strike="noStrike">
+                <a:solidFill>
+                  <a:srgbClr val="000000"/>
+                </a:solidFill>
+                <a:latin typeface="Arial"/>
+              </a:rPr>
+              <a:t>Fourth Outline Level</a:t>
+            </a:r>
+            <a:endParaRPr b="0" lang="en-US" sz="2000" spc="-1" strike="noStrike">
+              <a:solidFill>
+                <a:srgbClr val="000000"/>
+              </a:solidFill>
+              <a:latin typeface="Arial"/>
+            </a:endParaRPr>
+          </a:p>
+          <a:p>
+            <a:pPr lvl="4" marL="2160000" indent="-216000">
+              <a:spcBef>
+                <a:spcPts val="283"/>
+              </a:spcBef>
+              <a:buClr>
+                <a:srgbClr val="000000"/>
+              </a:buClr>
+              <a:buSzPct val="45000"/>
+              <a:buFont typeface="Wingdings" charset="2"/>
+              <a:buChar char=""/>
+            </a:pPr>
+            <a:r>
+              <a:rPr b="0" lang="en-US" sz="2000" spc="-1" strike="noStrike">
+                <a:solidFill>
+                  <a:srgbClr val="000000"/>
+                </a:solidFill>
+                <a:latin typeface="Arial"/>
+              </a:rPr>
+              <a:t>Fifth Outline Level</a:t>
+            </a:r>
+            <a:endParaRPr b="0" lang="en-US" sz="2000" spc="-1" strike="noStrike">
+              <a:solidFill>
+                <a:srgbClr val="000000"/>
+              </a:solidFill>
+              <a:latin typeface="Arial"/>
+            </a:endParaRPr>
+          </a:p>
+          <a:p>
+            <a:pPr lvl="5" marL="2592000" indent="-216000">
+              <a:spcBef>
+                <a:spcPts val="283"/>
+              </a:spcBef>
+              <a:buClr>
+                <a:srgbClr val="000000"/>
+              </a:buClr>
+              <a:buSzPct val="45000"/>
+              <a:buFont typeface="Wingdings" charset="2"/>
+              <a:buChar char=""/>
+            </a:pPr>
+            <a:r>
+              <a:rPr b="0" lang="en-US" sz="2000" spc="-1" strike="noStrike">
+                <a:solidFill>
+                  <a:srgbClr val="000000"/>
+                </a:solidFill>
+                <a:latin typeface="Arial"/>
+              </a:rPr>
+              <a:t>Sixth Outline Level</a:t>
+            </a:r>
+            <a:endParaRPr b="0" lang="en-US" sz="2000" spc="-1" strike="noStrike">
+              <a:solidFill>
+                <a:srgbClr val="000000"/>
+              </a:solidFill>
+              <a:latin typeface="Arial"/>
+            </a:endParaRPr>
+          </a:p>
+          <a:p>
+            <a:pPr lvl="6" marL="3024000" indent="-216000">
+              <a:spcBef>
+                <a:spcPts val="283"/>
+              </a:spcBef>
+              <a:buClr>
+                <a:srgbClr val="000000"/>
+              </a:buClr>
+              <a:buSzPct val="45000"/>
+              <a:buFont typeface="Wingdings" charset="2"/>
+              <a:buChar char=""/>
+            </a:pPr>
+            <a:r>
+              <a:rPr b="0" lang="en-US" sz="2000" spc="-1" strike="noStrike">
+                <a:solidFill>
+                  <a:srgbClr val="000000"/>
+                </a:solidFill>
+                <a:latin typeface="Arial"/>
+              </a:rPr>
+              <a:t>Seventh Outline Level</a:t>
+            </a:r>
+            <a:endParaRPr b="0" lang="en-US" sz="2000" spc="-1" strike="noStrike">
+              <a:solidFill>
+                <a:srgbClr val="000000"/>
+              </a:solidFill>
+              <a:latin typeface="Arial"/>
             </a:endParaRPr>
           </a:p>
         </p:txBody>
@@ -1164,6 +1618,474 @@
   <p:clrMap bg1="lt1" bg2="lt2" tx1="dk1" tx2="dk2" accent1="accent1" accent2="accent2" accent3="accent3" accent4="accent4" accent5="accent5" accent6="accent6" hlink="hlink" folHlink="folHlink"/>
   <p:sldLayoutIdLst>
     <p:sldLayoutId id="2147483653" r:id="rId4"/>
+  </p:sldLayoutIdLst>
+</p:sldMaster>
+</file>
+
+<file path=ppt/slideMasters/slideMaster4.xml><?xml version="1.0" encoding="utf-8"?>
+<p:sldMaster xmlns:a="http://schemas.openxmlformats.org/drawingml/2006/main" xmlns:p="http://schemas.openxmlformats.org/presentationml/2006/main" xmlns:r="http://schemas.openxmlformats.org/officeDocument/2006/relationships" xmlns:p14="http://schemas.microsoft.com/office/powerpoint/2010/main" xmlns:p15="http://schemas.microsoft.com/office/powerpoint/2012/main" xmlns:mc="http://schemas.openxmlformats.org/markup-compatibility/2006">
+  <p:cSld>
+    <p:bg>
+      <p:bgPr>
+        <a:blipFill rotWithShape="0">
+          <a:blip r:embed="rId2"/>
+          <a:stretch/>
+        </a:blipFill>
+      </p:bgPr>
+    </p:bg>
+    <p:spTree>
+      <p:nvGrpSpPr>
+        <p:cNvPr id="1" name=""/>
+        <p:cNvGrpSpPr/>
+        <p:nvPr/>
+      </p:nvGrpSpPr>
+      <p:grpSpPr>
+        <a:xfrm>
+          <a:off x="0" y="0"/>
+          <a:ext cx="0" cy="0"/>
+          <a:chOff x="0" y="0"/>
+          <a:chExt cx="0" cy="0"/>
+        </a:xfrm>
+      </p:grpSpPr>
+      <p:pic>
+        <p:nvPicPr>
+          <p:cNvPr id="14" name="Google Shape;9;p11" descr=""/>
+          <p:cNvPicPr/>
+          <p:nvPr/>
+        </p:nvPicPr>
+        <p:blipFill>
+          <a:blip r:embed="rId3"/>
+          <a:stretch/>
+        </p:blipFill>
+        <p:spPr>
+          <a:xfrm>
+            <a:off x="216000" y="216000"/>
+            <a:ext cx="1504080" cy="644400"/>
+          </a:xfrm>
+          <a:prstGeom prst="rect">
+            <a:avLst/>
+          </a:prstGeom>
+          <a:ln w="0">
+            <a:noFill/>
+          </a:ln>
+        </p:spPr>
+      </p:pic>
+      <p:sp>
+        <p:nvSpPr>
+          <p:cNvPr id="15" name="PlaceHolder 1"/>
+          <p:cNvSpPr>
+            <a:spLocks noGrp="1"/>
+          </p:cNvSpPr>
+          <p:nvPr>
+            <p:ph type="title"/>
+          </p:nvPr>
+        </p:nvSpPr>
+        <p:spPr>
+          <a:xfrm>
+            <a:off x="391680" y="749880"/>
+            <a:ext cx="8516880" cy="624960"/>
+          </a:xfrm>
+          <a:prstGeom prst="rect">
+            <a:avLst/>
+          </a:prstGeom>
+          <a:noFill/>
+          <a:ln w="0">
+            <a:noFill/>
+          </a:ln>
+        </p:spPr>
+        <p:txBody>
+          <a:bodyPr lIns="0" rIns="0" tIns="0" bIns="0" anchor="ctr">
+            <a:noAutofit/>
+          </a:bodyPr>
+          <a:p>
+            <a:pPr indent="0">
+              <a:buNone/>
+            </a:pPr>
+            <a:r>
+              <a:rPr b="0" lang="en-US" sz="1800" spc="-1" strike="noStrike">
+                <a:solidFill>
+                  <a:srgbClr val="000000"/>
+                </a:solidFill>
+                <a:latin typeface="Arial"/>
+              </a:rPr>
+              <a:t>Clic</a:t>
+            </a:r>
+            <a:r>
+              <a:rPr b="0" lang="en-US" sz="1800" spc="-1" strike="noStrike">
+                <a:solidFill>
+                  <a:srgbClr val="000000"/>
+                </a:solidFill>
+                <a:latin typeface="Arial"/>
+              </a:rPr>
+              <a:t>k to </a:t>
+            </a:r>
+            <a:r>
+              <a:rPr b="0" lang="en-US" sz="1800" spc="-1" strike="noStrike">
+                <a:solidFill>
+                  <a:srgbClr val="000000"/>
+                </a:solidFill>
+                <a:latin typeface="Arial"/>
+              </a:rPr>
+              <a:t>edit </a:t>
+            </a:r>
+            <a:r>
+              <a:rPr b="0" lang="en-US" sz="1800" spc="-1" strike="noStrike">
+                <a:solidFill>
+                  <a:srgbClr val="000000"/>
+                </a:solidFill>
+                <a:latin typeface="Arial"/>
+              </a:rPr>
+              <a:t>the </a:t>
+            </a:r>
+            <a:r>
+              <a:rPr b="0" lang="en-US" sz="1800" spc="-1" strike="noStrike">
+                <a:solidFill>
+                  <a:srgbClr val="000000"/>
+                </a:solidFill>
+                <a:latin typeface="Arial"/>
+              </a:rPr>
+              <a:t>title </a:t>
+            </a:r>
+            <a:r>
+              <a:rPr b="0" lang="en-US" sz="1800" spc="-1" strike="noStrike">
+                <a:solidFill>
+                  <a:srgbClr val="000000"/>
+                </a:solidFill>
+                <a:latin typeface="Arial"/>
+              </a:rPr>
+              <a:t>text </a:t>
+            </a:r>
+            <a:r>
+              <a:rPr b="0" lang="en-US" sz="1800" spc="-1" strike="noStrike">
+                <a:solidFill>
+                  <a:srgbClr val="000000"/>
+                </a:solidFill>
+                <a:latin typeface="Arial"/>
+              </a:rPr>
+              <a:t>form</a:t>
+            </a:r>
+            <a:r>
+              <a:rPr b="0" lang="en-US" sz="1800" spc="-1" strike="noStrike">
+                <a:solidFill>
+                  <a:srgbClr val="000000"/>
+                </a:solidFill>
+                <a:latin typeface="Arial"/>
+              </a:rPr>
+              <a:t>at</a:t>
+            </a:r>
+            <a:endParaRPr b="0" lang="en-US" sz="1800" spc="-1" strike="noStrike">
+              <a:solidFill>
+                <a:srgbClr val="000000"/>
+              </a:solidFill>
+              <a:latin typeface="Arial"/>
+            </a:endParaRPr>
+          </a:p>
+        </p:txBody>
+      </p:sp>
+      <p:sp>
+        <p:nvSpPr>
+          <p:cNvPr id="16" name="PlaceHolder 2"/>
+          <p:cNvSpPr>
+            <a:spLocks noGrp="1"/>
+          </p:cNvSpPr>
+          <p:nvPr>
+            <p:ph type="sldNum" idx="4"/>
+          </p:nvPr>
+        </p:nvSpPr>
+        <p:spPr>
+          <a:xfrm>
+            <a:off x="8472600" y="4663080"/>
+            <a:ext cx="545040" cy="389880"/>
+          </a:xfrm>
+          <a:prstGeom prst="rect">
+            <a:avLst/>
+          </a:prstGeom>
+          <a:noFill/>
+          <a:ln w="0">
+            <a:noFill/>
+          </a:ln>
+        </p:spPr>
+        <p:txBody>
+          <a:bodyPr lIns="91440" rIns="91440" tIns="91440" bIns="91440" anchor="ctr">
+            <a:noAutofit/>
+          </a:bodyPr>
+          <a:lstStyle>
+            <a:lvl1pPr indent="0" algn="r">
+              <a:lnSpc>
+                <a:spcPct val="100000"/>
+              </a:lnSpc>
+              <a:buNone/>
+              <a:tabLst>
+                <a:tab algn="l" pos="0"/>
+              </a:tabLst>
+              <a:defRPr b="0" lang="en-IN" sz="1000" spc="-1" strike="noStrike">
+                <a:solidFill>
+                  <a:schemeClr val="dk2"/>
+                </a:solidFill>
+                <a:latin typeface="Arial"/>
+                <a:ea typeface="Arial"/>
+              </a:defRPr>
+            </a:lvl1pPr>
+          </a:lstStyle>
+          <a:p>
+            <a:pPr indent="0" algn="r">
+              <a:lnSpc>
+                <a:spcPct val="100000"/>
+              </a:lnSpc>
+              <a:buNone/>
+              <a:tabLst>
+                <a:tab algn="l" pos="0"/>
+              </a:tabLst>
+            </a:pPr>
+            <a:fld id="{49ACAB14-C1CC-40E0-BF14-6DD0C615660B}" type="slidenum">
+              <a:rPr b="0" lang="en-IN" sz="1000" spc="-1" strike="noStrike">
+                <a:solidFill>
+                  <a:schemeClr val="dk2"/>
+                </a:solidFill>
+                <a:latin typeface="Arial"/>
+                <a:ea typeface="Arial"/>
+              </a:rPr>
+              <a:t>&lt;number&gt;</a:t>
+            </a:fld>
+            <a:endParaRPr b="0" lang="en-US" sz="1000" spc="-1" strike="noStrike">
+              <a:solidFill>
+                <a:srgbClr val="000000"/>
+              </a:solidFill>
+              <a:latin typeface="Times New Roman"/>
+            </a:endParaRPr>
+          </a:p>
+        </p:txBody>
+      </p:sp>
+      <p:sp>
+        <p:nvSpPr>
+          <p:cNvPr id="17" name="PlaceHolder 3"/>
+          <p:cNvSpPr>
+            <a:spLocks noGrp="1"/>
+          </p:cNvSpPr>
+          <p:nvPr>
+            <p:ph type="body"/>
+          </p:nvPr>
+        </p:nvSpPr>
+        <p:spPr>
+          <a:xfrm>
+            <a:off x="457200" y="1203480"/>
+            <a:ext cx="8229240" cy="2982960"/>
+          </a:xfrm>
+          <a:prstGeom prst="rect">
+            <a:avLst/>
+          </a:prstGeom>
+          <a:noFill/>
+          <a:ln w="0">
+            <a:noFill/>
+          </a:ln>
+        </p:spPr>
+        <p:txBody>
+          <a:bodyPr lIns="0" rIns="0" tIns="0" bIns="0" anchor="t">
+            <a:normAutofit/>
+          </a:bodyPr>
+          <a:p>
+            <a:pPr marL="432000" indent="-324000">
+              <a:spcBef>
+                <a:spcPts val="1417"/>
+              </a:spcBef>
+              <a:buClr>
+                <a:srgbClr val="000000"/>
+              </a:buClr>
+              <a:buSzPct val="45000"/>
+              <a:buFont typeface="Wingdings" charset="2"/>
+              <a:buChar char=""/>
+            </a:pPr>
+            <a:r>
+              <a:rPr b="0" lang="en-US" sz="3200" spc="-1" strike="noStrike">
+                <a:solidFill>
+                  <a:srgbClr val="000000"/>
+                </a:solidFill>
+                <a:latin typeface="Arial"/>
+              </a:rPr>
+              <a:t>Click to edit the outline text format</a:t>
+            </a:r>
+            <a:endParaRPr b="0" lang="en-US" sz="3200" spc="-1" strike="noStrike">
+              <a:solidFill>
+                <a:srgbClr val="000000"/>
+              </a:solidFill>
+              <a:latin typeface="Arial"/>
+            </a:endParaRPr>
+          </a:p>
+          <a:p>
+            <a:pPr lvl="1" marL="864000" indent="-324000">
+              <a:spcBef>
+                <a:spcPts val="1134"/>
+              </a:spcBef>
+              <a:buClr>
+                <a:srgbClr val="000000"/>
+              </a:buClr>
+              <a:buSzPct val="75000"/>
+              <a:buFont typeface="Symbol" charset="2"/>
+              <a:buChar char=""/>
+            </a:pPr>
+            <a:r>
+              <a:rPr b="0" lang="en-US" sz="2800" spc="-1" strike="noStrike">
+                <a:solidFill>
+                  <a:srgbClr val="000000"/>
+                </a:solidFill>
+                <a:latin typeface="Arial"/>
+              </a:rPr>
+              <a:t>Second Outline Level</a:t>
+            </a:r>
+            <a:endParaRPr b="0" lang="en-US" sz="2800" spc="-1" strike="noStrike">
+              <a:solidFill>
+                <a:srgbClr val="000000"/>
+              </a:solidFill>
+              <a:latin typeface="Arial"/>
+            </a:endParaRPr>
+          </a:p>
+          <a:p>
+            <a:pPr lvl="2" marL="1296000" indent="-288000">
+              <a:spcBef>
+                <a:spcPts val="850"/>
+              </a:spcBef>
+              <a:buClr>
+                <a:srgbClr val="000000"/>
+              </a:buClr>
+              <a:buSzPct val="45000"/>
+              <a:buFont typeface="Wingdings" charset="2"/>
+              <a:buChar char=""/>
+            </a:pPr>
+            <a:r>
+              <a:rPr b="0" lang="en-US" sz="2400" spc="-1" strike="noStrike">
+                <a:solidFill>
+                  <a:srgbClr val="000000"/>
+                </a:solidFill>
+                <a:latin typeface="Arial"/>
+              </a:rPr>
+              <a:t>Third Outline Level</a:t>
+            </a:r>
+            <a:endParaRPr b="0" lang="en-US" sz="2400" spc="-1" strike="noStrike">
+              <a:solidFill>
+                <a:srgbClr val="000000"/>
+              </a:solidFill>
+              <a:latin typeface="Arial"/>
+            </a:endParaRPr>
+          </a:p>
+          <a:p>
+            <a:pPr lvl="3" marL="1728000" indent="-216000">
+              <a:spcBef>
+                <a:spcPts val="567"/>
+              </a:spcBef>
+              <a:buClr>
+                <a:srgbClr val="000000"/>
+              </a:buClr>
+              <a:buSzPct val="75000"/>
+              <a:buFont typeface="Symbol" charset="2"/>
+              <a:buChar char=""/>
+            </a:pPr>
+            <a:r>
+              <a:rPr b="0" lang="en-US" sz="2000" spc="-1" strike="noStrike">
+                <a:solidFill>
+                  <a:srgbClr val="000000"/>
+                </a:solidFill>
+                <a:latin typeface="Arial"/>
+              </a:rPr>
+              <a:t>Fourth Outline Level</a:t>
+            </a:r>
+            <a:endParaRPr b="0" lang="en-US" sz="2000" spc="-1" strike="noStrike">
+              <a:solidFill>
+                <a:srgbClr val="000000"/>
+              </a:solidFill>
+              <a:latin typeface="Arial"/>
+            </a:endParaRPr>
+          </a:p>
+          <a:p>
+            <a:pPr lvl="4" marL="2160000" indent="-216000">
+              <a:spcBef>
+                <a:spcPts val="283"/>
+              </a:spcBef>
+              <a:buClr>
+                <a:srgbClr val="000000"/>
+              </a:buClr>
+              <a:buSzPct val="45000"/>
+              <a:buFont typeface="Wingdings" charset="2"/>
+              <a:buChar char=""/>
+            </a:pPr>
+            <a:r>
+              <a:rPr b="0" lang="en-US" sz="2000" spc="-1" strike="noStrike">
+                <a:solidFill>
+                  <a:srgbClr val="000000"/>
+                </a:solidFill>
+                <a:latin typeface="Arial"/>
+              </a:rPr>
+              <a:t>Fifth Outline Level</a:t>
+            </a:r>
+            <a:endParaRPr b="0" lang="en-US" sz="2000" spc="-1" strike="noStrike">
+              <a:solidFill>
+                <a:srgbClr val="000000"/>
+              </a:solidFill>
+              <a:latin typeface="Arial"/>
+            </a:endParaRPr>
+          </a:p>
+          <a:p>
+            <a:pPr lvl="5" marL="2592000" indent="-216000">
+              <a:spcBef>
+                <a:spcPts val="283"/>
+              </a:spcBef>
+              <a:buClr>
+                <a:srgbClr val="000000"/>
+              </a:buClr>
+              <a:buSzPct val="45000"/>
+              <a:buFont typeface="Wingdings" charset="2"/>
+              <a:buChar char=""/>
+            </a:pPr>
+            <a:r>
+              <a:rPr b="0" lang="en-US" sz="2000" spc="-1" strike="noStrike">
+                <a:solidFill>
+                  <a:srgbClr val="000000"/>
+                </a:solidFill>
+                <a:latin typeface="Arial"/>
+              </a:rPr>
+              <a:t>Sixth Outline Level</a:t>
+            </a:r>
+            <a:endParaRPr b="0" lang="en-US" sz="2000" spc="-1" strike="noStrike">
+              <a:solidFill>
+                <a:srgbClr val="000000"/>
+              </a:solidFill>
+              <a:latin typeface="Arial"/>
+            </a:endParaRPr>
+          </a:p>
+          <a:p>
+            <a:pPr lvl="6" marL="3024000" indent="-216000">
+              <a:spcBef>
+                <a:spcPts val="283"/>
+              </a:spcBef>
+              <a:buClr>
+                <a:srgbClr val="000000"/>
+              </a:buClr>
+              <a:buSzPct val="45000"/>
+              <a:buFont typeface="Wingdings" charset="2"/>
+              <a:buChar char=""/>
+            </a:pPr>
+            <a:r>
+              <a:rPr b="0" lang="en-US" sz="2000" spc="-1" strike="noStrike">
+                <a:solidFill>
+                  <a:srgbClr val="000000"/>
+                </a:solidFill>
+                <a:latin typeface="Arial"/>
+              </a:rPr>
+              <a:t>Seventh Outline Level</a:t>
+            </a:r>
+            <a:endParaRPr b="0" lang="en-US" sz="2000" spc="-1" strike="noStrike">
+              <a:solidFill>
+                <a:srgbClr val="000000"/>
+              </a:solidFill>
+              <a:latin typeface="Arial"/>
+            </a:endParaRPr>
+          </a:p>
+        </p:txBody>
+      </p:sp>
+    </p:spTree>
+  </p:cSld>
+  <p:clrMap bg1="lt1" bg2="lt2" tx1="dk1" tx2="dk2" accent1="accent1" accent2="accent2" accent3="accent3" accent4="accent4" accent5="accent5" accent6="accent6" hlink="hlink" folHlink="folHlink"/>
+  <p:sldLayoutIdLst>
+    <p:sldLayoutId id="2147483655" r:id="rId4"/>
   </p:sldLayoutIdLst>
 </p:sldMaster>
 </file>
@@ -1187,7 +2109,7 @@
       </p:grpSpPr>
       <p:sp>
         <p:nvSpPr>
-          <p:cNvPr id="11" name="PlaceHolder 1"/>
+          <p:cNvPr id="19" name="PlaceHolder 1"/>
           <p:cNvSpPr>
             <a:spLocks noGrp="1"/>
           </p:cNvSpPr>
@@ -1198,7 +2120,7 @@
         <p:spPr>
           <a:xfrm>
             <a:off x="363600" y="1375200"/>
-            <a:ext cx="8518320" cy="2761560"/>
+            <a:ext cx="8516880" cy="2760120"/>
           </a:xfrm>
           <a:prstGeom prst="rect">
             <a:avLst/>
@@ -1490,14 +2412,14 @@
       </p:sp>
       <p:sp>
         <p:nvSpPr>
-          <p:cNvPr id="12" name="Google Shape;26;p1"/>
+          <p:cNvPr id="20" name="Google Shape;26;p1"/>
           <p:cNvSpPr/>
           <p:nvPr/>
         </p:nvSpPr>
         <p:spPr>
           <a:xfrm>
             <a:off x="146520" y="4490280"/>
-            <a:ext cx="9018000" cy="650880"/>
+            <a:ext cx="9016560" cy="649440"/>
           </a:xfrm>
           <a:prstGeom prst="rect">
             <a:avLst/>
@@ -1534,7 +2456,7 @@
                 <a:latin typeface="times new roman"/>
                 <a:ea typeface="Times New Roman"/>
               </a:rPr>
-              <a:t>Date   :17/06/2025                                              Department of MCA, RVCE                                             1/12</a:t>
+              <a:t>Date   :18/06/2025                                              Department of MCA, RVCE                                             1/12</a:t>
             </a:r>
             <a:endParaRPr b="0" lang="en-US" sz="1600" spc="-1" strike="noStrike">
               <a:solidFill>
@@ -1547,14 +2469,14 @@
       </p:sp>
       <p:sp>
         <p:nvSpPr>
-          <p:cNvPr id="13" name=""/>
+          <p:cNvPr id="21" name=""/>
           <p:cNvSpPr/>
           <p:nvPr/>
         </p:nvSpPr>
         <p:spPr>
           <a:xfrm>
             <a:off x="1448280" y="914400"/>
-            <a:ext cx="7433640" cy="460800"/>
+            <a:ext cx="7432200" cy="459360"/>
           </a:xfrm>
           <a:prstGeom prst="rect">
             <a:avLst/>
@@ -1631,14 +2553,120 @@
       </p:grpSpPr>
       <p:sp>
         <p:nvSpPr>
-          <p:cNvPr id="39" name=""/>
+          <p:cNvPr id="49" name="PlaceHolder 1"/>
+          <p:cNvSpPr>
+            <a:spLocks noGrp="1"/>
+          </p:cNvSpPr>
+          <p:nvPr>
+            <p:ph type="title"/>
+          </p:nvPr>
+        </p:nvSpPr>
+        <p:spPr>
+          <a:xfrm>
+            <a:off x="504720" y="814680"/>
+            <a:ext cx="8499240" cy="3829320"/>
+          </a:xfrm>
+          <a:prstGeom prst="rect">
+            <a:avLst/>
+          </a:prstGeom>
+          <a:noFill/>
+          <a:ln w="0">
+            <a:noFill/>
+          </a:ln>
+        </p:spPr>
+        <p:txBody>
+          <a:bodyPr lIns="91440" rIns="91440" tIns="91440" bIns="91440" anchor="t">
+            <a:normAutofit/>
+          </a:bodyPr>
+          <a:p>
+            <a:pPr indent="0">
+              <a:lnSpc>
+                <a:spcPct val="100000"/>
+              </a:lnSpc>
+              <a:buNone/>
+              <a:tabLst>
+                <a:tab algn="l" pos="0"/>
+              </a:tabLst>
+            </a:pPr>
+            <a:br>
+              <a:rPr sz="1800"/>
+            </a:br>
+            <a:br>
+              <a:rPr sz="1800"/>
+            </a:br>
+            <a:endParaRPr b="0" lang="en-US" sz="1800" spc="-1" strike="noStrike">
+              <a:solidFill>
+                <a:srgbClr val="000000"/>
+              </a:solidFill>
+              <a:latin typeface="Arial"/>
+            </a:endParaRPr>
+          </a:p>
+        </p:txBody>
+      </p:sp>
+      <p:sp>
+        <p:nvSpPr>
+          <p:cNvPr id="50" name="Google Shape;83;p10"/>
           <p:cNvSpPr/>
           <p:nvPr/>
         </p:nvSpPr>
         <p:spPr>
           <a:xfrm>
-            <a:off x="2743200" y="457200"/>
-            <a:ext cx="2284920" cy="824040"/>
+            <a:off x="1835640" y="185760"/>
+            <a:ext cx="5338440" cy="569160"/>
+          </a:xfrm>
+          <a:prstGeom prst="rect">
+            <a:avLst/>
+          </a:prstGeom>
+          <a:noFill/>
+          <a:ln w="0">
+            <a:noFill/>
+          </a:ln>
+        </p:spPr>
+        <p:style>
+          <a:lnRef idx="0"/>
+          <a:fillRef idx="0"/>
+          <a:effectRef idx="0"/>
+          <a:fontRef idx="minor"/>
+        </p:style>
+        <p:txBody>
+          <a:bodyPr lIns="90000" rIns="90000" tIns="91440" bIns="91440" anchor="b">
+            <a:noAutofit/>
+          </a:bodyPr>
+          <a:p>
+            <a:pPr algn="ctr">
+              <a:lnSpc>
+                <a:spcPct val="100000"/>
+              </a:lnSpc>
+            </a:pPr>
+            <a:r>
+              <a:rPr b="0" lang="en-IN" sz="3600" spc="-1" strike="noStrike">
+                <a:solidFill>
+                  <a:schemeClr val="dk1"/>
+                </a:solidFill>
+                <a:latin typeface="Times New Roman"/>
+                <a:ea typeface="Times New Roman"/>
+              </a:rPr>
+              <a:t>References</a:t>
+            </a:r>
+            <a:endParaRPr b="0" lang="en-US" sz="3600" spc="-1" strike="noStrike">
+              <a:solidFill>
+                <a:srgbClr val="000000"/>
+              </a:solidFill>
+              <a:latin typeface="Arial"/>
+            </a:endParaRPr>
+          </a:p>
+        </p:txBody>
+      </p:sp>
+      <p:sp>
+        <p:nvSpPr>
+          <p:cNvPr id="51" name=""/>
+          <p:cNvSpPr/>
+          <p:nvPr/>
+        </p:nvSpPr>
+        <p:spPr>
+          <a:xfrm>
+            <a:off x="16200" y="914400"/>
+            <a:ext cx="8987760" cy="4137480"/>
           </a:xfrm>
           <a:prstGeom prst="rect">
             <a:avLst/>
@@ -1663,21 +2691,343 @@
               <a:lnSpc>
                 <a:spcPct val="100000"/>
               </a:lnSpc>
-            </a:pPr>
-            <a:r>
-              <a:rPr b="0" lang="en-IN" sz="2600" spc="-1" strike="noStrike">
-                <a:solidFill>
-                  <a:schemeClr val="dk1"/>
-                </a:solidFill>
-                <a:latin typeface="Times New Roman"/>
-                <a:ea typeface="Times New Roman"/>
-              </a:rPr>
-              <a:t>Block Diagram</a:t>
-            </a:r>
-            <a:br>
-              <a:rPr sz="2600"/>
-            </a:br>
-            <a:endParaRPr b="0" lang="en-US" sz="2600" spc="-1" strike="noStrike">
+              <a:spcBef>
+                <a:spcPts val="624"/>
+              </a:spcBef>
+              <a:spcAft>
+                <a:spcPts val="425"/>
+              </a:spcAft>
+            </a:pPr>
+            <a:r>
+              <a:rPr b="0" lang="en-US" sz="1200" spc="-1" strike="noStrike">
+                <a:solidFill>
+                  <a:srgbClr val="000000"/>
+                </a:solidFill>
+                <a:latin typeface="times new roman"/>
+                <a:ea typeface="DejaVu Sans"/>
+              </a:rPr>
+              <a:t>[1] Z. Liu et al., "Holographic Video Communications," IEEE Wireless Communications, vol. 32, no. 2, Feb. 2025.</a:t>
+            </a:r>
+            <a:endParaRPr b="0" lang="en-US" sz="1200" spc="-1" strike="noStrike">
+              <a:solidFill>
+                <a:srgbClr val="000000"/>
+              </a:solidFill>
+              <a:latin typeface="Arial"/>
+            </a:endParaRPr>
+          </a:p>
+          <a:p>
+            <a:pPr>
+              <a:lnSpc>
+                <a:spcPct val="100000"/>
+              </a:lnSpc>
+              <a:spcBef>
+                <a:spcPts val="624"/>
+              </a:spcBef>
+              <a:spcAft>
+                <a:spcPts val="425"/>
+              </a:spcAft>
+            </a:pPr>
+            <a:r>
+              <a:rPr b="0" lang="en-US" sz="1200" spc="-1" strike="noStrike">
+                <a:solidFill>
+                  <a:srgbClr val="000000"/>
+                </a:solidFill>
+                <a:latin typeface="times new roman"/>
+                <a:ea typeface="DejaVu Sans"/>
+              </a:rPr>
+              <a:t>[2] T. Wang, C. Yang, J. Chen, Y. Zhao, J. Zong, et al., "Naked-eye light field display technology based on mini/micro LED panels: a systematic review and meta-analysis," Scientific Reports, vol. 14, Art. 24381, Oct. 2024.</a:t>
+            </a:r>
+            <a:endParaRPr b="0" lang="en-US" sz="1200" spc="-1" strike="noStrike">
+              <a:solidFill>
+                <a:srgbClr val="000000"/>
+              </a:solidFill>
+              <a:latin typeface="Arial"/>
+            </a:endParaRPr>
+          </a:p>
+          <a:p>
+            <a:pPr>
+              <a:lnSpc>
+                <a:spcPct val="100000"/>
+              </a:lnSpc>
+              <a:spcBef>
+                <a:spcPts val="624"/>
+              </a:spcBef>
+              <a:spcAft>
+                <a:spcPts val="425"/>
+              </a:spcAft>
+            </a:pPr>
+            <a:r>
+              <a:rPr b="0" lang="en-US" sz="1200" spc="-1" strike="noStrike">
+                <a:solidFill>
+                  <a:srgbClr val="000000"/>
+                </a:solidFill>
+                <a:latin typeface="times new roman"/>
+                <a:ea typeface="DejaVu Sans"/>
+              </a:rPr>
+              <a:t>[3] M. Rutz et al., "Perceived brightness and resolution in retinal scan glasses," arXiv:2403.xxxxx, Jul. 2024.</a:t>
+            </a:r>
+            <a:endParaRPr b="0" lang="en-US" sz="1200" spc="-1" strike="noStrike">
+              <a:solidFill>
+                <a:srgbClr val="000000"/>
+              </a:solidFill>
+              <a:latin typeface="Arial"/>
+            </a:endParaRPr>
+          </a:p>
+          <a:p>
+            <a:pPr>
+              <a:lnSpc>
+                <a:spcPct val="100000"/>
+              </a:lnSpc>
+              <a:spcBef>
+                <a:spcPts val="624"/>
+              </a:spcBef>
+              <a:spcAft>
+                <a:spcPts val="425"/>
+              </a:spcAft>
+            </a:pPr>
+            <a:r>
+              <a:rPr b="0" lang="en-US" sz="1200" spc="-1" strike="noStrike">
+                <a:solidFill>
+                  <a:srgbClr val="000000"/>
+                </a:solidFill>
+                <a:latin typeface="times new roman"/>
+                <a:ea typeface="DejaVu Sans"/>
+              </a:rPr>
+              <a:t>[4] Y. Jin et al., "Volumetric 3D video: capture, compression, display," arXiv:2404.xxxxx, Apr. 2024.</a:t>
+            </a:r>
+            <a:endParaRPr b="0" lang="en-US" sz="1200" spc="-1" strike="noStrike">
+              <a:solidFill>
+                <a:srgbClr val="000000"/>
+              </a:solidFill>
+              <a:latin typeface="Arial"/>
+            </a:endParaRPr>
+          </a:p>
+          <a:p>
+            <a:pPr>
+              <a:lnSpc>
+                <a:spcPct val="100000"/>
+              </a:lnSpc>
+              <a:spcBef>
+                <a:spcPts val="624"/>
+              </a:spcBef>
+              <a:spcAft>
+                <a:spcPts val="425"/>
+              </a:spcAft>
+            </a:pPr>
+            <a:r>
+              <a:rPr b="0" lang="en-US" sz="1200" spc="-1" strike="noStrike">
+                <a:solidFill>
+                  <a:srgbClr val="000000"/>
+                </a:solidFill>
+                <a:latin typeface="times new roman"/>
+                <a:ea typeface="DejaVu Sans"/>
+              </a:rPr>
+              <a:t>[5] PointerVol Team, "PointerVol: laser-pointer interaction in volumetric displays," ACM SIGGRAPH, 2024.</a:t>
+            </a:r>
+            <a:endParaRPr b="0" lang="en-US" sz="1200" spc="-1" strike="noStrike">
+              <a:solidFill>
+                <a:srgbClr val="000000"/>
+              </a:solidFill>
+              <a:latin typeface="Arial"/>
+            </a:endParaRPr>
+          </a:p>
+          <a:p>
+            <a:pPr>
+              <a:lnSpc>
+                <a:spcPct val="100000"/>
+              </a:lnSpc>
+              <a:spcBef>
+                <a:spcPts val="624"/>
+              </a:spcBef>
+              <a:spcAft>
+                <a:spcPts val="425"/>
+              </a:spcAft>
+            </a:pPr>
+            <a:r>
+              <a:rPr b="0" lang="en-US" sz="1200" spc="-1" strike="noStrike">
+                <a:solidFill>
+                  <a:srgbClr val="000000"/>
+                </a:solidFill>
+                <a:latin typeface="times new roman"/>
+                <a:ea typeface="DejaVu Sans"/>
+              </a:rPr>
+              <a:t>[6] K. Akşit and Y. Itoh, "HoloBeam: paper-thin near-eye displays," arXiv:2212.xxxxx, Dec. 2022.</a:t>
+            </a:r>
+            <a:endParaRPr b="0" lang="en-US" sz="1200" spc="-1" strike="noStrike">
+              <a:solidFill>
+                <a:srgbClr val="000000"/>
+              </a:solidFill>
+              <a:latin typeface="Arial"/>
+            </a:endParaRPr>
+          </a:p>
+          <a:p>
+            <a:pPr>
+              <a:lnSpc>
+                <a:spcPct val="100000"/>
+              </a:lnSpc>
+              <a:spcBef>
+                <a:spcPts val="624"/>
+              </a:spcBef>
+              <a:spcAft>
+                <a:spcPts val="425"/>
+              </a:spcAft>
+            </a:pPr>
+            <a:r>
+              <a:rPr b="0" lang="en-US" sz="1200" spc="-1" strike="noStrike">
+                <a:solidFill>
+                  <a:srgbClr val="000000"/>
+                </a:solidFill>
+                <a:latin typeface="times new roman"/>
+                <a:ea typeface="DejaVu Sans"/>
+              </a:rPr>
+              <a:t>[7] P. Chakravarthula et al., "Gaze-contingent retinal speckle suppression for foveated holographic displays," arXiv:2111.xxxxx, Nov. 2021.</a:t>
+            </a:r>
+            <a:endParaRPr b="0" lang="en-US" sz="1200" spc="-1" strike="noStrike">
+              <a:solidFill>
+                <a:srgbClr val="000000"/>
+              </a:solidFill>
+              <a:latin typeface="Arial"/>
+            </a:endParaRPr>
+          </a:p>
+          <a:p>
+            <a:pPr>
+              <a:lnSpc>
+                <a:spcPct val="100000"/>
+              </a:lnSpc>
+              <a:spcBef>
+                <a:spcPts val="624"/>
+              </a:spcBef>
+              <a:spcAft>
+                <a:spcPts val="425"/>
+              </a:spcAft>
+            </a:pPr>
+            <a:r>
+              <a:rPr b="0" lang="en-US" sz="1200" spc="-1" strike="noStrike">
+                <a:solidFill>
+                  <a:srgbClr val="000000"/>
+                </a:solidFill>
+                <a:latin typeface="times new roman"/>
+                <a:ea typeface="DejaVu Sans"/>
+              </a:rPr>
+              <a:t>[8] M. J. Jeong et al., "Screenless Display for Interactive Applications," Applied Sciences, vol. 11, no. 1, p. 117, Jan. 2021.</a:t>
+            </a:r>
+            <a:endParaRPr b="0" lang="en-US" sz="1200" spc="-1" strike="noStrike">
+              <a:solidFill>
+                <a:srgbClr val="000000"/>
+              </a:solidFill>
+              <a:latin typeface="Arial"/>
+            </a:endParaRPr>
+          </a:p>
+          <a:p>
+            <a:pPr>
+              <a:lnSpc>
+                <a:spcPct val="100000"/>
+              </a:lnSpc>
+              <a:spcBef>
+                <a:spcPts val="624"/>
+              </a:spcBef>
+              <a:spcAft>
+                <a:spcPts val="425"/>
+              </a:spcAft>
+            </a:pPr>
+            <a:r>
+              <a:rPr b="0" lang="en-US" sz="1200" spc="-1" strike="noStrike">
+                <a:solidFill>
+                  <a:srgbClr val="000000"/>
+                </a:solidFill>
+                <a:latin typeface="times new roman"/>
+                <a:ea typeface="DejaVu Sans"/>
+              </a:rPr>
+              <a:t>[9] W. Song et al., "Large-scale Huygens metasurfaces for holographic near-eye displays," arXiv:2010.xxxxx, Oct. 2020.</a:t>
+            </a:r>
+            <a:endParaRPr b="0" lang="en-US" sz="1200" spc="-1" strike="noStrike">
+              <a:solidFill>
+                <a:srgbClr val="000000"/>
+              </a:solidFill>
+              <a:latin typeface="Arial"/>
+            </a:endParaRPr>
+          </a:p>
+          <a:p>
+            <a:pPr>
+              <a:lnSpc>
+                <a:spcPct val="100000"/>
+              </a:lnSpc>
+              <a:spcBef>
+                <a:spcPts val="624"/>
+              </a:spcBef>
+              <a:spcAft>
+                <a:spcPts val="425"/>
+              </a:spcAft>
+            </a:pPr>
+            <a:r>
+              <a:rPr b="0" lang="en-US" sz="1200" spc="-1" strike="noStrike">
+                <a:solidFill>
+                  <a:srgbClr val="000000"/>
+                </a:solidFill>
+                <a:latin typeface="times new roman"/>
+                <a:ea typeface="DejaVu Sans"/>
+              </a:rPr>
+              <a:t>[10] P. S. Bhosale, R. Kale, and P. P. Salve, "Screenless Display: A Review," IJSRCSEIT, vol. 8, no. 1, pp. 337-343, 2022.</a:t>
+            </a:r>
+            <a:endParaRPr b="0" lang="en-US" sz="1200" spc="-1" strike="noStrike">
+              <a:solidFill>
+                <a:srgbClr val="000000"/>
+              </a:solidFill>
+              <a:latin typeface="Arial"/>
+            </a:endParaRPr>
+          </a:p>
+          <a:p>
+            <a:pPr>
+              <a:lnSpc>
+                <a:spcPct val="100000"/>
+              </a:lnSpc>
+              <a:spcBef>
+                <a:spcPts val="340"/>
+              </a:spcBef>
+              <a:spcAft>
+                <a:spcPts val="283"/>
+              </a:spcAft>
+            </a:pPr>
+            <a:r>
+              <a:rPr b="0" lang="en-US" sz="1200" spc="-1" strike="noStrike">
+                <a:solidFill>
+                  <a:srgbClr val="000000"/>
+                </a:solidFill>
+                <a:latin typeface="times new roman"/>
+                <a:ea typeface="Noto Sans CJK SC"/>
+              </a:rPr>
+              <a:t>[11] V. Kumar, "Screenless Display Technology," SlideShare, 2024.</a:t>
+            </a:r>
+            <a:endParaRPr b="0" lang="en-US" sz="1200" spc="-1" strike="noStrike">
+              <a:solidFill>
+                <a:srgbClr val="000000"/>
+              </a:solidFill>
+              <a:latin typeface="Arial"/>
+            </a:endParaRPr>
+          </a:p>
+          <a:p>
+            <a:pPr>
+              <a:lnSpc>
+                <a:spcPct val="100000"/>
+              </a:lnSpc>
+              <a:spcBef>
+                <a:spcPts val="340"/>
+              </a:spcBef>
+              <a:spcAft>
+                <a:spcPts val="283"/>
+              </a:spcAft>
+            </a:pPr>
+            <a:r>
+              <a:rPr b="0" lang="en-US" sz="1200" spc="-1" strike="noStrike">
+                <a:solidFill>
+                  <a:srgbClr val="000000"/>
+                </a:solidFill>
+                <a:latin typeface="times new roman"/>
+                <a:ea typeface="Noto Sans CJK SC"/>
+              </a:rPr>
+              <a:t>[12] M. Mierse, “Build a Sci-Fi aerial display,” IEEE Spectrum, Oct. 20, 2024. [Online]. Available: https://spectrum.ieee.org/diy-scifi-aerial-display.</a:t>
+            </a:r>
+            <a:endParaRPr b="0" lang="en-US" sz="1200" spc="-1" strike="noStrike">
               <a:solidFill>
                 <a:srgbClr val="000000"/>
               </a:solidFill>
@@ -1688,14 +3038,14 @@
       </p:sp>
       <p:sp>
         <p:nvSpPr>
-          <p:cNvPr id="40" name=""/>
-          <p:cNvSpPr txBox="1"/>
+          <p:cNvPr id="52" name=""/>
+          <p:cNvSpPr/>
           <p:nvPr/>
         </p:nvSpPr>
         <p:spPr>
           <a:xfrm>
-            <a:off x="8458200" y="4572000"/>
-            <a:ext cx="685800" cy="770400"/>
+            <a:off x="8503200" y="4645440"/>
+            <a:ext cx="639360" cy="540360"/>
           </a:xfrm>
           <a:prstGeom prst="rect">
             <a:avLst/>
@@ -1705,11 +3055,22 @@
             <a:noFill/>
           </a:ln>
         </p:spPr>
+        <p:style>
+          <a:lnRef idx="0"/>
+          <a:fillRef idx="0"/>
+          <a:effectRef idx="0"/>
+          <a:fontRef idx="minor"/>
+        </p:style>
         <p:txBody>
           <a:bodyPr lIns="90000" rIns="90000" tIns="45000" bIns="45000" anchor="t">
             <a:noAutofit/>
           </a:bodyPr>
           <a:p>
+            <a:pPr>
+              <a:lnSpc>
+                <a:spcPct val="100000"/>
+              </a:lnSpc>
+            </a:pPr>
             <a:r>
               <a:rPr b="0" lang="en-IN" sz="1600" spc="-1" strike="noStrike">
                 <a:solidFill>
@@ -1728,7 +3089,7 @@
                 <a:latin typeface="times new roman"/>
                 <a:ea typeface="Times New Roman"/>
               </a:rPr>
-              <a:t>10/12</a:t>
+              <a:t>11/12</a:t>
             </a:r>
             <a:endParaRPr b="0" lang="en-US" sz="1600" spc="-1" strike="noStrike">
               <a:solidFill>
@@ -1739,29 +3100,6 @@
           </a:p>
         </p:txBody>
       </p:sp>
-      <p:pic>
-        <p:nvPicPr>
-          <p:cNvPr id="41" name="" descr=""/>
-          <p:cNvPicPr/>
-          <p:nvPr/>
-        </p:nvPicPr>
-        <p:blipFill>
-          <a:blip r:embed="rId1"/>
-          <a:stretch/>
-        </p:blipFill>
-        <p:spPr>
-          <a:xfrm>
-            <a:off x="914400" y="1371600"/>
-            <a:ext cx="6865200" cy="2903040"/>
-          </a:xfrm>
-          <a:prstGeom prst="rect">
-            <a:avLst/>
-          </a:prstGeom>
-          <a:ln w="0">
-            <a:noFill/>
-          </a:ln>
-        </p:spPr>
-      </p:pic>
     </p:spTree>
   </p:cSld>
   <mc:AlternateContent>
@@ -1794,120 +3132,14 @@
       </p:grpSpPr>
       <p:sp>
         <p:nvSpPr>
-          <p:cNvPr id="42" name="PlaceHolder 1"/>
-          <p:cNvSpPr>
-            <a:spLocks noGrp="1"/>
-          </p:cNvSpPr>
-          <p:nvPr>
-            <p:ph type="title"/>
-          </p:nvPr>
-        </p:nvSpPr>
-        <p:spPr>
-          <a:xfrm>
-            <a:off x="504720" y="814680"/>
-            <a:ext cx="8500680" cy="3830760"/>
-          </a:xfrm>
-          <a:prstGeom prst="rect">
-            <a:avLst/>
-          </a:prstGeom>
-          <a:noFill/>
-          <a:ln w="0">
-            <a:noFill/>
-          </a:ln>
-        </p:spPr>
-        <p:txBody>
-          <a:bodyPr lIns="91440" rIns="91440" tIns="91440" bIns="91440" anchor="t">
-            <a:normAutofit/>
-          </a:bodyPr>
-          <a:p>
-            <a:pPr indent="0">
-              <a:lnSpc>
-                <a:spcPct val="100000"/>
-              </a:lnSpc>
-              <a:buNone/>
-              <a:tabLst>
-                <a:tab algn="l" pos="0"/>
-              </a:tabLst>
-            </a:pPr>
-            <a:br>
-              <a:rPr sz="1800"/>
-            </a:br>
-            <a:br>
-              <a:rPr sz="1800"/>
-            </a:br>
-            <a:endParaRPr b="0" lang="en-US" sz="1800" spc="-1" strike="noStrike">
-              <a:solidFill>
-                <a:srgbClr val="000000"/>
-              </a:solidFill>
-              <a:latin typeface="Arial"/>
-            </a:endParaRPr>
-          </a:p>
-        </p:txBody>
-      </p:sp>
-      <p:sp>
-        <p:nvSpPr>
-          <p:cNvPr id="43" name="Google Shape;83;p10"/>
+          <p:cNvPr id="53" name=""/>
           <p:cNvSpPr/>
           <p:nvPr/>
         </p:nvSpPr>
         <p:spPr>
           <a:xfrm>
-            <a:off x="1835640" y="185760"/>
-            <a:ext cx="5339880" cy="570600"/>
-          </a:xfrm>
-          <a:prstGeom prst="rect">
-            <a:avLst/>
-          </a:prstGeom>
-          <a:noFill/>
-          <a:ln w="0">
-            <a:noFill/>
-          </a:ln>
-        </p:spPr>
-        <p:style>
-          <a:lnRef idx="0"/>
-          <a:fillRef idx="0"/>
-          <a:effectRef idx="0"/>
-          <a:fontRef idx="minor"/>
-        </p:style>
-        <p:txBody>
-          <a:bodyPr lIns="90000" rIns="90000" tIns="91440" bIns="91440" anchor="b">
-            <a:noAutofit/>
-          </a:bodyPr>
-          <a:p>
-            <a:pPr algn="ctr">
-              <a:lnSpc>
-                <a:spcPct val="100000"/>
-              </a:lnSpc>
-            </a:pPr>
-            <a:r>
-              <a:rPr b="0" lang="en-IN" sz="3600" spc="-1" strike="noStrike">
-                <a:solidFill>
-                  <a:schemeClr val="dk1"/>
-                </a:solidFill>
-                <a:latin typeface="Times New Roman"/>
-                <a:ea typeface="Times New Roman"/>
-              </a:rPr>
-              <a:t>References</a:t>
-            </a:r>
-            <a:endParaRPr b="0" lang="en-US" sz="3600" spc="-1" strike="noStrike">
-              <a:solidFill>
-                <a:srgbClr val="000000"/>
-              </a:solidFill>
-              <a:latin typeface="Arial"/>
-            </a:endParaRPr>
-          </a:p>
-        </p:txBody>
-      </p:sp>
-      <p:sp>
-        <p:nvSpPr>
-          <p:cNvPr id="44" name=""/>
-          <p:cNvSpPr/>
-          <p:nvPr/>
-        </p:nvSpPr>
-        <p:spPr>
-          <a:xfrm>
-            <a:off x="16200" y="914400"/>
-            <a:ext cx="8989200" cy="4138920"/>
+            <a:off x="1080" y="685800"/>
+            <a:ext cx="9141120" cy="4227480"/>
           </a:xfrm>
           <a:prstGeom prst="rect">
             <a:avLst/>
@@ -1933,274 +3165,13 @@
                 <a:spcPct val="100000"/>
               </a:lnSpc>
               <a:spcBef>
-                <a:spcPts val="624"/>
+                <a:spcPts val="340"/>
               </a:spcBef>
               <a:spcAft>
-                <a:spcPts val="425"/>
+                <a:spcPts val="283"/>
               </a:spcAft>
             </a:pPr>
-            <a:r>
-              <a:rPr b="0" lang="en-US" sz="1200" spc="-1" strike="noStrike">
-                <a:solidFill>
-                  <a:srgbClr val="000000"/>
-                </a:solidFill>
-                <a:latin typeface="times new roman"/>
-              </a:rPr>
-              <a:t>[1] Z. Liu et al., "Holographic Video Communications," IEEE Wireless Communications, vol. 32, no. 2, Feb. 2025.</a:t>
-            </a:r>
-            <a:endParaRPr b="0" lang="en-US" sz="1200" spc="-1" strike="noStrike">
-              <a:solidFill>
-                <a:srgbClr val="000000"/>
-              </a:solidFill>
-              <a:latin typeface="Arial"/>
-            </a:endParaRPr>
-          </a:p>
-          <a:p>
-            <a:pPr>
-              <a:lnSpc>
-                <a:spcPct val="100000"/>
-              </a:lnSpc>
-              <a:spcBef>
-                <a:spcPts val="624"/>
-              </a:spcBef>
-              <a:spcAft>
-                <a:spcPts val="425"/>
-              </a:spcAft>
-            </a:pPr>
-            <a:r>
-              <a:rPr b="0" lang="en-US" sz="1200" spc="-1" strike="noStrike">
-                <a:solidFill>
-                  <a:srgbClr val="000000"/>
-                </a:solidFill>
-                <a:latin typeface="times new roman"/>
-              </a:rPr>
-              <a:t>[2] T. Wang, C. Yang, J. Chen, Y. Zhao, J. Zong, et al., "Naked-eye light field display technology based on mini/micro LED panels: a systematic review and meta-analysis," Scientific Reports, vol. 14, Art. 24381, Oct. 2024.</a:t>
-            </a:r>
-            <a:endParaRPr b="0" lang="en-US" sz="1200" spc="-1" strike="noStrike">
-              <a:solidFill>
-                <a:srgbClr val="000000"/>
-              </a:solidFill>
-              <a:latin typeface="Arial"/>
-            </a:endParaRPr>
-          </a:p>
-          <a:p>
-            <a:pPr>
-              <a:lnSpc>
-                <a:spcPct val="100000"/>
-              </a:lnSpc>
-              <a:spcBef>
-                <a:spcPts val="624"/>
-              </a:spcBef>
-              <a:spcAft>
-                <a:spcPts val="425"/>
-              </a:spcAft>
-            </a:pPr>
-            <a:r>
-              <a:rPr b="0" lang="en-US" sz="1200" spc="-1" strike="noStrike">
-                <a:solidFill>
-                  <a:srgbClr val="000000"/>
-                </a:solidFill>
-                <a:latin typeface="times new roman"/>
-              </a:rPr>
-              <a:t>[3] M. Rutz et al., "Perceived brightness and resolution in retinal scan glasses," arXiv:2403.xxxxx, Jul. 2024.</a:t>
-            </a:r>
-            <a:endParaRPr b="0" lang="en-US" sz="1200" spc="-1" strike="noStrike">
-              <a:solidFill>
-                <a:srgbClr val="000000"/>
-              </a:solidFill>
-              <a:latin typeface="Arial"/>
-            </a:endParaRPr>
-          </a:p>
-          <a:p>
-            <a:pPr>
-              <a:lnSpc>
-                <a:spcPct val="100000"/>
-              </a:lnSpc>
-              <a:spcBef>
-                <a:spcPts val="624"/>
-              </a:spcBef>
-              <a:spcAft>
-                <a:spcPts val="425"/>
-              </a:spcAft>
-            </a:pPr>
-            <a:r>
-              <a:rPr b="0" lang="en-US" sz="1200" spc="-1" strike="noStrike">
-                <a:solidFill>
-                  <a:srgbClr val="000000"/>
-                </a:solidFill>
-                <a:latin typeface="times new roman"/>
-              </a:rPr>
-              <a:t>[4] Y. Jin et al., "Volumetric 3D video: capture, compression, display," arXiv:2404.xxxxx, Apr. 2024.</a:t>
-            </a:r>
-            <a:endParaRPr b="0" lang="en-US" sz="1200" spc="-1" strike="noStrike">
-              <a:solidFill>
-                <a:srgbClr val="000000"/>
-              </a:solidFill>
-              <a:latin typeface="Arial"/>
-            </a:endParaRPr>
-          </a:p>
-          <a:p>
-            <a:pPr>
-              <a:lnSpc>
-                <a:spcPct val="100000"/>
-              </a:lnSpc>
-              <a:spcBef>
-                <a:spcPts val="624"/>
-              </a:spcBef>
-              <a:spcAft>
-                <a:spcPts val="425"/>
-              </a:spcAft>
-            </a:pPr>
-            <a:r>
-              <a:rPr b="0" lang="en-US" sz="1200" spc="-1" strike="noStrike">
-                <a:solidFill>
-                  <a:srgbClr val="000000"/>
-                </a:solidFill>
-                <a:latin typeface="times new roman"/>
-              </a:rPr>
-              <a:t>[5] PointerVol Team, "PointerVol: laser-pointer interaction in volumetric displays," ACM SIGGRAPH, 2024.</a:t>
-            </a:r>
-            <a:endParaRPr b="0" lang="en-US" sz="1200" spc="-1" strike="noStrike">
-              <a:solidFill>
-                <a:srgbClr val="000000"/>
-              </a:solidFill>
-              <a:latin typeface="Arial"/>
-            </a:endParaRPr>
-          </a:p>
-          <a:p>
-            <a:pPr>
-              <a:lnSpc>
-                <a:spcPct val="100000"/>
-              </a:lnSpc>
-              <a:spcBef>
-                <a:spcPts val="624"/>
-              </a:spcBef>
-              <a:spcAft>
-                <a:spcPts val="425"/>
-              </a:spcAft>
-            </a:pPr>
-            <a:r>
-              <a:rPr b="0" lang="en-US" sz="1200" spc="-1" strike="noStrike">
-                <a:solidFill>
-                  <a:srgbClr val="000000"/>
-                </a:solidFill>
-                <a:latin typeface="times new roman"/>
-              </a:rPr>
-              <a:t>[6] K. Akşit and Y. Itoh, "HoloBeam: paper-thin near-eye displays," arXiv:2212.xxxxx, Dec. 2022.</a:t>
-            </a:r>
-            <a:endParaRPr b="0" lang="en-US" sz="1200" spc="-1" strike="noStrike">
-              <a:solidFill>
-                <a:srgbClr val="000000"/>
-              </a:solidFill>
-              <a:latin typeface="Arial"/>
-            </a:endParaRPr>
-          </a:p>
-          <a:p>
-            <a:pPr>
-              <a:lnSpc>
-                <a:spcPct val="100000"/>
-              </a:lnSpc>
-              <a:spcBef>
-                <a:spcPts val="624"/>
-              </a:spcBef>
-              <a:spcAft>
-                <a:spcPts val="425"/>
-              </a:spcAft>
-            </a:pPr>
-            <a:r>
-              <a:rPr b="0" lang="en-US" sz="1200" spc="-1" strike="noStrike">
-                <a:solidFill>
-                  <a:srgbClr val="000000"/>
-                </a:solidFill>
-                <a:latin typeface="times new roman"/>
-              </a:rPr>
-              <a:t>[7] P. Chakravarthula et al., "Gaze-contingent retinal speckle suppression for foveated holographic displays," arXiv:2111.xxxxx, Nov. 2021.</a:t>
-            </a:r>
-            <a:endParaRPr b="0" lang="en-US" sz="1200" spc="-1" strike="noStrike">
-              <a:solidFill>
-                <a:srgbClr val="000000"/>
-              </a:solidFill>
-              <a:latin typeface="Arial"/>
-            </a:endParaRPr>
-          </a:p>
-          <a:p>
-            <a:pPr>
-              <a:lnSpc>
-                <a:spcPct val="100000"/>
-              </a:lnSpc>
-              <a:spcBef>
-                <a:spcPts val="624"/>
-              </a:spcBef>
-              <a:spcAft>
-                <a:spcPts val="425"/>
-              </a:spcAft>
-            </a:pPr>
-            <a:r>
-              <a:rPr b="0" lang="en-US" sz="1200" spc="-1" strike="noStrike">
-                <a:solidFill>
-                  <a:srgbClr val="000000"/>
-                </a:solidFill>
-                <a:latin typeface="times new roman"/>
-              </a:rPr>
-              <a:t>[8] M. J. Jeong et al., "Screenless Display for Interactive Applications," Applied Sciences, vol. 11, no. 1, p. 117, Jan. 2021.</a:t>
-            </a:r>
-            <a:endParaRPr b="0" lang="en-US" sz="1200" spc="-1" strike="noStrike">
-              <a:solidFill>
-                <a:srgbClr val="000000"/>
-              </a:solidFill>
-              <a:latin typeface="Arial"/>
-            </a:endParaRPr>
-          </a:p>
-          <a:p>
-            <a:pPr>
-              <a:lnSpc>
-                <a:spcPct val="100000"/>
-              </a:lnSpc>
-              <a:spcBef>
-                <a:spcPts val="624"/>
-              </a:spcBef>
-              <a:spcAft>
-                <a:spcPts val="425"/>
-              </a:spcAft>
-            </a:pPr>
-            <a:r>
-              <a:rPr b="0" lang="en-US" sz="1200" spc="-1" strike="noStrike">
-                <a:solidFill>
-                  <a:srgbClr val="000000"/>
-                </a:solidFill>
-                <a:latin typeface="times new roman"/>
-              </a:rPr>
-              <a:t>[9] W. Song et al., "Large-scale Huygens metasurfaces for holographic near-eye displays," arXiv:2010.xxxxx, Oct. 2020.</a:t>
-            </a:r>
-            <a:endParaRPr b="0" lang="en-US" sz="1200" spc="-1" strike="noStrike">
-              <a:solidFill>
-                <a:srgbClr val="000000"/>
-              </a:solidFill>
-              <a:latin typeface="Arial"/>
-            </a:endParaRPr>
-          </a:p>
-          <a:p>
-            <a:pPr>
-              <a:lnSpc>
-                <a:spcPct val="100000"/>
-              </a:lnSpc>
-              <a:spcBef>
-                <a:spcPts val="624"/>
-              </a:spcBef>
-              <a:spcAft>
-                <a:spcPts val="425"/>
-              </a:spcAft>
-            </a:pPr>
-            <a:r>
-              <a:rPr b="0" lang="en-US" sz="1200" spc="-1" strike="noStrike">
-                <a:solidFill>
-                  <a:srgbClr val="000000"/>
-                </a:solidFill>
-                <a:latin typeface="times new roman"/>
-              </a:rPr>
-              <a:t>[10] P. S. Bhosale, R. Kale, and P. P. Salve, "Screenless Display: A Review," IJSRCSEIT, vol. 8, no. 1, pp. 337-343, 2022.</a:t>
-            </a:r>
-            <a:endParaRPr b="0" lang="en-US" sz="1200" spc="-1" strike="noStrike">
+            <a:endParaRPr b="0" lang="en-US" sz="1100" spc="-1" strike="noStrike">
               <a:solidFill>
                 <a:srgbClr val="000000"/>
               </a:solidFill>
@@ -2220,16 +3191,16 @@
               </a:spcAft>
             </a:pPr>
             <a:r>
-              <a:rPr b="0" lang="en-US" sz="1200" spc="-1" strike="noStrike">
+              <a:rPr b="0" lang="en-US" sz="1100" spc="-1" strike="noStrike">
                 <a:solidFill>
                   <a:srgbClr val="000000"/>
                 </a:solidFill>
                 <a:latin typeface="times new roman"/>
                 <a:ea typeface="Noto Sans CJK SC"/>
               </a:rPr>
-              <a:t>[11] V. Kumar, "Screenless Display Technology," SlideShare, 2024.</a:t>
-            </a:r>
-            <a:endParaRPr b="0" lang="en-US" sz="1200" spc="-1" strike="noStrike">
+              <a:t>[13] Virtual retinal display, Wikipedia, The Free Encyclopedia, 2025. [Online].  (Accessed: Jun. 12, 2025).</a:t>
+            </a:r>
+            <a:endParaRPr b="0" lang="en-US" sz="1100" spc="-1" strike="noStrike">
               <a:solidFill>
                 <a:srgbClr val="000000"/>
               </a:solidFill>
@@ -2249,16 +3220,354 @@
               </a:spcAft>
             </a:pPr>
             <a:r>
-              <a:rPr b="0" lang="en-US" sz="1200" spc="-1" strike="noStrike">
+              <a:rPr b="0" lang="en-US" sz="1100" spc="-1" strike="noStrike">
                 <a:solidFill>
                   <a:srgbClr val="000000"/>
                 </a:solidFill>
                 <a:latin typeface="times new roman"/>
                 <a:ea typeface="Noto Sans CJK SC"/>
               </a:rPr>
-              <a:t>[12] M. Mierse, “Build a Sci-Fi aerial display,” IEEE Spectrum, Oct. 20, 2024. [Online]. Available: https://spectrum.ieee.org/diy-scifi-aerial-display.</a:t>
-            </a:r>
-            <a:endParaRPr b="0" lang="en-US" sz="1200" spc="-1" strike="noStrike">
+              <a:t>[14] M. J. Jeong et al., “Screenless display for interactive applications,” Appl. Sci., vol. 11, no. 1, p. 117, 2021.</a:t>
+            </a:r>
+            <a:endParaRPr b="0" lang="en-US" sz="1100" spc="-1" strike="noStrike">
+              <a:solidFill>
+                <a:srgbClr val="000000"/>
+              </a:solidFill>
+              <a:latin typeface="Arial"/>
+            </a:endParaRPr>
+          </a:p>
+          <a:p>
+            <a:pPr>
+              <a:lnSpc>
+                <a:spcPct val="100000"/>
+              </a:lnSpc>
+              <a:spcBef>
+                <a:spcPts val="340"/>
+              </a:spcBef>
+              <a:spcAft>
+                <a:spcPts val="283"/>
+              </a:spcAft>
+            </a:pPr>
+            <a:r>
+              <a:rPr b="0" lang="en-US" sz="1100" spc="-1" strike="noStrike">
+                <a:solidFill>
+                  <a:srgbClr val="000000"/>
+                </a:solidFill>
+                <a:latin typeface="times new roman"/>
+                <a:ea typeface="Noto Sans CJK SC"/>
+              </a:rPr>
+              <a:t>[15] H. Fuchs et al., “A survey of techniques for 3D display,” Comput. Graph. Forum, vol. 25, no. 4, pp. 1105–1126, 2006.</a:t>
+            </a:r>
+            <a:endParaRPr b="0" lang="en-US" sz="1100" spc="-1" strike="noStrike">
+              <a:solidFill>
+                <a:srgbClr val="000000"/>
+              </a:solidFill>
+              <a:latin typeface="Arial"/>
+            </a:endParaRPr>
+          </a:p>
+          <a:p>
+            <a:pPr>
+              <a:lnSpc>
+                <a:spcPct val="100000"/>
+              </a:lnSpc>
+              <a:spcBef>
+                <a:spcPts val="340"/>
+              </a:spcBef>
+              <a:spcAft>
+                <a:spcPts val="283"/>
+              </a:spcAft>
+            </a:pPr>
+            <a:r>
+              <a:rPr b="0" lang="en-US" sz="1100" spc="-1" strike="noStrike">
+                <a:solidFill>
+                  <a:srgbClr val="000000"/>
+                </a:solidFill>
+                <a:latin typeface="times new roman"/>
+                <a:ea typeface="Noto Sans CJK SC"/>
+              </a:rPr>
+              <a:t>[16] X. Yang et al., “Progress in volumetric 3D display technologies,” IEEE Access, vol. 8, pp. 98661–98673, 2020.</a:t>
+            </a:r>
+            <a:endParaRPr b="0" lang="en-US" sz="1100" spc="-1" strike="noStrike">
+              <a:solidFill>
+                <a:srgbClr val="000000"/>
+              </a:solidFill>
+              <a:latin typeface="Arial"/>
+            </a:endParaRPr>
+          </a:p>
+          <a:p>
+            <a:pPr>
+              <a:lnSpc>
+                <a:spcPct val="100000"/>
+              </a:lnSpc>
+              <a:spcBef>
+                <a:spcPts val="340"/>
+              </a:spcBef>
+              <a:spcAft>
+                <a:spcPts val="283"/>
+              </a:spcAft>
+            </a:pPr>
+            <a:r>
+              <a:rPr b="0" lang="en-US" sz="1100" spc="-1" strike="noStrike">
+                <a:solidFill>
+                  <a:srgbClr val="000000"/>
+                </a:solidFill>
+                <a:latin typeface="times new roman"/>
+                <a:ea typeface="Noto Sans CJK SC"/>
+              </a:rPr>
+              <a:t>[17] J. S. Kim et al., “Review of holographic 3D display technologies,” J. Korean Phys. Soc., vol. 63, no. 1, pp. 11–20, 2013.</a:t>
+            </a:r>
+            <a:endParaRPr b="0" lang="en-US" sz="1100" spc="-1" strike="noStrike">
+              <a:solidFill>
+                <a:srgbClr val="000000"/>
+              </a:solidFill>
+              <a:latin typeface="Arial"/>
+            </a:endParaRPr>
+          </a:p>
+          <a:p>
+            <a:pPr>
+              <a:lnSpc>
+                <a:spcPct val="100000"/>
+              </a:lnSpc>
+              <a:spcBef>
+                <a:spcPts val="340"/>
+              </a:spcBef>
+              <a:spcAft>
+                <a:spcPts val="283"/>
+              </a:spcAft>
+            </a:pPr>
+            <a:r>
+              <a:rPr b="0" lang="en-US" sz="1100" spc="-1" strike="noStrike">
+                <a:solidFill>
+                  <a:srgbClr val="000000"/>
+                </a:solidFill>
+                <a:latin typeface="times new roman"/>
+                <a:ea typeface="Noto Sans CJK SC"/>
+              </a:rPr>
+              <a:t>[18] M. Lucente et al., “A survey of light-field displays,” Proc. IEEE, vol. 101, no. 7, pp. 1469–1487, 2013.</a:t>
+            </a:r>
+            <a:endParaRPr b="0" lang="en-US" sz="1100" spc="-1" strike="noStrike">
+              <a:solidFill>
+                <a:srgbClr val="000000"/>
+              </a:solidFill>
+              <a:latin typeface="Arial"/>
+            </a:endParaRPr>
+          </a:p>
+          <a:p>
+            <a:pPr>
+              <a:lnSpc>
+                <a:spcPct val="100000"/>
+              </a:lnSpc>
+              <a:spcBef>
+                <a:spcPts val="340"/>
+              </a:spcBef>
+              <a:spcAft>
+                <a:spcPts val="283"/>
+              </a:spcAft>
+            </a:pPr>
+            <a:r>
+              <a:rPr b="0" lang="en-US" sz="1100" spc="-1" strike="noStrike">
+                <a:solidFill>
+                  <a:srgbClr val="000000"/>
+                </a:solidFill>
+                <a:latin typeface="times new roman"/>
+                <a:ea typeface="Noto Sans CJK SC"/>
+              </a:rPr>
+              <a:t>[19] H. Kuwahara et al., “Three-dimensional displays: Technologies and applications,” Proc. IEEE, vol. 101, no. 7, pp. 1508–1523, 2013.</a:t>
+            </a:r>
+            <a:endParaRPr b="0" lang="en-US" sz="1100" spc="-1" strike="noStrike">
+              <a:solidFill>
+                <a:srgbClr val="000000"/>
+              </a:solidFill>
+              <a:latin typeface="Arial"/>
+            </a:endParaRPr>
+          </a:p>
+          <a:p>
+            <a:pPr>
+              <a:lnSpc>
+                <a:spcPct val="100000"/>
+              </a:lnSpc>
+              <a:spcBef>
+                <a:spcPts val="340"/>
+              </a:spcBef>
+              <a:spcAft>
+                <a:spcPts val="283"/>
+              </a:spcAft>
+            </a:pPr>
+            <a:r>
+              <a:rPr b="0" lang="en-US" sz="1100" spc="-1" strike="noStrike">
+                <a:solidFill>
+                  <a:srgbClr val="000000"/>
+                </a:solidFill>
+                <a:latin typeface="times new roman"/>
+                <a:ea typeface="Noto Sans CJK SC"/>
+              </a:rPr>
+              <a:t>[20] H. Saito et al., “Laser-plasma scanning 3D display for putting digital contents in free space,” Proc. SPIE, vol. 6803, Feb. 2008, doi:10.1117/12.768068.</a:t>
+            </a:r>
+            <a:endParaRPr b="0" lang="en-US" sz="1100" spc="-1" strike="noStrike">
+              <a:solidFill>
+                <a:srgbClr val="000000"/>
+              </a:solidFill>
+              <a:latin typeface="Arial"/>
+            </a:endParaRPr>
+          </a:p>
+          <a:p>
+            <a:pPr>
+              <a:lnSpc>
+                <a:spcPct val="100000"/>
+              </a:lnSpc>
+              <a:spcBef>
+                <a:spcPts val="340"/>
+              </a:spcBef>
+              <a:spcAft>
+                <a:spcPts val="283"/>
+              </a:spcAft>
+            </a:pPr>
+            <a:r>
+              <a:rPr b="0" lang="en-US" sz="1100" spc="-1" strike="noStrike">
+                <a:solidFill>
+                  <a:srgbClr val="000000"/>
+                </a:solidFill>
+                <a:latin typeface="times new roman"/>
+                <a:ea typeface="Noto Sans CJK SC"/>
+              </a:rPr>
+              <a:t>[21] K. Unagar, “Screenless display (1),” SlideShare, 2024. [Online]. Available: https://www.slideshare.net/slideshow/screenless-display-204907143/204907143.</a:t>
+            </a:r>
+            <a:endParaRPr b="0" lang="en-US" sz="1100" spc="-1" strike="noStrike">
+              <a:solidFill>
+                <a:srgbClr val="000000"/>
+              </a:solidFill>
+              <a:latin typeface="Arial"/>
+            </a:endParaRPr>
+          </a:p>
+          <a:p>
+            <a:pPr>
+              <a:lnSpc>
+                <a:spcPct val="100000"/>
+              </a:lnSpc>
+              <a:spcBef>
+                <a:spcPts val="340"/>
+              </a:spcBef>
+              <a:spcAft>
+                <a:spcPts val="283"/>
+              </a:spcAft>
+            </a:pPr>
+            <a:r>
+              <a:rPr b="0" lang="en-US" sz="1100" spc="-1" strike="noStrike">
+                <a:solidFill>
+                  <a:srgbClr val="000000"/>
+                </a:solidFill>
+                <a:latin typeface="times new roman"/>
+                <a:ea typeface="Noto Sans CJK SC"/>
+              </a:rPr>
+              <a:t>[22] K. Kumagai and Y. Hayasaki, “Colored voxels of laser-excited aerial volumetric display,” in Digital Holography and 3-D Imaging 2022, D. Chu et al., Eds., OSA Technical Digest (online), paper W3A.1, 2022, doi:10.1364/DH.2022.W3A.1.</a:t>
+            </a:r>
+            <a:endParaRPr b="0" lang="en-US" sz="1100" spc="-1" strike="noStrike">
+              <a:solidFill>
+                <a:srgbClr val="000000"/>
+              </a:solidFill>
+              <a:latin typeface="Arial"/>
+            </a:endParaRPr>
+          </a:p>
+          <a:p>
+            <a:pPr>
+              <a:lnSpc>
+                <a:spcPct val="100000"/>
+              </a:lnSpc>
+              <a:spcBef>
+                <a:spcPts val="340"/>
+              </a:spcBef>
+              <a:spcAft>
+                <a:spcPts val="283"/>
+              </a:spcAft>
+            </a:pPr>
+            <a:r>
+              <a:rPr b="0" lang="en-US" sz="1100" spc="-1" strike="noStrike">
+                <a:solidFill>
+                  <a:srgbClr val="000000"/>
+                </a:solidFill>
+                <a:latin typeface="times new roman"/>
+                <a:ea typeface="Noto Sans CJK SC"/>
+              </a:rPr>
+              <a:t>[23] K. Kumagai, S. Miura, and Y. Hayasaki, “Aerial re-imaging of femtosecond-laser-excited graphics for volumetric display,” in OSA Imaging and Applied Optics Congress (Imaging, 3D, DH, ISA, COSI), OSA Technical Digest, paper 3Th7E.1, 2021.</a:t>
+            </a:r>
+            <a:endParaRPr b="0" lang="en-US" sz="1100" spc="-1" strike="noStrike">
+              <a:solidFill>
+                <a:srgbClr val="000000"/>
+              </a:solidFill>
+              <a:latin typeface="Arial"/>
+            </a:endParaRPr>
+          </a:p>
+          <a:p>
+            <a:pPr>
+              <a:lnSpc>
+                <a:spcPct val="100000"/>
+              </a:lnSpc>
+              <a:spcBef>
+                <a:spcPts val="340"/>
+              </a:spcBef>
+              <a:spcAft>
+                <a:spcPts val="283"/>
+              </a:spcAft>
+            </a:pPr>
+            <a:r>
+              <a:rPr b="0" lang="en-US" sz="1100" spc="-1" strike="noStrike">
+                <a:solidFill>
+                  <a:srgbClr val="000000"/>
+                </a:solidFill>
+                <a:latin typeface="times new roman"/>
+                <a:ea typeface="Noto Sans CJK SC"/>
+              </a:rPr>
+              <a:t>[24] W. D. Jones, “Wireless display on a contact lens,” IEEE Spectrum, Nov. 2011.</a:t>
+            </a:r>
+            <a:endParaRPr b="0" lang="en-US" sz="1100" spc="-1" strike="noStrike">
+              <a:solidFill>
+                <a:srgbClr val="000000"/>
+              </a:solidFill>
+              <a:latin typeface="Arial"/>
+            </a:endParaRPr>
+          </a:p>
+          <a:p>
+            <a:pPr>
+              <a:lnSpc>
+                <a:spcPct val="100000"/>
+              </a:lnSpc>
+              <a:spcBef>
+                <a:spcPts val="340"/>
+              </a:spcBef>
+              <a:spcAft>
+                <a:spcPts val="283"/>
+              </a:spcAft>
+            </a:pPr>
+            <a:r>
+              <a:rPr b="0" lang="en-US" sz="1100" spc="-1" strike="noStrike">
+                <a:solidFill>
+                  <a:srgbClr val="000000"/>
+                </a:solidFill>
+                <a:latin typeface="times new roman"/>
+                <a:ea typeface="Noto Sans CJK SC"/>
+              </a:rPr>
+              <a:t>[25] E. N. Sardinha, M. Munera, N. Zook, D. Western, and V. Ruiz Garate, “Diegetic graphical user interfaces and intuitive control of assistive robots via eye-gaze,” arXiv:2401.03944 [cs.RO], 2024.</a:t>
+            </a:r>
+            <a:endParaRPr b="0" lang="en-US" sz="1100" spc="-1" strike="noStrike">
+              <a:solidFill>
+                <a:srgbClr val="000000"/>
+              </a:solidFill>
+              <a:latin typeface="Arial"/>
+            </a:endParaRPr>
+          </a:p>
+          <a:p>
+            <a:pPr>
+              <a:lnSpc>
+                <a:spcPct val="100000"/>
+              </a:lnSpc>
+              <a:spcBef>
+                <a:spcPts val="340"/>
+              </a:spcBef>
+              <a:spcAft>
+                <a:spcPts val="283"/>
+              </a:spcAft>
+            </a:pPr>
+            <a:endParaRPr b="0" lang="en-US" sz="1100" spc="-1" strike="noStrike">
               <a:solidFill>
                 <a:srgbClr val="000000"/>
               </a:solidFill>
@@ -2269,97 +3578,14 @@
       </p:sp>
       <p:sp>
         <p:nvSpPr>
-          <p:cNvPr id="45" name=""/>
-          <p:cNvSpPr txBox="1"/>
-          <p:nvPr/>
-        </p:nvSpPr>
-        <p:spPr>
-          <a:xfrm>
-            <a:off x="8503200" y="4645440"/>
-            <a:ext cx="640800" cy="541800"/>
-          </a:xfrm>
-          <a:prstGeom prst="rect">
-            <a:avLst/>
-          </a:prstGeom>
-          <a:noFill/>
-          <a:ln w="0">
-            <a:noFill/>
-          </a:ln>
-        </p:spPr>
-        <p:txBody>
-          <a:bodyPr lIns="90000" rIns="90000" tIns="45000" bIns="45000" anchor="t">
-            <a:noAutofit/>
-          </a:bodyPr>
-          <a:p>
-            <a:r>
-              <a:rPr b="0" lang="en-IN" sz="1600" spc="-1" strike="noStrike">
-                <a:solidFill>
-                  <a:srgbClr val="000000"/>
-                </a:solidFill>
-                <a:latin typeface="times new roman"/>
-                <a:ea typeface="Times New Roman"/>
-              </a:rPr>
-              <a:t>  </a:t>
-            </a:r>
-            <a:r>
-              <a:rPr b="0" lang="en-IN" sz="1600" spc="-1" strike="noStrike">
-                <a:solidFill>
-                  <a:srgbClr val="000000"/>
-                </a:solidFill>
-                <a:latin typeface="times new roman"/>
-                <a:ea typeface="Times New Roman"/>
-              </a:rPr>
-              <a:t>11/12</a:t>
-            </a:r>
-            <a:endParaRPr b="0" lang="en-US" sz="1600" spc="-1" strike="noStrike">
-              <a:solidFill>
-                <a:srgbClr val="000000"/>
-              </a:solidFill>
-              <a:latin typeface="Arial"/>
-            </a:endParaRPr>
-          </a:p>
-        </p:txBody>
-      </p:sp>
-    </p:spTree>
-  </p:cSld>
-  <mc:AlternateContent>
-    <mc:Choice Requires="p14">
-      <p:transition spd="slow" p14:dur="2000"/>
-    </mc:Choice>
-    <mc:Fallback>
-      <p:transition spd="slow"/>
-    </mc:Fallback>
-  </mc:AlternateContent>
-</p:sld>
-</file>
-
-<file path=ppt/slides/slide12.xml><?xml version="1.0" encoding="utf-8"?>
-<p:sld xmlns:a="http://schemas.openxmlformats.org/drawingml/2006/main" xmlns:p="http://schemas.openxmlformats.org/presentationml/2006/main" xmlns:r="http://schemas.openxmlformats.org/officeDocument/2006/relationships" xmlns:p14="http://schemas.microsoft.com/office/powerpoint/2010/main" xmlns:p15="http://schemas.microsoft.com/office/powerpoint/2012/main" xmlns:mc="http://schemas.openxmlformats.org/markup-compatibility/2006">
-  <p:cSld>
-    <p:spTree>
-      <p:nvGrpSpPr>
-        <p:cNvPr id="1" name=""/>
-        <p:cNvGrpSpPr/>
-        <p:nvPr/>
-      </p:nvGrpSpPr>
-      <p:grpSpPr>
-        <a:xfrm>
-          <a:off x="0" y="0"/>
-          <a:ext cx="0" cy="0"/>
-          <a:chOff x="0" y="0"/>
-          <a:chExt cx="0" cy="0"/>
-        </a:xfrm>
-      </p:grpSpPr>
-      <p:sp>
-        <p:nvSpPr>
-          <p:cNvPr id="46" name=""/>
+          <p:cNvPr id="54" name=""/>
           <p:cNvSpPr/>
           <p:nvPr/>
         </p:nvSpPr>
         <p:spPr>
           <a:xfrm>
-            <a:off x="1080" y="685800"/>
-            <a:ext cx="9142560" cy="4228920"/>
+            <a:off x="8478000" y="4695840"/>
+            <a:ext cx="639360" cy="540360"/>
           </a:xfrm>
           <a:prstGeom prst="rect">
             <a:avLst/>
@@ -2384,442 +3610,7 @@
               <a:lnSpc>
                 <a:spcPct val="100000"/>
               </a:lnSpc>
-              <a:spcBef>
-                <a:spcPts val="340"/>
-              </a:spcBef>
-              <a:spcAft>
-                <a:spcPts val="283"/>
-              </a:spcAft>
-            </a:pPr>
-            <a:endParaRPr b="0" lang="en-US" sz="1100" spc="-1" strike="noStrike">
-              <a:solidFill>
-                <a:srgbClr val="000000"/>
-              </a:solidFill>
-              <a:latin typeface="Arial"/>
-            </a:endParaRPr>
-          </a:p>
-          <a:p>
-            <a:pPr>
-              <a:lnSpc>
-                <a:spcPct val="100000"/>
-              </a:lnSpc>
-              <a:spcBef>
-                <a:spcPts val="340"/>
-              </a:spcBef>
-              <a:spcAft>
-                <a:spcPts val="283"/>
-              </a:spcAft>
-            </a:pPr>
-            <a:r>
-              <a:rPr b="0" lang="en-US" sz="1100" spc="-1" strike="noStrike">
-                <a:solidFill>
-                  <a:srgbClr val="000000"/>
-                </a:solidFill>
-                <a:latin typeface="times new roman"/>
-                <a:ea typeface="Noto Sans CJK SC"/>
-              </a:rPr>
-              <a:t>[13] Virtual retinal display, Wikipedia, The Free Encyclopedia, 2025. [Online].  (Accessed: Jun. 12, 2025).</a:t>
-            </a:r>
-            <a:endParaRPr b="0" lang="en-US" sz="1100" spc="-1" strike="noStrike">
-              <a:solidFill>
-                <a:srgbClr val="000000"/>
-              </a:solidFill>
-              <a:latin typeface="Arial"/>
-            </a:endParaRPr>
-          </a:p>
-          <a:p>
-            <a:pPr>
-              <a:lnSpc>
-                <a:spcPct val="100000"/>
-              </a:lnSpc>
-              <a:spcBef>
-                <a:spcPts val="340"/>
-              </a:spcBef>
-              <a:spcAft>
-                <a:spcPts val="283"/>
-              </a:spcAft>
-            </a:pPr>
-            <a:r>
-              <a:rPr b="0" lang="en-US" sz="1100" spc="-1" strike="noStrike">
-                <a:solidFill>
-                  <a:srgbClr val="000000"/>
-                </a:solidFill>
-                <a:latin typeface="times new roman"/>
-                <a:ea typeface="Noto Sans CJK SC"/>
-              </a:rPr>
-              <a:t>[14] M. J. Jeong et al., “Screenless display for interactive applications,” Appl. Sci., vol. 11, no. 1, p. 117, 2021.</a:t>
-            </a:r>
-            <a:endParaRPr b="0" lang="en-US" sz="1100" spc="-1" strike="noStrike">
-              <a:solidFill>
-                <a:srgbClr val="000000"/>
-              </a:solidFill>
-              <a:latin typeface="Arial"/>
-            </a:endParaRPr>
-          </a:p>
-          <a:p>
-            <a:pPr>
-              <a:lnSpc>
-                <a:spcPct val="100000"/>
-              </a:lnSpc>
-              <a:spcBef>
-                <a:spcPts val="340"/>
-              </a:spcBef>
-              <a:spcAft>
-                <a:spcPts val="283"/>
-              </a:spcAft>
-            </a:pPr>
-            <a:r>
-              <a:rPr b="0" lang="en-US" sz="1100" spc="-1" strike="noStrike">
-                <a:solidFill>
-                  <a:srgbClr val="000000"/>
-                </a:solidFill>
-                <a:latin typeface="times new roman"/>
-                <a:ea typeface="Noto Sans CJK SC"/>
-              </a:rPr>
-              <a:t>[15] H. Fuchs et al., “A survey of techniques for 3D display,” Comput. Graph. Forum, vol. 25, no. 4, pp. 1105–1126, 2006.</a:t>
-            </a:r>
-            <a:endParaRPr b="0" lang="en-US" sz="1100" spc="-1" strike="noStrike">
-              <a:solidFill>
-                <a:srgbClr val="000000"/>
-              </a:solidFill>
-              <a:latin typeface="Arial"/>
-            </a:endParaRPr>
-          </a:p>
-          <a:p>
-            <a:pPr>
-              <a:lnSpc>
-                <a:spcPct val="100000"/>
-              </a:lnSpc>
-              <a:spcBef>
-                <a:spcPts val="340"/>
-              </a:spcBef>
-              <a:spcAft>
-                <a:spcPts val="283"/>
-              </a:spcAft>
-            </a:pPr>
-            <a:r>
-              <a:rPr b="0" lang="en-US" sz="1100" spc="-1" strike="noStrike">
-                <a:solidFill>
-                  <a:srgbClr val="000000"/>
-                </a:solidFill>
-                <a:latin typeface="times new roman"/>
-                <a:ea typeface="Noto Sans CJK SC"/>
-              </a:rPr>
-              <a:t>[16] X. Yang et al., “Progress in volumetric 3D display technologies,” IEEE Access, vol. 8, pp. 98661–98673, 2020.</a:t>
-            </a:r>
-            <a:endParaRPr b="0" lang="en-US" sz="1100" spc="-1" strike="noStrike">
-              <a:solidFill>
-                <a:srgbClr val="000000"/>
-              </a:solidFill>
-              <a:latin typeface="Arial"/>
-            </a:endParaRPr>
-          </a:p>
-          <a:p>
-            <a:pPr>
-              <a:lnSpc>
-                <a:spcPct val="100000"/>
-              </a:lnSpc>
-              <a:spcBef>
-                <a:spcPts val="340"/>
-              </a:spcBef>
-              <a:spcAft>
-                <a:spcPts val="283"/>
-              </a:spcAft>
-            </a:pPr>
-            <a:r>
-              <a:rPr b="0" lang="en-US" sz="1100" spc="-1" strike="noStrike">
-                <a:solidFill>
-                  <a:srgbClr val="000000"/>
-                </a:solidFill>
-                <a:latin typeface="times new roman"/>
-                <a:ea typeface="Noto Sans CJK SC"/>
-              </a:rPr>
-              <a:t>[17] J. S. Kim et al., “Review of holographic 3D display technologies,” J. Korean Phys. Soc., vol. 63, no. 1, pp. 11–20, 2013.</a:t>
-            </a:r>
-            <a:endParaRPr b="0" lang="en-US" sz="1100" spc="-1" strike="noStrike">
-              <a:solidFill>
-                <a:srgbClr val="000000"/>
-              </a:solidFill>
-              <a:latin typeface="Arial"/>
-            </a:endParaRPr>
-          </a:p>
-          <a:p>
-            <a:pPr>
-              <a:lnSpc>
-                <a:spcPct val="100000"/>
-              </a:lnSpc>
-              <a:spcBef>
-                <a:spcPts val="340"/>
-              </a:spcBef>
-              <a:spcAft>
-                <a:spcPts val="283"/>
-              </a:spcAft>
-            </a:pPr>
-            <a:r>
-              <a:rPr b="0" lang="en-US" sz="1100" spc="-1" strike="noStrike">
-                <a:solidFill>
-                  <a:srgbClr val="000000"/>
-                </a:solidFill>
-                <a:latin typeface="times new roman"/>
-                <a:ea typeface="Noto Sans CJK SC"/>
-              </a:rPr>
-              <a:t>[18] M. Lucente et al., “A survey of light-field displays,” Proc. IEEE, vol. 101, no. 7, pp. 1469–1487, 2013.</a:t>
-            </a:r>
-            <a:endParaRPr b="0" lang="en-US" sz="1100" spc="-1" strike="noStrike">
-              <a:solidFill>
-                <a:srgbClr val="000000"/>
-              </a:solidFill>
-              <a:latin typeface="Arial"/>
-            </a:endParaRPr>
-          </a:p>
-          <a:p>
-            <a:pPr>
-              <a:lnSpc>
-                <a:spcPct val="100000"/>
-              </a:lnSpc>
-              <a:spcBef>
-                <a:spcPts val="340"/>
-              </a:spcBef>
-              <a:spcAft>
-                <a:spcPts val="283"/>
-              </a:spcAft>
-            </a:pPr>
-            <a:r>
-              <a:rPr b="0" lang="en-US" sz="1100" spc="-1" strike="noStrike">
-                <a:solidFill>
-                  <a:srgbClr val="000000"/>
-                </a:solidFill>
-                <a:latin typeface="times new roman"/>
-                <a:ea typeface="Noto Sans CJK SC"/>
-              </a:rPr>
-              <a:t>[19] H. Kuwahara et al., “Three-dimensional displays: Technologies and applications,” Proc. IEEE, vol. 101, no. 7, pp. 1508–1523, 2013.</a:t>
-            </a:r>
-            <a:endParaRPr b="0" lang="en-US" sz="1100" spc="-1" strike="noStrike">
-              <a:solidFill>
-                <a:srgbClr val="000000"/>
-              </a:solidFill>
-              <a:latin typeface="Arial"/>
-            </a:endParaRPr>
-          </a:p>
-          <a:p>
-            <a:pPr>
-              <a:lnSpc>
-                <a:spcPct val="100000"/>
-              </a:lnSpc>
-              <a:spcBef>
-                <a:spcPts val="340"/>
-              </a:spcBef>
-              <a:spcAft>
-                <a:spcPts val="283"/>
-              </a:spcAft>
-            </a:pPr>
-            <a:r>
-              <a:rPr b="0" lang="en-US" sz="1100" spc="-1" strike="noStrike">
-                <a:solidFill>
-                  <a:srgbClr val="000000"/>
-                </a:solidFill>
-                <a:latin typeface="times new roman"/>
-                <a:ea typeface="Noto Sans CJK SC"/>
-              </a:rPr>
-              <a:t>[20] H. Saito et al., “Laser-plasma scanning 3D display for putting digital contents in free space,” Proc. SPIE, vol. 6803, Feb. 2008, doi:10.1117/12.768068.</a:t>
-            </a:r>
-            <a:endParaRPr b="0" lang="en-US" sz="1100" spc="-1" strike="noStrike">
-              <a:solidFill>
-                <a:srgbClr val="000000"/>
-              </a:solidFill>
-              <a:latin typeface="Arial"/>
-            </a:endParaRPr>
-          </a:p>
-          <a:p>
-            <a:pPr>
-              <a:lnSpc>
-                <a:spcPct val="100000"/>
-              </a:lnSpc>
-              <a:spcBef>
-                <a:spcPts val="340"/>
-              </a:spcBef>
-              <a:spcAft>
-                <a:spcPts val="283"/>
-              </a:spcAft>
-            </a:pPr>
-            <a:r>
-              <a:rPr b="0" lang="en-US" sz="1100" spc="-1" strike="noStrike">
-                <a:solidFill>
-                  <a:srgbClr val="000000"/>
-                </a:solidFill>
-                <a:latin typeface="times new roman"/>
-                <a:ea typeface="Noto Sans CJK SC"/>
-              </a:rPr>
-              <a:t>[21] K. Unagar, “Screenless display (1),” SlideShare, 2024. [Online]. Available: https://www.slideshare.net/slideshow/screenless-display-204907143/204907143.</a:t>
-            </a:r>
-            <a:endParaRPr b="0" lang="en-US" sz="1100" spc="-1" strike="noStrike">
-              <a:solidFill>
-                <a:srgbClr val="000000"/>
-              </a:solidFill>
-              <a:latin typeface="Arial"/>
-            </a:endParaRPr>
-          </a:p>
-          <a:p>
-            <a:pPr>
-              <a:lnSpc>
-                <a:spcPct val="100000"/>
-              </a:lnSpc>
-              <a:spcBef>
-                <a:spcPts val="340"/>
-              </a:spcBef>
-              <a:spcAft>
-                <a:spcPts val="283"/>
-              </a:spcAft>
-            </a:pPr>
-            <a:r>
-              <a:rPr b="0" lang="en-US" sz="1100" spc="-1" strike="noStrike">
-                <a:solidFill>
-                  <a:srgbClr val="000000"/>
-                </a:solidFill>
-                <a:latin typeface="times new roman"/>
-                <a:ea typeface="Noto Sans CJK SC"/>
-              </a:rPr>
-              <a:t>[22] K. Kumagai and Y. Hayasaki, “Colored voxels of laser-excited aerial volumetric display,” in Digital Holography and 3-D Imaging 2022, D. Chu et al., Eds., OSA Technical Digest (online), paper W3A.1, 2022, doi:10.1364/DH.2022.W3A.1.</a:t>
-            </a:r>
-            <a:endParaRPr b="0" lang="en-US" sz="1100" spc="-1" strike="noStrike">
-              <a:solidFill>
-                <a:srgbClr val="000000"/>
-              </a:solidFill>
-              <a:latin typeface="Arial"/>
-            </a:endParaRPr>
-          </a:p>
-          <a:p>
-            <a:pPr>
-              <a:lnSpc>
-                <a:spcPct val="100000"/>
-              </a:lnSpc>
-              <a:spcBef>
-                <a:spcPts val="340"/>
-              </a:spcBef>
-              <a:spcAft>
-                <a:spcPts val="283"/>
-              </a:spcAft>
-            </a:pPr>
-            <a:r>
-              <a:rPr b="0" lang="en-US" sz="1100" spc="-1" strike="noStrike">
-                <a:solidFill>
-                  <a:srgbClr val="000000"/>
-                </a:solidFill>
-                <a:latin typeface="times new roman"/>
-                <a:ea typeface="Noto Sans CJK SC"/>
-              </a:rPr>
-              <a:t>[23] K. Kumagai, S. Miura, and Y. Hayasaki, “Aerial re-imaging of femtosecond-laser-excited graphics for volumetric display,” in OSA Imaging and Applied Optics Congress (Imaging, 3D, DH, ISA, COSI), OSA Technical Digest, paper 3Th7E.1, 2021.</a:t>
-            </a:r>
-            <a:endParaRPr b="0" lang="en-US" sz="1100" spc="-1" strike="noStrike">
-              <a:solidFill>
-                <a:srgbClr val="000000"/>
-              </a:solidFill>
-              <a:latin typeface="Arial"/>
-            </a:endParaRPr>
-          </a:p>
-          <a:p>
-            <a:pPr>
-              <a:lnSpc>
-                <a:spcPct val="100000"/>
-              </a:lnSpc>
-              <a:spcBef>
-                <a:spcPts val="340"/>
-              </a:spcBef>
-              <a:spcAft>
-                <a:spcPts val="283"/>
-              </a:spcAft>
-            </a:pPr>
-            <a:r>
-              <a:rPr b="0" lang="en-US" sz="1100" spc="-1" strike="noStrike">
-                <a:solidFill>
-                  <a:srgbClr val="000000"/>
-                </a:solidFill>
-                <a:latin typeface="times new roman"/>
-                <a:ea typeface="Noto Sans CJK SC"/>
-              </a:rPr>
-              <a:t>[24] W. D. Jones, “Wireless display on a contact lens,” IEEE Spectrum, Nov. 2011.</a:t>
-            </a:r>
-            <a:endParaRPr b="0" lang="en-US" sz="1100" spc="-1" strike="noStrike">
-              <a:solidFill>
-                <a:srgbClr val="000000"/>
-              </a:solidFill>
-              <a:latin typeface="Arial"/>
-            </a:endParaRPr>
-          </a:p>
-          <a:p>
-            <a:pPr>
-              <a:lnSpc>
-                <a:spcPct val="100000"/>
-              </a:lnSpc>
-              <a:spcBef>
-                <a:spcPts val="340"/>
-              </a:spcBef>
-              <a:spcAft>
-                <a:spcPts val="283"/>
-              </a:spcAft>
-            </a:pPr>
-            <a:r>
-              <a:rPr b="0" lang="en-US" sz="1100" spc="-1" strike="noStrike">
-                <a:solidFill>
-                  <a:srgbClr val="000000"/>
-                </a:solidFill>
-                <a:latin typeface="times new roman"/>
-                <a:ea typeface="Noto Sans CJK SC"/>
-              </a:rPr>
-              <a:t>[25] E. N. Sardinha, M. Munera, N. Zook, D. Western, and V. Ruiz Garate, “Diegetic graphical user interfaces and intuitive control of assistive robots via eye-gaze,” arXiv:2401.03944 [cs.RO], 2024.</a:t>
-            </a:r>
-            <a:endParaRPr b="0" lang="en-US" sz="1100" spc="-1" strike="noStrike">
-              <a:solidFill>
-                <a:srgbClr val="000000"/>
-              </a:solidFill>
-              <a:latin typeface="Arial"/>
-            </a:endParaRPr>
-          </a:p>
-          <a:p>
-            <a:pPr>
-              <a:lnSpc>
-                <a:spcPct val="100000"/>
-              </a:lnSpc>
-              <a:spcBef>
-                <a:spcPts val="340"/>
-              </a:spcBef>
-              <a:spcAft>
-                <a:spcPts val="283"/>
-              </a:spcAft>
-            </a:pPr>
-            <a:endParaRPr b="0" lang="en-US" sz="1100" spc="-1" strike="noStrike">
-              <a:solidFill>
-                <a:srgbClr val="000000"/>
-              </a:solidFill>
-              <a:latin typeface="Arial"/>
-            </a:endParaRPr>
-          </a:p>
-        </p:txBody>
-      </p:sp>
-      <p:sp>
-        <p:nvSpPr>
-          <p:cNvPr id="47" name=""/>
-          <p:cNvSpPr txBox="1"/>
-          <p:nvPr/>
-        </p:nvSpPr>
-        <p:spPr>
-          <a:xfrm>
-            <a:off x="8478000" y="4695840"/>
-            <a:ext cx="640800" cy="541800"/>
-          </a:xfrm>
-          <a:prstGeom prst="rect">
-            <a:avLst/>
-          </a:prstGeom>
-          <a:noFill/>
-          <a:ln w="0">
-            <a:noFill/>
-          </a:ln>
-        </p:spPr>
-        <p:txBody>
-          <a:bodyPr lIns="90000" rIns="90000" tIns="45000" bIns="45000" anchor="t">
-            <a:noAutofit/>
-          </a:bodyPr>
-          <a:p>
+            </a:pPr>
             <a:r>
               <a:rPr b="0" lang="en-IN" sz="1600" spc="-1" strike="noStrike">
                 <a:solidFill>
@@ -2881,7 +3672,7 @@
       </p:grpSpPr>
       <p:sp>
         <p:nvSpPr>
-          <p:cNvPr id="14" name="PlaceHolder 1"/>
+          <p:cNvPr id="22" name="PlaceHolder 1"/>
           <p:cNvSpPr>
             <a:spLocks noGrp="1"/>
           </p:cNvSpPr>
@@ -2892,7 +3683,7 @@
         <p:spPr>
           <a:xfrm>
             <a:off x="2055600" y="72720"/>
-            <a:ext cx="4649760" cy="672120"/>
+            <a:ext cx="4648320" cy="670680"/>
           </a:xfrm>
           <a:prstGeom prst="rect">
             <a:avLst/>
@@ -2924,7 +3715,37 @@
                 <a:latin typeface="Times New Roman"/>
                 <a:ea typeface="Times New Roman"/>
               </a:rPr>
-              <a:t>Agenda</a:t>
+              <a:t>A</a:t>
+            </a:r>
+            <a:r>
+              <a:rPr b="0" lang="en-IN" sz="3600" spc="-1" strike="noStrike">
+                <a:solidFill>
+                  <a:schemeClr val="dk1"/>
+                </a:solidFill>
+                <a:latin typeface="Times New Roman"/>
+                <a:ea typeface="Times New Roman"/>
+              </a:rPr>
+              <a:t>ge</a:t>
+            </a:r>
+            <a:r>
+              <a:rPr b="0" lang="en-IN" sz="3600" spc="-1" strike="noStrike">
+                <a:solidFill>
+                  <a:schemeClr val="dk1"/>
+                </a:solidFill>
+                <a:latin typeface="Times New Roman"/>
+                <a:ea typeface="Times New Roman"/>
+              </a:rPr>
+              <a:t>nd</a:t>
+            </a:r>
+            <a:r>
+              <a:rPr b="0" lang="en-IN" sz="3600" spc="-1" strike="noStrike">
+                <a:solidFill>
+                  <a:schemeClr val="dk1"/>
+                </a:solidFill>
+                <a:latin typeface="Times New Roman"/>
+                <a:ea typeface="Times New Roman"/>
+              </a:rPr>
+              <a:t>a</a:t>
             </a:r>
             <a:endParaRPr b="0" lang="en-US" sz="3600" spc="-1" strike="noStrike">
               <a:solidFill>
@@ -2937,7 +3758,7 @@
       </p:sp>
       <p:sp>
         <p:nvSpPr>
-          <p:cNvPr id="15" name="PlaceHolder 2"/>
+          <p:cNvPr id="23" name="PlaceHolder 2"/>
           <p:cNvSpPr>
             <a:spLocks noGrp="1"/>
           </p:cNvSpPr>
@@ -2948,7 +3769,7 @@
         <p:spPr>
           <a:xfrm>
             <a:off x="263520" y="957960"/>
-            <a:ext cx="8518320" cy="3225240"/>
+            <a:ext cx="8516880" cy="3223800"/>
           </a:xfrm>
           <a:prstGeom prst="rect">
             <a:avLst/>
@@ -3186,14 +4007,14 @@
       </p:sp>
       <p:sp>
         <p:nvSpPr>
-          <p:cNvPr id="16" name=""/>
-          <p:cNvSpPr txBox="1"/>
+          <p:cNvPr id="24" name=""/>
+          <p:cNvSpPr/>
           <p:nvPr/>
         </p:nvSpPr>
         <p:spPr>
           <a:xfrm>
-            <a:off x="8605440" y="4827240"/>
-            <a:ext cx="538560" cy="316440"/>
+            <a:off x="8458200" y="4827240"/>
+            <a:ext cx="684360" cy="315000"/>
           </a:xfrm>
           <a:prstGeom prst="rect">
             <a:avLst/>
@@ -3203,11 +4024,22 @@
             <a:noFill/>
           </a:ln>
         </p:spPr>
+        <p:style>
+          <a:lnRef idx="0"/>
+          <a:fillRef idx="0"/>
+          <a:effectRef idx="0"/>
+          <a:fontRef idx="minor"/>
+        </p:style>
         <p:txBody>
           <a:bodyPr lIns="90000" rIns="90000" tIns="45000" bIns="45000" anchor="t">
             <a:noAutofit/>
           </a:bodyPr>
           <a:p>
+            <a:pPr>
+              <a:lnSpc>
+                <a:spcPct val="100000"/>
+              </a:lnSpc>
+            </a:pPr>
             <a:r>
               <a:rPr b="0" lang="en-IN" sz="1600" spc="-1" strike="noStrike">
                 <a:solidFill>
@@ -3259,14 +4091,14 @@
       </p:grpSpPr>
       <p:sp>
         <p:nvSpPr>
-          <p:cNvPr id="17" name="Google Shape;38;p3"/>
+          <p:cNvPr id="25" name="Google Shape;38;p3"/>
           <p:cNvSpPr/>
           <p:nvPr/>
         </p:nvSpPr>
         <p:spPr>
           <a:xfrm>
             <a:off x="2055600" y="72720"/>
-            <a:ext cx="4649760" cy="672120"/>
+            <a:ext cx="4648320" cy="670680"/>
           </a:xfrm>
           <a:prstGeom prst="rect">
             <a:avLst/>
@@ -3316,7 +4148,7 @@
       </p:sp>
       <p:pic>
         <p:nvPicPr>
-          <p:cNvPr id="18" name="" descr=""/>
+          <p:cNvPr id="26" name="" descr=""/>
           <p:cNvPicPr/>
           <p:nvPr/>
         </p:nvPicPr>
@@ -3326,8 +4158,8 @@
         </p:blipFill>
         <p:spPr>
           <a:xfrm>
-            <a:off x="5715000" y="1143000"/>
-            <a:ext cx="3198600" cy="3336120"/>
+            <a:off x="6629400" y="2409840"/>
+            <a:ext cx="2072880" cy="2162160"/>
           </a:xfrm>
           <a:prstGeom prst="rect">
             <a:avLst/>
@@ -3339,14 +4171,14 @@
       </p:pic>
       <p:sp>
         <p:nvSpPr>
-          <p:cNvPr id="19" name=""/>
+          <p:cNvPr id="27" name=""/>
           <p:cNvSpPr/>
           <p:nvPr/>
         </p:nvSpPr>
         <p:spPr>
           <a:xfrm>
             <a:off x="457200" y="914400"/>
-            <a:ext cx="5256000" cy="3932640"/>
+            <a:ext cx="5254560" cy="3931200"/>
           </a:xfrm>
           <a:prstGeom prst="rect">
             <a:avLst/>
@@ -3389,7 +4221,8 @@
                 <a:solidFill>
                   <a:srgbClr val="000000"/>
                 </a:solidFill>
-                <a:latin typeface="times new roman "/>
+                <a:latin typeface="times new roman"/>
+                <a:ea typeface="DejaVu Sans"/>
               </a:rPr>
               <a:t>Screenless display technology delivers digital visuals without physical screens using AR, holography, and retinal projection.</a:t>
             </a:r>
@@ -3423,7 +4256,8 @@
                 <a:solidFill>
                   <a:srgbClr val="000000"/>
                 </a:solidFill>
-                <a:latin typeface="times new roman "/>
+                <a:latin typeface="times new roman"/>
+                <a:ea typeface="DejaVu Sans"/>
               </a:rPr>
               <a:t>It enables immersive, hands-free interaction, blending digital content with the physical world.</a:t>
             </a:r>
@@ -3457,7 +4291,8 @@
                 <a:solidFill>
                   <a:srgbClr val="000000"/>
                 </a:solidFill>
-                <a:latin typeface="times new roman "/>
+                <a:latin typeface="times new roman"/>
+                <a:ea typeface="DejaVu Sans"/>
               </a:rPr>
               <a:t>Key applications:</a:t>
             </a:r>
@@ -3491,7 +4326,8 @@
                 <a:solidFill>
                   <a:srgbClr val="000000"/>
                 </a:solidFill>
-                <a:latin typeface="times new roman "/>
+                <a:latin typeface="times new roman"/>
+                <a:ea typeface="DejaVu Sans"/>
               </a:rPr>
               <a:t>Healthcare – real-time data during surgery.</a:t>
             </a:r>
@@ -3525,7 +4361,8 @@
                 <a:solidFill>
                   <a:srgbClr val="000000"/>
                 </a:solidFill>
-                <a:latin typeface="times new roman "/>
+                <a:latin typeface="times new roman"/>
+                <a:ea typeface="DejaVu Sans"/>
               </a:rPr>
               <a:t>Education – 3D interactive learning.</a:t>
             </a:r>
@@ -3559,7 +4396,8 @@
                 <a:solidFill>
                   <a:srgbClr val="000000"/>
                 </a:solidFill>
-                <a:latin typeface="times new roman "/>
+                <a:latin typeface="times new roman"/>
+                <a:ea typeface="DejaVu Sans"/>
               </a:rPr>
               <a:t>Defense – AR-assisted mission data.</a:t>
             </a:r>
@@ -3593,7 +4431,8 @@
                 <a:solidFill>
                   <a:srgbClr val="000000"/>
                 </a:solidFill>
-                <a:latin typeface="times new roman "/>
+                <a:latin typeface="times new roman"/>
+                <a:ea typeface="DejaVu Sans"/>
               </a:rPr>
               <a:t>Entertainment &amp; Wearables – smart lenses, gaming.</a:t>
             </a:r>
@@ -3605,7 +4444,7 @@
             </a:endParaRPr>
           </a:p>
           <a:p>
-            <a:pPr marL="216000" indent="-216000">
+            <a:pPr>
               <a:lnSpc>
                 <a:spcPct val="100000"/>
               </a:lnSpc>
@@ -3615,22 +4454,7 @@
               <a:spcAft>
                 <a:spcPts val="709"/>
               </a:spcAft>
-              <a:buClr>
-                <a:srgbClr val="000000"/>
-              </a:buClr>
-              <a:buSzPct val="45000"/>
-              <a:buFont typeface="Wingdings" charset="2"/>
-              <a:buChar char=""/>
-            </a:pPr>
-            <a:r>
-              <a:rPr b="0" lang="en-US" sz="1500" spc="-1" strike="noStrike">
-                <a:solidFill>
-                  <a:srgbClr val="000000"/>
-                </a:solidFill>
-                <a:latin typeface="times new roman "/>
-              </a:rPr>
-              <a:t>It represents the future of digital interfaces, making it a highly relevant and transformative topic.</a:t>
-            </a:r>
+            </a:pPr>
             <a:endParaRPr b="0" lang="en-US" sz="1500" spc="-1" strike="noStrike">
               <a:solidFill>
                 <a:srgbClr val="000000"/>
@@ -3642,14 +4466,14 @@
       </p:sp>
       <p:sp>
         <p:nvSpPr>
-          <p:cNvPr id="20" name=""/>
-          <p:cNvSpPr txBox="1"/>
+          <p:cNvPr id="28" name=""/>
+          <p:cNvSpPr/>
           <p:nvPr/>
         </p:nvSpPr>
         <p:spPr>
           <a:xfrm>
-            <a:off x="8605440" y="4800600"/>
-            <a:ext cx="538560" cy="316440"/>
+            <a:off x="8458200" y="4800600"/>
+            <a:ext cx="684360" cy="315000"/>
           </a:xfrm>
           <a:prstGeom prst="rect">
             <a:avLst/>
@@ -3659,11 +4483,22 @@
             <a:noFill/>
           </a:ln>
         </p:spPr>
+        <p:style>
+          <a:lnRef idx="0"/>
+          <a:fillRef idx="0"/>
+          <a:effectRef idx="0"/>
+          <a:fontRef idx="minor"/>
+        </p:style>
         <p:txBody>
           <a:bodyPr lIns="90000" rIns="90000" tIns="45000" bIns="45000" anchor="t">
             <a:noAutofit/>
           </a:bodyPr>
           <a:p>
+            <a:pPr>
+              <a:lnSpc>
+                <a:spcPct val="100000"/>
+              </a:lnSpc>
+            </a:pPr>
             <a:r>
               <a:rPr b="0" lang="en-IN" sz="1600" spc="-1" strike="noStrike">
                 <a:solidFill>
@@ -3683,6 +4518,29 @@
           </a:p>
         </p:txBody>
       </p:sp>
+      <p:pic>
+        <p:nvPicPr>
+          <p:cNvPr id="29" name="" descr=""/>
+          <p:cNvPicPr/>
+          <p:nvPr/>
+        </p:nvPicPr>
+        <p:blipFill>
+          <a:blip r:embed="rId2"/>
+          <a:stretch/>
+        </p:blipFill>
+        <p:spPr>
+          <a:xfrm>
+            <a:off x="6172560" y="685800"/>
+            <a:ext cx="2742840" cy="1600200"/>
+          </a:xfrm>
+          <a:prstGeom prst="rect">
+            <a:avLst/>
+          </a:prstGeom>
+          <a:ln w="0">
+            <a:noFill/>
+          </a:ln>
+        </p:spPr>
+      </p:pic>
     </p:spTree>
   </p:cSld>
   <mc:AlternateContent>
@@ -3715,14 +4573,14 @@
       </p:grpSpPr>
       <p:sp>
         <p:nvSpPr>
-          <p:cNvPr id="21" name="Google Shape;44;p4"/>
+          <p:cNvPr id="30" name="Google Shape;44;p4"/>
           <p:cNvSpPr/>
           <p:nvPr/>
         </p:nvSpPr>
         <p:spPr>
           <a:xfrm>
             <a:off x="2055600" y="72720"/>
-            <a:ext cx="4649760" cy="672120"/>
+            <a:ext cx="4648320" cy="670680"/>
           </a:xfrm>
           <a:prstGeom prst="rect">
             <a:avLst/>
@@ -3772,13 +4630,13 @@
       </p:sp>
       <p:graphicFrame>
         <p:nvGraphicFramePr>
-          <p:cNvPr id="22" name="Google Shape;45;p4"/>
+          <p:cNvPr id="31" name="Google Shape;45;p4"/>
           <p:cNvGraphicFramePr/>
           <p:nvPr/>
         </p:nvGraphicFramePr>
         <p:xfrm>
           <a:off x="356760" y="940680"/>
-          <a:ext cx="8451720" cy="3783240"/>
+          <a:ext cx="8451720" cy="3970800"/>
         </p:xfrm>
         <a:graphic>
           <a:graphicData uri="http://schemas.openxmlformats.org/drawingml/2006/table">
@@ -3790,7 +4648,7 @@
                 <a:gridCol w="2622240"/>
                 <a:gridCol w="3125520"/>
               </a:tblGrid>
-              <a:tr h="348840">
+              <a:tr h="365760">
                 <a:tc>
                   <a:txBody>
                     <a:bodyPr anchor="t">
@@ -4040,7 +4898,7 @@
                   </a:tcPr>
                 </a:tc>
               </a:tr>
-              <a:tr h="693360">
+              <a:tr h="727560">
                 <a:tc>
                   <a:txBody>
                     <a:bodyPr anchor="t">
@@ -4118,7 +4976,7 @@
                           <a:latin typeface="Times New Roman"/>
                           <a:ea typeface="Times New Roman"/>
                         </a:rPr>
-                        <a:t>Holographic Video Communications – SI</a:t>
+                        <a:t>Parimal Bhosale et al.  Screenless Display</a:t>
                       </a:r>
                       <a:endParaRPr b="0" lang="en-US" sz="1400" spc="-1" strike="noStrike">
                         <a:solidFill>
@@ -4169,6 +5027,19 @@
                           <a:spcPct val="100000"/>
                         </a:lnSpc>
                       </a:pPr>
+                      <a:endParaRPr b="0" lang="en-US" sz="1400" spc="-1" strike="noStrike">
+                        <a:solidFill>
+                          <a:srgbClr val="000000"/>
+                        </a:solidFill>
+                        <a:latin typeface="Arial"/>
+                      </a:endParaRPr>
+                    </a:p>
+                    <a:p>
+                      <a:pPr>
+                        <a:lnSpc>
+                          <a:spcPct val="100000"/>
+                        </a:lnSpc>
+                      </a:pPr>
                       <a:r>
                         <a:rPr b="0" lang="en-US" sz="1400" spc="-1" strike="noStrike">
                           <a:solidFill>
@@ -4177,7 +5048,7 @@
                           <a:latin typeface="Times New Roman"/>
                           <a:ea typeface="Times New Roman"/>
                         </a:rPr>
-                        <a:t>IEEE Wireless Communications, Vol. 32, No. 2, 2025 (In press)</a:t>
+                        <a:t>IJSRCSEIT, Vol. 8, Issue 1, 2025</a:t>
                       </a:r>
                       <a:endParaRPr b="0" lang="en-US" sz="1400" spc="-1" strike="noStrike">
                         <a:solidFill>
@@ -4228,6 +5099,19 @@
                           <a:spcPct val="100000"/>
                         </a:lnSpc>
                       </a:pPr>
+                      <a:endParaRPr b="0" lang="en-US" sz="1400" spc="-1" strike="noStrike">
+                        <a:solidFill>
+                          <a:srgbClr val="000000"/>
+                        </a:solidFill>
+                        <a:latin typeface="Arial"/>
+                      </a:endParaRPr>
+                    </a:p>
+                    <a:p>
+                      <a:pPr>
+                        <a:lnSpc>
+                          <a:spcPct val="100000"/>
+                        </a:lnSpc>
+                      </a:pPr>
                       <a:r>
                         <a:rPr b="0" lang="en-US" sz="1400" spc="-1" strike="noStrike">
                           <a:solidFill>
@@ -4236,7 +5120,7 @@
                           <a:latin typeface="Times New Roman"/>
                           <a:ea typeface="Times New Roman"/>
                         </a:rPr>
-                        <a:t>Explores technical advancements and system requirements for wireless holographic video systems.</a:t>
+                        <a:t>Surveys visual-image, retinal-projection.</a:t>
                       </a:r>
                       <a:endParaRPr b="0" lang="en-US" sz="1400" spc="-1" strike="noStrike">
                         <a:solidFill>
@@ -4277,7 +5161,7 @@
                   </a:tcPr>
                 </a:tc>
               </a:tr>
-              <a:tr h="673560">
+              <a:tr h="714960">
                 <a:tc>
                   <a:txBody>
                     <a:bodyPr anchor="t">
@@ -4514,7 +5398,7 @@
                   </a:tcPr>
                 </a:tc>
               </a:tr>
-              <a:tr h="696960">
+              <a:tr h="731160">
                 <a:tc>
                   <a:txBody>
                     <a:bodyPr anchor="t">
@@ -4751,7 +5635,7 @@
                   </a:tcPr>
                 </a:tc>
               </a:tr>
-              <a:tr h="651240">
+              <a:tr h="714960">
                 <a:tc>
                   <a:txBody>
                     <a:bodyPr anchor="t">
@@ -4988,7 +5872,7 @@
                   </a:tcPr>
                 </a:tc>
               </a:tr>
-              <a:tr h="354240">
+              <a:tr h="716400">
                 <a:tc>
                   <a:txBody>
                     <a:bodyPr anchor="t">
@@ -5231,14 +6115,14 @@
       </p:graphicFrame>
       <p:sp>
         <p:nvSpPr>
-          <p:cNvPr id="23" name=""/>
-          <p:cNvSpPr txBox="1"/>
+          <p:cNvPr id="32" name=""/>
+          <p:cNvSpPr/>
           <p:nvPr/>
         </p:nvSpPr>
         <p:spPr>
           <a:xfrm>
-            <a:off x="8605440" y="4827240"/>
-            <a:ext cx="538560" cy="316440"/>
+            <a:off x="8458200" y="4827240"/>
+            <a:ext cx="684360" cy="315000"/>
           </a:xfrm>
           <a:prstGeom prst="rect">
             <a:avLst/>
@@ -5248,11 +6132,22 @@
             <a:noFill/>
           </a:ln>
         </p:spPr>
+        <p:style>
+          <a:lnRef idx="0"/>
+          <a:fillRef idx="0"/>
+          <a:effectRef idx="0"/>
+          <a:fontRef idx="minor"/>
+        </p:style>
         <p:txBody>
           <a:bodyPr lIns="90000" rIns="90000" tIns="45000" bIns="45000" anchor="t">
             <a:noAutofit/>
           </a:bodyPr>
           <a:p>
+            <a:pPr>
+              <a:lnSpc>
+                <a:spcPct val="100000"/>
+              </a:lnSpc>
+            </a:pPr>
             <a:r>
               <a:rPr b="0" lang="en-IN" sz="1600" spc="-1" strike="noStrike">
                 <a:solidFill>
@@ -5304,7 +6199,7 @@
       </p:grpSpPr>
       <p:graphicFrame>
         <p:nvGraphicFramePr>
-          <p:cNvPr id="24" name="Google Shape;45;p 1"/>
+          <p:cNvPr id="33" name="Google Shape;45;p 1"/>
           <p:cNvGraphicFramePr/>
           <p:nvPr/>
         </p:nvGraphicFramePr>
@@ -6598,7 +7493,7 @@
                           <a:latin typeface="Times New Roman"/>
                           <a:ea typeface="Times New Roman"/>
                         </a:rPr>
-                        <a:t>Parimal Bhosale et al. – Screenless Display: A Review</a:t>
+                        <a:t>Holographic Video Communications – SI</a:t>
                       </a:r>
                       <a:endParaRPr b="0" lang="en-US" sz="1400" spc="-1" strike="noStrike">
                         <a:solidFill>
@@ -6657,7 +7552,7 @@
                           <a:latin typeface="Times New Roman"/>
                           <a:ea typeface="Times New Roman"/>
                         </a:rPr>
-                        <a:t>IJSRCSEIT, Vol. 8, Issue 1, 2022</a:t>
+                        <a:t>IEEE Wireless Communications, Vol. 32, No. 2, 2021</a:t>
                       </a:r>
                       <a:endParaRPr b="0" lang="en-US" sz="1400" spc="-1" strike="noStrike">
                         <a:solidFill>
@@ -6716,7 +7611,7 @@
                           <a:latin typeface="Times New Roman"/>
                           <a:ea typeface="Times New Roman"/>
                         </a:rPr>
-                        <a:t>Surveys visual-image, retinal-projection, and synaptic-based screenless systems.</a:t>
+                        <a:t>Explores technical advancements and system requirements for wireless holographic video systems.</a:t>
                       </a:r>
                       <a:endParaRPr b="0" lang="en-US" sz="1400" spc="-1" strike="noStrike">
                         <a:solidFill>
@@ -6763,14 +7658,14 @@
       </p:graphicFrame>
       <p:sp>
         <p:nvSpPr>
-          <p:cNvPr id="25" name=""/>
-          <p:cNvSpPr txBox="1"/>
+          <p:cNvPr id="34" name=""/>
+          <p:cNvSpPr/>
           <p:nvPr/>
         </p:nvSpPr>
         <p:spPr>
           <a:xfrm>
-            <a:off x="8605440" y="4800240"/>
-            <a:ext cx="538560" cy="316440"/>
+            <a:off x="8458200" y="4800240"/>
+            <a:ext cx="684360" cy="315000"/>
           </a:xfrm>
           <a:prstGeom prst="rect">
             <a:avLst/>
@@ -6780,11 +7675,22 @@
             <a:noFill/>
           </a:ln>
         </p:spPr>
+        <p:style>
+          <a:lnRef idx="0"/>
+          <a:fillRef idx="0"/>
+          <a:effectRef idx="0"/>
+          <a:fontRef idx="minor"/>
+        </p:style>
         <p:txBody>
           <a:bodyPr lIns="90000" rIns="90000" tIns="45000" bIns="45000" anchor="t">
             <a:noAutofit/>
           </a:bodyPr>
           <a:p>
+            <a:pPr>
+              <a:lnSpc>
+                <a:spcPct val="100000"/>
+              </a:lnSpc>
+            </a:pPr>
             <a:r>
               <a:rPr b="0" lang="en-IN" sz="1600" spc="-1" strike="noStrike">
                 <a:solidFill>
@@ -6836,7 +7742,7 @@
       </p:grpSpPr>
       <p:sp>
         <p:nvSpPr>
-          <p:cNvPr id="26" name="PlaceHolder 1"/>
+          <p:cNvPr id="35" name="PlaceHolder 1"/>
           <p:cNvSpPr>
             <a:spLocks noGrp="1"/>
           </p:cNvSpPr>
@@ -6847,7 +7753,7 @@
         <p:spPr>
           <a:xfrm>
             <a:off x="1917000" y="176760"/>
-            <a:ext cx="6920280" cy="615240"/>
+            <a:ext cx="6918840" cy="613800"/>
           </a:xfrm>
           <a:prstGeom prst="rect">
             <a:avLst/>
@@ -6879,7 +7785,7 @@
                 <a:latin typeface="Times New Roman"/>
                 <a:ea typeface="Times New Roman"/>
               </a:rPr>
-              <a:t>Summary of </a:t>
+              <a:t>S</a:t>
             </a:r>
             <a:r>
               <a:rPr b="0" lang="en-IN" sz="3600" spc="-1" strike="noStrike">
@@ -6889,7 +7795,7 @@
                 <a:latin typeface="Times New Roman"/>
                 <a:ea typeface="Times New Roman"/>
               </a:rPr>
-              <a:t>the literature </a:t>
+              <a:t>u</a:t>
             </a:r>
             <a:r>
               <a:rPr b="0" lang="en-IN" sz="3600" spc="-1" strike="noStrike">
@@ -6899,7 +7805,147 @@
                 <a:latin typeface="Times New Roman"/>
                 <a:ea typeface="Times New Roman"/>
               </a:rPr>
-              <a:t>survey</a:t>
+              <a:t>m</a:t>
+            </a:r>
+            <a:r>
+              <a:rPr b="0" lang="en-IN" sz="3600" spc="-1" strike="noStrike">
+                <a:solidFill>
+                  <a:schemeClr val="dk1"/>
+                </a:solidFill>
+                <a:latin typeface="Times New Roman"/>
+                <a:ea typeface="Times New Roman"/>
+              </a:rPr>
+              <a:t>m</a:t>
+            </a:r>
+            <a:r>
+              <a:rPr b="0" lang="en-IN" sz="3600" spc="-1" strike="noStrike">
+                <a:solidFill>
+                  <a:schemeClr val="dk1"/>
+                </a:solidFill>
+                <a:latin typeface="Times New Roman"/>
+                <a:ea typeface="Times New Roman"/>
+              </a:rPr>
+              <a:t>ar</a:t>
+            </a:r>
+            <a:r>
+              <a:rPr b="0" lang="en-IN" sz="3600" spc="-1" strike="noStrike">
+                <a:solidFill>
+                  <a:schemeClr val="dk1"/>
+                </a:solidFill>
+                <a:latin typeface="Times New Roman"/>
+                <a:ea typeface="Times New Roman"/>
+              </a:rPr>
+              <a:t>y </a:t>
+            </a:r>
+            <a:r>
+              <a:rPr b="0" lang="en-IN" sz="3600" spc="-1" strike="noStrike">
+                <a:solidFill>
+                  <a:schemeClr val="dk1"/>
+                </a:solidFill>
+                <a:latin typeface="Times New Roman"/>
+                <a:ea typeface="Times New Roman"/>
+              </a:rPr>
+              <a:t>of </a:t>
+            </a:r>
+            <a:r>
+              <a:rPr b="0" lang="en-IN" sz="3600" spc="-1" strike="noStrike">
+                <a:solidFill>
+                  <a:schemeClr val="dk1"/>
+                </a:solidFill>
+                <a:latin typeface="Times New Roman"/>
+                <a:ea typeface="Times New Roman"/>
+              </a:rPr>
+              <a:t>th</a:t>
+            </a:r>
+            <a:r>
+              <a:rPr b="0" lang="en-IN" sz="3600" spc="-1" strike="noStrike">
+                <a:solidFill>
+                  <a:schemeClr val="dk1"/>
+                </a:solidFill>
+                <a:latin typeface="Times New Roman"/>
+                <a:ea typeface="Times New Roman"/>
+              </a:rPr>
+              <a:t>e </a:t>
+            </a:r>
+            <a:r>
+              <a:rPr b="0" lang="en-IN" sz="3600" spc="-1" strike="noStrike">
+                <a:solidFill>
+                  <a:schemeClr val="dk1"/>
+                </a:solidFill>
+                <a:latin typeface="Times New Roman"/>
+                <a:ea typeface="Times New Roman"/>
+              </a:rPr>
+              <a:t>lit</a:t>
+            </a:r>
+            <a:r>
+              <a:rPr b="0" lang="en-IN" sz="3600" spc="-1" strike="noStrike">
+                <a:solidFill>
+                  <a:schemeClr val="dk1"/>
+                </a:solidFill>
+                <a:latin typeface="Times New Roman"/>
+                <a:ea typeface="Times New Roman"/>
+              </a:rPr>
+              <a:t>er</a:t>
+            </a:r>
+            <a:r>
+              <a:rPr b="0" lang="en-IN" sz="3600" spc="-1" strike="noStrike">
+                <a:solidFill>
+                  <a:schemeClr val="dk1"/>
+                </a:solidFill>
+                <a:latin typeface="Times New Roman"/>
+                <a:ea typeface="Times New Roman"/>
+              </a:rPr>
+              <a:t>at</a:t>
+            </a:r>
+            <a:r>
+              <a:rPr b="0" lang="en-IN" sz="3600" spc="-1" strike="noStrike">
+                <a:solidFill>
+                  <a:schemeClr val="dk1"/>
+                </a:solidFill>
+                <a:latin typeface="Times New Roman"/>
+                <a:ea typeface="Times New Roman"/>
+              </a:rPr>
+              <a:t>ur</a:t>
+            </a:r>
+            <a:r>
+              <a:rPr b="0" lang="en-IN" sz="3600" spc="-1" strike="noStrike">
+                <a:solidFill>
+                  <a:schemeClr val="dk1"/>
+                </a:solidFill>
+                <a:latin typeface="Times New Roman"/>
+                <a:ea typeface="Times New Roman"/>
+              </a:rPr>
+              <a:t>e </a:t>
+            </a:r>
+            <a:r>
+              <a:rPr b="0" lang="en-IN" sz="3600" spc="-1" strike="noStrike">
+                <a:solidFill>
+                  <a:schemeClr val="dk1"/>
+                </a:solidFill>
+                <a:latin typeface="Times New Roman"/>
+                <a:ea typeface="Times New Roman"/>
+              </a:rPr>
+              <a:t>su</a:t>
+            </a:r>
+            <a:r>
+              <a:rPr b="0" lang="en-IN" sz="3600" spc="-1" strike="noStrike">
+                <a:solidFill>
+                  <a:schemeClr val="dk1"/>
+                </a:solidFill>
+                <a:latin typeface="Times New Roman"/>
+                <a:ea typeface="Times New Roman"/>
+              </a:rPr>
+              <a:t>rv</a:t>
+            </a:r>
+            <a:r>
+              <a:rPr b="0" lang="en-IN" sz="3600" spc="-1" strike="noStrike">
+                <a:solidFill>
+                  <a:schemeClr val="dk1"/>
+                </a:solidFill>
+                <a:latin typeface="Times New Roman"/>
+                <a:ea typeface="Times New Roman"/>
+              </a:rPr>
+              <a:t>ey</a:t>
             </a:r>
             <a:endParaRPr b="0" lang="en-US" sz="3600" spc="-1" strike="noStrike">
               <a:solidFill>
@@ -6912,14 +7958,14 @@
       </p:sp>
       <p:sp>
         <p:nvSpPr>
-          <p:cNvPr id="27" name="Google Shape;53;p5"/>
+          <p:cNvPr id="36" name="Google Shape;53;p5"/>
           <p:cNvSpPr/>
           <p:nvPr/>
         </p:nvSpPr>
         <p:spPr>
           <a:xfrm>
             <a:off x="311760" y="1340640"/>
-            <a:ext cx="8518320" cy="3110040"/>
+            <a:ext cx="8516880" cy="3108600"/>
           </a:xfrm>
           <a:prstGeom prst="rect">
             <a:avLst/>
@@ -6967,1475 +8013,16 @@
           </a:p>
         </p:txBody>
       </p:sp>
-      <p:graphicFrame>
-        <p:nvGraphicFramePr>
-          <p:cNvPr id="28" name="Google Shape;45;p 2"/>
-          <p:cNvGraphicFramePr/>
-          <p:nvPr/>
-        </p:nvGraphicFramePr>
-        <p:xfrm>
-          <a:off x="357120" y="941040"/>
-          <a:ext cx="8557920" cy="3892320"/>
-        </p:xfrm>
-        <a:graphic>
-          <a:graphicData uri="http://schemas.openxmlformats.org/drawingml/2006/table">
-            <a:tbl>
-              <a:tblPr/>
-              <a:tblGrid>
-                <a:gridCol w="674280"/>
-                <a:gridCol w="2063880"/>
-                <a:gridCol w="2655000"/>
-                <a:gridCol w="3165120"/>
-              </a:tblGrid>
-              <a:tr h="288360">
-                <a:tc>
-                  <a:txBody>
-                    <a:bodyPr anchor="t">
-                      <a:noAutofit/>
-                    </a:bodyPr>
-                    <a:p>
-                      <a:pPr>
-                        <a:lnSpc>
-                          <a:spcPct val="100000"/>
-                        </a:lnSpc>
-                        <a:tabLst>
-                          <a:tab algn="l" pos="0"/>
-                        </a:tabLst>
-                      </a:pPr>
-                      <a:r>
-                        <a:rPr b="1" lang="en-IN" sz="1400" spc="-1" strike="noStrike">
-                          <a:solidFill>
-                            <a:schemeClr val="dk1"/>
-                          </a:solidFill>
-                          <a:latin typeface="Times New Roman"/>
-                          <a:ea typeface="Times New Roman"/>
-                        </a:rPr>
-                        <a:t>Sl No</a:t>
-                      </a:r>
-                      <a:endParaRPr b="0" lang="en-US" sz="1400" spc="-1" strike="noStrike">
-                        <a:solidFill>
-                          <a:srgbClr val="000000"/>
-                        </a:solidFill>
-                        <a:latin typeface="Arial"/>
-                      </a:endParaRPr>
-                    </a:p>
-                  </a:txBody>
-                  <a:tcPr anchor="t" marL="91440" marR="91440">
-                    <a:lnL w="12240">
-                      <a:solidFill>
-                        <a:srgbClr val="ffffff"/>
-                      </a:solidFill>
-                      <a:prstDash val="solid"/>
-                    </a:lnL>
-                    <a:lnR w="12240">
-                      <a:solidFill>
-                        <a:srgbClr val="ffffff"/>
-                      </a:solidFill>
-                      <a:prstDash val="solid"/>
-                    </a:lnR>
-                    <a:lnT w="12240">
-                      <a:solidFill>
-                        <a:srgbClr val="ffffff"/>
-                      </a:solidFill>
-                      <a:prstDash val="solid"/>
-                    </a:lnT>
-                    <a:lnB w="38160">
-                      <a:solidFill>
-                        <a:srgbClr val="ffffff"/>
-                      </a:solidFill>
-                      <a:prstDash val="solid"/>
-                    </a:lnB>
-                    <a:solidFill>
-                      <a:srgbClr val="d6d6d6"/>
-                    </a:solidFill>
-                  </a:tcPr>
-                </a:tc>
-                <a:tc>
-                  <a:txBody>
-                    <a:bodyPr anchor="t">
-                      <a:noAutofit/>
-                    </a:bodyPr>
-                    <a:p>
-                      <a:pPr>
-                        <a:lnSpc>
-                          <a:spcPct val="100000"/>
-                        </a:lnSpc>
-                        <a:tabLst>
-                          <a:tab algn="l" pos="0"/>
-                        </a:tabLst>
-                      </a:pPr>
-                      <a:r>
-                        <a:rPr b="1" lang="en-IN" sz="1400" spc="-1" strike="noStrike">
-                          <a:solidFill>
-                            <a:schemeClr val="dk1"/>
-                          </a:solidFill>
-                          <a:latin typeface="Times New Roman"/>
-                          <a:ea typeface="Times New Roman"/>
-                        </a:rPr>
-                        <a:t>Author (s) &amp; Paper title</a:t>
-                      </a:r>
-                      <a:endParaRPr b="0" lang="en-US" sz="1400" spc="-1" strike="noStrike">
-                        <a:solidFill>
-                          <a:srgbClr val="000000"/>
-                        </a:solidFill>
-                        <a:latin typeface="Arial"/>
-                      </a:endParaRPr>
-                    </a:p>
-                  </a:txBody>
-                  <a:tcPr anchor="t" marL="91440" marR="91440">
-                    <a:lnL w="12240">
-                      <a:solidFill>
-                        <a:srgbClr val="ffffff"/>
-                      </a:solidFill>
-                      <a:prstDash val="solid"/>
-                    </a:lnL>
-                    <a:lnR w="12240">
-                      <a:solidFill>
-                        <a:srgbClr val="ffffff"/>
-                      </a:solidFill>
-                      <a:prstDash val="solid"/>
-                    </a:lnR>
-                    <a:lnT w="12240">
-                      <a:solidFill>
-                        <a:srgbClr val="ffffff"/>
-                      </a:solidFill>
-                      <a:prstDash val="solid"/>
-                    </a:lnT>
-                    <a:lnB w="38160">
-                      <a:solidFill>
-                        <a:srgbClr val="ffffff"/>
-                      </a:solidFill>
-                      <a:prstDash val="solid"/>
-                    </a:lnB>
-                    <a:solidFill>
-                      <a:srgbClr val="d6d6d6"/>
-                    </a:solidFill>
-                  </a:tcPr>
-                </a:tc>
-                <a:tc>
-                  <a:txBody>
-                    <a:bodyPr anchor="t">
-                      <a:noAutofit/>
-                    </a:bodyPr>
-                    <a:p>
-                      <a:pPr>
-                        <a:lnSpc>
-                          <a:spcPct val="100000"/>
-                        </a:lnSpc>
-                        <a:tabLst>
-                          <a:tab algn="l" pos="0"/>
-                        </a:tabLst>
-                      </a:pPr>
-                      <a:r>
-                        <a:rPr b="1" lang="en-IN" sz="1400" spc="-1" strike="noStrike">
-                          <a:solidFill>
-                            <a:schemeClr val="dk1"/>
-                          </a:solidFill>
-                          <a:latin typeface="Times New Roman"/>
-                          <a:ea typeface="Times New Roman"/>
-                        </a:rPr>
-                        <a:t>Pros</a:t>
-                      </a:r>
-                      <a:endParaRPr b="0" lang="en-US" sz="1400" spc="-1" strike="noStrike">
-                        <a:solidFill>
-                          <a:srgbClr val="000000"/>
-                        </a:solidFill>
-                        <a:latin typeface="Arial"/>
-                      </a:endParaRPr>
-                    </a:p>
-                  </a:txBody>
-                  <a:tcPr anchor="t" marL="91440" marR="91440">
-                    <a:lnL w="12240">
-                      <a:solidFill>
-                        <a:srgbClr val="ffffff"/>
-                      </a:solidFill>
-                      <a:prstDash val="solid"/>
-                    </a:lnL>
-                    <a:lnR w="12240">
-                      <a:solidFill>
-                        <a:srgbClr val="ffffff"/>
-                      </a:solidFill>
-                      <a:prstDash val="solid"/>
-                    </a:lnR>
-                    <a:lnT w="12240">
-                      <a:solidFill>
-                        <a:srgbClr val="ffffff"/>
-                      </a:solidFill>
-                      <a:prstDash val="solid"/>
-                    </a:lnT>
-                    <a:lnB w="38160">
-                      <a:solidFill>
-                        <a:srgbClr val="ffffff"/>
-                      </a:solidFill>
-                      <a:prstDash val="solid"/>
-                    </a:lnB>
-                    <a:solidFill>
-                      <a:srgbClr val="d6d6d6"/>
-                    </a:solidFill>
-                  </a:tcPr>
-                </a:tc>
-                <a:tc>
-                  <a:txBody>
-                    <a:bodyPr anchor="t">
-                      <a:noAutofit/>
-                    </a:bodyPr>
-                    <a:p>
-                      <a:pPr>
-                        <a:lnSpc>
-                          <a:spcPct val="100000"/>
-                        </a:lnSpc>
-                        <a:tabLst>
-                          <a:tab algn="l" pos="0"/>
-                        </a:tabLst>
-                      </a:pPr>
-                      <a:r>
-                        <a:rPr b="1" lang="en-IN" sz="1400" spc="-1" strike="noStrike">
-                          <a:solidFill>
-                            <a:schemeClr val="dk1"/>
-                          </a:solidFill>
-                          <a:latin typeface="Times New Roman"/>
-                          <a:ea typeface="Times New Roman"/>
-                        </a:rPr>
-                        <a:t>Cons</a:t>
-                      </a:r>
-                      <a:endParaRPr b="0" lang="en-US" sz="1400" spc="-1" strike="noStrike">
-                        <a:solidFill>
-                          <a:srgbClr val="000000"/>
-                        </a:solidFill>
-                        <a:latin typeface="Arial"/>
-                      </a:endParaRPr>
-                    </a:p>
-                  </a:txBody>
-                  <a:tcPr anchor="t" marL="91440" marR="91440">
-                    <a:lnL w="12240">
-                      <a:solidFill>
-                        <a:srgbClr val="ffffff"/>
-                      </a:solidFill>
-                      <a:prstDash val="solid"/>
-                    </a:lnL>
-                    <a:lnR w="12240">
-                      <a:solidFill>
-                        <a:srgbClr val="ffffff"/>
-                      </a:solidFill>
-                      <a:prstDash val="solid"/>
-                    </a:lnR>
-                    <a:lnT w="12240">
-                      <a:solidFill>
-                        <a:srgbClr val="ffffff"/>
-                      </a:solidFill>
-                      <a:prstDash val="solid"/>
-                    </a:lnT>
-                    <a:lnB w="38160">
-                      <a:solidFill>
-                        <a:srgbClr val="ffffff"/>
-                      </a:solidFill>
-                      <a:prstDash val="solid"/>
-                    </a:lnB>
-                    <a:solidFill>
-                      <a:srgbClr val="d6d6d6"/>
-                    </a:solidFill>
-                  </a:tcPr>
-                </a:tc>
-              </a:tr>
-              <a:tr h="681480">
-                <a:tc>
-                  <a:txBody>
-                    <a:bodyPr anchor="t">
-                      <a:noAutofit/>
-                    </a:bodyPr>
-                    <a:p>
-                      <a:pPr>
-                        <a:lnSpc>
-                          <a:spcPct val="100000"/>
-                        </a:lnSpc>
-                      </a:pPr>
-                      <a:r>
-                        <a:rPr b="0" lang="en-US" sz="1400" spc="-1" strike="noStrike">
-                          <a:solidFill>
-                            <a:schemeClr val="dk1"/>
-                          </a:solidFill>
-                          <a:latin typeface="Times New Roman"/>
-                        </a:rPr>
-                        <a:t>1</a:t>
-                      </a:r>
-                      <a:endParaRPr b="0" lang="en-US" sz="1400" spc="-1" strike="noStrike">
-                        <a:solidFill>
-                          <a:srgbClr val="000000"/>
-                        </a:solidFill>
-                        <a:latin typeface="Arial"/>
-                      </a:endParaRPr>
-                    </a:p>
-                  </a:txBody>
-                  <a:tcPr anchor="t" marL="91440" marR="91440">
-                    <a:lnL w="12240">
-                      <a:solidFill>
-                        <a:srgbClr val="ffffff"/>
-                      </a:solidFill>
-                      <a:prstDash val="solid"/>
-                    </a:lnL>
-                    <a:lnR w="12240">
-                      <a:solidFill>
-                        <a:srgbClr val="ffffff"/>
-                      </a:solidFill>
-                      <a:prstDash val="solid"/>
-                    </a:lnR>
-                    <a:lnT w="12240">
-                      <a:solidFill>
-                        <a:srgbClr val="ffffff"/>
-                      </a:solidFill>
-                      <a:prstDash val="solid"/>
-                    </a:lnT>
-                    <a:lnB w="12240">
-                      <a:solidFill>
-                        <a:srgbClr val="ffffff"/>
-                      </a:solidFill>
-                      <a:prstDash val="solid"/>
-                    </a:lnB>
-                    <a:solidFill>
-                      <a:srgbClr val="f2f2f2"/>
-                    </a:solidFill>
-                  </a:tcPr>
-                </a:tc>
-                <a:tc>
-                  <a:txBody>
-                    <a:bodyPr anchor="t">
-                      <a:noAutofit/>
-                    </a:bodyPr>
-                    <a:p>
-                      <a:pPr>
-                        <a:lnSpc>
-                          <a:spcPct val="100000"/>
-                        </a:lnSpc>
-                      </a:pPr>
-                      <a:r>
-                        <a:rPr b="0" lang="en-US" sz="1400" spc="-1" strike="noStrike">
-                          <a:solidFill>
-                            <a:schemeClr val="dk1"/>
-                          </a:solidFill>
-                          <a:latin typeface="Times New Roman"/>
-                          <a:ea typeface="Times New Roman"/>
-                        </a:rPr>
-                        <a:t>Holographic Video Communications – SI</a:t>
-                      </a:r>
-                      <a:endParaRPr b="0" lang="en-US" sz="1400" spc="-1" strike="noStrike">
-                        <a:solidFill>
-                          <a:srgbClr val="000000"/>
-                        </a:solidFill>
-                        <a:latin typeface="Arial"/>
-                      </a:endParaRPr>
-                    </a:p>
-                  </a:txBody>
-                  <a:tcPr anchor="t" marL="91440" marR="91440">
-                    <a:lnL w="12240">
-                      <a:solidFill>
-                        <a:srgbClr val="ffffff"/>
-                      </a:solidFill>
-                      <a:prstDash val="solid"/>
-                    </a:lnL>
-                    <a:lnR w="12240">
-                      <a:solidFill>
-                        <a:srgbClr val="ffffff"/>
-                      </a:solidFill>
-                      <a:prstDash val="solid"/>
-                    </a:lnR>
-                    <a:lnT w="12240">
-                      <a:solidFill>
-                        <a:srgbClr val="ffffff"/>
-                      </a:solidFill>
-                      <a:prstDash val="solid"/>
-                    </a:lnT>
-                    <a:lnB w="12240">
-                      <a:solidFill>
-                        <a:srgbClr val="ffffff"/>
-                      </a:solidFill>
-                      <a:prstDash val="solid"/>
-                    </a:lnB>
-                    <a:solidFill>
-                      <a:srgbClr val="f2f2f2"/>
-                    </a:solidFill>
-                  </a:tcPr>
-                </a:tc>
-                <a:tc>
-                  <a:txBody>
-                    <a:bodyPr anchor="t">
-                      <a:noAutofit/>
-                    </a:bodyPr>
-                    <a:p>
-                      <a:pPr>
-                        <a:lnSpc>
-                          <a:spcPct val="100000"/>
-                        </a:lnSpc>
-                      </a:pPr>
-                      <a:r>
-                        <a:rPr b="0" lang="en-US" sz="1400" spc="-1" strike="noStrike">
-                          <a:solidFill>
-                            <a:schemeClr val="dk1"/>
-                          </a:solidFill>
-                          <a:latin typeface="Times New Roman"/>
-                          <a:ea typeface="Times New Roman"/>
-                        </a:rPr>
-                        <a:t>Covers state-of-the-art wireless holographic systems; focuses on end-to-end system design.</a:t>
-                      </a:r>
-                      <a:endParaRPr b="0" lang="en-US" sz="1400" spc="-1" strike="noStrike">
-                        <a:solidFill>
-                          <a:srgbClr val="000000"/>
-                        </a:solidFill>
-                        <a:latin typeface="Arial"/>
-                      </a:endParaRPr>
-                    </a:p>
-                  </a:txBody>
-                  <a:tcPr anchor="t" marL="91440" marR="91440">
-                    <a:lnL w="12240">
-                      <a:solidFill>
-                        <a:srgbClr val="ffffff"/>
-                      </a:solidFill>
-                      <a:prstDash val="solid"/>
-                    </a:lnL>
-                    <a:lnR w="12240">
-                      <a:solidFill>
-                        <a:srgbClr val="ffffff"/>
-                      </a:solidFill>
-                      <a:prstDash val="solid"/>
-                    </a:lnR>
-                    <a:lnT w="12240">
-                      <a:solidFill>
-                        <a:srgbClr val="ffffff"/>
-                      </a:solidFill>
-                      <a:prstDash val="solid"/>
-                    </a:lnT>
-                    <a:lnB w="12240">
-                      <a:solidFill>
-                        <a:srgbClr val="ffffff"/>
-                      </a:solidFill>
-                      <a:prstDash val="solid"/>
-                    </a:lnB>
-                    <a:solidFill>
-                      <a:srgbClr val="f2f2f2"/>
-                    </a:solidFill>
-                  </a:tcPr>
-                </a:tc>
-                <a:tc>
-                  <a:txBody>
-                    <a:bodyPr anchor="t">
-                      <a:noAutofit/>
-                    </a:bodyPr>
-                    <a:p>
-                      <a:pPr>
-                        <a:lnSpc>
-                          <a:spcPct val="100000"/>
-                        </a:lnSpc>
-                      </a:pPr>
-                      <a:r>
-                        <a:rPr b="0" lang="en-US" sz="1400" spc="-1" strike="noStrike">
-                          <a:solidFill>
-                            <a:schemeClr val="dk1"/>
-                          </a:solidFill>
-                          <a:latin typeface="Times New Roman"/>
-                          <a:ea typeface="Times New Roman"/>
-                        </a:rPr>
-                        <a:t>As it's a special issue, it may be more editorial/overview-based than experimental.</a:t>
-                      </a:r>
-                      <a:endParaRPr b="0" lang="en-US" sz="1400" spc="-1" strike="noStrike">
-                        <a:solidFill>
-                          <a:srgbClr val="000000"/>
-                        </a:solidFill>
-                        <a:latin typeface="Arial"/>
-                      </a:endParaRPr>
-                    </a:p>
-                  </a:txBody>
-                  <a:tcPr anchor="t" marL="91440" marR="91440">
-                    <a:lnL w="12240">
-                      <a:solidFill>
-                        <a:srgbClr val="ffffff"/>
-                      </a:solidFill>
-                      <a:prstDash val="solid"/>
-                    </a:lnL>
-                    <a:lnR w="12240">
-                      <a:solidFill>
-                        <a:srgbClr val="ffffff"/>
-                      </a:solidFill>
-                      <a:prstDash val="solid"/>
-                    </a:lnR>
-                    <a:lnT w="12240">
-                      <a:solidFill>
-                        <a:srgbClr val="ffffff"/>
-                      </a:solidFill>
-                      <a:prstDash val="solid"/>
-                    </a:lnT>
-                    <a:lnB w="12240">
-                      <a:solidFill>
-                        <a:srgbClr val="ffffff"/>
-                      </a:solidFill>
-                      <a:prstDash val="solid"/>
-                    </a:lnB>
-                    <a:solidFill>
-                      <a:srgbClr val="f2f2f2"/>
-                    </a:solidFill>
-                  </a:tcPr>
-                </a:tc>
-              </a:tr>
-              <a:tr h="681480">
-                <a:tc>
-                  <a:txBody>
-                    <a:bodyPr anchor="t">
-                      <a:noAutofit/>
-                    </a:bodyPr>
-                    <a:p>
-                      <a:pPr>
-                        <a:lnSpc>
-                          <a:spcPct val="100000"/>
-                        </a:lnSpc>
-                      </a:pPr>
-                      <a:r>
-                        <a:rPr b="0" lang="en-US" sz="1400" spc="-1" strike="noStrike">
-                          <a:solidFill>
-                            <a:schemeClr val="dk1"/>
-                          </a:solidFill>
-                          <a:latin typeface="Times New Roman"/>
-                        </a:rPr>
-                        <a:t>2</a:t>
-                      </a:r>
-                      <a:endParaRPr b="0" lang="en-US" sz="1400" spc="-1" strike="noStrike">
-                        <a:solidFill>
-                          <a:srgbClr val="000000"/>
-                        </a:solidFill>
-                        <a:latin typeface="Arial"/>
-                      </a:endParaRPr>
-                    </a:p>
-                  </a:txBody>
-                  <a:tcPr anchor="t" marL="91440" marR="91440">
-                    <a:lnL w="12240">
-                      <a:solidFill>
-                        <a:srgbClr val="ffffff"/>
-                      </a:solidFill>
-                      <a:prstDash val="solid"/>
-                    </a:lnL>
-                    <a:lnR w="12240">
-                      <a:solidFill>
-                        <a:srgbClr val="ffffff"/>
-                      </a:solidFill>
-                      <a:prstDash val="solid"/>
-                    </a:lnR>
-                    <a:lnT w="12240">
-                      <a:solidFill>
-                        <a:srgbClr val="ffffff"/>
-                      </a:solidFill>
-                      <a:prstDash val="solid"/>
-                    </a:lnT>
-                    <a:lnB w="12240">
-                      <a:solidFill>
-                        <a:srgbClr val="ffffff"/>
-                      </a:solidFill>
-                      <a:prstDash val="solid"/>
-                    </a:lnB>
-                    <a:solidFill>
-                      <a:srgbClr val="f2f2f2"/>
-                    </a:solidFill>
-                  </a:tcPr>
-                </a:tc>
-                <a:tc>
-                  <a:txBody>
-                    <a:bodyPr anchor="t">
-                      <a:noAutofit/>
-                    </a:bodyPr>
-                    <a:p>
-                      <a:pPr>
-                        <a:lnSpc>
-                          <a:spcPct val="100000"/>
-                        </a:lnSpc>
-                      </a:pPr>
-                      <a:r>
-                        <a:rPr b="0" lang="en-US" sz="1400" spc="-1" strike="noStrike">
-                          <a:solidFill>
-                            <a:schemeClr val="dk1"/>
-                          </a:solidFill>
-                          <a:latin typeface="Times New Roman"/>
-                          <a:ea typeface="Times New Roman"/>
-                        </a:rPr>
-                        <a:t>Tong Wang et al. – Naked-eye light field display using micro-LED</a:t>
-                      </a:r>
-                      <a:endParaRPr b="0" lang="en-US" sz="1400" spc="-1" strike="noStrike">
-                        <a:solidFill>
-                          <a:srgbClr val="000000"/>
-                        </a:solidFill>
-                        <a:latin typeface="Arial"/>
-                      </a:endParaRPr>
-                    </a:p>
-                  </a:txBody>
-                  <a:tcPr anchor="t" marL="91440" marR="91440">
-                    <a:lnL w="12240">
-                      <a:solidFill>
-                        <a:srgbClr val="ffffff"/>
-                      </a:solidFill>
-                      <a:prstDash val="solid"/>
-                    </a:lnL>
-                    <a:lnR w="12240">
-                      <a:solidFill>
-                        <a:srgbClr val="ffffff"/>
-                      </a:solidFill>
-                      <a:prstDash val="solid"/>
-                    </a:lnR>
-                    <a:lnT w="12240">
-                      <a:solidFill>
-                        <a:srgbClr val="ffffff"/>
-                      </a:solidFill>
-                      <a:prstDash val="solid"/>
-                    </a:lnT>
-                    <a:lnB w="12240">
-                      <a:solidFill>
-                        <a:srgbClr val="ffffff"/>
-                      </a:solidFill>
-                      <a:prstDash val="solid"/>
-                    </a:lnB>
-                    <a:solidFill>
-                      <a:srgbClr val="f2f2f2"/>
-                    </a:solidFill>
-                  </a:tcPr>
-                </a:tc>
-                <a:tc>
-                  <a:txBody>
-                    <a:bodyPr anchor="t">
-                      <a:noAutofit/>
-                    </a:bodyPr>
-                    <a:p>
-                      <a:pPr>
-                        <a:lnSpc>
-                          <a:spcPct val="100000"/>
-                        </a:lnSpc>
-                      </a:pPr>
-                      <a:r>
-                        <a:rPr b="0" lang="en-US" sz="1400" spc="-1" strike="noStrike">
-                          <a:solidFill>
-                            <a:schemeClr val="dk1"/>
-                          </a:solidFill>
-                          <a:latin typeface="Times New Roman"/>
-                          <a:ea typeface="Times New Roman"/>
-                        </a:rPr>
-                        <a:t>Demonstrates cutting-edge micro-LED tech; supports high-resolution, glasses-free displays.</a:t>
-                      </a:r>
-                      <a:endParaRPr b="0" lang="en-US" sz="1400" spc="-1" strike="noStrike">
-                        <a:solidFill>
-                          <a:srgbClr val="000000"/>
-                        </a:solidFill>
-                        <a:latin typeface="Arial"/>
-                      </a:endParaRPr>
-                    </a:p>
-                  </a:txBody>
-                  <a:tcPr anchor="t" marL="91440" marR="91440">
-                    <a:lnL w="12240">
-                      <a:solidFill>
-                        <a:srgbClr val="ffffff"/>
-                      </a:solidFill>
-                      <a:prstDash val="solid"/>
-                    </a:lnL>
-                    <a:lnR w="12240">
-                      <a:solidFill>
-                        <a:srgbClr val="ffffff"/>
-                      </a:solidFill>
-                      <a:prstDash val="solid"/>
-                    </a:lnR>
-                    <a:lnT w="12240">
-                      <a:solidFill>
-                        <a:srgbClr val="ffffff"/>
-                      </a:solidFill>
-                      <a:prstDash val="solid"/>
-                    </a:lnT>
-                    <a:lnB w="12240">
-                      <a:solidFill>
-                        <a:srgbClr val="ffffff"/>
-                      </a:solidFill>
-                      <a:prstDash val="solid"/>
-                    </a:lnB>
-                    <a:solidFill>
-                      <a:srgbClr val="f2f2f2"/>
-                    </a:solidFill>
-                  </a:tcPr>
-                </a:tc>
-                <a:tc>
-                  <a:txBody>
-                    <a:bodyPr anchor="t">
-                      <a:noAutofit/>
-                    </a:bodyPr>
-                    <a:p>
-                      <a:pPr>
-                        <a:lnSpc>
-                          <a:spcPct val="100000"/>
-                        </a:lnSpc>
-                      </a:pPr>
-                      <a:r>
-                        <a:rPr b="0" lang="en-US" sz="1400" spc="-1" strike="noStrike">
-                          <a:solidFill>
-                            <a:schemeClr val="dk1"/>
-                          </a:solidFill>
-                          <a:latin typeface="Times New Roman"/>
-                          <a:ea typeface="Times New Roman"/>
-                        </a:rPr>
-                        <a:t>Technology is still emerging; cost and mass production scalability are not addressed.</a:t>
-                      </a:r>
-                      <a:endParaRPr b="0" lang="en-US" sz="1400" spc="-1" strike="noStrike">
-                        <a:solidFill>
-                          <a:srgbClr val="000000"/>
-                        </a:solidFill>
-                        <a:latin typeface="Arial"/>
-                      </a:endParaRPr>
-                    </a:p>
-                  </a:txBody>
-                  <a:tcPr anchor="t" marL="91440" marR="91440">
-                    <a:lnL w="12240">
-                      <a:solidFill>
-                        <a:srgbClr val="ffffff"/>
-                      </a:solidFill>
-                      <a:prstDash val="solid"/>
-                    </a:lnL>
-                    <a:lnR w="12240">
-                      <a:solidFill>
-                        <a:srgbClr val="ffffff"/>
-                      </a:solidFill>
-                      <a:prstDash val="solid"/>
-                    </a:lnR>
-                    <a:lnT w="12240">
-                      <a:solidFill>
-                        <a:srgbClr val="ffffff"/>
-                      </a:solidFill>
-                      <a:prstDash val="solid"/>
-                    </a:lnT>
-                    <a:lnB w="12240">
-                      <a:solidFill>
-                        <a:srgbClr val="ffffff"/>
-                      </a:solidFill>
-                      <a:prstDash val="solid"/>
-                    </a:lnB>
-                    <a:solidFill>
-                      <a:srgbClr val="f2f2f2"/>
-                    </a:solidFill>
-                  </a:tcPr>
-                </a:tc>
-              </a:tr>
-              <a:tr h="878040">
-                <a:tc>
-                  <a:txBody>
-                    <a:bodyPr anchor="t">
-                      <a:noAutofit/>
-                    </a:bodyPr>
-                    <a:p>
-                      <a:pPr>
-                        <a:lnSpc>
-                          <a:spcPct val="100000"/>
-                        </a:lnSpc>
-                      </a:pPr>
-                      <a:r>
-                        <a:rPr b="0" lang="en-US" sz="1400" spc="-1" strike="noStrike">
-                          <a:solidFill>
-                            <a:schemeClr val="dk1"/>
-                          </a:solidFill>
-                          <a:latin typeface="Times New Roman"/>
-                        </a:rPr>
-                        <a:t>3</a:t>
-                      </a:r>
-                      <a:endParaRPr b="0" lang="en-US" sz="1400" spc="-1" strike="noStrike">
-                        <a:solidFill>
-                          <a:srgbClr val="000000"/>
-                        </a:solidFill>
-                        <a:latin typeface="Arial"/>
-                      </a:endParaRPr>
-                    </a:p>
-                  </a:txBody>
-                  <a:tcPr anchor="t" marL="91440" marR="91440">
-                    <a:lnL w="12240">
-                      <a:solidFill>
-                        <a:srgbClr val="ffffff"/>
-                      </a:solidFill>
-                      <a:prstDash val="solid"/>
-                    </a:lnL>
-                    <a:lnR w="12240">
-                      <a:solidFill>
-                        <a:srgbClr val="ffffff"/>
-                      </a:solidFill>
-                      <a:prstDash val="solid"/>
-                    </a:lnR>
-                    <a:lnT w="12240">
-                      <a:solidFill>
-                        <a:srgbClr val="ffffff"/>
-                      </a:solidFill>
-                      <a:prstDash val="solid"/>
-                    </a:lnT>
-                    <a:lnB w="12240">
-                      <a:solidFill>
-                        <a:srgbClr val="ffffff"/>
-                      </a:solidFill>
-                      <a:prstDash val="solid"/>
-                    </a:lnB>
-                    <a:solidFill>
-                      <a:srgbClr val="f2f2f2"/>
-                    </a:solidFill>
-                  </a:tcPr>
-                </a:tc>
-                <a:tc>
-                  <a:txBody>
-                    <a:bodyPr anchor="t">
-                      <a:noAutofit/>
-                    </a:bodyPr>
-                    <a:p>
-                      <a:pPr>
-                        <a:lnSpc>
-                          <a:spcPct val="100000"/>
-                        </a:lnSpc>
-                      </a:pPr>
-                      <a:r>
-                        <a:rPr b="0" lang="en-US" sz="1400" spc="-1" strike="noStrike">
-                          <a:solidFill>
-                            <a:schemeClr val="dk1"/>
-                          </a:solidFill>
-                          <a:latin typeface="Times New Roman"/>
-                          <a:ea typeface="Times New Roman"/>
-                        </a:rPr>
-                        <a:t>Chun Chen et al. – Ultrahigh-fidelity full-color holography</a:t>
-                      </a:r>
-                      <a:endParaRPr b="0" lang="en-US" sz="1400" spc="-1" strike="noStrike">
-                        <a:solidFill>
-                          <a:srgbClr val="000000"/>
-                        </a:solidFill>
-                        <a:latin typeface="Arial"/>
-                      </a:endParaRPr>
-                    </a:p>
-                  </a:txBody>
-                  <a:tcPr anchor="t" marL="91440" marR="91440">
-                    <a:lnL w="12240">
-                      <a:solidFill>
-                        <a:srgbClr val="ffffff"/>
-                      </a:solidFill>
-                      <a:prstDash val="solid"/>
-                    </a:lnL>
-                    <a:lnR w="12240">
-                      <a:solidFill>
-                        <a:srgbClr val="ffffff"/>
-                      </a:solidFill>
-                      <a:prstDash val="solid"/>
-                    </a:lnR>
-                    <a:lnT w="12240">
-                      <a:solidFill>
-                        <a:srgbClr val="ffffff"/>
-                      </a:solidFill>
-                      <a:prstDash val="solid"/>
-                    </a:lnT>
-                    <a:lnB w="12240">
-                      <a:solidFill>
-                        <a:srgbClr val="ffffff"/>
-                      </a:solidFill>
-                      <a:prstDash val="solid"/>
-                    </a:lnB>
-                    <a:solidFill>
-                      <a:srgbClr val="f2f2f2"/>
-                    </a:solidFill>
-                  </a:tcPr>
-                </a:tc>
-                <a:tc>
-                  <a:txBody>
-                    <a:bodyPr anchor="t">
-                      <a:noAutofit/>
-                    </a:bodyPr>
-                    <a:p>
-                      <a:pPr>
-                        <a:lnSpc>
-                          <a:spcPct val="100000"/>
-                        </a:lnSpc>
-                      </a:pPr>
-                      <a:r>
-                        <a:rPr b="0" lang="en-US" sz="1400" spc="-1" strike="noStrike">
-                          <a:solidFill>
-                            <a:schemeClr val="dk1"/>
-                          </a:solidFill>
-                          <a:latin typeface="Times New Roman"/>
-                          <a:ea typeface="Times New Roman"/>
-                        </a:rPr>
-                        <a:t>High-quality visuals with full color and camera-in-loop feedback; improves user immersion.</a:t>
-                      </a:r>
-                      <a:endParaRPr b="0" lang="en-US" sz="1400" spc="-1" strike="noStrike">
-                        <a:solidFill>
-                          <a:srgbClr val="000000"/>
-                        </a:solidFill>
-                        <a:latin typeface="Arial"/>
-                      </a:endParaRPr>
-                    </a:p>
-                  </a:txBody>
-                  <a:tcPr anchor="t" marL="91440" marR="91440">
-                    <a:lnL w="12240">
-                      <a:solidFill>
-                        <a:srgbClr val="ffffff"/>
-                      </a:solidFill>
-                      <a:prstDash val="solid"/>
-                    </a:lnL>
-                    <a:lnR w="12240">
-                      <a:solidFill>
-                        <a:srgbClr val="ffffff"/>
-                      </a:solidFill>
-                      <a:prstDash val="solid"/>
-                    </a:lnR>
-                    <a:lnT w="12240">
-                      <a:solidFill>
-                        <a:srgbClr val="ffffff"/>
-                      </a:solidFill>
-                      <a:prstDash val="solid"/>
-                    </a:lnT>
-                    <a:lnB w="12240">
-                      <a:solidFill>
-                        <a:srgbClr val="ffffff"/>
-                      </a:solidFill>
-                      <a:prstDash val="solid"/>
-                    </a:lnB>
-                    <a:solidFill>
-                      <a:srgbClr val="f2f2f2"/>
-                    </a:solidFill>
-                  </a:tcPr>
-                </a:tc>
-                <a:tc>
-                  <a:txBody>
-                    <a:bodyPr anchor="t">
-                      <a:noAutofit/>
-                    </a:bodyPr>
-                    <a:p>
-                      <a:pPr>
-                        <a:lnSpc>
-                          <a:spcPct val="100000"/>
-                        </a:lnSpc>
-                      </a:pPr>
-                      <a:r>
-                        <a:rPr b="0" lang="en-US" sz="1400" spc="-1" strike="noStrike">
-                          <a:solidFill>
-                            <a:schemeClr val="dk1"/>
-                          </a:solidFill>
-                          <a:latin typeface="Times New Roman"/>
-                          <a:ea typeface="Times New Roman"/>
-                        </a:rPr>
-                        <a:t>May require high computational resources; hardware complexity can be a barrier.</a:t>
-                      </a:r>
-                      <a:endParaRPr b="0" lang="en-US" sz="1400" spc="-1" strike="noStrike">
-                        <a:solidFill>
-                          <a:srgbClr val="000000"/>
-                        </a:solidFill>
-                        <a:latin typeface="Arial"/>
-                      </a:endParaRPr>
-                    </a:p>
-                  </a:txBody>
-                  <a:tcPr anchor="t" marL="91440" marR="91440">
-                    <a:lnL w="12240">
-                      <a:solidFill>
-                        <a:srgbClr val="ffffff"/>
-                      </a:solidFill>
-                      <a:prstDash val="solid"/>
-                    </a:lnL>
-                    <a:lnR w="12240">
-                      <a:solidFill>
-                        <a:srgbClr val="ffffff"/>
-                      </a:solidFill>
-                      <a:prstDash val="solid"/>
-                    </a:lnR>
-                    <a:lnT w="12240">
-                      <a:solidFill>
-                        <a:srgbClr val="ffffff"/>
-                      </a:solidFill>
-                      <a:prstDash val="solid"/>
-                    </a:lnT>
-                    <a:lnB w="12240">
-                      <a:solidFill>
-                        <a:srgbClr val="ffffff"/>
-                      </a:solidFill>
-                      <a:prstDash val="solid"/>
-                    </a:lnB>
-                    <a:solidFill>
-                      <a:srgbClr val="f2f2f2"/>
-                    </a:solidFill>
-                  </a:tcPr>
-                </a:tc>
-              </a:tr>
-              <a:tr h="681480">
-                <a:tc>
-                  <a:txBody>
-                    <a:bodyPr anchor="t">
-                      <a:noAutofit/>
-                    </a:bodyPr>
-                    <a:p>
-                      <a:pPr>
-                        <a:lnSpc>
-                          <a:spcPct val="100000"/>
-                        </a:lnSpc>
-                      </a:pPr>
-                      <a:r>
-                        <a:rPr b="0" lang="en-US" sz="1400" spc="-1" strike="noStrike">
-                          <a:solidFill>
-                            <a:schemeClr val="dk1"/>
-                          </a:solidFill>
-                          <a:latin typeface="Times New Roman"/>
-                        </a:rPr>
-                        <a:t>4</a:t>
-                      </a:r>
-                      <a:endParaRPr b="0" lang="en-US" sz="1400" spc="-1" strike="noStrike">
-                        <a:solidFill>
-                          <a:srgbClr val="000000"/>
-                        </a:solidFill>
-                        <a:latin typeface="Arial"/>
-                      </a:endParaRPr>
-                    </a:p>
-                  </a:txBody>
-                  <a:tcPr anchor="t" marL="91440" marR="91440">
-                    <a:lnL w="12240">
-                      <a:solidFill>
-                        <a:srgbClr val="ffffff"/>
-                      </a:solidFill>
-                      <a:prstDash val="solid"/>
-                    </a:lnL>
-                    <a:lnR w="12240">
-                      <a:solidFill>
-                        <a:srgbClr val="ffffff"/>
-                      </a:solidFill>
-                      <a:prstDash val="solid"/>
-                    </a:lnR>
-                    <a:lnT w="12240">
-                      <a:solidFill>
-                        <a:srgbClr val="ffffff"/>
-                      </a:solidFill>
-                      <a:prstDash val="solid"/>
-                    </a:lnT>
-                    <a:lnB w="12240">
-                      <a:solidFill>
-                        <a:srgbClr val="ffffff"/>
-                      </a:solidFill>
-                      <a:prstDash val="solid"/>
-                    </a:lnB>
-                    <a:solidFill>
-                      <a:srgbClr val="f2f2f2"/>
-                    </a:solidFill>
-                  </a:tcPr>
-                </a:tc>
-                <a:tc>
-                  <a:txBody>
-                    <a:bodyPr anchor="t">
-                      <a:noAutofit/>
-                    </a:bodyPr>
-                    <a:p>
-                      <a:pPr>
-                        <a:lnSpc>
-                          <a:spcPct val="100000"/>
-                        </a:lnSpc>
-                      </a:pPr>
-                      <a:r>
-                        <a:rPr b="0" lang="en-US" sz="1400" spc="-1" strike="noStrike">
-                          <a:solidFill>
-                            <a:schemeClr val="dk1"/>
-                          </a:solidFill>
-                          <a:latin typeface="Times New Roman"/>
-                          <a:ea typeface="Times New Roman"/>
-                        </a:rPr>
-                        <a:t>Maximilian Rutz et al. – Perceptual brightness in retinal glasses</a:t>
-                      </a:r>
-                      <a:endParaRPr b="0" lang="en-US" sz="1400" spc="-1" strike="noStrike">
-                        <a:solidFill>
-                          <a:srgbClr val="000000"/>
-                        </a:solidFill>
-                        <a:latin typeface="Arial"/>
-                      </a:endParaRPr>
-                    </a:p>
-                  </a:txBody>
-                  <a:tcPr anchor="t" marL="91440" marR="91440">
-                    <a:lnL w="12240">
-                      <a:solidFill>
-                        <a:srgbClr val="ffffff"/>
-                      </a:solidFill>
-                      <a:prstDash val="solid"/>
-                    </a:lnL>
-                    <a:lnR w="12240">
-                      <a:solidFill>
-                        <a:srgbClr val="ffffff"/>
-                      </a:solidFill>
-                      <a:prstDash val="solid"/>
-                    </a:lnR>
-                    <a:lnT w="12240">
-                      <a:solidFill>
-                        <a:srgbClr val="ffffff"/>
-                      </a:solidFill>
-                      <a:prstDash val="solid"/>
-                    </a:lnT>
-                    <a:lnB w="12240">
-                      <a:solidFill>
-                        <a:srgbClr val="ffffff"/>
-                      </a:solidFill>
-                      <a:prstDash val="solid"/>
-                    </a:lnB>
-                    <a:solidFill>
-                      <a:srgbClr val="f2f2f2"/>
-                    </a:solidFill>
-                  </a:tcPr>
-                </a:tc>
-                <a:tc>
-                  <a:txBody>
-                    <a:bodyPr anchor="t">
-                      <a:noAutofit/>
-                    </a:bodyPr>
-                    <a:p>
-                      <a:pPr>
-                        <a:lnSpc>
-                          <a:spcPct val="100000"/>
-                        </a:lnSpc>
-                      </a:pPr>
-                      <a:r>
-                        <a:rPr b="0" lang="en-US" sz="1400" spc="-1" strike="noStrike">
-                          <a:solidFill>
-                            <a:schemeClr val="dk1"/>
-                          </a:solidFill>
-                          <a:latin typeface="Times New Roman"/>
-                          <a:ea typeface="Times New Roman"/>
-                        </a:rPr>
-                        <a:t>Addresses human perception, enhancing clarity and brightness in retinal projection.</a:t>
-                      </a:r>
-                      <a:endParaRPr b="0" lang="en-US" sz="1400" spc="-1" strike="noStrike">
-                        <a:solidFill>
-                          <a:srgbClr val="000000"/>
-                        </a:solidFill>
-                        <a:latin typeface="Arial"/>
-                      </a:endParaRPr>
-                    </a:p>
-                  </a:txBody>
-                  <a:tcPr anchor="t" marL="91440" marR="91440">
-                    <a:lnL w="12240">
-                      <a:solidFill>
-                        <a:srgbClr val="ffffff"/>
-                      </a:solidFill>
-                      <a:prstDash val="solid"/>
-                    </a:lnL>
-                    <a:lnR w="12240">
-                      <a:solidFill>
-                        <a:srgbClr val="ffffff"/>
-                      </a:solidFill>
-                      <a:prstDash val="solid"/>
-                    </a:lnR>
-                    <a:lnT w="12240">
-                      <a:solidFill>
-                        <a:srgbClr val="ffffff"/>
-                      </a:solidFill>
-                      <a:prstDash val="solid"/>
-                    </a:lnT>
-                    <a:lnB w="12240">
-                      <a:solidFill>
-                        <a:srgbClr val="ffffff"/>
-                      </a:solidFill>
-                      <a:prstDash val="solid"/>
-                    </a:lnB>
-                    <a:solidFill>
-                      <a:srgbClr val="f2f2f2"/>
-                    </a:solidFill>
-                  </a:tcPr>
-                </a:tc>
-                <a:tc>
-                  <a:txBody>
-                    <a:bodyPr anchor="t">
-                      <a:noAutofit/>
-                    </a:bodyPr>
-                    <a:p>
-                      <a:pPr>
-                        <a:lnSpc>
-                          <a:spcPct val="100000"/>
-                        </a:lnSpc>
-                      </a:pPr>
-                      <a:r>
-                        <a:rPr b="0" lang="en-US" sz="1400" spc="-1" strike="noStrike">
-                          <a:solidFill>
-                            <a:schemeClr val="dk1"/>
-                          </a:solidFill>
-                          <a:latin typeface="Times New Roman"/>
-                          <a:ea typeface="Times New Roman"/>
-                        </a:rPr>
-                        <a:t>Focuses mainly on perception studies; lacks detailed technical hardware analysis.</a:t>
-                      </a:r>
-                      <a:endParaRPr b="0" lang="en-US" sz="1400" spc="-1" strike="noStrike">
-                        <a:solidFill>
-                          <a:srgbClr val="000000"/>
-                        </a:solidFill>
-                        <a:latin typeface="Arial"/>
-                      </a:endParaRPr>
-                    </a:p>
-                  </a:txBody>
-                  <a:tcPr anchor="t" marL="91440" marR="91440">
-                    <a:lnL w="12240">
-                      <a:solidFill>
-                        <a:srgbClr val="ffffff"/>
-                      </a:solidFill>
-                      <a:prstDash val="solid"/>
-                    </a:lnL>
-                    <a:lnR w="12240">
-                      <a:solidFill>
-                        <a:srgbClr val="ffffff"/>
-                      </a:solidFill>
-                      <a:prstDash val="solid"/>
-                    </a:lnR>
-                    <a:lnT w="12240">
-                      <a:solidFill>
-                        <a:srgbClr val="ffffff"/>
-                      </a:solidFill>
-                      <a:prstDash val="solid"/>
-                    </a:lnT>
-                    <a:lnB w="12240">
-                      <a:solidFill>
-                        <a:srgbClr val="ffffff"/>
-                      </a:solidFill>
-                      <a:prstDash val="solid"/>
-                    </a:lnB>
-                    <a:solidFill>
-                      <a:srgbClr val="f2f2f2"/>
-                    </a:solidFill>
-                  </a:tcPr>
-                </a:tc>
-              </a:tr>
-              <a:tr h="681480">
-                <a:tc>
-                  <a:txBody>
-                    <a:bodyPr anchor="t">
-                      <a:noAutofit/>
-                    </a:bodyPr>
-                    <a:p>
-                      <a:pPr>
-                        <a:lnSpc>
-                          <a:spcPct val="100000"/>
-                        </a:lnSpc>
-                      </a:pPr>
-                      <a:r>
-                        <a:rPr b="0" lang="en-US" sz="1400" spc="-1" strike="noStrike">
-                          <a:solidFill>
-                            <a:schemeClr val="dk1"/>
-                          </a:solidFill>
-                          <a:latin typeface="Times New Roman"/>
-                        </a:rPr>
-                        <a:t>5</a:t>
-                      </a:r>
-                      <a:endParaRPr b="0" lang="en-US" sz="1400" spc="-1" strike="noStrike">
-                        <a:solidFill>
-                          <a:srgbClr val="000000"/>
-                        </a:solidFill>
-                        <a:latin typeface="Arial"/>
-                      </a:endParaRPr>
-                    </a:p>
-                  </a:txBody>
-                  <a:tcPr anchor="t" marL="91440" marR="91440">
-                    <a:lnL w="12240">
-                      <a:solidFill>
-                        <a:srgbClr val="ffffff"/>
-                      </a:solidFill>
-                      <a:prstDash val="solid"/>
-                    </a:lnL>
-                    <a:lnR w="12240">
-                      <a:solidFill>
-                        <a:srgbClr val="ffffff"/>
-                      </a:solidFill>
-                      <a:prstDash val="solid"/>
-                    </a:lnR>
-                    <a:lnT w="12240">
-                      <a:solidFill>
-                        <a:srgbClr val="ffffff"/>
-                      </a:solidFill>
-                      <a:prstDash val="solid"/>
-                    </a:lnT>
-                    <a:lnB w="12240">
-                      <a:solidFill>
-                        <a:srgbClr val="ffffff"/>
-                      </a:solidFill>
-                      <a:prstDash val="solid"/>
-                    </a:lnB>
-                    <a:solidFill>
-                      <a:srgbClr val="f2f2f2"/>
-                    </a:solidFill>
-                  </a:tcPr>
-                </a:tc>
-                <a:tc>
-                  <a:txBody>
-                    <a:bodyPr anchor="t">
-                      <a:noAutofit/>
-                    </a:bodyPr>
-                    <a:p>
-                      <a:pPr>
-                        <a:lnSpc>
-                          <a:spcPct val="100000"/>
-                        </a:lnSpc>
-                      </a:pPr>
-                      <a:r>
-                        <a:rPr b="0" lang="en-US" sz="1400" spc="-1" strike="noStrike">
-                          <a:solidFill>
-                            <a:schemeClr val="dk1"/>
-                          </a:solidFill>
-                          <a:latin typeface="Times New Roman"/>
-                          <a:ea typeface="Times New Roman"/>
-                        </a:rPr>
-                        <a:t>Yili Jin et al. – Volumetric Video Survey</a:t>
-                      </a:r>
-                      <a:endParaRPr b="0" lang="en-US" sz="1400" spc="-1" strike="noStrike">
-                        <a:solidFill>
-                          <a:srgbClr val="000000"/>
-                        </a:solidFill>
-                        <a:latin typeface="Arial"/>
-                      </a:endParaRPr>
-                    </a:p>
-                  </a:txBody>
-                  <a:tcPr anchor="t" marL="91440" marR="91440">
-                    <a:lnL w="12240">
-                      <a:solidFill>
-                        <a:srgbClr val="ffffff"/>
-                      </a:solidFill>
-                      <a:prstDash val="solid"/>
-                    </a:lnL>
-                    <a:lnR w="12240">
-                      <a:solidFill>
-                        <a:srgbClr val="ffffff"/>
-                      </a:solidFill>
-                      <a:prstDash val="solid"/>
-                    </a:lnR>
-                    <a:lnT w="12240">
-                      <a:solidFill>
-                        <a:srgbClr val="ffffff"/>
-                      </a:solidFill>
-                      <a:prstDash val="solid"/>
-                    </a:lnT>
-                    <a:lnB w="12240">
-                      <a:solidFill>
-                        <a:srgbClr val="ffffff"/>
-                      </a:solidFill>
-                      <a:prstDash val="solid"/>
-                    </a:lnB>
-                    <a:solidFill>
-                      <a:srgbClr val="f2f2f2"/>
-                    </a:solidFill>
-                  </a:tcPr>
-                </a:tc>
-                <a:tc>
-                  <a:txBody>
-                    <a:bodyPr anchor="t">
-                      <a:noAutofit/>
-                    </a:bodyPr>
-                    <a:p>
-                      <a:pPr>
-                        <a:lnSpc>
-                          <a:spcPct val="100000"/>
-                        </a:lnSpc>
-                      </a:pPr>
-                      <a:r>
-                        <a:rPr b="0" lang="en-US" sz="1400" spc="-1" strike="noStrike">
-                          <a:solidFill>
-                            <a:schemeClr val="dk1"/>
-                          </a:solidFill>
-                          <a:latin typeface="Times New Roman"/>
-                          <a:ea typeface="Times New Roman"/>
-                        </a:rPr>
-                        <a:t>Offers comprehensive overview of real-time volumetric video tech; covers full pipeline.</a:t>
-                      </a:r>
-                      <a:endParaRPr b="0" lang="en-US" sz="1400" spc="-1" strike="noStrike">
-                        <a:solidFill>
-                          <a:srgbClr val="000000"/>
-                        </a:solidFill>
-                        <a:latin typeface="Arial"/>
-                      </a:endParaRPr>
-                    </a:p>
-                  </a:txBody>
-                  <a:tcPr anchor="t" marL="91440" marR="91440">
-                    <a:lnL w="12240">
-                      <a:solidFill>
-                        <a:srgbClr val="ffffff"/>
-                      </a:solidFill>
-                      <a:prstDash val="solid"/>
-                    </a:lnL>
-                    <a:lnR w="12240">
-                      <a:solidFill>
-                        <a:srgbClr val="ffffff"/>
-                      </a:solidFill>
-                      <a:prstDash val="solid"/>
-                    </a:lnR>
-                    <a:lnT w="12240">
-                      <a:solidFill>
-                        <a:srgbClr val="ffffff"/>
-                      </a:solidFill>
-                      <a:prstDash val="solid"/>
-                    </a:lnT>
-                    <a:lnB w="12240">
-                      <a:solidFill>
-                        <a:srgbClr val="ffffff"/>
-                      </a:solidFill>
-                      <a:prstDash val="solid"/>
-                    </a:lnB>
-                    <a:solidFill>
-                      <a:srgbClr val="f2f2f2"/>
-                    </a:solidFill>
-                  </a:tcPr>
-                </a:tc>
-                <a:tc>
-                  <a:txBody>
-                    <a:bodyPr anchor="t">
-                      <a:noAutofit/>
-                    </a:bodyPr>
-                    <a:p>
-                      <a:pPr>
-                        <a:lnSpc>
-                          <a:spcPct val="100000"/>
-                        </a:lnSpc>
-                      </a:pPr>
-                      <a:r>
-                        <a:rPr b="0" lang="en-US" sz="1400" spc="-1" strike="noStrike">
-                          <a:solidFill>
-                            <a:schemeClr val="dk1"/>
-                          </a:solidFill>
-                          <a:latin typeface="Times New Roman"/>
-                          <a:ea typeface="Times New Roman"/>
-                        </a:rPr>
-                        <a:t>Being a survey, it doesn’t provide new experimental results or system implementations.</a:t>
-                      </a:r>
-                      <a:endParaRPr b="0" lang="en-US" sz="1400" spc="-1" strike="noStrike">
-                        <a:solidFill>
-                          <a:srgbClr val="000000"/>
-                        </a:solidFill>
-                        <a:latin typeface="Arial"/>
-                      </a:endParaRPr>
-                    </a:p>
-                  </a:txBody>
-                  <a:tcPr anchor="t" marL="91440" marR="91440">
-                    <a:lnL w="12240">
-                      <a:solidFill>
-                        <a:srgbClr val="ffffff"/>
-                      </a:solidFill>
-                      <a:prstDash val="solid"/>
-                    </a:lnL>
-                    <a:lnR w="12240">
-                      <a:solidFill>
-                        <a:srgbClr val="ffffff"/>
-                      </a:solidFill>
-                      <a:prstDash val="solid"/>
-                    </a:lnR>
-                    <a:lnT w="12240">
-                      <a:solidFill>
-                        <a:srgbClr val="ffffff"/>
-                      </a:solidFill>
-                      <a:prstDash val="solid"/>
-                    </a:lnT>
-                    <a:lnB w="12240">
-                      <a:solidFill>
-                        <a:srgbClr val="ffffff"/>
-                      </a:solidFill>
-                      <a:prstDash val="solid"/>
-                    </a:lnB>
-                    <a:solidFill>
-                      <a:srgbClr val="f2f2f2"/>
-                    </a:solidFill>
-                  </a:tcPr>
-                </a:tc>
-              </a:tr>
-            </a:tbl>
-          </a:graphicData>
-        </a:graphic>
-      </p:graphicFrame>
       <p:sp>
         <p:nvSpPr>
-          <p:cNvPr id="29" name=""/>
-          <p:cNvSpPr txBox="1"/>
+          <p:cNvPr id="37" name=""/>
+          <p:cNvSpPr/>
           <p:nvPr/>
         </p:nvSpPr>
         <p:spPr>
           <a:xfrm>
-            <a:off x="8605440" y="4833000"/>
-            <a:ext cx="538560" cy="316440"/>
+            <a:off x="8458200" y="4833000"/>
+            <a:ext cx="684360" cy="315000"/>
           </a:xfrm>
           <a:prstGeom prst="rect">
             <a:avLst/>
@@ -8445,11 +8032,22 @@
             <a:noFill/>
           </a:ln>
         </p:spPr>
+        <p:style>
+          <a:lnRef idx="0"/>
+          <a:fillRef idx="0"/>
+          <a:effectRef idx="0"/>
+          <a:fontRef idx="minor"/>
+        </p:style>
         <p:txBody>
           <a:bodyPr lIns="90000" rIns="90000" tIns="45000" bIns="45000" anchor="t">
             <a:noAutofit/>
           </a:bodyPr>
           <a:p>
+            <a:pPr>
+              <a:lnSpc>
+                <a:spcPct val="100000"/>
+              </a:lnSpc>
+            </a:pPr>
             <a:r>
               <a:rPr b="0" lang="en-IN" sz="1600" spc="-1" strike="noStrike">
                 <a:solidFill>
@@ -8461,6 +8059,60 @@
               <a:t>6/12</a:t>
             </a:r>
             <a:endParaRPr b="0" lang="en-US" sz="1600" spc="-1" strike="noStrike">
+              <a:solidFill>
+                <a:srgbClr val="000000"/>
+              </a:solidFill>
+              <a:latin typeface="Arial"/>
+            </a:endParaRPr>
+          </a:p>
+        </p:txBody>
+      </p:sp>
+      <p:sp>
+        <p:nvSpPr>
+          <p:cNvPr id="38" name=""/>
+          <p:cNvSpPr/>
+          <p:nvPr/>
+        </p:nvSpPr>
+        <p:spPr>
+          <a:xfrm>
+            <a:off x="457200" y="1414440"/>
+            <a:ext cx="7771680" cy="2471040"/>
+          </a:xfrm>
+          <a:prstGeom prst="rect">
+            <a:avLst/>
+          </a:prstGeom>
+          <a:noFill/>
+          <a:ln w="0">
+            <a:noFill/>
+          </a:ln>
+        </p:spPr>
+        <p:style>
+          <a:lnRef idx="0"/>
+          <a:fillRef idx="0"/>
+          <a:effectRef idx="0"/>
+          <a:fontRef idx="minor"/>
+        </p:style>
+        <p:txBody>
+          <a:bodyPr lIns="90000" rIns="90000" tIns="45000" bIns="45000" anchor="t">
+            <a:noAutofit/>
+          </a:bodyPr>
+          <a:p>
+            <a:pPr>
+              <a:lnSpc>
+                <a:spcPct val="100000"/>
+              </a:lnSpc>
+            </a:pPr>
+            <a:r>
+              <a:rPr b="0" lang="en-US" sz="1500" spc="-1" strike="noStrike">
+                <a:solidFill>
+                  <a:srgbClr val="000000"/>
+                </a:solidFill>
+                <a:latin typeface="times new roman"/>
+                <a:ea typeface="DejaVu Sans"/>
+              </a:rPr>
+              <a:t>The reviewed papers cover advancements in screenless display technologies, including holography, volumetric video, retinal projection, and light field displays. Key innovations include glasses-free micro-LED displays, high-fidelity holography, and laser-based interaction systems. Several works focus on user immersion, clarity, and real-time rendering, while others provide comprehensive surveys of current technologies. However, common limitations across these studies include high computational cost, hardware complexity, scalability issues, and a lack of long-term validation or practical implementations. Many are still in the experimental stage, signaling the need for further development and testing before commercial application.</a:t>
+            </a:r>
+            <a:endParaRPr b="0" lang="en-US" sz="1500" spc="-1" strike="noStrike">
               <a:solidFill>
                 <a:srgbClr val="000000"/>
               </a:solidFill>
@@ -8499,1475 +8151,63 @@
           <a:chExt cx="0" cy="0"/>
         </a:xfrm>
       </p:grpSpPr>
-      <p:graphicFrame>
-        <p:nvGraphicFramePr>
-          <p:cNvPr id="30" name="Google Shape;45;p 3"/>
-          <p:cNvGraphicFramePr/>
-          <p:nvPr/>
-        </p:nvGraphicFramePr>
-        <p:xfrm>
-          <a:off x="357480" y="941400"/>
-          <a:ext cx="8329320" cy="4034520"/>
-        </p:xfrm>
-        <a:graphic>
-          <a:graphicData uri="http://schemas.openxmlformats.org/drawingml/2006/table">
-            <a:tbl>
-              <a:tblPr/>
-              <a:tblGrid>
-                <a:gridCol w="656640"/>
-                <a:gridCol w="2009160"/>
-                <a:gridCol w="2584440"/>
-                <a:gridCol w="3079440"/>
-              </a:tblGrid>
-              <a:tr h="365760">
-                <a:tc>
-                  <a:txBody>
-                    <a:bodyPr anchor="t">
-                      <a:noAutofit/>
-                    </a:bodyPr>
-                    <a:p>
-                      <a:pPr>
-                        <a:lnSpc>
-                          <a:spcPct val="100000"/>
-                        </a:lnSpc>
-                        <a:tabLst>
-                          <a:tab algn="l" pos="0"/>
-                        </a:tabLst>
-                      </a:pPr>
-                      <a:r>
-                        <a:rPr b="1" lang="en-IN" sz="1400" spc="-1" strike="noStrike">
-                          <a:solidFill>
-                            <a:schemeClr val="dk1"/>
-                          </a:solidFill>
-                          <a:latin typeface="Times New Roman"/>
-                          <a:ea typeface="Times New Roman"/>
-                        </a:rPr>
-                        <a:t>Sl No</a:t>
-                      </a:r>
-                      <a:endParaRPr b="0" lang="en-US" sz="1400" spc="-1" strike="noStrike">
-                        <a:solidFill>
-                          <a:srgbClr val="000000"/>
-                        </a:solidFill>
-                        <a:latin typeface="Arial"/>
-                      </a:endParaRPr>
-                    </a:p>
-                  </a:txBody>
-                  <a:tcPr anchor="t" marL="91440" marR="91440">
-                    <a:lnL w="12240">
-                      <a:solidFill>
-                        <a:srgbClr val="ffffff"/>
-                      </a:solidFill>
-                      <a:prstDash val="solid"/>
-                    </a:lnL>
-                    <a:lnR w="12240">
-                      <a:solidFill>
-                        <a:srgbClr val="ffffff"/>
-                      </a:solidFill>
-                      <a:prstDash val="solid"/>
-                    </a:lnR>
-                    <a:lnT w="12240">
-                      <a:solidFill>
-                        <a:srgbClr val="ffffff"/>
-                      </a:solidFill>
-                      <a:prstDash val="solid"/>
-                    </a:lnT>
-                    <a:lnB w="38160">
-                      <a:solidFill>
-                        <a:srgbClr val="ffffff"/>
-                      </a:solidFill>
-                      <a:prstDash val="solid"/>
-                    </a:lnB>
-                    <a:solidFill>
-                      <a:srgbClr val="d6d6d6"/>
-                    </a:solidFill>
-                  </a:tcPr>
-                </a:tc>
-                <a:tc>
-                  <a:txBody>
-                    <a:bodyPr anchor="t">
-                      <a:noAutofit/>
-                    </a:bodyPr>
-                    <a:p>
-                      <a:pPr>
-                        <a:lnSpc>
-                          <a:spcPct val="100000"/>
-                        </a:lnSpc>
-                        <a:tabLst>
-                          <a:tab algn="l" pos="0"/>
-                        </a:tabLst>
-                      </a:pPr>
-                      <a:r>
-                        <a:rPr b="1" lang="en-IN" sz="1400" spc="-1" strike="noStrike">
-                          <a:solidFill>
-                            <a:schemeClr val="dk1"/>
-                          </a:solidFill>
-                          <a:latin typeface="Times New Roman"/>
-                          <a:ea typeface="Times New Roman"/>
-                        </a:rPr>
-                        <a:t>Author (s) &amp; Paper title</a:t>
-                      </a:r>
-                      <a:endParaRPr b="0" lang="en-US" sz="1400" spc="-1" strike="noStrike">
-                        <a:solidFill>
-                          <a:srgbClr val="000000"/>
-                        </a:solidFill>
-                        <a:latin typeface="Arial"/>
-                      </a:endParaRPr>
-                    </a:p>
-                  </a:txBody>
-                  <a:tcPr anchor="t" marL="91440" marR="91440">
-                    <a:lnL w="12240">
-                      <a:solidFill>
-                        <a:srgbClr val="ffffff"/>
-                      </a:solidFill>
-                      <a:prstDash val="solid"/>
-                    </a:lnL>
-                    <a:lnR w="12240">
-                      <a:solidFill>
-                        <a:srgbClr val="ffffff"/>
-                      </a:solidFill>
-                      <a:prstDash val="solid"/>
-                    </a:lnR>
-                    <a:lnT w="12240">
-                      <a:solidFill>
-                        <a:srgbClr val="ffffff"/>
-                      </a:solidFill>
-                      <a:prstDash val="solid"/>
-                    </a:lnT>
-                    <a:lnB w="38160">
-                      <a:solidFill>
-                        <a:srgbClr val="ffffff"/>
-                      </a:solidFill>
-                      <a:prstDash val="solid"/>
-                    </a:lnB>
-                    <a:solidFill>
-                      <a:srgbClr val="d6d6d6"/>
-                    </a:solidFill>
-                  </a:tcPr>
-                </a:tc>
-                <a:tc>
-                  <a:txBody>
-                    <a:bodyPr anchor="t">
-                      <a:noAutofit/>
-                    </a:bodyPr>
-                    <a:p>
-                      <a:pPr>
-                        <a:lnSpc>
-                          <a:spcPct val="100000"/>
-                        </a:lnSpc>
-                        <a:tabLst>
-                          <a:tab algn="l" pos="0"/>
-                        </a:tabLst>
-                      </a:pPr>
-                      <a:r>
-                        <a:rPr b="1" lang="en-IN" sz="1400" spc="-1" strike="noStrike">
-                          <a:solidFill>
-                            <a:schemeClr val="dk1"/>
-                          </a:solidFill>
-                          <a:latin typeface="Times New Roman"/>
-                          <a:ea typeface="Times New Roman"/>
-                        </a:rPr>
-                        <a:t>Pros</a:t>
-                      </a:r>
-                      <a:endParaRPr b="0" lang="en-US" sz="1400" spc="-1" strike="noStrike">
-                        <a:solidFill>
-                          <a:srgbClr val="000000"/>
-                        </a:solidFill>
-                        <a:latin typeface="Arial"/>
-                      </a:endParaRPr>
-                    </a:p>
-                  </a:txBody>
-                  <a:tcPr anchor="t" marL="91440" marR="91440">
-                    <a:lnL w="12240">
-                      <a:solidFill>
-                        <a:srgbClr val="ffffff"/>
-                      </a:solidFill>
-                      <a:prstDash val="solid"/>
-                    </a:lnL>
-                    <a:lnR w="12240">
-                      <a:solidFill>
-                        <a:srgbClr val="ffffff"/>
-                      </a:solidFill>
-                      <a:prstDash val="solid"/>
-                    </a:lnR>
-                    <a:lnT w="12240">
-                      <a:solidFill>
-                        <a:srgbClr val="ffffff"/>
-                      </a:solidFill>
-                      <a:prstDash val="solid"/>
-                    </a:lnT>
-                    <a:lnB w="38160">
-                      <a:solidFill>
-                        <a:srgbClr val="ffffff"/>
-                      </a:solidFill>
-                      <a:prstDash val="solid"/>
-                    </a:lnB>
-                    <a:solidFill>
-                      <a:srgbClr val="d6d6d6"/>
-                    </a:solidFill>
-                  </a:tcPr>
-                </a:tc>
-                <a:tc>
-                  <a:txBody>
-                    <a:bodyPr anchor="t">
-                      <a:noAutofit/>
-                    </a:bodyPr>
-                    <a:p>
-                      <a:pPr>
-                        <a:lnSpc>
-                          <a:spcPct val="100000"/>
-                        </a:lnSpc>
-                        <a:tabLst>
-                          <a:tab algn="l" pos="0"/>
-                        </a:tabLst>
-                      </a:pPr>
-                      <a:r>
-                        <a:rPr b="1" lang="en-IN" sz="1400" spc="-1" strike="noStrike">
-                          <a:solidFill>
-                            <a:schemeClr val="dk1"/>
-                          </a:solidFill>
-                          <a:latin typeface="Times New Roman"/>
-                          <a:ea typeface="Times New Roman"/>
-                        </a:rPr>
-                        <a:t>Cons</a:t>
-                      </a:r>
-                      <a:endParaRPr b="0" lang="en-US" sz="1400" spc="-1" strike="noStrike">
-                        <a:solidFill>
-                          <a:srgbClr val="000000"/>
-                        </a:solidFill>
-                        <a:latin typeface="Arial"/>
-                      </a:endParaRPr>
-                    </a:p>
-                  </a:txBody>
-                  <a:tcPr anchor="t" marL="91440" marR="91440">
-                    <a:lnL w="12240">
-                      <a:solidFill>
-                        <a:srgbClr val="ffffff"/>
-                      </a:solidFill>
-                      <a:prstDash val="solid"/>
-                    </a:lnL>
-                    <a:lnR w="12240">
-                      <a:solidFill>
-                        <a:srgbClr val="ffffff"/>
-                      </a:solidFill>
-                      <a:prstDash val="solid"/>
-                    </a:lnR>
-                    <a:lnT w="12240">
-                      <a:solidFill>
-                        <a:srgbClr val="ffffff"/>
-                      </a:solidFill>
-                      <a:prstDash val="solid"/>
-                    </a:lnT>
-                    <a:lnB w="38160">
-                      <a:solidFill>
-                        <a:srgbClr val="ffffff"/>
-                      </a:solidFill>
-                      <a:prstDash val="solid"/>
-                    </a:lnB>
-                    <a:solidFill>
-                      <a:srgbClr val="d6d6d6"/>
-                    </a:solidFill>
-                  </a:tcPr>
-                </a:tc>
-              </a:tr>
-              <a:tr h="708480">
-                <a:tc>
-                  <a:txBody>
-                    <a:bodyPr anchor="t">
-                      <a:noAutofit/>
-                    </a:bodyPr>
-                    <a:p>
-                      <a:pPr>
-                        <a:lnSpc>
-                          <a:spcPct val="100000"/>
-                        </a:lnSpc>
-                      </a:pPr>
-                      <a:r>
-                        <a:rPr b="0" lang="en-US" sz="1400" spc="-1" strike="noStrike">
-                          <a:solidFill>
-                            <a:schemeClr val="dk1"/>
-                          </a:solidFill>
-                          <a:latin typeface="Times New Roman"/>
-                        </a:rPr>
-                        <a:t>6</a:t>
-                      </a:r>
-                      <a:endParaRPr b="0" lang="en-US" sz="1400" spc="-1" strike="noStrike">
-                        <a:solidFill>
-                          <a:srgbClr val="000000"/>
-                        </a:solidFill>
-                        <a:latin typeface="Arial"/>
-                      </a:endParaRPr>
-                    </a:p>
-                  </a:txBody>
-                  <a:tcPr anchor="t" marL="91440" marR="91440">
-                    <a:lnL w="12240">
-                      <a:solidFill>
-                        <a:srgbClr val="ffffff"/>
-                      </a:solidFill>
-                      <a:prstDash val="solid"/>
-                    </a:lnL>
-                    <a:lnR w="12240">
-                      <a:solidFill>
-                        <a:srgbClr val="ffffff"/>
-                      </a:solidFill>
-                      <a:prstDash val="solid"/>
-                    </a:lnR>
-                    <a:lnT w="12240">
-                      <a:solidFill>
-                        <a:srgbClr val="ffffff"/>
-                      </a:solidFill>
-                      <a:prstDash val="solid"/>
-                    </a:lnT>
-                    <a:lnB w="12240">
-                      <a:solidFill>
-                        <a:srgbClr val="ffffff"/>
-                      </a:solidFill>
-                      <a:prstDash val="solid"/>
-                    </a:lnB>
-                    <a:solidFill>
-                      <a:srgbClr val="f2f2f2"/>
-                    </a:solidFill>
-                  </a:tcPr>
-                </a:tc>
-                <a:tc>
-                  <a:txBody>
-                    <a:bodyPr anchor="t">
-                      <a:noAutofit/>
-                    </a:bodyPr>
-                    <a:p>
-                      <a:pPr>
-                        <a:lnSpc>
-                          <a:spcPct val="100000"/>
-                        </a:lnSpc>
-                      </a:pPr>
-                      <a:r>
-                        <a:rPr b="0" lang="en-US" sz="1400" spc="-1" strike="noStrike">
-                          <a:solidFill>
-                            <a:schemeClr val="dk1"/>
-                          </a:solidFill>
-                          <a:latin typeface="Times New Roman"/>
-                          <a:ea typeface="Times New Roman"/>
-                        </a:rPr>
-                        <a:t>PointerVol Team – Volumetric Interaction with Laser Pointers</a:t>
-                      </a:r>
-                      <a:endParaRPr b="0" lang="en-US" sz="1400" spc="-1" strike="noStrike">
-                        <a:solidFill>
-                          <a:srgbClr val="000000"/>
-                        </a:solidFill>
-                        <a:latin typeface="Arial"/>
-                      </a:endParaRPr>
-                    </a:p>
-                  </a:txBody>
-                  <a:tcPr anchor="t" marL="91440" marR="91440">
-                    <a:lnL w="12240">
-                      <a:solidFill>
-                        <a:srgbClr val="ffffff"/>
-                      </a:solidFill>
-                      <a:prstDash val="solid"/>
-                    </a:lnL>
-                    <a:lnR w="12240">
-                      <a:solidFill>
-                        <a:srgbClr val="ffffff"/>
-                      </a:solidFill>
-                      <a:prstDash val="solid"/>
-                    </a:lnR>
-                    <a:lnT w="12240">
-                      <a:solidFill>
-                        <a:srgbClr val="ffffff"/>
-                      </a:solidFill>
-                      <a:prstDash val="solid"/>
-                    </a:lnT>
-                    <a:lnB w="12240">
-                      <a:solidFill>
-                        <a:srgbClr val="ffffff"/>
-                      </a:solidFill>
-                      <a:prstDash val="solid"/>
-                    </a:lnB>
-                    <a:solidFill>
-                      <a:srgbClr val="f2f2f2"/>
-                    </a:solidFill>
-                  </a:tcPr>
-                </a:tc>
-                <a:tc>
-                  <a:txBody>
-                    <a:bodyPr anchor="t">
-                      <a:noAutofit/>
-                    </a:bodyPr>
-                    <a:p>
-                      <a:pPr>
-                        <a:lnSpc>
-                          <a:spcPct val="100000"/>
-                        </a:lnSpc>
-                      </a:pPr>
-                      <a:r>
-                        <a:rPr b="0" lang="en-US" sz="1400" spc="-1" strike="noStrike">
-                          <a:solidFill>
-                            <a:schemeClr val="dk1"/>
-                          </a:solidFill>
-                          <a:latin typeface="Times New Roman"/>
-                          <a:ea typeface="Times New Roman"/>
-                        </a:rPr>
-                        <a:t>Innovative interaction method using laser beams; enables precise spatial input.</a:t>
-                      </a:r>
-                      <a:endParaRPr b="0" lang="en-US" sz="1400" spc="-1" strike="noStrike">
-                        <a:solidFill>
-                          <a:srgbClr val="000000"/>
-                        </a:solidFill>
-                        <a:latin typeface="Arial"/>
-                      </a:endParaRPr>
-                    </a:p>
-                  </a:txBody>
-                  <a:tcPr anchor="t" marL="91440" marR="91440">
-                    <a:lnL w="12240">
-                      <a:solidFill>
-                        <a:srgbClr val="ffffff"/>
-                      </a:solidFill>
-                      <a:prstDash val="solid"/>
-                    </a:lnL>
-                    <a:lnR w="12240">
-                      <a:solidFill>
-                        <a:srgbClr val="ffffff"/>
-                      </a:solidFill>
-                      <a:prstDash val="solid"/>
-                    </a:lnR>
-                    <a:lnT w="12240">
-                      <a:solidFill>
-                        <a:srgbClr val="ffffff"/>
-                      </a:solidFill>
-                      <a:prstDash val="solid"/>
-                    </a:lnT>
-                    <a:lnB w="12240">
-                      <a:solidFill>
-                        <a:srgbClr val="ffffff"/>
-                      </a:solidFill>
-                      <a:prstDash val="solid"/>
-                    </a:lnB>
-                    <a:solidFill>
-                      <a:srgbClr val="f2f2f2"/>
-                    </a:solidFill>
-                  </a:tcPr>
-                </a:tc>
-                <a:tc>
-                  <a:txBody>
-                    <a:bodyPr anchor="t">
-                      <a:noAutofit/>
-                    </a:bodyPr>
-                    <a:p>
-                      <a:pPr>
-                        <a:lnSpc>
-                          <a:spcPct val="100000"/>
-                        </a:lnSpc>
-                      </a:pPr>
-                      <a:r>
-                        <a:rPr b="0" lang="en-US" sz="1400" spc="-1" strike="noStrike">
-                          <a:solidFill>
-                            <a:schemeClr val="dk1"/>
-                          </a:solidFill>
-                          <a:latin typeface="Times New Roman"/>
-                          <a:ea typeface="Times New Roman"/>
-                        </a:rPr>
-                        <a:t>System may lack robustness under different lighting or environmental conditions.</a:t>
-                      </a:r>
-                      <a:endParaRPr b="0" lang="en-US" sz="1400" spc="-1" strike="noStrike">
-                        <a:solidFill>
-                          <a:srgbClr val="000000"/>
-                        </a:solidFill>
-                        <a:latin typeface="Arial"/>
-                      </a:endParaRPr>
-                    </a:p>
-                  </a:txBody>
-                  <a:tcPr anchor="t" marL="91440" marR="91440">
-                    <a:lnL w="12240">
-                      <a:solidFill>
-                        <a:srgbClr val="ffffff"/>
-                      </a:solidFill>
-                      <a:prstDash val="solid"/>
-                    </a:lnL>
-                    <a:lnR w="12240">
-                      <a:solidFill>
-                        <a:srgbClr val="ffffff"/>
-                      </a:solidFill>
-                      <a:prstDash val="solid"/>
-                    </a:lnR>
-                    <a:lnT w="12240">
-                      <a:solidFill>
-                        <a:srgbClr val="ffffff"/>
-                      </a:solidFill>
-                      <a:prstDash val="solid"/>
-                    </a:lnT>
-                    <a:lnB w="12240">
-                      <a:solidFill>
-                        <a:srgbClr val="ffffff"/>
-                      </a:solidFill>
-                      <a:prstDash val="solid"/>
-                    </a:lnB>
-                    <a:solidFill>
-                      <a:srgbClr val="f2f2f2"/>
-                    </a:solidFill>
-                  </a:tcPr>
-                </a:tc>
-              </a:tr>
-              <a:tr h="688320">
-                <a:tc>
-                  <a:txBody>
-                    <a:bodyPr anchor="t">
-                      <a:noAutofit/>
-                    </a:bodyPr>
-                    <a:p>
-                      <a:pPr>
-                        <a:lnSpc>
-                          <a:spcPct val="100000"/>
-                        </a:lnSpc>
-                      </a:pPr>
-                      <a:r>
-                        <a:rPr b="0" lang="en-US" sz="1400" spc="-1" strike="noStrike">
-                          <a:solidFill>
-                            <a:schemeClr val="dk1"/>
-                          </a:solidFill>
-                          <a:latin typeface="Times New Roman"/>
-                        </a:rPr>
-                        <a:t>7</a:t>
-                      </a:r>
-                      <a:endParaRPr b="0" lang="en-US" sz="1400" spc="-1" strike="noStrike">
-                        <a:solidFill>
-                          <a:srgbClr val="000000"/>
-                        </a:solidFill>
-                        <a:latin typeface="Arial"/>
-                      </a:endParaRPr>
-                    </a:p>
-                  </a:txBody>
-                  <a:tcPr anchor="t" marL="91440" marR="91440">
-                    <a:lnL w="12240">
-                      <a:solidFill>
-                        <a:srgbClr val="ffffff"/>
-                      </a:solidFill>
-                      <a:prstDash val="solid"/>
-                    </a:lnL>
-                    <a:lnR w="12240">
-                      <a:solidFill>
-                        <a:srgbClr val="ffffff"/>
-                      </a:solidFill>
-                      <a:prstDash val="solid"/>
-                    </a:lnR>
-                    <a:lnT w="12240">
-                      <a:solidFill>
-                        <a:srgbClr val="ffffff"/>
-                      </a:solidFill>
-                      <a:prstDash val="solid"/>
-                    </a:lnT>
-                    <a:lnB w="12240">
-                      <a:solidFill>
-                        <a:srgbClr val="ffffff"/>
-                      </a:solidFill>
-                      <a:prstDash val="solid"/>
-                    </a:lnB>
-                    <a:solidFill>
-                      <a:srgbClr val="f2f2f2"/>
-                    </a:solidFill>
-                  </a:tcPr>
-                </a:tc>
-                <a:tc>
-                  <a:txBody>
-                    <a:bodyPr anchor="t">
-                      <a:noAutofit/>
-                    </a:bodyPr>
-                    <a:p>
-                      <a:pPr>
-                        <a:lnSpc>
-                          <a:spcPct val="100000"/>
-                        </a:lnSpc>
-                      </a:pPr>
-                      <a:r>
-                        <a:rPr b="0" lang="en-US" sz="1400" spc="-1" strike="noStrike">
-                          <a:solidFill>
-                            <a:schemeClr val="dk1"/>
-                          </a:solidFill>
-                          <a:latin typeface="Times New Roman"/>
-                          <a:ea typeface="Times New Roman"/>
-                        </a:rPr>
-                        <a:t>Kaan Akşit &amp; Yuta Itoh – HoloBeam</a:t>
-                      </a:r>
-                      <a:endParaRPr b="0" lang="en-US" sz="1400" spc="-1" strike="noStrike">
-                        <a:solidFill>
-                          <a:srgbClr val="000000"/>
-                        </a:solidFill>
-                        <a:latin typeface="Arial"/>
-                      </a:endParaRPr>
-                    </a:p>
-                  </a:txBody>
-                  <a:tcPr anchor="t" marL="91440" marR="91440">
-                    <a:lnL w="12240">
-                      <a:solidFill>
-                        <a:srgbClr val="ffffff"/>
-                      </a:solidFill>
-                      <a:prstDash val="solid"/>
-                    </a:lnL>
-                    <a:lnR w="12240">
-                      <a:solidFill>
-                        <a:srgbClr val="ffffff"/>
-                      </a:solidFill>
-                      <a:prstDash val="solid"/>
-                    </a:lnR>
-                    <a:lnT w="12240">
-                      <a:solidFill>
-                        <a:srgbClr val="ffffff"/>
-                      </a:solidFill>
-                      <a:prstDash val="solid"/>
-                    </a:lnT>
-                    <a:lnB w="12240">
-                      <a:solidFill>
-                        <a:srgbClr val="ffffff"/>
-                      </a:solidFill>
-                      <a:prstDash val="solid"/>
-                    </a:lnB>
-                    <a:solidFill>
-                      <a:srgbClr val="f2f2f2"/>
-                    </a:solidFill>
-                  </a:tcPr>
-                </a:tc>
-                <a:tc>
-                  <a:txBody>
-                    <a:bodyPr anchor="t">
-                      <a:noAutofit/>
-                    </a:bodyPr>
-                    <a:p>
-                      <a:pPr>
-                        <a:lnSpc>
-                          <a:spcPct val="100000"/>
-                        </a:lnSpc>
-                      </a:pPr>
-                      <a:r>
-                        <a:rPr b="0" lang="en-US" sz="1400" spc="-1" strike="noStrike">
-                          <a:solidFill>
-                            <a:schemeClr val="dk1"/>
-                          </a:solidFill>
-                          <a:latin typeface="Times New Roman"/>
-                          <a:ea typeface="Times New Roman"/>
-                        </a:rPr>
-                        <a:t>Projects directly onto retina for immersive field of view; eliminates traditional optics.</a:t>
-                      </a:r>
-                      <a:endParaRPr b="0" lang="en-US" sz="1400" spc="-1" strike="noStrike">
-                        <a:solidFill>
-                          <a:srgbClr val="000000"/>
-                        </a:solidFill>
-                        <a:latin typeface="Arial"/>
-                      </a:endParaRPr>
-                    </a:p>
-                  </a:txBody>
-                  <a:tcPr anchor="t" marL="91440" marR="91440">
-                    <a:lnL w="12240">
-                      <a:solidFill>
-                        <a:srgbClr val="ffffff"/>
-                      </a:solidFill>
-                      <a:prstDash val="solid"/>
-                    </a:lnL>
-                    <a:lnR w="12240">
-                      <a:solidFill>
-                        <a:srgbClr val="ffffff"/>
-                      </a:solidFill>
-                      <a:prstDash val="solid"/>
-                    </a:lnR>
-                    <a:lnT w="12240">
-                      <a:solidFill>
-                        <a:srgbClr val="ffffff"/>
-                      </a:solidFill>
-                      <a:prstDash val="solid"/>
-                    </a:lnT>
-                    <a:lnB w="12240">
-                      <a:solidFill>
-                        <a:srgbClr val="ffffff"/>
-                      </a:solidFill>
-                      <a:prstDash val="solid"/>
-                    </a:lnB>
-                    <a:solidFill>
-                      <a:srgbClr val="f2f2f2"/>
-                    </a:solidFill>
-                  </a:tcPr>
-                </a:tc>
-                <a:tc>
-                  <a:txBody>
-                    <a:bodyPr anchor="t">
-                      <a:noAutofit/>
-                    </a:bodyPr>
-                    <a:p>
-                      <a:pPr>
-                        <a:lnSpc>
-                          <a:spcPct val="100000"/>
-                        </a:lnSpc>
-                      </a:pPr>
-                      <a:r>
-                        <a:rPr b="0" lang="en-US" sz="1400" spc="-1" strike="noStrike">
-                          <a:solidFill>
-                            <a:schemeClr val="dk1"/>
-                          </a:solidFill>
-                          <a:latin typeface="Times New Roman"/>
-                          <a:ea typeface="Times New Roman"/>
-                        </a:rPr>
-                        <a:t>Still experimental; safety and eye comfort in long-term use need more validation.</a:t>
-                      </a:r>
-                      <a:endParaRPr b="0" lang="en-US" sz="1400" spc="-1" strike="noStrike">
-                        <a:solidFill>
-                          <a:srgbClr val="000000"/>
-                        </a:solidFill>
-                        <a:latin typeface="Arial"/>
-                      </a:endParaRPr>
-                    </a:p>
-                  </a:txBody>
-                  <a:tcPr anchor="t" marL="91440" marR="91440">
-                    <a:lnL w="12240">
-                      <a:solidFill>
-                        <a:srgbClr val="ffffff"/>
-                      </a:solidFill>
-                      <a:prstDash val="solid"/>
-                    </a:lnL>
-                    <a:lnR w="12240">
-                      <a:solidFill>
-                        <a:srgbClr val="ffffff"/>
-                      </a:solidFill>
-                      <a:prstDash val="solid"/>
-                    </a:lnR>
-                    <a:lnT w="12240">
-                      <a:solidFill>
-                        <a:srgbClr val="ffffff"/>
-                      </a:solidFill>
-                      <a:prstDash val="solid"/>
-                    </a:lnT>
-                    <a:lnB w="12240">
-                      <a:solidFill>
-                        <a:srgbClr val="ffffff"/>
-                      </a:solidFill>
-                      <a:prstDash val="solid"/>
-                    </a:lnB>
-                    <a:solidFill>
-                      <a:srgbClr val="f2f2f2"/>
-                    </a:solidFill>
-                  </a:tcPr>
-                </a:tc>
-              </a:tr>
-              <a:tr h="712440">
-                <a:tc>
-                  <a:txBody>
-                    <a:bodyPr anchor="t">
-                      <a:noAutofit/>
-                    </a:bodyPr>
-                    <a:p>
-                      <a:pPr>
-                        <a:lnSpc>
-                          <a:spcPct val="100000"/>
-                        </a:lnSpc>
-                      </a:pPr>
-                      <a:r>
-                        <a:rPr b="0" lang="en-US" sz="1400" spc="-1" strike="noStrike">
-                          <a:solidFill>
-                            <a:schemeClr val="dk1"/>
-                          </a:solidFill>
-                          <a:latin typeface="Times New Roman"/>
-                        </a:rPr>
-                        <a:t>8</a:t>
-                      </a:r>
-                      <a:endParaRPr b="0" lang="en-US" sz="1400" spc="-1" strike="noStrike">
-                        <a:solidFill>
-                          <a:srgbClr val="000000"/>
-                        </a:solidFill>
-                        <a:latin typeface="Arial"/>
-                      </a:endParaRPr>
-                    </a:p>
-                  </a:txBody>
-                  <a:tcPr anchor="t" marL="91440" marR="91440">
-                    <a:lnL w="12240">
-                      <a:solidFill>
-                        <a:srgbClr val="ffffff"/>
-                      </a:solidFill>
-                      <a:prstDash val="solid"/>
-                    </a:lnL>
-                    <a:lnR w="12240">
-                      <a:solidFill>
-                        <a:srgbClr val="ffffff"/>
-                      </a:solidFill>
-                      <a:prstDash val="solid"/>
-                    </a:lnR>
-                    <a:lnT w="12240">
-                      <a:solidFill>
-                        <a:srgbClr val="ffffff"/>
-                      </a:solidFill>
-                      <a:prstDash val="solid"/>
-                    </a:lnT>
-                    <a:lnB w="12240">
-                      <a:solidFill>
-                        <a:srgbClr val="ffffff"/>
-                      </a:solidFill>
-                      <a:prstDash val="solid"/>
-                    </a:lnB>
-                    <a:solidFill>
-                      <a:srgbClr val="f2f2f2"/>
-                    </a:solidFill>
-                  </a:tcPr>
-                </a:tc>
-                <a:tc>
-                  <a:txBody>
-                    <a:bodyPr anchor="t">
-                      <a:noAutofit/>
-                    </a:bodyPr>
-                    <a:p>
-                      <a:pPr>
-                        <a:lnSpc>
-                          <a:spcPct val="100000"/>
-                        </a:lnSpc>
-                      </a:pPr>
-                      <a:r>
-                        <a:rPr b="0" lang="en-US" sz="1400" spc="-1" strike="noStrike">
-                          <a:solidFill>
-                            <a:schemeClr val="dk1"/>
-                          </a:solidFill>
-                          <a:latin typeface="Times New Roman"/>
-                          <a:ea typeface="Times New Roman"/>
-                        </a:rPr>
-                        <a:t>Parimal Chakravarthula et al. – Gaze-contingent speckle suppression</a:t>
-                      </a:r>
-                      <a:endParaRPr b="0" lang="en-US" sz="1400" spc="-1" strike="noStrike">
-                        <a:solidFill>
-                          <a:srgbClr val="000000"/>
-                        </a:solidFill>
-                        <a:latin typeface="Arial"/>
-                      </a:endParaRPr>
-                    </a:p>
-                  </a:txBody>
-                  <a:tcPr anchor="t" marL="91440" marR="91440">
-                    <a:lnL w="12240">
-                      <a:solidFill>
-                        <a:srgbClr val="ffffff"/>
-                      </a:solidFill>
-                      <a:prstDash val="solid"/>
-                    </a:lnL>
-                    <a:lnR w="12240">
-                      <a:solidFill>
-                        <a:srgbClr val="ffffff"/>
-                      </a:solidFill>
-                      <a:prstDash val="solid"/>
-                    </a:lnR>
-                    <a:lnT w="12240">
-                      <a:solidFill>
-                        <a:srgbClr val="ffffff"/>
-                      </a:solidFill>
-                      <a:prstDash val="solid"/>
-                    </a:lnT>
-                    <a:lnB w="12240">
-                      <a:solidFill>
-                        <a:srgbClr val="ffffff"/>
-                      </a:solidFill>
-                      <a:prstDash val="solid"/>
-                    </a:lnB>
-                    <a:solidFill>
-                      <a:srgbClr val="f2f2f2"/>
-                    </a:solidFill>
-                  </a:tcPr>
-                </a:tc>
-                <a:tc>
-                  <a:txBody>
-                    <a:bodyPr anchor="t">
-                      <a:noAutofit/>
-                    </a:bodyPr>
-                    <a:p>
-                      <a:pPr>
-                        <a:lnSpc>
-                          <a:spcPct val="100000"/>
-                        </a:lnSpc>
-                      </a:pPr>
-                      <a:r>
-                        <a:rPr b="0" lang="en-US" sz="1400" spc="-1" strike="noStrike">
-                          <a:solidFill>
-                            <a:schemeClr val="dk1"/>
-                          </a:solidFill>
-                          <a:latin typeface="Times New Roman"/>
-                          <a:ea typeface="Times New Roman"/>
-                        </a:rPr>
-                        <a:t>Reduces visual noise in holographic displays; uses gaze tracking for targeted enhancement.</a:t>
-                      </a:r>
-                      <a:endParaRPr b="0" lang="en-US" sz="1400" spc="-1" strike="noStrike">
-                        <a:solidFill>
-                          <a:srgbClr val="000000"/>
-                        </a:solidFill>
-                        <a:latin typeface="Arial"/>
-                      </a:endParaRPr>
-                    </a:p>
-                  </a:txBody>
-                  <a:tcPr anchor="t" marL="91440" marR="91440">
-                    <a:lnL w="12240">
-                      <a:solidFill>
-                        <a:srgbClr val="ffffff"/>
-                      </a:solidFill>
-                      <a:prstDash val="solid"/>
-                    </a:lnL>
-                    <a:lnR w="12240">
-                      <a:solidFill>
-                        <a:srgbClr val="ffffff"/>
-                      </a:solidFill>
-                      <a:prstDash val="solid"/>
-                    </a:lnR>
-                    <a:lnT w="12240">
-                      <a:solidFill>
-                        <a:srgbClr val="ffffff"/>
-                      </a:solidFill>
-                      <a:prstDash val="solid"/>
-                    </a:lnT>
-                    <a:lnB w="12240">
-                      <a:solidFill>
-                        <a:srgbClr val="ffffff"/>
-                      </a:solidFill>
-                      <a:prstDash val="solid"/>
-                    </a:lnB>
-                    <a:solidFill>
-                      <a:srgbClr val="f2f2f2"/>
-                    </a:solidFill>
-                  </a:tcPr>
-                </a:tc>
-                <a:tc>
-                  <a:txBody>
-                    <a:bodyPr anchor="t">
-                      <a:noAutofit/>
-                    </a:bodyPr>
-                    <a:p>
-                      <a:pPr>
-                        <a:lnSpc>
-                          <a:spcPct val="100000"/>
-                        </a:lnSpc>
-                      </a:pPr>
-                      <a:r>
-                        <a:rPr b="0" lang="en-US" sz="1400" spc="-1" strike="noStrike">
-                          <a:solidFill>
-                            <a:schemeClr val="dk1"/>
-                          </a:solidFill>
-                          <a:latin typeface="Times New Roman"/>
-                          <a:ea typeface="Times New Roman"/>
-                        </a:rPr>
-                        <a:t>Complexity increases due to need for accurate eye tracking; system latency can be a concern.</a:t>
-                      </a:r>
-                      <a:endParaRPr b="0" lang="en-US" sz="1400" spc="-1" strike="noStrike">
-                        <a:solidFill>
-                          <a:srgbClr val="000000"/>
-                        </a:solidFill>
-                        <a:latin typeface="Arial"/>
-                      </a:endParaRPr>
-                    </a:p>
-                  </a:txBody>
-                  <a:tcPr anchor="t" marL="91440" marR="91440">
-                    <a:lnL w="12240">
-                      <a:solidFill>
-                        <a:srgbClr val="ffffff"/>
-                      </a:solidFill>
-                      <a:prstDash val="solid"/>
-                    </a:lnL>
-                    <a:lnR w="12240">
-                      <a:solidFill>
-                        <a:srgbClr val="ffffff"/>
-                      </a:solidFill>
-                      <a:prstDash val="solid"/>
-                    </a:lnR>
-                    <a:lnT w="12240">
-                      <a:solidFill>
-                        <a:srgbClr val="ffffff"/>
-                      </a:solidFill>
-                      <a:prstDash val="solid"/>
-                    </a:lnT>
-                    <a:lnB w="12240">
-                      <a:solidFill>
-                        <a:srgbClr val="ffffff"/>
-                      </a:solidFill>
-                      <a:prstDash val="solid"/>
-                    </a:lnB>
-                    <a:solidFill>
-                      <a:srgbClr val="f2f2f2"/>
-                    </a:solidFill>
-                  </a:tcPr>
-                </a:tc>
-              </a:tr>
-              <a:tr h="696600">
-                <a:tc>
-                  <a:txBody>
-                    <a:bodyPr anchor="t">
-                      <a:noAutofit/>
-                    </a:bodyPr>
-                    <a:p>
-                      <a:pPr>
-                        <a:lnSpc>
-                          <a:spcPct val="100000"/>
-                        </a:lnSpc>
-                      </a:pPr>
-                      <a:r>
-                        <a:rPr b="0" lang="en-US" sz="1400" spc="-1" strike="noStrike">
-                          <a:solidFill>
-                            <a:schemeClr val="dk1"/>
-                          </a:solidFill>
-                          <a:latin typeface="Times New Roman"/>
-                        </a:rPr>
-                        <a:t>9</a:t>
-                      </a:r>
-                      <a:endParaRPr b="0" lang="en-US" sz="1400" spc="-1" strike="noStrike">
-                        <a:solidFill>
-                          <a:srgbClr val="000000"/>
-                        </a:solidFill>
-                        <a:latin typeface="Arial"/>
-                      </a:endParaRPr>
-                    </a:p>
-                  </a:txBody>
-                  <a:tcPr anchor="t" marL="91440" marR="91440">
-                    <a:lnL w="12240">
-                      <a:solidFill>
-                        <a:srgbClr val="ffffff"/>
-                      </a:solidFill>
-                      <a:prstDash val="solid"/>
-                    </a:lnL>
-                    <a:lnR w="12240">
-                      <a:solidFill>
-                        <a:srgbClr val="ffffff"/>
-                      </a:solidFill>
-                      <a:prstDash val="solid"/>
-                    </a:lnR>
-                    <a:lnT w="12240">
-                      <a:solidFill>
-                        <a:srgbClr val="ffffff"/>
-                      </a:solidFill>
-                      <a:prstDash val="solid"/>
-                    </a:lnT>
-                    <a:lnB w="12240">
-                      <a:solidFill>
-                        <a:srgbClr val="ffffff"/>
-                      </a:solidFill>
-                      <a:prstDash val="solid"/>
-                    </a:lnB>
-                    <a:solidFill>
-                      <a:srgbClr val="f2f2f2"/>
-                    </a:solidFill>
-                  </a:tcPr>
-                </a:tc>
-                <a:tc>
-                  <a:txBody>
-                    <a:bodyPr anchor="t">
-                      <a:noAutofit/>
-                    </a:bodyPr>
-                    <a:p>
-                      <a:pPr>
-                        <a:lnSpc>
-                          <a:spcPct val="100000"/>
-                        </a:lnSpc>
-                      </a:pPr>
-                      <a:r>
-                        <a:rPr b="0" lang="en-US" sz="1400" spc="-1" strike="noStrike">
-                          <a:solidFill>
-                            <a:schemeClr val="dk1"/>
-                          </a:solidFill>
-                          <a:latin typeface="Times New Roman"/>
-                          <a:ea typeface="Times New Roman"/>
-                        </a:rPr>
-                        <a:t>M. J. Jeong et al. – Screenless Display for Interactive Applications</a:t>
-                      </a:r>
-                      <a:endParaRPr b="0" lang="en-US" sz="1400" spc="-1" strike="noStrike">
-                        <a:solidFill>
-                          <a:srgbClr val="000000"/>
-                        </a:solidFill>
-                        <a:latin typeface="Arial"/>
-                      </a:endParaRPr>
-                    </a:p>
-                  </a:txBody>
-                  <a:tcPr anchor="t" marL="91440" marR="91440">
-                    <a:lnL w="12240">
-                      <a:solidFill>
-                        <a:srgbClr val="ffffff"/>
-                      </a:solidFill>
-                      <a:prstDash val="solid"/>
-                    </a:lnL>
-                    <a:lnR w="12240">
-                      <a:solidFill>
-                        <a:srgbClr val="ffffff"/>
-                      </a:solidFill>
-                      <a:prstDash val="solid"/>
-                    </a:lnR>
-                    <a:lnT w="12240">
-                      <a:solidFill>
-                        <a:srgbClr val="ffffff"/>
-                      </a:solidFill>
-                      <a:prstDash val="solid"/>
-                    </a:lnT>
-                    <a:lnB w="12240">
-                      <a:solidFill>
-                        <a:srgbClr val="ffffff"/>
-                      </a:solidFill>
-                      <a:prstDash val="solid"/>
-                    </a:lnB>
-                    <a:solidFill>
-                      <a:srgbClr val="f2f2f2"/>
-                    </a:solidFill>
-                  </a:tcPr>
-                </a:tc>
-                <a:tc>
-                  <a:txBody>
-                    <a:bodyPr anchor="t">
-                      <a:noAutofit/>
-                    </a:bodyPr>
-                    <a:p>
-                      <a:pPr>
-                        <a:lnSpc>
-                          <a:spcPct val="100000"/>
-                        </a:lnSpc>
-                      </a:pPr>
-                      <a:r>
-                        <a:rPr b="0" lang="en-US" sz="1400" spc="-1" strike="noStrike">
-                          <a:solidFill>
-                            <a:schemeClr val="dk1"/>
-                          </a:solidFill>
-                          <a:latin typeface="Times New Roman"/>
-                          <a:ea typeface="Times New Roman"/>
-                        </a:rPr>
-                        <a:t>Applies screenless displays to practical domains like smart homes and gaming.</a:t>
-                      </a:r>
-                      <a:endParaRPr b="0" lang="en-US" sz="1400" spc="-1" strike="noStrike">
-                        <a:solidFill>
-                          <a:srgbClr val="000000"/>
-                        </a:solidFill>
-                        <a:latin typeface="Arial"/>
-                      </a:endParaRPr>
-                    </a:p>
-                  </a:txBody>
-                  <a:tcPr anchor="t" marL="91440" marR="91440">
-                    <a:lnL w="12240">
-                      <a:solidFill>
-                        <a:srgbClr val="ffffff"/>
-                      </a:solidFill>
-                      <a:prstDash val="solid"/>
-                    </a:lnL>
-                    <a:lnR w="12240">
-                      <a:solidFill>
-                        <a:srgbClr val="ffffff"/>
-                      </a:solidFill>
-                      <a:prstDash val="solid"/>
-                    </a:lnR>
-                    <a:lnT w="12240">
-                      <a:solidFill>
-                        <a:srgbClr val="ffffff"/>
-                      </a:solidFill>
-                      <a:prstDash val="solid"/>
-                    </a:lnT>
-                    <a:lnB w="12240">
-                      <a:solidFill>
-                        <a:srgbClr val="ffffff"/>
-                      </a:solidFill>
-                      <a:prstDash val="solid"/>
-                    </a:lnB>
-                    <a:solidFill>
-                      <a:srgbClr val="f2f2f2"/>
-                    </a:solidFill>
-                  </a:tcPr>
-                </a:tc>
-                <a:tc>
-                  <a:txBody>
-                    <a:bodyPr anchor="t">
-                      <a:noAutofit/>
-                    </a:bodyPr>
-                    <a:p>
-                      <a:pPr>
-                        <a:lnSpc>
-                          <a:spcPct val="100000"/>
-                        </a:lnSpc>
-                      </a:pPr>
-                      <a:r>
-                        <a:rPr b="0" lang="en-US" sz="1400" spc="-1" strike="noStrike">
-                          <a:solidFill>
-                            <a:schemeClr val="dk1"/>
-                          </a:solidFill>
-                          <a:latin typeface="Times New Roman"/>
-                          <a:ea typeface="Times New Roman"/>
-                        </a:rPr>
-                        <a:t>Focus is more on applications; lacks detailed hardware or technical innovations.</a:t>
-                      </a:r>
-                      <a:endParaRPr b="0" lang="en-US" sz="1400" spc="-1" strike="noStrike">
-                        <a:solidFill>
-                          <a:srgbClr val="000000"/>
-                        </a:solidFill>
-                        <a:latin typeface="Arial"/>
-                      </a:endParaRPr>
-                    </a:p>
-                  </a:txBody>
-                  <a:tcPr anchor="t" marL="91440" marR="91440">
-                    <a:lnL w="12240">
-                      <a:solidFill>
-                        <a:srgbClr val="ffffff"/>
-                      </a:solidFill>
-                      <a:prstDash val="solid"/>
-                    </a:lnL>
-                    <a:lnR w="12240">
-                      <a:solidFill>
-                        <a:srgbClr val="ffffff"/>
-                      </a:solidFill>
-                      <a:prstDash val="solid"/>
-                    </a:lnR>
-                    <a:lnT w="12240">
-                      <a:solidFill>
-                        <a:srgbClr val="ffffff"/>
-                      </a:solidFill>
-                      <a:prstDash val="solid"/>
-                    </a:lnT>
-                    <a:lnB w="12240">
-                      <a:solidFill>
-                        <a:srgbClr val="ffffff"/>
-                      </a:solidFill>
-                      <a:prstDash val="solid"/>
-                    </a:lnB>
-                    <a:solidFill>
-                      <a:srgbClr val="f2f2f2"/>
-                    </a:solidFill>
-                  </a:tcPr>
-                </a:tc>
-              </a:tr>
-              <a:tr h="697320">
-                <a:tc>
-                  <a:txBody>
-                    <a:bodyPr anchor="t">
-                      <a:noAutofit/>
-                    </a:bodyPr>
-                    <a:p>
-                      <a:pPr>
-                        <a:lnSpc>
-                          <a:spcPct val="100000"/>
-                        </a:lnSpc>
-                      </a:pPr>
-                      <a:r>
-                        <a:rPr b="0" lang="en-US" sz="1400" spc="-1" strike="noStrike">
-                          <a:solidFill>
-                            <a:schemeClr val="dk1"/>
-                          </a:solidFill>
-                          <a:latin typeface="Times New Roman"/>
-                        </a:rPr>
-                        <a:t>10</a:t>
-                      </a:r>
-                      <a:endParaRPr b="0" lang="en-US" sz="1400" spc="-1" strike="noStrike">
-                        <a:solidFill>
-                          <a:srgbClr val="000000"/>
-                        </a:solidFill>
-                        <a:latin typeface="Arial"/>
-                      </a:endParaRPr>
-                    </a:p>
-                  </a:txBody>
-                  <a:tcPr anchor="t" marL="91440" marR="91440">
-                    <a:lnL w="12240">
-                      <a:solidFill>
-                        <a:srgbClr val="ffffff"/>
-                      </a:solidFill>
-                      <a:prstDash val="solid"/>
-                    </a:lnL>
-                    <a:lnR w="12240">
-                      <a:solidFill>
-                        <a:srgbClr val="ffffff"/>
-                      </a:solidFill>
-                      <a:prstDash val="solid"/>
-                    </a:lnR>
-                    <a:lnT w="12240">
-                      <a:solidFill>
-                        <a:srgbClr val="ffffff"/>
-                      </a:solidFill>
-                      <a:prstDash val="solid"/>
-                    </a:lnT>
-                    <a:lnB w="12240">
-                      <a:solidFill>
-                        <a:srgbClr val="ffffff"/>
-                      </a:solidFill>
-                      <a:prstDash val="solid"/>
-                    </a:lnB>
-                    <a:solidFill>
-                      <a:srgbClr val="f2f2f2"/>
-                    </a:solidFill>
-                  </a:tcPr>
-                </a:tc>
-                <a:tc>
-                  <a:txBody>
-                    <a:bodyPr anchor="t">
-                      <a:noAutofit/>
-                    </a:bodyPr>
-                    <a:p>
-                      <a:pPr>
-                        <a:lnSpc>
-                          <a:spcPct val="100000"/>
-                        </a:lnSpc>
-                      </a:pPr>
-                      <a:r>
-                        <a:rPr b="0" lang="en-US" sz="1400" spc="-1" strike="noStrike">
-                          <a:solidFill>
-                            <a:schemeClr val="dk1"/>
-                          </a:solidFill>
-                          <a:latin typeface="Times New Roman"/>
-                          <a:ea typeface="Times New Roman"/>
-                        </a:rPr>
-                        <a:t>Parimal Bhosale et al. – Screenless Display: A Review</a:t>
-                      </a:r>
-                      <a:endParaRPr b="0" lang="en-US" sz="1400" spc="-1" strike="noStrike">
-                        <a:solidFill>
-                          <a:srgbClr val="000000"/>
-                        </a:solidFill>
-                        <a:latin typeface="Arial"/>
-                      </a:endParaRPr>
-                    </a:p>
-                  </a:txBody>
-                  <a:tcPr anchor="t" marL="91440" marR="91440">
-                    <a:lnL w="12240">
-                      <a:solidFill>
-                        <a:srgbClr val="ffffff"/>
-                      </a:solidFill>
-                      <a:prstDash val="solid"/>
-                    </a:lnL>
-                    <a:lnR w="12240">
-                      <a:solidFill>
-                        <a:srgbClr val="ffffff"/>
-                      </a:solidFill>
-                      <a:prstDash val="solid"/>
-                    </a:lnR>
-                    <a:lnT w="12240">
-                      <a:solidFill>
-                        <a:srgbClr val="ffffff"/>
-                      </a:solidFill>
-                      <a:prstDash val="solid"/>
-                    </a:lnT>
-                    <a:lnB w="12240">
-                      <a:solidFill>
-                        <a:srgbClr val="ffffff"/>
-                      </a:solidFill>
-                      <a:prstDash val="solid"/>
-                    </a:lnB>
-                    <a:solidFill>
-                      <a:srgbClr val="f2f2f2"/>
-                    </a:solidFill>
-                  </a:tcPr>
-                </a:tc>
-                <a:tc>
-                  <a:txBody>
-                    <a:bodyPr anchor="t">
-                      <a:noAutofit/>
-                    </a:bodyPr>
-                    <a:p>
-                      <a:pPr>
-                        <a:lnSpc>
-                          <a:spcPct val="100000"/>
-                        </a:lnSpc>
-                      </a:pPr>
-                      <a:r>
-                        <a:rPr b="0" lang="en-US" sz="1400" spc="-1" strike="noStrike">
-                          <a:solidFill>
-                            <a:schemeClr val="dk1"/>
-                          </a:solidFill>
-                          <a:latin typeface="Times New Roman"/>
-                          <a:ea typeface="Times New Roman"/>
-                        </a:rPr>
-                        <a:t>Comprehensive survey of screenless display types and technologies.</a:t>
-                      </a:r>
-                      <a:endParaRPr b="0" lang="en-US" sz="1400" spc="-1" strike="noStrike">
-                        <a:solidFill>
-                          <a:srgbClr val="000000"/>
-                        </a:solidFill>
-                        <a:latin typeface="Arial"/>
-                      </a:endParaRPr>
-                    </a:p>
-                  </a:txBody>
-                  <a:tcPr anchor="t" marL="91440" marR="91440">
-                    <a:lnL w="12240">
-                      <a:solidFill>
-                        <a:srgbClr val="ffffff"/>
-                      </a:solidFill>
-                      <a:prstDash val="solid"/>
-                    </a:lnL>
-                    <a:lnR w="12240">
-                      <a:solidFill>
-                        <a:srgbClr val="ffffff"/>
-                      </a:solidFill>
-                      <a:prstDash val="solid"/>
-                    </a:lnR>
-                    <a:lnT w="12240">
-                      <a:solidFill>
-                        <a:srgbClr val="ffffff"/>
-                      </a:solidFill>
-                      <a:prstDash val="solid"/>
-                    </a:lnT>
-                    <a:lnB w="12240">
-                      <a:solidFill>
-                        <a:srgbClr val="ffffff"/>
-                      </a:solidFill>
-                      <a:prstDash val="solid"/>
-                    </a:lnB>
-                    <a:solidFill>
-                      <a:srgbClr val="f2f2f2"/>
-                    </a:solidFill>
-                  </a:tcPr>
-                </a:tc>
-                <a:tc>
-                  <a:txBody>
-                    <a:bodyPr anchor="t">
-                      <a:noAutofit/>
-                    </a:bodyPr>
-                    <a:p>
-                      <a:pPr>
-                        <a:lnSpc>
-                          <a:spcPct val="100000"/>
-                        </a:lnSpc>
-                      </a:pPr>
-                      <a:r>
-                        <a:rPr b="0" lang="en-US" sz="1400" spc="-1" strike="noStrike">
-                          <a:solidFill>
-                            <a:schemeClr val="dk1"/>
-                          </a:solidFill>
-                          <a:latin typeface="Times New Roman"/>
-                          <a:ea typeface="Times New Roman"/>
-                        </a:rPr>
-                        <a:t>Review paper—does not propose or test a new system; mostly secondary research.</a:t>
-                      </a:r>
-                      <a:endParaRPr b="0" lang="en-US" sz="1400" spc="-1" strike="noStrike">
-                        <a:solidFill>
-                          <a:srgbClr val="000000"/>
-                        </a:solidFill>
-                        <a:latin typeface="Arial"/>
-                      </a:endParaRPr>
-                    </a:p>
-                  </a:txBody>
-                  <a:tcPr anchor="t" marL="91440" marR="91440">
-                    <a:lnL w="12240">
-                      <a:solidFill>
-                        <a:srgbClr val="ffffff"/>
-                      </a:solidFill>
-                      <a:prstDash val="solid"/>
-                    </a:lnL>
-                    <a:lnR w="12240">
-                      <a:solidFill>
-                        <a:srgbClr val="ffffff"/>
-                      </a:solidFill>
-                      <a:prstDash val="solid"/>
-                    </a:lnR>
-                    <a:lnT w="12240">
-                      <a:solidFill>
-                        <a:srgbClr val="ffffff"/>
-                      </a:solidFill>
-                      <a:prstDash val="solid"/>
-                    </a:lnT>
-                    <a:lnB w="12240">
-                      <a:solidFill>
-                        <a:srgbClr val="ffffff"/>
-                      </a:solidFill>
-                      <a:prstDash val="solid"/>
-                    </a:lnB>
-                    <a:solidFill>
-                      <a:srgbClr val="f2f2f2"/>
-                    </a:solidFill>
-                  </a:tcPr>
-                </a:tc>
-              </a:tr>
-            </a:tbl>
-          </a:graphicData>
-        </a:graphic>
-      </p:graphicFrame>
       <p:sp>
         <p:nvSpPr>
-          <p:cNvPr id="31" name=""/>
-          <p:cNvSpPr txBox="1"/>
+          <p:cNvPr id="39" name="Google Shape;59;p6"/>
+          <p:cNvSpPr/>
           <p:nvPr/>
         </p:nvSpPr>
         <p:spPr>
           <a:xfrm>
-            <a:off x="8605440" y="4827240"/>
-            <a:ext cx="538560" cy="316440"/>
+            <a:off x="279000" y="2457360"/>
+            <a:ext cx="360" cy="438840"/>
+          </a:xfrm>
+          <a:prstGeom prst="rect">
+            <a:avLst/>
+          </a:prstGeom>
+          <a:solidFill>
+            <a:srgbClr val="ffffff"/>
+          </a:solidFill>
+          <a:ln w="0">
+            <a:noFill/>
+          </a:ln>
+        </p:spPr>
+        <p:style>
+          <a:lnRef idx="0"/>
+          <a:fillRef idx="0"/>
+          <a:effectRef idx="0"/>
+          <a:fontRef idx="minor"/>
+        </p:style>
+        <p:txBody>
+          <a:bodyPr lIns="0" rIns="0" tIns="66600" bIns="66600" anchor="ctr">
+            <a:spAutoFit/>
+          </a:bodyPr>
+          <a:p>
+            <a:pPr>
+              <a:lnSpc>
+                <a:spcPct val="100000"/>
+              </a:lnSpc>
+            </a:pPr>
+            <a:endParaRPr b="0" lang="en-US" sz="2000" spc="-1" strike="noStrike">
+              <a:solidFill>
+                <a:schemeClr val="dk1"/>
+              </a:solidFill>
+              <a:latin typeface="Arial"/>
+              <a:ea typeface="Arial"/>
+            </a:endParaRPr>
+          </a:p>
+        </p:txBody>
+      </p:sp>
+      <p:sp>
+        <p:nvSpPr>
+          <p:cNvPr id="40" name="Google Shape;60;p6"/>
+          <p:cNvSpPr/>
+          <p:nvPr/>
+        </p:nvSpPr>
+        <p:spPr>
+          <a:xfrm>
+            <a:off x="1911240" y="136800"/>
+            <a:ext cx="6102360" cy="636120"/>
           </a:xfrm>
           <a:prstGeom prst="rect">
             <a:avLst/>
@@ -9977,11 +8217,301 @@
             <a:noFill/>
           </a:ln>
         </p:spPr>
+        <p:style>
+          <a:lnRef idx="0"/>
+          <a:fillRef idx="0"/>
+          <a:effectRef idx="0"/>
+          <a:fontRef idx="minor"/>
+        </p:style>
+        <p:txBody>
+          <a:bodyPr lIns="0" rIns="0" tIns="0" bIns="0" anchor="ctr">
+            <a:noAutofit/>
+          </a:bodyPr>
+          <a:p>
+            <a:pPr algn="ctr">
+              <a:lnSpc>
+                <a:spcPct val="100000"/>
+              </a:lnSpc>
+              <a:tabLst>
+                <a:tab algn="l" pos="0"/>
+              </a:tabLst>
+            </a:pPr>
+            <a:r>
+              <a:rPr b="0" lang="en-IN" sz="3600" spc="-1" strike="noStrike">
+                <a:solidFill>
+                  <a:schemeClr val="dk1"/>
+                </a:solidFill>
+                <a:latin typeface="Times New Roman"/>
+                <a:ea typeface="Times New Roman"/>
+              </a:rPr>
+              <a:t>Objectives</a:t>
+            </a:r>
+            <a:r>
+              <a:rPr b="0" lang="en-IN" sz="4000" spc="-1" strike="noStrike">
+                <a:solidFill>
+                  <a:schemeClr val="dk1"/>
+                </a:solidFill>
+                <a:latin typeface="Times New Roman"/>
+                <a:ea typeface="Times New Roman"/>
+              </a:rPr>
+              <a:t> </a:t>
+            </a:r>
+            <a:endParaRPr b="0" lang="en-US" sz="4000" spc="-1" strike="noStrike">
+              <a:solidFill>
+                <a:srgbClr val="000000"/>
+              </a:solidFill>
+              <a:latin typeface="Arial"/>
+            </a:endParaRPr>
+          </a:p>
+        </p:txBody>
+      </p:sp>
+      <p:sp>
+        <p:nvSpPr>
+          <p:cNvPr id="41" name=""/>
+          <p:cNvSpPr/>
+          <p:nvPr/>
+        </p:nvSpPr>
+        <p:spPr>
+          <a:xfrm>
+            <a:off x="45000" y="1089000"/>
+            <a:ext cx="8867160" cy="3936960"/>
+          </a:xfrm>
+          <a:prstGeom prst="rect">
+            <a:avLst/>
+          </a:prstGeom>
+          <a:noFill/>
+          <a:ln w="0">
+            <a:noFill/>
+          </a:ln>
+        </p:spPr>
+        <p:style>
+          <a:lnRef idx="0"/>
+          <a:fillRef idx="0"/>
+          <a:effectRef idx="0"/>
+          <a:fontRef idx="minor"/>
+        </p:style>
         <p:txBody>
           <a:bodyPr lIns="90000" rIns="90000" tIns="45000" bIns="45000" anchor="t">
             <a:noAutofit/>
           </a:bodyPr>
           <a:p>
+            <a:pPr marL="216000" indent="-216000">
+              <a:lnSpc>
+                <a:spcPct val="100000"/>
+              </a:lnSpc>
+              <a:buClr>
+                <a:srgbClr val="000000"/>
+              </a:buClr>
+              <a:buSzPct val="45000"/>
+              <a:buFont typeface="Wingdings" charset="2"/>
+              <a:buChar char=""/>
+            </a:pPr>
+            <a:r>
+              <a:rPr b="0" lang="en-IN" sz="1500" spc="-1" strike="noStrike">
+                <a:solidFill>
+                  <a:srgbClr val="000000"/>
+                </a:solidFill>
+                <a:latin typeface="times new roman"/>
+                <a:ea typeface="Arial"/>
+              </a:rPr>
+              <a:t>To understand the core concept and working of screenless display technology</a:t>
+            </a:r>
+            <a:endParaRPr b="0" lang="en-US" sz="1500" spc="-1" strike="noStrike">
+              <a:solidFill>
+                <a:srgbClr val="000000"/>
+              </a:solidFill>
+              <a:latin typeface="Arial"/>
+            </a:endParaRPr>
+          </a:p>
+          <a:p>
+            <a:pPr>
+              <a:lnSpc>
+                <a:spcPct val="100000"/>
+              </a:lnSpc>
+            </a:pPr>
+            <a:endParaRPr b="0" lang="en-US" sz="1500" spc="-1" strike="noStrike">
+              <a:solidFill>
+                <a:srgbClr val="000000"/>
+              </a:solidFill>
+              <a:latin typeface="Arial"/>
+            </a:endParaRPr>
+          </a:p>
+          <a:p>
+            <a:pPr marL="216000" indent="-216000">
+              <a:lnSpc>
+                <a:spcPct val="100000"/>
+              </a:lnSpc>
+              <a:buClr>
+                <a:srgbClr val="000000"/>
+              </a:buClr>
+              <a:buSzPct val="45000"/>
+              <a:buFont typeface="Wingdings" charset="2"/>
+              <a:buChar char=""/>
+            </a:pPr>
+            <a:r>
+              <a:rPr b="0" lang="en-IN" sz="1500" spc="-1" strike="noStrike">
+                <a:solidFill>
+                  <a:srgbClr val="000000"/>
+                </a:solidFill>
+                <a:latin typeface="times new roman"/>
+                <a:ea typeface="Arial"/>
+              </a:rPr>
+              <a:t>To explore its key enabling technologies like AR, holography, and retinal projection</a:t>
+            </a:r>
+            <a:endParaRPr b="0" lang="en-US" sz="1500" spc="-1" strike="noStrike">
+              <a:solidFill>
+                <a:srgbClr val="000000"/>
+              </a:solidFill>
+              <a:latin typeface="Arial"/>
+            </a:endParaRPr>
+          </a:p>
+          <a:p>
+            <a:pPr>
+              <a:lnSpc>
+                <a:spcPct val="100000"/>
+              </a:lnSpc>
+            </a:pPr>
+            <a:endParaRPr b="0" lang="en-US" sz="1500" spc="-1" strike="noStrike">
+              <a:solidFill>
+                <a:srgbClr val="000000"/>
+              </a:solidFill>
+              <a:latin typeface="Arial"/>
+            </a:endParaRPr>
+          </a:p>
+          <a:p>
+            <a:pPr marL="216000" indent="-216000">
+              <a:lnSpc>
+                <a:spcPct val="100000"/>
+              </a:lnSpc>
+              <a:buClr>
+                <a:srgbClr val="000000"/>
+              </a:buClr>
+              <a:buSzPct val="45000"/>
+              <a:buFont typeface="Wingdings" charset="2"/>
+              <a:buChar char=""/>
+            </a:pPr>
+            <a:r>
+              <a:rPr b="0" lang="en-IN" sz="1500" spc="-1" strike="noStrike">
+                <a:solidFill>
+                  <a:srgbClr val="000000"/>
+                </a:solidFill>
+                <a:latin typeface="times new roman"/>
+                <a:ea typeface="Arial"/>
+              </a:rPr>
+              <a:t>To identify real-world applications across healthcare, education, defense, and entertainment</a:t>
+            </a:r>
+            <a:endParaRPr b="0" lang="en-US" sz="1500" spc="-1" strike="noStrike">
+              <a:solidFill>
+                <a:srgbClr val="000000"/>
+              </a:solidFill>
+              <a:latin typeface="Arial"/>
+            </a:endParaRPr>
+          </a:p>
+          <a:p>
+            <a:pPr>
+              <a:lnSpc>
+                <a:spcPct val="100000"/>
+              </a:lnSpc>
+            </a:pPr>
+            <a:endParaRPr b="0" lang="en-US" sz="1500" spc="-1" strike="noStrike">
+              <a:solidFill>
+                <a:srgbClr val="000000"/>
+              </a:solidFill>
+              <a:latin typeface="Arial"/>
+            </a:endParaRPr>
+          </a:p>
+          <a:p>
+            <a:pPr marL="216000" indent="-216000">
+              <a:lnSpc>
+                <a:spcPct val="100000"/>
+              </a:lnSpc>
+              <a:buClr>
+                <a:srgbClr val="000000"/>
+              </a:buClr>
+              <a:buSzPct val="45000"/>
+              <a:buFont typeface="Wingdings" charset="2"/>
+              <a:buChar char=""/>
+            </a:pPr>
+            <a:r>
+              <a:rPr b="0" lang="en-IN" sz="1500" spc="-1" strike="noStrike">
+                <a:solidFill>
+                  <a:srgbClr val="000000"/>
+                </a:solidFill>
+                <a:latin typeface="times new roman"/>
+                <a:ea typeface="Arial"/>
+              </a:rPr>
+              <a:t>To examine recent innovations such as Mojo Lens and Microsoft HoloLens</a:t>
+            </a:r>
+            <a:endParaRPr b="0" lang="en-US" sz="1500" spc="-1" strike="noStrike">
+              <a:solidFill>
+                <a:srgbClr val="000000"/>
+              </a:solidFill>
+              <a:latin typeface="Arial"/>
+            </a:endParaRPr>
+          </a:p>
+          <a:p>
+            <a:pPr>
+              <a:lnSpc>
+                <a:spcPct val="100000"/>
+              </a:lnSpc>
+            </a:pPr>
+            <a:endParaRPr b="0" lang="en-US" sz="1500" spc="-1" strike="noStrike">
+              <a:solidFill>
+                <a:srgbClr val="000000"/>
+              </a:solidFill>
+              <a:latin typeface="Arial"/>
+            </a:endParaRPr>
+          </a:p>
+          <a:p>
+            <a:pPr>
+              <a:lnSpc>
+                <a:spcPct val="100000"/>
+              </a:lnSpc>
+            </a:pPr>
+            <a:endParaRPr b="0" lang="en-US" sz="1500" spc="-1" strike="noStrike">
+              <a:solidFill>
+                <a:srgbClr val="000000"/>
+              </a:solidFill>
+              <a:latin typeface="Arial"/>
+            </a:endParaRPr>
+          </a:p>
+        </p:txBody>
+      </p:sp>
+      <p:sp>
+        <p:nvSpPr>
+          <p:cNvPr id="42" name=""/>
+          <p:cNvSpPr/>
+          <p:nvPr/>
+        </p:nvSpPr>
+        <p:spPr>
+          <a:xfrm>
+            <a:off x="8553240" y="4827240"/>
+            <a:ext cx="589320" cy="315000"/>
+          </a:xfrm>
+          <a:prstGeom prst="rect">
+            <a:avLst/>
+          </a:prstGeom>
+          <a:noFill/>
+          <a:ln w="0">
+            <a:noFill/>
+          </a:ln>
+        </p:spPr>
+        <p:style>
+          <a:lnRef idx="0"/>
+          <a:fillRef idx="0"/>
+          <a:effectRef idx="0"/>
+          <a:fontRef idx="minor"/>
+        </p:style>
+        <p:txBody>
+          <a:bodyPr lIns="90000" rIns="90000" tIns="45000" bIns="45000" anchor="t">
+            <a:noAutofit/>
+          </a:bodyPr>
+          <a:p>
+            <a:pPr>
+              <a:lnSpc>
+                <a:spcPct val="100000"/>
+              </a:lnSpc>
+            </a:pPr>
             <a:r>
               <a:rPr b="0" lang="en-IN" sz="1600" spc="-1" strike="noStrike">
                 <a:solidFill>
@@ -9990,7 +8520,17 @@
                 <a:latin typeface="times new roman"/>
                 <a:ea typeface="Times New Roman"/>
               </a:rPr>
-              <a:t>7/12</a:t>
+              <a:t> </a:t>
+            </a:r>
+            <a:r>
+              <a:rPr b="0" lang="en-IN" sz="1600" spc="-1" strike="noStrike">
+                <a:solidFill>
+                  <a:srgbClr val="000000"/>
+                </a:solidFill>
+                <a:latin typeface="times new roman"/>
+                <a:ea typeface="Times New Roman"/>
+              </a:rPr>
+              <a:t>8/12</a:t>
             </a:r>
             <a:endParaRPr b="0" lang="en-US" sz="1600" spc="-1" strike="noStrike">
               <a:solidFill>
@@ -10033,64 +8573,14 @@
       </p:grpSpPr>
       <p:sp>
         <p:nvSpPr>
-          <p:cNvPr id="32" name="Google Shape;59;p6"/>
-          <p:cNvSpPr/>
-          <p:nvPr/>
-        </p:nvSpPr>
-        <p:spPr>
-          <a:xfrm>
-            <a:off x="279000" y="2457360"/>
-            <a:ext cx="360" cy="440280"/>
-          </a:xfrm>
-          <a:prstGeom prst="rect">
-            <a:avLst/>
-          </a:prstGeom>
-          <a:solidFill>
-            <a:srgbClr val="ffffff"/>
-          </a:solidFill>
-          <a:ln w="0">
-            <a:noFill/>
-          </a:ln>
-        </p:spPr>
-        <p:style>
-          <a:lnRef idx="0"/>
-          <a:fillRef idx="0"/>
-          <a:effectRef idx="0"/>
-          <a:fontRef idx="minor"/>
-        </p:style>
-        <p:txBody>
-          <a:bodyPr lIns="0" rIns="0" tIns="66600" bIns="66600" anchor="ctr">
-            <a:spAutoFit/>
-          </a:bodyPr>
-          <a:p>
-            <a:pPr>
-              <a:lnSpc>
-                <a:spcPct val="100000"/>
-              </a:lnSpc>
-              <a:tabLst>
-                <a:tab algn="l" pos="0"/>
-              </a:tabLst>
-            </a:pPr>
-            <a:endParaRPr b="0" lang="en-US" sz="2000" spc="-1" strike="noStrike">
-              <a:solidFill>
-                <a:schemeClr val="dk1"/>
-              </a:solidFill>
-              <a:latin typeface="Arial"/>
-              <a:ea typeface="Arial"/>
-            </a:endParaRPr>
-          </a:p>
-        </p:txBody>
-      </p:sp>
-      <p:sp>
-        <p:nvSpPr>
-          <p:cNvPr id="33" name="Google Shape;60;p6"/>
+          <p:cNvPr id="43" name="Google Shape;60;p6"/>
           <p:cNvSpPr/>
           <p:nvPr/>
         </p:nvSpPr>
         <p:spPr>
           <a:xfrm>
             <a:off x="1911240" y="136800"/>
-            <a:ext cx="6103800" cy="637560"/>
+            <a:ext cx="6102360" cy="636120"/>
           </a:xfrm>
           <a:prstGeom prst="rect">
             <a:avLst/>
@@ -10127,7 +8617,7 @@
                 <a:latin typeface="Times New Roman"/>
                 <a:ea typeface="Times New Roman"/>
               </a:rPr>
-              <a:t>Objectives</a:t>
+              <a:t>Technical Relevance</a:t>
             </a:r>
             <a:r>
               <a:rPr b="0" lang="en-IN" sz="4000" spc="-1" strike="noStrike">
@@ -10150,14 +8640,14 @@
       </p:sp>
       <p:sp>
         <p:nvSpPr>
-          <p:cNvPr id="34" name=""/>
+          <p:cNvPr id="44" name=""/>
           <p:cNvSpPr/>
           <p:nvPr/>
         </p:nvSpPr>
         <p:spPr>
           <a:xfrm>
-            <a:off x="45000" y="1089000"/>
-            <a:ext cx="8868600" cy="3938400"/>
+            <a:off x="230040" y="914400"/>
+            <a:ext cx="8683920" cy="3715920"/>
           </a:xfrm>
           <a:prstGeom prst="rect">
             <a:avLst/>
@@ -10178,10 +8668,45 @@
             <a:noAutofit/>
           </a:bodyPr>
           <a:p>
+            <a:pPr>
+              <a:lnSpc>
+                <a:spcPct val="100000"/>
+              </a:lnSpc>
+              <a:spcBef>
+                <a:spcPts val="340"/>
+              </a:spcBef>
+              <a:spcAft>
+                <a:spcPts val="142"/>
+              </a:spcAft>
+            </a:pPr>
+            <a:r>
+              <a:rPr b="1" lang="en-US" sz="1500" spc="-1" strike="noStrike">
+                <a:solidFill>
+                  <a:srgbClr val="000000"/>
+                </a:solidFill>
+                <a:latin typeface="times new roman"/>
+                <a:ea typeface="DejaVu Sans"/>
+              </a:rPr>
+              <a:t>Technical Relevance</a:t>
+            </a:r>
+            <a:endParaRPr b="0" lang="en-US" sz="1500" spc="-1" strike="noStrike">
+              <a:solidFill>
+                <a:srgbClr val="000000"/>
+              </a:solidFill>
+              <a:latin typeface="Arial"/>
+            </a:endParaRPr>
+          </a:p>
+          <a:p>
             <a:pPr marL="216000" indent="-216000">
               <a:lnSpc>
                 <a:spcPct val="100000"/>
               </a:lnSpc>
+              <a:spcBef>
+                <a:spcPts val="340"/>
+              </a:spcBef>
+              <a:spcAft>
+                <a:spcPts val="142"/>
+              </a:spcAft>
               <a:buClr>
                 <a:srgbClr val="000000"/>
               </a:buClr>
@@ -10190,40 +8715,33 @@
               <a:buChar char=""/>
             </a:pPr>
             <a:r>
-              <a:rPr b="0" lang="en-IN" sz="1500" spc="-1" strike="noStrike">
+              <a:rPr b="0" lang="en-US" sz="1500" spc="-1" strike="noStrike">
                 <a:solidFill>
                   <a:srgbClr val="000000"/>
                 </a:solidFill>
                 <a:latin typeface="times new roman"/>
-                <a:ea typeface="Arial"/>
-              </a:rPr>
-              <a:t>To understand the core concept and working of screenless display technology</a:t>
+                <a:ea typeface="DejaVu Sans"/>
+              </a:rPr>
+              <a:t>Eliminates the need for physical screens in VR/AR headsets, holograms, retinal projection, smart glasses, voice interfaces.</a:t>
             </a:r>
             <a:endParaRPr b="0" lang="en-US" sz="1500" spc="-1" strike="noStrike">
               <a:solidFill>
                 <a:srgbClr val="000000"/>
               </a:solidFill>
-              <a:latin typeface="times new roman"/>
-            </a:endParaRPr>
-          </a:p>
-          <a:p>
-            <a:pPr>
+              <a:latin typeface="Arial"/>
+            </a:endParaRPr>
+          </a:p>
+          <a:p>
+            <a:pPr marL="216000" indent="-216000">
               <a:lnSpc>
                 <a:spcPct val="100000"/>
               </a:lnSpc>
-            </a:pPr>
-            <a:endParaRPr b="0" lang="en-US" sz="1500" spc="-1" strike="noStrike">
-              <a:solidFill>
-                <a:srgbClr val="000000"/>
-              </a:solidFill>
-              <a:latin typeface="times new roman"/>
-            </a:endParaRPr>
-          </a:p>
-          <a:p>
-            <a:pPr marL="216000" indent="-216000">
-              <a:lnSpc>
-                <a:spcPct val="100000"/>
-              </a:lnSpc>
+              <a:spcBef>
+                <a:spcPts val="340"/>
+              </a:spcBef>
+              <a:spcAft>
+                <a:spcPts val="142"/>
+              </a:spcAft>
               <a:buClr>
                 <a:srgbClr val="000000"/>
               </a:buClr>
@@ -10232,40 +8750,33 @@
               <a:buChar char=""/>
             </a:pPr>
             <a:r>
-              <a:rPr b="0" lang="en-IN" sz="1500" spc="-1" strike="noStrike">
+              <a:rPr b="0" lang="en-US" sz="1500" spc="-1" strike="noStrike">
                 <a:solidFill>
                   <a:srgbClr val="000000"/>
                 </a:solidFill>
                 <a:latin typeface="times new roman"/>
-                <a:ea typeface="Arial"/>
-              </a:rPr>
-              <a:t>To explore its key enabling technologies like AR, holography, and retinal projection</a:t>
+                <a:ea typeface="DejaVu Sans"/>
+              </a:rPr>
+              <a:t>Supports immersive technologies like AR/VR.</a:t>
             </a:r>
             <a:endParaRPr b="0" lang="en-US" sz="1500" spc="-1" strike="noStrike">
               <a:solidFill>
                 <a:srgbClr val="000000"/>
               </a:solidFill>
-              <a:latin typeface="times new roman"/>
-            </a:endParaRPr>
-          </a:p>
-          <a:p>
-            <a:pPr>
+              <a:latin typeface="Arial"/>
+            </a:endParaRPr>
+          </a:p>
+          <a:p>
+            <a:pPr marL="216000" indent="-216000">
               <a:lnSpc>
                 <a:spcPct val="100000"/>
               </a:lnSpc>
-            </a:pPr>
-            <a:endParaRPr b="0" lang="en-US" sz="1500" spc="-1" strike="noStrike">
-              <a:solidFill>
-                <a:srgbClr val="000000"/>
-              </a:solidFill>
-              <a:latin typeface="times new roman"/>
-            </a:endParaRPr>
-          </a:p>
-          <a:p>
-            <a:pPr marL="216000" indent="-216000">
-              <a:lnSpc>
-                <a:spcPct val="100000"/>
-              </a:lnSpc>
+              <a:spcBef>
+                <a:spcPts val="340"/>
+              </a:spcBef>
+              <a:spcAft>
+                <a:spcPts val="142"/>
+              </a:spcAft>
               <a:buClr>
                 <a:srgbClr val="000000"/>
               </a:buClr>
@@ -10274,40 +8785,33 @@
               <a:buChar char=""/>
             </a:pPr>
             <a:r>
-              <a:rPr b="0" lang="en-IN" sz="1500" spc="-1" strike="noStrike">
+              <a:rPr b="0" lang="en-US" sz="1500" spc="-1" strike="noStrike">
                 <a:solidFill>
                   <a:srgbClr val="000000"/>
                 </a:solidFill>
                 <a:latin typeface="times new roman"/>
-                <a:ea typeface="Arial"/>
-              </a:rPr>
-              <a:t>To identify real-world applications across healthcare, education, defense, and entertainment</a:t>
+                <a:ea typeface="DejaVu Sans"/>
+              </a:rPr>
+              <a:t>Enables hands-free and portable visual interfaces.</a:t>
             </a:r>
             <a:endParaRPr b="0" lang="en-US" sz="1500" spc="-1" strike="noStrike">
               <a:solidFill>
                 <a:srgbClr val="000000"/>
               </a:solidFill>
-              <a:latin typeface="times new roman"/>
-            </a:endParaRPr>
-          </a:p>
-          <a:p>
-            <a:pPr>
+              <a:latin typeface="Arial"/>
+            </a:endParaRPr>
+          </a:p>
+          <a:p>
+            <a:pPr marL="216000" indent="-216000">
               <a:lnSpc>
                 <a:spcPct val="100000"/>
               </a:lnSpc>
-            </a:pPr>
-            <a:endParaRPr b="0" lang="en-US" sz="1500" spc="-1" strike="noStrike">
-              <a:solidFill>
-                <a:srgbClr val="000000"/>
-              </a:solidFill>
-              <a:latin typeface="times new roman"/>
-            </a:endParaRPr>
-          </a:p>
-          <a:p>
-            <a:pPr marL="216000" indent="-216000">
-              <a:lnSpc>
-                <a:spcPct val="100000"/>
-              </a:lnSpc>
+              <a:spcBef>
+                <a:spcPts val="340"/>
+              </a:spcBef>
+              <a:spcAft>
+                <a:spcPts val="142"/>
+              </a:spcAft>
               <a:buClr>
                 <a:srgbClr val="000000"/>
               </a:buClr>
@@ -10316,20 +8820,20 @@
               <a:buChar char=""/>
             </a:pPr>
             <a:r>
-              <a:rPr b="0" lang="en-IN" sz="1500" spc="-1" strike="noStrike">
+              <a:rPr b="0" lang="en-US" sz="1500" spc="-1" strike="noStrike">
                 <a:solidFill>
                   <a:srgbClr val="000000"/>
                 </a:solidFill>
                 <a:latin typeface="times new roman"/>
-                <a:ea typeface="Arial"/>
-              </a:rPr>
-              <a:t>To examine recent innovations such as Mojo Lens and Microsoft HoloLens</a:t>
+                <a:ea typeface="DejaVu Sans"/>
+              </a:rPr>
+              <a:t>Useful in smart glasses, medical imaging, military and automotive displays.</a:t>
             </a:r>
             <a:endParaRPr b="0" lang="en-US" sz="1500" spc="-1" strike="noStrike">
               <a:solidFill>
                 <a:srgbClr val="000000"/>
               </a:solidFill>
-              <a:latin typeface="times new roman"/>
+              <a:latin typeface="Arial"/>
             </a:endParaRPr>
           </a:p>
           <a:p>
@@ -10337,12 +8841,66 @@
               <a:lnSpc>
                 <a:spcPct val="100000"/>
               </a:lnSpc>
+              <a:spcBef>
+                <a:spcPts val="340"/>
+              </a:spcBef>
+              <a:spcAft>
+                <a:spcPts val="142"/>
+              </a:spcAft>
             </a:pPr>
             <a:endParaRPr b="0" lang="en-US" sz="1500" spc="-1" strike="noStrike">
               <a:solidFill>
                 <a:srgbClr val="000000"/>
               </a:solidFill>
-              <a:latin typeface="times new roman"/>
+              <a:latin typeface="Arial"/>
+            </a:endParaRPr>
+          </a:p>
+          <a:p>
+            <a:pPr>
+              <a:lnSpc>
+                <a:spcPct val="100000"/>
+              </a:lnSpc>
+              <a:spcBef>
+                <a:spcPts val="340"/>
+              </a:spcBef>
+              <a:spcAft>
+                <a:spcPts val="142"/>
+              </a:spcAft>
+            </a:pPr>
+            <a:endParaRPr b="0" lang="en-US" sz="1500" spc="-1" strike="noStrike">
+              <a:solidFill>
+                <a:srgbClr val="000000"/>
+              </a:solidFill>
+              <a:latin typeface="Arial"/>
+            </a:endParaRPr>
+          </a:p>
+          <a:p>
+            <a:pPr>
+              <a:lnSpc>
+                <a:spcPct val="100000"/>
+              </a:lnSpc>
+              <a:spcBef>
+                <a:spcPts val="340"/>
+              </a:spcBef>
+              <a:spcAft>
+                <a:spcPts val="142"/>
+              </a:spcAft>
+            </a:pPr>
+            <a:r>
+              <a:rPr b="1" lang="en-US" sz="1500" spc="-1" strike="noStrike">
+                <a:solidFill>
+                  <a:srgbClr val="000000"/>
+                </a:solidFill>
+                <a:latin typeface="times new roman"/>
+                <a:ea typeface="Noto Sans CJK SC"/>
+              </a:rPr>
+              <a:t>Key Technical Features</a:t>
+            </a:r>
+            <a:endParaRPr b="0" lang="en-US" sz="1500" spc="-1" strike="noStrike">
+              <a:solidFill>
+                <a:srgbClr val="000000"/>
+              </a:solidFill>
+              <a:latin typeface="Arial"/>
             </a:endParaRPr>
           </a:p>
           <a:p>
@@ -10350,6 +8908,12 @@
               <a:lnSpc>
                 <a:spcPct val="100000"/>
               </a:lnSpc>
+              <a:spcBef>
+                <a:spcPts val="340"/>
+              </a:spcBef>
+              <a:spcAft>
+                <a:spcPts val="142"/>
+              </a:spcAft>
               <a:buClr>
                 <a:srgbClr val="000000"/>
               </a:buClr>
@@ -10358,50 +8922,161 @@
               <a:buChar char=""/>
             </a:pPr>
             <a:r>
-              <a:rPr b="0" lang="en-IN" sz="1500" spc="-1" strike="noStrike">
+              <a:rPr b="0" lang="en-US" sz="1500" spc="-1" strike="noStrike">
                 <a:solidFill>
                   <a:srgbClr val="000000"/>
                 </a:solidFill>
                 <a:latin typeface="times new roman"/>
-                <a:ea typeface="Arial"/>
-              </a:rPr>
-              <a:t>To assess the future potential and impact of screenless displays on digital interaction</a:t>
-            </a:r>
-            <a:br>
-              <a:rPr sz="1500"/>
-            </a:br>
-            <a:br>
-              <a:rPr sz="1500"/>
-            </a:br>
-            <a:r>
-              <a:rPr b="0" lang="en-IN" sz="1500" spc="-1" strike="noStrike">
+                <a:ea typeface="Noto Sans CJK SC"/>
+              </a:rPr>
+              <a:t>Retinal projection: Displays visuals directly to the eye.</a:t>
+            </a:r>
+            <a:endParaRPr b="0" lang="en-US" sz="1500" spc="-1" strike="noStrike">
+              <a:solidFill>
+                <a:srgbClr val="000000"/>
+              </a:solidFill>
+              <a:latin typeface="Arial"/>
+            </a:endParaRPr>
+          </a:p>
+          <a:p>
+            <a:pPr marL="216000" indent="-216000">
+              <a:lnSpc>
+                <a:spcPct val="100000"/>
+              </a:lnSpc>
+              <a:spcBef>
+                <a:spcPts val="340"/>
+              </a:spcBef>
+              <a:spcAft>
+                <a:spcPts val="142"/>
+              </a:spcAft>
+              <a:buClr>
+                <a:srgbClr val="000000"/>
+              </a:buClr>
+              <a:buSzPct val="45000"/>
+              <a:buFont typeface="Wingdings" charset="2"/>
+              <a:buChar char=""/>
+            </a:pPr>
+            <a:r>
+              <a:rPr b="0" lang="en-US" sz="1500" spc="-1" strike="noStrike">
                 <a:solidFill>
                   <a:srgbClr val="000000"/>
                 </a:solidFill>
                 <a:latin typeface="times new roman"/>
-                <a:ea typeface="Arial"/>
-              </a:rPr>
-              <a:t> </a:t>
+                <a:ea typeface="Noto Sans CJK SC"/>
+              </a:rPr>
+              <a:t>Holographic rendering: Creates 3D images with depth perception.</a:t>
             </a:r>
             <a:endParaRPr b="0" lang="en-US" sz="1500" spc="-1" strike="noStrike">
               <a:solidFill>
                 <a:srgbClr val="000000"/>
               </a:solidFill>
-              <a:latin typeface="times new roman"/>
+              <a:latin typeface="Arial"/>
+            </a:endParaRPr>
+          </a:p>
+          <a:p>
+            <a:pPr marL="216000" indent="-216000">
+              <a:lnSpc>
+                <a:spcPct val="100000"/>
+              </a:lnSpc>
+              <a:spcBef>
+                <a:spcPts val="340"/>
+              </a:spcBef>
+              <a:spcAft>
+                <a:spcPts val="142"/>
+              </a:spcAft>
+              <a:buClr>
+                <a:srgbClr val="000000"/>
+              </a:buClr>
+              <a:buSzPct val="45000"/>
+              <a:buFont typeface="Wingdings" charset="2"/>
+              <a:buChar char=""/>
+            </a:pPr>
+            <a:r>
+              <a:rPr b="0" lang="en-US" sz="1500" spc="-1" strike="noStrike">
+                <a:solidFill>
+                  <a:srgbClr val="000000"/>
+                </a:solidFill>
+                <a:latin typeface="times new roman"/>
+                <a:ea typeface="Noto Sans CJK SC"/>
+              </a:rPr>
+              <a:t>Volumetric display: Projects visuals into free space.</a:t>
+            </a:r>
+            <a:endParaRPr b="0" lang="en-US" sz="1500" spc="-1" strike="noStrike">
+              <a:solidFill>
+                <a:srgbClr val="000000"/>
+              </a:solidFill>
+              <a:latin typeface="Arial"/>
+            </a:endParaRPr>
+          </a:p>
+          <a:p>
+            <a:pPr>
+              <a:lnSpc>
+                <a:spcPct val="100000"/>
+              </a:lnSpc>
+              <a:spcBef>
+                <a:spcPts val="340"/>
+              </a:spcBef>
+              <a:spcAft>
+                <a:spcPts val="142"/>
+              </a:spcAft>
+            </a:pPr>
+            <a:endParaRPr b="0" lang="en-US" sz="1500" spc="-1" strike="noStrike">
+              <a:solidFill>
+                <a:srgbClr val="000000"/>
+              </a:solidFill>
+              <a:latin typeface="Arial"/>
+            </a:endParaRPr>
+          </a:p>
+          <a:p>
+            <a:pPr>
+              <a:lnSpc>
+                <a:spcPct val="100000"/>
+              </a:lnSpc>
+              <a:spcBef>
+                <a:spcPts val="340"/>
+              </a:spcBef>
+              <a:spcAft>
+                <a:spcPts val="142"/>
+              </a:spcAft>
+            </a:pPr>
+            <a:endParaRPr b="0" lang="en-US" sz="1500" spc="-1" strike="noStrike">
+              <a:solidFill>
+                <a:srgbClr val="000000"/>
+              </a:solidFill>
+              <a:latin typeface="Arial"/>
+            </a:endParaRPr>
+          </a:p>
+          <a:p>
+            <a:pPr>
+              <a:lnSpc>
+                <a:spcPct val="100000"/>
+              </a:lnSpc>
+              <a:spcBef>
+                <a:spcPts val="340"/>
+              </a:spcBef>
+              <a:spcAft>
+                <a:spcPts val="142"/>
+              </a:spcAft>
+            </a:pPr>
+            <a:endParaRPr b="0" lang="en-US" sz="1500" spc="-1" strike="noStrike">
+              <a:solidFill>
+                <a:srgbClr val="000000"/>
+              </a:solidFill>
+              <a:latin typeface="Arial"/>
             </a:endParaRPr>
           </a:p>
         </p:txBody>
       </p:sp>
       <p:sp>
         <p:nvSpPr>
-          <p:cNvPr id="35" name=""/>
-          <p:cNvSpPr txBox="1"/>
+          <p:cNvPr id="45" name=""/>
+          <p:cNvSpPr/>
           <p:nvPr/>
         </p:nvSpPr>
         <p:spPr>
           <a:xfrm>
-            <a:off x="8553240" y="4827240"/>
-            <a:ext cx="590760" cy="316440"/>
+            <a:off x="8458200" y="4800600"/>
+            <a:ext cx="603360" cy="315000"/>
           </a:xfrm>
           <a:prstGeom prst="rect">
             <a:avLst/>
@@ -10411,11 +9086,22 @@
             <a:noFill/>
           </a:ln>
         </p:spPr>
+        <p:style>
+          <a:lnRef idx="0"/>
+          <a:fillRef idx="0"/>
+          <a:effectRef idx="0"/>
+          <a:fontRef idx="minor"/>
+        </p:style>
         <p:txBody>
           <a:bodyPr lIns="90000" rIns="90000" tIns="45000" bIns="45000" anchor="t">
             <a:noAutofit/>
           </a:bodyPr>
           <a:p>
+            <a:pPr>
+              <a:lnSpc>
+                <a:spcPct val="100000"/>
+              </a:lnSpc>
+            </a:pPr>
             <a:r>
               <a:rPr b="0" lang="en-IN" sz="1600" spc="-1" strike="noStrike">
                 <a:solidFill>
@@ -10434,7 +9120,7 @@
                 <a:latin typeface="times new roman"/>
                 <a:ea typeface="Times New Roman"/>
               </a:rPr>
-              <a:t>8/12</a:t>
+              <a:t>9/12</a:t>
             </a:r>
             <a:endParaRPr b="0" lang="en-US" sz="1600" spc="-1" strike="noStrike">
               <a:solidFill>
@@ -10477,81 +9163,14 @@
       </p:grpSpPr>
       <p:sp>
         <p:nvSpPr>
-          <p:cNvPr id="36" name="Google Shape;60;p6"/>
+          <p:cNvPr id="46" name=""/>
           <p:cNvSpPr/>
           <p:nvPr/>
         </p:nvSpPr>
         <p:spPr>
           <a:xfrm>
-            <a:off x="1911240" y="136800"/>
-            <a:ext cx="6103800" cy="637560"/>
-          </a:xfrm>
-          <a:prstGeom prst="rect">
-            <a:avLst/>
-          </a:prstGeom>
-          <a:noFill/>
-          <a:ln w="0">
-            <a:noFill/>
-          </a:ln>
-        </p:spPr>
-        <p:style>
-          <a:lnRef idx="0"/>
-          <a:fillRef idx="0"/>
-          <a:effectRef idx="0"/>
-          <a:fontRef idx="minor"/>
-        </p:style>
-        <p:txBody>
-          <a:bodyPr lIns="0" rIns="0" tIns="0" bIns="0" anchor="ctr">
-            <a:noAutofit/>
-          </a:bodyPr>
-          <a:p>
-            <a:pPr algn="ctr">
-              <a:lnSpc>
-                <a:spcPct val="100000"/>
-              </a:lnSpc>
-              <a:tabLst>
-                <a:tab algn="l" pos="0"/>
-              </a:tabLst>
-            </a:pPr>
-            <a:r>
-              <a:rPr b="0" lang="en-IN" sz="3600" spc="-1" strike="noStrike">
-                <a:solidFill>
-                  <a:schemeClr val="dk1"/>
-                </a:solidFill>
-                <a:latin typeface="Times New Roman"/>
-                <a:ea typeface="Times New Roman"/>
-              </a:rPr>
-              <a:t>Technical Relevance</a:t>
-            </a:r>
-            <a:r>
-              <a:rPr b="0" lang="en-IN" sz="4000" spc="-1" strike="noStrike">
-                <a:solidFill>
-                  <a:schemeClr val="dk1"/>
-                </a:solidFill>
-                <a:latin typeface="Times New Roman"/>
-                <a:ea typeface="Times New Roman"/>
-              </a:rPr>
-              <a:t> </a:t>
-            </a:r>
-            <a:endParaRPr b="0" lang="en-US" sz="4000" spc="-1" strike="noStrike">
-              <a:solidFill>
-                <a:srgbClr val="000000"/>
-              </a:solidFill>
-              <a:latin typeface="Arial"/>
-            </a:endParaRPr>
-          </a:p>
-        </p:txBody>
-      </p:sp>
-      <p:sp>
-        <p:nvSpPr>
-          <p:cNvPr id="37" name=""/>
-          <p:cNvSpPr/>
-          <p:nvPr/>
-        </p:nvSpPr>
-        <p:spPr>
-          <a:xfrm>
-            <a:off x="230040" y="914400"/>
-            <a:ext cx="8685360" cy="3717360"/>
+            <a:off x="2743200" y="457200"/>
+            <a:ext cx="2283480" cy="822600"/>
           </a:xfrm>
           <a:prstGeom prst="rect">
             <a:avLst/>
@@ -10576,403 +9195,21 @@
               <a:lnSpc>
                 <a:spcPct val="100000"/>
               </a:lnSpc>
-              <a:spcBef>
-                <a:spcPts val="340"/>
-              </a:spcBef>
-              <a:spcAft>
-                <a:spcPts val="142"/>
-              </a:spcAft>
-            </a:pPr>
-            <a:r>
-              <a:rPr b="1" lang="en-US" sz="1500" spc="-1" strike="noStrike">
-                <a:solidFill>
-                  <a:srgbClr val="000000"/>
-                </a:solidFill>
-                <a:latin typeface="times new roman"/>
-              </a:rPr>
-              <a:t>Technical Relevance</a:t>
-            </a:r>
-            <a:endParaRPr b="0" lang="en-US" sz="1500" spc="-1" strike="noStrike">
-              <a:solidFill>
-                <a:srgbClr val="000000"/>
-              </a:solidFill>
-              <a:latin typeface="Arial"/>
-            </a:endParaRPr>
-          </a:p>
-          <a:p>
-            <a:pPr marL="216000" indent="-216000">
-              <a:lnSpc>
-                <a:spcPct val="100000"/>
-              </a:lnSpc>
-              <a:spcBef>
-                <a:spcPts val="340"/>
-              </a:spcBef>
-              <a:spcAft>
-                <a:spcPts val="142"/>
-              </a:spcAft>
-              <a:buClr>
-                <a:srgbClr val="000000"/>
-              </a:buClr>
-              <a:buSzPct val="45000"/>
-              <a:buFont typeface="Wingdings" charset="2"/>
-              <a:buChar char=""/>
-            </a:pPr>
-            <a:r>
-              <a:rPr b="0" lang="en-US" sz="1500" spc="-1" strike="noStrike">
-                <a:solidFill>
-                  <a:srgbClr val="000000"/>
-                </a:solidFill>
-                <a:latin typeface="times new roman"/>
-              </a:rPr>
-              <a:t>Eliminates the need for physical screens in VR/AR headsets, holograms, retinal projection, smart glasses, voice interfaces.</a:t>
-            </a:r>
-            <a:endParaRPr b="0" lang="en-US" sz="1500" spc="-1" strike="noStrike">
-              <a:solidFill>
-                <a:srgbClr val="000000"/>
-              </a:solidFill>
-              <a:latin typeface="Arial"/>
-              <a:ea typeface="Noto Sans CJK SC"/>
-            </a:endParaRPr>
-          </a:p>
-          <a:p>
-            <a:pPr marL="216000" indent="-216000">
-              <a:lnSpc>
-                <a:spcPct val="100000"/>
-              </a:lnSpc>
-              <a:spcBef>
-                <a:spcPts val="340"/>
-              </a:spcBef>
-              <a:spcAft>
-                <a:spcPts val="142"/>
-              </a:spcAft>
-              <a:buClr>
-                <a:srgbClr val="000000"/>
-              </a:buClr>
-              <a:buSzPct val="45000"/>
-              <a:buFont typeface="Wingdings" charset="2"/>
-              <a:buChar char=""/>
-            </a:pPr>
-            <a:r>
-              <a:rPr b="0" lang="en-US" sz="1500" spc="-1" strike="noStrike">
-                <a:solidFill>
-                  <a:srgbClr val="000000"/>
-                </a:solidFill>
-                <a:latin typeface="times new roman"/>
-              </a:rPr>
-              <a:t>Supports immersive technologies like AR/VR</a:t>
-            </a:r>
-            <a:endParaRPr b="0" lang="en-US" sz="1500" spc="-1" strike="noStrike">
-              <a:solidFill>
-                <a:srgbClr val="000000"/>
-              </a:solidFill>
-              <a:latin typeface="Arial"/>
-              <a:ea typeface="Noto Sans CJK SC"/>
-            </a:endParaRPr>
-          </a:p>
-          <a:p>
-            <a:pPr marL="216000" indent="-216000">
-              <a:lnSpc>
-                <a:spcPct val="100000"/>
-              </a:lnSpc>
-              <a:spcBef>
-                <a:spcPts val="340"/>
-              </a:spcBef>
-              <a:spcAft>
-                <a:spcPts val="142"/>
-              </a:spcAft>
-              <a:buClr>
-                <a:srgbClr val="000000"/>
-              </a:buClr>
-              <a:buSzPct val="45000"/>
-              <a:buFont typeface="Wingdings" charset="2"/>
-              <a:buChar char=""/>
-            </a:pPr>
-            <a:r>
-              <a:rPr b="0" lang="en-US" sz="1500" spc="-1" strike="noStrike">
-                <a:solidFill>
-                  <a:srgbClr val="000000"/>
-                </a:solidFill>
-                <a:latin typeface="times new roman"/>
-              </a:rPr>
-              <a:t>Enables hands-free and portable visual interfaces.</a:t>
-            </a:r>
-            <a:endParaRPr b="0" lang="en-US" sz="1500" spc="-1" strike="noStrike">
-              <a:solidFill>
-                <a:srgbClr val="000000"/>
-              </a:solidFill>
-              <a:latin typeface="Arial"/>
-            </a:endParaRPr>
-          </a:p>
-          <a:p>
-            <a:pPr marL="216000" indent="-216000">
-              <a:lnSpc>
-                <a:spcPct val="100000"/>
-              </a:lnSpc>
-              <a:spcBef>
-                <a:spcPts val="340"/>
-              </a:spcBef>
-              <a:spcAft>
-                <a:spcPts val="142"/>
-              </a:spcAft>
-              <a:buClr>
-                <a:srgbClr val="000000"/>
-              </a:buClr>
-              <a:buSzPct val="45000"/>
-              <a:buFont typeface="Wingdings" charset="2"/>
-              <a:buChar char=""/>
-            </a:pPr>
-            <a:r>
-              <a:rPr b="0" lang="en-US" sz="1500" spc="-1" strike="noStrike">
-                <a:solidFill>
-                  <a:srgbClr val="000000"/>
-                </a:solidFill>
-                <a:latin typeface="times new roman"/>
-              </a:rPr>
-              <a:t>Useful in smart glasses, medical imaging, military and automotive displays.</a:t>
-            </a:r>
-            <a:endParaRPr b="0" lang="en-US" sz="1500" spc="-1" strike="noStrike">
-              <a:solidFill>
-                <a:srgbClr val="000000"/>
-              </a:solidFill>
-              <a:latin typeface="Arial"/>
-            </a:endParaRPr>
-          </a:p>
-          <a:p>
-            <a:pPr>
-              <a:lnSpc>
-                <a:spcPct val="100000"/>
-              </a:lnSpc>
-              <a:spcBef>
-                <a:spcPts val="340"/>
-              </a:spcBef>
-              <a:spcAft>
-                <a:spcPts val="142"/>
-              </a:spcAft>
-            </a:pPr>
-            <a:endParaRPr b="0" lang="en-US" sz="1500" spc="-1" strike="noStrike">
-              <a:solidFill>
-                <a:srgbClr val="000000"/>
-              </a:solidFill>
-              <a:latin typeface="Arial"/>
-            </a:endParaRPr>
-          </a:p>
-          <a:p>
-            <a:pPr>
-              <a:lnSpc>
-                <a:spcPct val="100000"/>
-              </a:lnSpc>
-              <a:spcBef>
-                <a:spcPts val="340"/>
-              </a:spcBef>
-              <a:spcAft>
-                <a:spcPts val="142"/>
-              </a:spcAft>
-            </a:pPr>
-            <a:r>
-              <a:rPr b="1" lang="en-US" sz="1500" spc="-1" strike="noStrike">
-                <a:solidFill>
-                  <a:srgbClr val="000000"/>
-                </a:solidFill>
-                <a:latin typeface="times new roman"/>
-                <a:ea typeface="Noto Sans CJK SC"/>
-              </a:rPr>
-              <a:t>Key Technical Features</a:t>
-            </a:r>
-            <a:endParaRPr b="0" lang="en-US" sz="1500" spc="-1" strike="noStrike">
-              <a:solidFill>
-                <a:srgbClr val="000000"/>
-              </a:solidFill>
-              <a:latin typeface="Arial"/>
-            </a:endParaRPr>
-          </a:p>
-          <a:p>
-            <a:pPr marL="216000" indent="-216000">
-              <a:lnSpc>
-                <a:spcPct val="100000"/>
-              </a:lnSpc>
-              <a:spcBef>
-                <a:spcPts val="340"/>
-              </a:spcBef>
-              <a:spcAft>
-                <a:spcPts val="142"/>
-              </a:spcAft>
-              <a:buClr>
-                <a:srgbClr val="000000"/>
-              </a:buClr>
-              <a:buSzPct val="45000"/>
-              <a:buFont typeface="Wingdings" charset="2"/>
-              <a:buChar char=""/>
-            </a:pPr>
-            <a:r>
-              <a:rPr b="0" lang="en-US" sz="1500" spc="-1" strike="noStrike">
-                <a:solidFill>
-                  <a:srgbClr val="000000"/>
-                </a:solidFill>
-                <a:latin typeface="times new roman"/>
-                <a:ea typeface="Noto Sans CJK SC"/>
-              </a:rPr>
-              <a:t>Retinal projection: Displays visuals directly to the eye.</a:t>
-            </a:r>
-            <a:endParaRPr b="0" lang="en-US" sz="1500" spc="-1" strike="noStrike">
-              <a:solidFill>
-                <a:srgbClr val="000000"/>
-              </a:solidFill>
-              <a:latin typeface="Arial"/>
-            </a:endParaRPr>
-          </a:p>
-          <a:p>
-            <a:pPr marL="216000" indent="-216000">
-              <a:lnSpc>
-                <a:spcPct val="100000"/>
-              </a:lnSpc>
-              <a:spcBef>
-                <a:spcPts val="340"/>
-              </a:spcBef>
-              <a:spcAft>
-                <a:spcPts val="142"/>
-              </a:spcAft>
-              <a:buClr>
-                <a:srgbClr val="000000"/>
-              </a:buClr>
-              <a:buSzPct val="45000"/>
-              <a:buFont typeface="Wingdings" charset="2"/>
-              <a:buChar char=""/>
-            </a:pPr>
-            <a:r>
-              <a:rPr b="0" lang="en-US" sz="1500" spc="-1" strike="noStrike">
-                <a:solidFill>
-                  <a:srgbClr val="000000"/>
-                </a:solidFill>
-                <a:latin typeface="times new roman"/>
-                <a:ea typeface="Noto Sans CJK SC"/>
-              </a:rPr>
-              <a:t>Holographic rendering: Creates 3D images with depth perception.</a:t>
-            </a:r>
-            <a:endParaRPr b="0" lang="en-US" sz="1500" spc="-1" strike="noStrike">
-              <a:solidFill>
-                <a:srgbClr val="000000"/>
-              </a:solidFill>
-              <a:latin typeface="Arial"/>
-            </a:endParaRPr>
-          </a:p>
-          <a:p>
-            <a:pPr marL="216000" indent="-216000">
-              <a:lnSpc>
-                <a:spcPct val="100000"/>
-              </a:lnSpc>
-              <a:spcBef>
-                <a:spcPts val="340"/>
-              </a:spcBef>
-              <a:spcAft>
-                <a:spcPts val="142"/>
-              </a:spcAft>
-              <a:buClr>
-                <a:srgbClr val="000000"/>
-              </a:buClr>
-              <a:buSzPct val="45000"/>
-              <a:buFont typeface="Wingdings" charset="2"/>
-              <a:buChar char=""/>
-            </a:pPr>
-            <a:r>
-              <a:rPr b="0" lang="en-US" sz="1500" spc="-1" strike="noStrike">
-                <a:solidFill>
-                  <a:srgbClr val="000000"/>
-                </a:solidFill>
-                <a:latin typeface="times new roman"/>
-                <a:ea typeface="Noto Sans CJK SC"/>
-              </a:rPr>
-              <a:t>Volumetric display: Projects visuals into free space.</a:t>
-            </a:r>
-            <a:endParaRPr b="0" lang="en-US" sz="1500" spc="-1" strike="noStrike">
-              <a:solidFill>
-                <a:srgbClr val="000000"/>
-              </a:solidFill>
-              <a:latin typeface="Arial"/>
-            </a:endParaRPr>
-          </a:p>
-          <a:p>
-            <a:pPr marL="216000" indent="-216000">
-              <a:lnSpc>
-                <a:spcPct val="100000"/>
-              </a:lnSpc>
-              <a:spcBef>
-                <a:spcPts val="340"/>
-              </a:spcBef>
-              <a:spcAft>
-                <a:spcPts val="142"/>
-              </a:spcAft>
-              <a:buClr>
-                <a:srgbClr val="000000"/>
-              </a:buClr>
-              <a:buSzPct val="45000"/>
-              <a:buFont typeface="Wingdings" charset="2"/>
-              <a:buChar char=""/>
-            </a:pPr>
-            <a:r>
-              <a:rPr b="0" lang="en-US" sz="1500" spc="-1" strike="noStrike">
-                <a:solidFill>
-                  <a:srgbClr val="000000"/>
-                </a:solidFill>
-                <a:latin typeface="times new roman"/>
-                <a:ea typeface="Noto Sans CJK SC"/>
-              </a:rPr>
-              <a:t>Eye tracking: Enhances interaction and display accuracy.</a:t>
-            </a:r>
-            <a:endParaRPr b="0" lang="en-US" sz="1500" spc="-1" strike="noStrike">
-              <a:solidFill>
-                <a:srgbClr val="000000"/>
-              </a:solidFill>
-              <a:latin typeface="Arial"/>
-            </a:endParaRPr>
-          </a:p>
-          <a:p>
-            <a:pPr marL="216000" indent="-216000">
-              <a:lnSpc>
-                <a:spcPct val="100000"/>
-              </a:lnSpc>
-              <a:spcBef>
-                <a:spcPts val="340"/>
-              </a:spcBef>
-              <a:spcAft>
-                <a:spcPts val="142"/>
-              </a:spcAft>
-              <a:buClr>
-                <a:srgbClr val="000000"/>
-              </a:buClr>
-              <a:buSzPct val="45000"/>
-              <a:buFont typeface="Wingdings" charset="2"/>
-              <a:buChar char=""/>
-            </a:pPr>
-            <a:r>
-              <a:rPr b="0" lang="en-US" sz="1500" spc="-1" strike="noStrike">
-                <a:solidFill>
-                  <a:srgbClr val="000000"/>
-                </a:solidFill>
-                <a:latin typeface="times new roman"/>
-                <a:ea typeface="Noto Sans CJK SC"/>
-              </a:rPr>
-              <a:t>Micro-LED &amp; laser tech: Used for high brightness and compact design.</a:t>
-            </a:r>
-            <a:endParaRPr b="0" lang="en-US" sz="1500" spc="-1" strike="noStrike">
-              <a:solidFill>
-                <a:srgbClr val="000000"/>
-              </a:solidFill>
-              <a:latin typeface="Arial"/>
-            </a:endParaRPr>
-          </a:p>
-          <a:p>
-            <a:pPr>
-              <a:lnSpc>
-                <a:spcPct val="100000"/>
-              </a:lnSpc>
-              <a:spcBef>
-                <a:spcPts val="340"/>
-              </a:spcBef>
-              <a:spcAft>
-                <a:spcPts val="142"/>
-              </a:spcAft>
-            </a:pPr>
-            <a:endParaRPr b="0" lang="en-US" sz="1500" spc="-1" strike="noStrike">
+            </a:pPr>
+            <a:r>
+              <a:rPr b="0" lang="en-IN" sz="2600" spc="-1" strike="noStrike">
+                <a:solidFill>
+                  <a:schemeClr val="dk1"/>
+                </a:solidFill>
+                <a:latin typeface="Times New Roman"/>
+                <a:ea typeface="Times New Roman"/>
+              </a:rPr>
+              <a:t>Block Diagram</a:t>
+            </a:r>
+            <a:br>
+              <a:rPr sz="2600"/>
+            </a:br>
+            <a:endParaRPr b="0" lang="en-US" sz="2600" spc="-1" strike="noStrike">
               <a:solidFill>
                 <a:srgbClr val="000000"/>
               </a:solidFill>
@@ -10983,14 +9220,14 @@
       </p:sp>
       <p:sp>
         <p:nvSpPr>
-          <p:cNvPr id="38" name=""/>
-          <p:cNvSpPr txBox="1"/>
+          <p:cNvPr id="47" name=""/>
+          <p:cNvSpPr/>
           <p:nvPr/>
         </p:nvSpPr>
         <p:spPr>
           <a:xfrm>
-            <a:off x="8458200" y="4800600"/>
-            <a:ext cx="604800" cy="316440"/>
+            <a:off x="8458200" y="4572000"/>
+            <a:ext cx="684360" cy="768960"/>
           </a:xfrm>
           <a:prstGeom prst="rect">
             <a:avLst/>
@@ -11000,11 +9237,22 @@
             <a:noFill/>
           </a:ln>
         </p:spPr>
+        <p:style>
+          <a:lnRef idx="0"/>
+          <a:fillRef idx="0"/>
+          <a:effectRef idx="0"/>
+          <a:fontRef idx="minor"/>
+        </p:style>
         <p:txBody>
           <a:bodyPr lIns="90000" rIns="90000" tIns="45000" bIns="45000" anchor="t">
             <a:noAutofit/>
           </a:bodyPr>
           <a:p>
+            <a:pPr>
+              <a:lnSpc>
+                <a:spcPct val="100000"/>
+              </a:lnSpc>
+            </a:pPr>
             <a:r>
               <a:rPr b="0" lang="en-IN" sz="1600" spc="-1" strike="noStrike">
                 <a:solidFill>
@@ -11013,7 +9261,7 @@
                 <a:latin typeface="times new roman"/>
                 <a:ea typeface="Times New Roman"/>
               </a:rPr>
-              <a:t> </a:t>
+              <a:t>  </a:t>
             </a:r>
             <a:r>
               <a:rPr b="0" lang="en-IN" sz="1600" spc="-1" strike="noStrike">
@@ -11023,7 +9271,7 @@
                 <a:latin typeface="times new roman"/>
                 <a:ea typeface="Times New Roman"/>
               </a:rPr>
-              <a:t>9/12</a:t>
+              <a:t>10/12</a:t>
             </a:r>
             <a:endParaRPr b="0" lang="en-US" sz="1600" spc="-1" strike="noStrike">
               <a:solidFill>
@@ -11034,6 +9282,29 @@
           </a:p>
         </p:txBody>
       </p:sp>
+      <p:pic>
+        <p:nvPicPr>
+          <p:cNvPr id="48" name="" descr=""/>
+          <p:cNvPicPr/>
+          <p:nvPr/>
+        </p:nvPicPr>
+        <p:blipFill>
+          <a:blip r:embed="rId1"/>
+          <a:stretch/>
+        </p:blipFill>
+        <p:spPr>
+          <a:xfrm>
+            <a:off x="914400" y="1371600"/>
+            <a:ext cx="6863760" cy="2901600"/>
+          </a:xfrm>
+          <a:prstGeom prst="rect">
+            <a:avLst/>
+          </a:prstGeom>
+          <a:ln w="0">
+            <a:noFill/>
+          </a:ln>
+        </p:spPr>
+      </p:pic>
     </p:spTree>
   </p:cSld>
   <mc:AlternateContent>
@@ -11091,13 +9362,13 @@
     <a:fontScheme name="Office">
       <a:majorFont>
         <a:latin typeface="Arial" pitchFamily="0" charset="1"/>
-        <a:ea typeface=""/>
-        <a:cs typeface=""/>
+        <a:ea typeface="DejaVu Sans" pitchFamily="0" charset="1"/>
+        <a:cs typeface="DejaVu Sans" pitchFamily="0" charset="1"/>
       </a:majorFont>
       <a:minorFont>
         <a:latin typeface="Arial" pitchFamily="0" charset="1"/>
-        <a:ea typeface=""/>
-        <a:cs typeface=""/>
+        <a:ea typeface="DejaVu Sans" pitchFamily="0" charset="1"/>
+        <a:cs typeface="DejaVu Sans" pitchFamily="0" charset="1"/>
       </a:minorFont>
     </a:fontScheme>
     <a:fmtScheme>
@@ -11105,55 +9376,25 @@
         <a:solidFill>
           <a:schemeClr val="phClr"/>
         </a:solidFill>
-        <a:gradFill>
-          <a:gsLst>
-            <a:gs pos="0">
-              <a:schemeClr val="phClr">
-                <a:tint val="50000"/>
-              </a:schemeClr>
-            </a:gs>
-            <a:gs pos="35000">
-              <a:schemeClr val="phClr">
-                <a:tint val="37000"/>
-              </a:schemeClr>
-            </a:gs>
-            <a:gs pos="100000">
-              <a:schemeClr val="phClr">
-                <a:tint val="15000"/>
-              </a:schemeClr>
-            </a:gs>
-          </a:gsLst>
-          <a:lin ang="16200000" scaled="1"/>
-          <a:tileRect l="0" t="0" r="0" b="0"/>
-        </a:gradFill>
-        <a:gradFill>
-          <a:gsLst>
-            <a:gs pos="0">
-              <a:schemeClr val="phClr">
-                <a:tint val="100000"/>
-                <a:shade val="100000"/>
-              </a:schemeClr>
-            </a:gs>
-            <a:gs pos="100000">
-              <a:schemeClr val="phClr">
-                <a:tint val="50000"/>
-                <a:shade val="100000"/>
-              </a:schemeClr>
-            </a:gs>
-          </a:gsLst>
-          <a:lin ang="16200000" scaled="0"/>
-          <a:tileRect l="0" t="0" r="0" b="0"/>
-        </a:gradFill>
+        <a:solidFill>
+          <a:schemeClr val="phClr"/>
+        </a:solidFill>
+        <a:solidFill>
+          <a:schemeClr val="phClr"/>
+        </a:solidFill>
       </a:fillStyleLst>
       <a:lnStyleLst>
-        <a:ln w="9525" cap="flat" cmpd="sng" algn="ctr">
+        <a:ln w="6350" cap="flat" cmpd="sng" algn="ctr">
           <a:prstDash val="solid"/>
+          <a:miter/>
         </a:ln>
-        <a:ln w="25400" cap="flat" cmpd="sng" algn="ctr">
+        <a:ln w="6350" cap="flat" cmpd="sng" algn="ctr">
           <a:prstDash val="solid"/>
+          <a:miter/>
         </a:ln>
-        <a:ln w="38100" cap="flat" cmpd="sng" algn="ctr">
+        <a:ln w="6350" cap="flat" cmpd="sng" algn="ctr">
           <a:prstDash val="solid"/>
+          <a:miter/>
         </a:ln>
       </a:lnStyleLst>
       <a:effectStyleLst>
@@ -11171,48 +9412,12 @@
         <a:solidFill>
           <a:schemeClr val="phClr"/>
         </a:solidFill>
-        <a:gradFill>
-          <a:gsLst>
-            <a:gs pos="0">
-              <a:schemeClr val="phClr">
-                <a:tint val="40000"/>
-              </a:schemeClr>
-            </a:gs>
-            <a:gs pos="40000">
-              <a:schemeClr val="phClr">
-                <a:tint val="45000"/>
-                <a:shade val="99000"/>
-              </a:schemeClr>
-            </a:gs>
-            <a:gs pos="100000">
-              <a:schemeClr val="phClr">
-                <a:shade val="20000"/>
-              </a:schemeClr>
-            </a:gs>
-          </a:gsLst>
-          <a:path path="circle">
-            <a:fillToRect l="50000" t="-80000" r="50000" b="180000"/>
-          </a:path>
-          <a:tileRect l="0" t="0" r="0" b="0"/>
-        </a:gradFill>
-        <a:gradFill>
-          <a:gsLst>
-            <a:gs pos="0">
-              <a:schemeClr val="phClr">
-                <a:tint val="80000"/>
-              </a:schemeClr>
-            </a:gs>
-            <a:gs pos="100000">
-              <a:schemeClr val="phClr">
-                <a:shade val="30000"/>
-              </a:schemeClr>
-            </a:gs>
-          </a:gsLst>
-          <a:path path="circle">
-            <a:fillToRect l="50000" t="50000" r="50000" b="50000"/>
-          </a:path>
-          <a:tileRect l="0" t="0" r="0" b="0"/>
-        </a:gradFill>
+        <a:solidFill>
+          <a:schemeClr val="phClr"/>
+        </a:solidFill>
+        <a:solidFill>
+          <a:schemeClr val="phClr"/>
+        </a:solidFill>
       </a:bgFillStyleLst>
     </a:fmtScheme>
   </a:themeElements>
@@ -11263,13 +9468,13 @@
     <a:fontScheme name="Office">
       <a:majorFont>
         <a:latin typeface="Arial" pitchFamily="0" charset="1"/>
-        <a:ea typeface=""/>
-        <a:cs typeface=""/>
+        <a:ea typeface="DejaVu Sans" pitchFamily="0" charset="1"/>
+        <a:cs typeface="DejaVu Sans" pitchFamily="0" charset="1"/>
       </a:majorFont>
       <a:minorFont>
         <a:latin typeface="Arial" pitchFamily="0" charset="1"/>
-        <a:ea typeface=""/>
-        <a:cs typeface=""/>
+        <a:ea typeface="DejaVu Sans" pitchFamily="0" charset="1"/>
+        <a:cs typeface="DejaVu Sans" pitchFamily="0" charset="1"/>
       </a:minorFont>
     </a:fontScheme>
     <a:fmtScheme>
@@ -11277,55 +9482,25 @@
         <a:solidFill>
           <a:schemeClr val="phClr"/>
         </a:solidFill>
-        <a:gradFill>
-          <a:gsLst>
-            <a:gs pos="0">
-              <a:schemeClr val="phClr">
-                <a:tint val="50000"/>
-              </a:schemeClr>
-            </a:gs>
-            <a:gs pos="35000">
-              <a:schemeClr val="phClr">
-                <a:tint val="37000"/>
-              </a:schemeClr>
-            </a:gs>
-            <a:gs pos="100000">
-              <a:schemeClr val="phClr">
-                <a:tint val="15000"/>
-              </a:schemeClr>
-            </a:gs>
-          </a:gsLst>
-          <a:lin ang="16200000" scaled="1"/>
-          <a:tileRect l="0" t="0" r="0" b="0"/>
-        </a:gradFill>
-        <a:gradFill>
-          <a:gsLst>
-            <a:gs pos="0">
-              <a:schemeClr val="phClr">
-                <a:tint val="100000"/>
-                <a:shade val="100000"/>
-              </a:schemeClr>
-            </a:gs>
-            <a:gs pos="100000">
-              <a:schemeClr val="phClr">
-                <a:tint val="50000"/>
-                <a:shade val="100000"/>
-              </a:schemeClr>
-            </a:gs>
-          </a:gsLst>
-          <a:lin ang="16200000" scaled="0"/>
-          <a:tileRect l="0" t="0" r="0" b="0"/>
-        </a:gradFill>
+        <a:solidFill>
+          <a:schemeClr val="phClr"/>
+        </a:solidFill>
+        <a:solidFill>
+          <a:schemeClr val="phClr"/>
+        </a:solidFill>
       </a:fillStyleLst>
       <a:lnStyleLst>
-        <a:ln w="9525" cap="flat" cmpd="sng" algn="ctr">
+        <a:ln w="6350" cap="flat" cmpd="sng" algn="ctr">
           <a:prstDash val="solid"/>
+          <a:miter/>
         </a:ln>
-        <a:ln w="25400" cap="flat" cmpd="sng" algn="ctr">
+        <a:ln w="6350" cap="flat" cmpd="sng" algn="ctr">
           <a:prstDash val="solid"/>
+          <a:miter/>
         </a:ln>
-        <a:ln w="38100" cap="flat" cmpd="sng" algn="ctr">
+        <a:ln w="6350" cap="flat" cmpd="sng" algn="ctr">
           <a:prstDash val="solid"/>
+          <a:miter/>
         </a:ln>
       </a:lnStyleLst>
       <a:effectStyleLst>
@@ -11343,48 +9518,12 @@
         <a:solidFill>
           <a:schemeClr val="phClr"/>
         </a:solidFill>
-        <a:gradFill>
-          <a:gsLst>
-            <a:gs pos="0">
-              <a:schemeClr val="phClr">
-                <a:tint val="40000"/>
-              </a:schemeClr>
-            </a:gs>
-            <a:gs pos="40000">
-              <a:schemeClr val="phClr">
-                <a:tint val="45000"/>
-                <a:shade val="99000"/>
-              </a:schemeClr>
-            </a:gs>
-            <a:gs pos="100000">
-              <a:schemeClr val="phClr">
-                <a:shade val="20000"/>
-              </a:schemeClr>
-            </a:gs>
-          </a:gsLst>
-          <a:path path="circle">
-            <a:fillToRect l="50000" t="-80000" r="50000" b="180000"/>
-          </a:path>
-          <a:tileRect l="0" t="0" r="0" b="0"/>
-        </a:gradFill>
-        <a:gradFill>
-          <a:gsLst>
-            <a:gs pos="0">
-              <a:schemeClr val="phClr">
-                <a:tint val="80000"/>
-              </a:schemeClr>
-            </a:gs>
-            <a:gs pos="100000">
-              <a:schemeClr val="phClr">
-                <a:shade val="30000"/>
-              </a:schemeClr>
-            </a:gs>
-          </a:gsLst>
-          <a:path path="circle">
-            <a:fillToRect l="50000" t="50000" r="50000" b="50000"/>
-          </a:path>
-          <a:tileRect l="0" t="0" r="0" b="0"/>
-        </a:gradFill>
+        <a:solidFill>
+          <a:schemeClr val="phClr"/>
+        </a:solidFill>
+        <a:solidFill>
+          <a:schemeClr val="phClr"/>
+        </a:solidFill>
       </a:bgFillStyleLst>
     </a:fmtScheme>
   </a:themeElements>
@@ -11435,13 +9574,13 @@
     <a:fontScheme name="Office">
       <a:majorFont>
         <a:latin typeface="Arial" pitchFamily="0" charset="1"/>
-        <a:ea typeface=""/>
-        <a:cs typeface=""/>
+        <a:ea typeface="DejaVu Sans" pitchFamily="0" charset="1"/>
+        <a:cs typeface="DejaVu Sans" pitchFamily="0" charset="1"/>
       </a:majorFont>
       <a:minorFont>
         <a:latin typeface="Arial" pitchFamily="0" charset="1"/>
-        <a:ea typeface=""/>
-        <a:cs typeface=""/>
+        <a:ea typeface="DejaVu Sans" pitchFamily="0" charset="1"/>
+        <a:cs typeface="DejaVu Sans" pitchFamily="0" charset="1"/>
       </a:minorFont>
     </a:fontScheme>
     <a:fmtScheme>
@@ -11449,55 +9588,25 @@
         <a:solidFill>
           <a:schemeClr val="phClr"/>
         </a:solidFill>
-        <a:gradFill>
-          <a:gsLst>
-            <a:gs pos="0">
-              <a:schemeClr val="phClr">
-                <a:tint val="50000"/>
-              </a:schemeClr>
-            </a:gs>
-            <a:gs pos="35000">
-              <a:schemeClr val="phClr">
-                <a:tint val="37000"/>
-              </a:schemeClr>
-            </a:gs>
-            <a:gs pos="100000">
-              <a:schemeClr val="phClr">
-                <a:tint val="15000"/>
-              </a:schemeClr>
-            </a:gs>
-          </a:gsLst>
-          <a:lin ang="16200000" scaled="1"/>
-          <a:tileRect l="0" t="0" r="0" b="0"/>
-        </a:gradFill>
-        <a:gradFill>
-          <a:gsLst>
-            <a:gs pos="0">
-              <a:schemeClr val="phClr">
-                <a:tint val="100000"/>
-                <a:shade val="100000"/>
-              </a:schemeClr>
-            </a:gs>
-            <a:gs pos="100000">
-              <a:schemeClr val="phClr">
-                <a:tint val="50000"/>
-                <a:shade val="100000"/>
-              </a:schemeClr>
-            </a:gs>
-          </a:gsLst>
-          <a:lin ang="16200000" scaled="0"/>
-          <a:tileRect l="0" t="0" r="0" b="0"/>
-        </a:gradFill>
+        <a:solidFill>
+          <a:schemeClr val="phClr"/>
+        </a:solidFill>
+        <a:solidFill>
+          <a:schemeClr val="phClr"/>
+        </a:solidFill>
       </a:fillStyleLst>
       <a:lnStyleLst>
-        <a:ln w="9525" cap="flat" cmpd="sng" algn="ctr">
+        <a:ln w="6350" cap="flat" cmpd="sng" algn="ctr">
           <a:prstDash val="solid"/>
+          <a:miter/>
         </a:ln>
-        <a:ln w="25400" cap="flat" cmpd="sng" algn="ctr">
+        <a:ln w="6350" cap="flat" cmpd="sng" algn="ctr">
           <a:prstDash val="solid"/>
+          <a:miter/>
         </a:ln>
-        <a:ln w="38100" cap="flat" cmpd="sng" algn="ctr">
+        <a:ln w="6350" cap="flat" cmpd="sng" algn="ctr">
           <a:prstDash val="solid"/>
+          <a:miter/>
         </a:ln>
       </a:lnStyleLst>
       <a:effectStyleLst>
@@ -11515,48 +9624,118 @@
         <a:solidFill>
           <a:schemeClr val="phClr"/>
         </a:solidFill>
-        <a:gradFill>
-          <a:gsLst>
-            <a:gs pos="0">
-              <a:schemeClr val="phClr">
-                <a:tint val="40000"/>
-              </a:schemeClr>
-            </a:gs>
-            <a:gs pos="40000">
-              <a:schemeClr val="phClr">
-                <a:tint val="45000"/>
-                <a:shade val="99000"/>
-              </a:schemeClr>
-            </a:gs>
-            <a:gs pos="100000">
-              <a:schemeClr val="phClr">
-                <a:shade val="20000"/>
-              </a:schemeClr>
-            </a:gs>
-          </a:gsLst>
-          <a:path path="circle">
-            <a:fillToRect l="50000" t="-80000" r="50000" b="180000"/>
-          </a:path>
-          <a:tileRect l="0" t="0" r="0" b="0"/>
-        </a:gradFill>
-        <a:gradFill>
-          <a:gsLst>
-            <a:gs pos="0">
-              <a:schemeClr val="phClr">
-                <a:tint val="80000"/>
-              </a:schemeClr>
-            </a:gs>
-            <a:gs pos="100000">
-              <a:schemeClr val="phClr">
-                <a:shade val="30000"/>
-              </a:schemeClr>
-            </a:gs>
-          </a:gsLst>
-          <a:path path="circle">
-            <a:fillToRect l="50000" t="50000" r="50000" b="50000"/>
-          </a:path>
-          <a:tileRect l="0" t="0" r="0" b="0"/>
-        </a:gradFill>
+        <a:solidFill>
+          <a:schemeClr val="phClr"/>
+        </a:solidFill>
+        <a:solidFill>
+          <a:schemeClr val="phClr"/>
+        </a:solidFill>
+      </a:bgFillStyleLst>
+    </a:fmtScheme>
+  </a:themeElements>
+</a:theme>
+</file>
+
+<file path=ppt/theme/theme4.xml><?xml version="1.0" encoding="utf-8"?>
+<a:theme xmlns:a="http://schemas.openxmlformats.org/drawingml/2006/main" xmlns:r="http://schemas.openxmlformats.org/officeDocument/2006/relationships" name="Simple Light">
+  <a:themeElements>
+    <a:clrScheme name="Simple Light">
+      <a:dk1>
+        <a:srgbClr val="000000"/>
+      </a:dk1>
+      <a:lt1>
+        <a:srgbClr val="ffffff"/>
+      </a:lt1>
+      <a:dk2>
+        <a:srgbClr val="595959"/>
+      </a:dk2>
+      <a:lt2>
+        <a:srgbClr val="eeeeee"/>
+      </a:lt2>
+      <a:accent1>
+        <a:srgbClr val="4285f4"/>
+      </a:accent1>
+      <a:accent2>
+        <a:srgbClr val="212121"/>
+      </a:accent2>
+      <a:accent3>
+        <a:srgbClr val="78909c"/>
+      </a:accent3>
+      <a:accent4>
+        <a:srgbClr val="ffab40"/>
+      </a:accent4>
+      <a:accent5>
+        <a:srgbClr val="0097a7"/>
+      </a:accent5>
+      <a:accent6>
+        <a:srgbClr val="eeff41"/>
+      </a:accent6>
+      <a:hlink>
+        <a:srgbClr val="0097a7"/>
+      </a:hlink>
+      <a:folHlink>
+        <a:srgbClr val="0097a7"/>
+      </a:folHlink>
+    </a:clrScheme>
+    <a:fontScheme name="Office">
+      <a:majorFont>
+        <a:latin typeface="Arial" pitchFamily="0" charset="1"/>
+        <a:ea typeface="DejaVu Sans" pitchFamily="0" charset="1"/>
+        <a:cs typeface="DejaVu Sans" pitchFamily="0" charset="1"/>
+      </a:majorFont>
+      <a:minorFont>
+        <a:latin typeface="Arial" pitchFamily="0" charset="1"/>
+        <a:ea typeface="DejaVu Sans" pitchFamily="0" charset="1"/>
+        <a:cs typeface="DejaVu Sans" pitchFamily="0" charset="1"/>
+      </a:minorFont>
+    </a:fontScheme>
+    <a:fmtScheme>
+      <a:fillStyleLst>
+        <a:solidFill>
+          <a:schemeClr val="phClr"/>
+        </a:solidFill>
+        <a:solidFill>
+          <a:schemeClr val="phClr"/>
+        </a:solidFill>
+        <a:solidFill>
+          <a:schemeClr val="phClr"/>
+        </a:solidFill>
+      </a:fillStyleLst>
+      <a:lnStyleLst>
+        <a:ln w="6350" cap="flat" cmpd="sng" algn="ctr">
+          <a:prstDash val="solid"/>
+          <a:miter/>
+        </a:ln>
+        <a:ln w="6350" cap="flat" cmpd="sng" algn="ctr">
+          <a:prstDash val="solid"/>
+          <a:miter/>
+        </a:ln>
+        <a:ln w="6350" cap="flat" cmpd="sng" algn="ctr">
+          <a:prstDash val="solid"/>
+          <a:miter/>
+        </a:ln>
+      </a:lnStyleLst>
+      <a:effectStyleLst>
+        <a:effectStyle>
+          <a:effectLst/>
+        </a:effectStyle>
+        <a:effectStyle>
+          <a:effectLst/>
+        </a:effectStyle>
+        <a:effectStyle>
+          <a:effectLst/>
+        </a:effectStyle>
+      </a:effectStyleLst>
+      <a:bgFillStyleLst>
+        <a:solidFill>
+          <a:schemeClr val="phClr"/>
+        </a:solidFill>
+        <a:solidFill>
+          <a:schemeClr val="phClr"/>
+        </a:solidFill>
+        <a:solidFill>
+          <a:schemeClr val="phClr"/>
+        </a:solidFill>
       </a:bgFillStyleLst>
     </a:fmtScheme>
   </a:themeElements>

--- a/Phase-1_Technical Seminar.pptx
+++ b/Phase-1_Technical Seminar.pptx
@@ -19,6 +19,7 @@
     <p:sldId id="264" r:id="rId14"/>
     <p:sldId id="265" r:id="rId15"/>
     <p:sldId id="266" r:id="rId16"/>
+    <p:sldId id="267" r:id="rId17"/>
   </p:sldIdLst>
   <p:sldSz cx="9144000" cy="5143500"/>
   <p:notesSz cx="7559675" cy="10691813"/>
@@ -55,7 +56,7 @@
         <p:spPr>
           <a:xfrm>
             <a:off x="391680" y="749880"/>
-            <a:ext cx="8516880" cy="625320"/>
+            <a:ext cx="8515800" cy="625320"/>
           </a:xfrm>
           <a:prstGeom prst="rect">
             <a:avLst/>
@@ -96,7 +97,7 @@
         <p:txBody>
           <a:bodyPr/>
           <a:p>
-            <a:fld id="{1138A9FD-20E6-4FF2-9FC0-9B1720375443}" type="slidenum">
+            <a:fld id="{DA36744F-8D0C-4DDC-B899-B2B015D00ACA}" type="slidenum">
               <a:t>&lt;#&gt;</a:t>
             </a:fld>
           </a:p>
@@ -138,7 +139,7 @@
         <p:txBody>
           <a:bodyPr/>
           <a:p>
-            <a:fld id="{7F7E0DBF-8ACE-493E-98D1-F8C0544FB4BE}" type="slidenum">
+            <a:fld id="{FB1F4C96-44CC-4FED-97B4-9B5AA68361ED}" type="slidenum">
               <a:t>&lt;#&gt;</a:t>
             </a:fld>
           </a:p>
@@ -179,7 +180,7 @@
         <p:spPr>
           <a:xfrm>
             <a:off x="391680" y="749880"/>
-            <a:ext cx="8516880" cy="625320"/>
+            <a:ext cx="8515800" cy="625320"/>
           </a:xfrm>
           <a:prstGeom prst="rect">
             <a:avLst/>
@@ -260,7 +261,7 @@
         <p:txBody>
           <a:bodyPr/>
           <a:p>
-            <a:fld id="{CDE4894D-2664-472C-AB58-172DB9B38E06}" type="slidenum">
+            <a:fld id="{7A869A61-74D6-46D5-823C-C1940FA44C59}" type="slidenum">
               <a:t>&lt;#&gt;</a:t>
             </a:fld>
           </a:p>
@@ -301,7 +302,7 @@
         <p:spPr>
           <a:xfrm>
             <a:off x="391680" y="749880"/>
-            <a:ext cx="8516880" cy="625320"/>
+            <a:ext cx="8515800" cy="625320"/>
           </a:xfrm>
           <a:prstGeom prst="rect">
             <a:avLst/>
@@ -342,7 +343,7 @@
         <p:txBody>
           <a:bodyPr/>
           <a:p>
-            <a:fld id="{AE8769E8-D3D2-4695-8933-EAFAD6B84300}" type="slidenum">
+            <a:fld id="{FB4B6190-6783-458B-8FEC-0BE7369786B7}" type="slidenum">
               <a:t>&lt;#&gt;</a:t>
             </a:fld>
           </a:p>
@@ -391,7 +392,7 @@
         <p:spPr>
           <a:xfrm>
             <a:off x="216000" y="216000"/>
-            <a:ext cx="1504080" cy="644400"/>
+            <a:ext cx="1503000" cy="643320"/>
           </a:xfrm>
           <a:prstGeom prst="rect">
             <a:avLst/>
@@ -414,7 +415,7 @@
         <p:spPr>
           <a:xfrm>
             <a:off x="391680" y="749880"/>
-            <a:ext cx="8516880" cy="624960"/>
+            <a:ext cx="8515800" cy="624960"/>
           </a:xfrm>
           <a:prstGeom prst="rect">
             <a:avLst/>
@@ -526,7 +527,7 @@
         <p:spPr>
           <a:xfrm>
             <a:off x="8472600" y="4663080"/>
-            <a:ext cx="545040" cy="389880"/>
+            <a:ext cx="543960" cy="388800"/>
           </a:xfrm>
           <a:prstGeom prst="rect">
             <a:avLst/>
@@ -568,7 +569,7 @@
                 <a:tab algn="l" pos="0"/>
               </a:tabLst>
             </a:pPr>
-            <a:fld id="{75BF9B94-133B-441D-BB6B-A3D9CE86049D}" type="slidenum">
+            <a:fld id="{BEC88B47-E92A-4538-AF5A-1177DBD649D9}" type="slidenum">
               <a:rPr b="0" lang="en-IN" sz="1000" spc="-1" strike="noStrike">
                 <a:solidFill>
                   <a:schemeClr val="dk2"/>
@@ -634,7 +635,7 @@
         <p:spPr>
           <a:xfrm>
             <a:off x="216000" y="216000"/>
-            <a:ext cx="1504080" cy="644400"/>
+            <a:ext cx="1503000" cy="643320"/>
           </a:xfrm>
           <a:prstGeom prst="rect">
             <a:avLst/>
@@ -657,7 +658,7 @@
         <p:spPr>
           <a:xfrm>
             <a:off x="8472600" y="4663080"/>
-            <a:ext cx="545040" cy="389880"/>
+            <a:ext cx="543960" cy="388800"/>
           </a:xfrm>
           <a:prstGeom prst="rect">
             <a:avLst/>
@@ -699,7 +700,7 @@
                 <a:tab algn="l" pos="0"/>
               </a:tabLst>
             </a:pPr>
-            <a:fld id="{5251C7FB-6156-41D4-AD8E-9F3051C6B77C}" type="slidenum">
+            <a:fld id="{D88D21B9-3E04-49E8-B8C2-A738967D055D}" type="slidenum">
               <a:rPr b="0" lang="en-IN" sz="1000" spc="-1" strike="noStrike">
                 <a:solidFill>
                   <a:schemeClr val="dk2"/>
@@ -1192,7 +1193,7 @@
         <p:spPr>
           <a:xfrm>
             <a:off x="216000" y="216000"/>
-            <a:ext cx="1504080" cy="644400"/>
+            <a:ext cx="1503000" cy="643320"/>
           </a:xfrm>
           <a:prstGeom prst="rect">
             <a:avLst/>
@@ -1215,7 +1216,7 @@
         <p:spPr>
           <a:xfrm>
             <a:off x="391680" y="749880"/>
-            <a:ext cx="8516880" cy="624960"/>
+            <a:ext cx="8515800" cy="624960"/>
           </a:xfrm>
           <a:prstGeom prst="rect">
             <a:avLst/>
@@ -1327,7 +1328,7 @@
         <p:spPr>
           <a:xfrm>
             <a:off x="8472600" y="4663080"/>
-            <a:ext cx="545040" cy="389880"/>
+            <a:ext cx="543960" cy="388800"/>
           </a:xfrm>
           <a:prstGeom prst="rect">
             <a:avLst/>
@@ -1369,7 +1370,7 @@
                 <a:tab algn="l" pos="0"/>
               </a:tabLst>
             </a:pPr>
-            <a:fld id="{9C502480-A9AF-46E1-92CB-CCF39A8AC0A8}" type="slidenum">
+            <a:fld id="{9A62D6D8-B120-45D0-84B2-EB18B687CF12}" type="slidenum">
               <a:rPr b="0" lang="en-IN" sz="1000" spc="-1" strike="noStrike">
                 <a:solidFill>
                   <a:schemeClr val="dk2"/>
@@ -1660,7 +1661,7 @@
         <p:spPr>
           <a:xfrm>
             <a:off x="216000" y="216000"/>
-            <a:ext cx="1504080" cy="644400"/>
+            <a:ext cx="1503000" cy="643320"/>
           </a:xfrm>
           <a:prstGeom prst="rect">
             <a:avLst/>
@@ -1683,7 +1684,7 @@
         <p:spPr>
           <a:xfrm>
             <a:off x="391680" y="749880"/>
-            <a:ext cx="8516880" cy="624960"/>
+            <a:ext cx="8515800" cy="624960"/>
           </a:xfrm>
           <a:prstGeom prst="rect">
             <a:avLst/>
@@ -1795,7 +1796,7 @@
         <p:spPr>
           <a:xfrm>
             <a:off x="8472600" y="4663080"/>
-            <a:ext cx="545040" cy="389880"/>
+            <a:ext cx="543960" cy="388800"/>
           </a:xfrm>
           <a:prstGeom prst="rect">
             <a:avLst/>
@@ -1837,7 +1838,7 @@
                 <a:tab algn="l" pos="0"/>
               </a:tabLst>
             </a:pPr>
-            <a:fld id="{49ACAB14-C1CC-40E0-BF14-6DD0C615660B}" type="slidenum">
+            <a:fld id="{2D5D0B1F-5CB7-4B53-99C5-4687F928CEB0}" type="slidenum">
               <a:rPr b="0" lang="en-IN" sz="1000" spc="-1" strike="noStrike">
                 <a:solidFill>
                   <a:schemeClr val="dk2"/>
@@ -2120,7 +2121,7 @@
         <p:spPr>
           <a:xfrm>
             <a:off x="363600" y="1375200"/>
-            <a:ext cx="8516880" cy="2760120"/>
+            <a:ext cx="8515800" cy="2759040"/>
           </a:xfrm>
           <a:prstGeom prst="rect">
             <a:avLst/>
@@ -2419,7 +2420,7 @@
         <p:spPr>
           <a:xfrm>
             <a:off x="146520" y="4490280"/>
-            <a:ext cx="9016560" cy="649440"/>
+            <a:ext cx="9015480" cy="648360"/>
           </a:xfrm>
           <a:prstGeom prst="rect">
             <a:avLst/>
@@ -2476,7 +2477,7 @@
         <p:spPr>
           <a:xfrm>
             <a:off x="1448280" y="914400"/>
-            <a:ext cx="7432200" cy="459360"/>
+            <a:ext cx="7431120" cy="458280"/>
           </a:xfrm>
           <a:prstGeom prst="rect">
             <a:avLst/>
@@ -2553,7 +2554,7 @@
       </p:grpSpPr>
       <p:sp>
         <p:nvSpPr>
-          <p:cNvPr id="49" name="PlaceHolder 1"/>
+          <p:cNvPr id="48" name="PlaceHolder 1"/>
           <p:cNvSpPr>
             <a:spLocks noGrp="1"/>
           </p:cNvSpPr>
@@ -2564,7 +2565,7 @@
         <p:spPr>
           <a:xfrm>
             <a:off x="504720" y="814680"/>
-            <a:ext cx="8499240" cy="3829320"/>
+            <a:ext cx="8498160" cy="3828240"/>
           </a:xfrm>
           <a:prstGeom prst="rect">
             <a:avLst/>
@@ -2605,14 +2606,14 @@
       </p:sp>
       <p:sp>
         <p:nvSpPr>
-          <p:cNvPr id="50" name="Google Shape;83;p10"/>
+          <p:cNvPr id="49" name="Google Shape;83;p10"/>
           <p:cNvSpPr/>
           <p:nvPr/>
         </p:nvSpPr>
         <p:spPr>
           <a:xfrm>
             <a:off x="1835640" y="185760"/>
-            <a:ext cx="5338440" cy="569160"/>
+            <a:ext cx="5337360" cy="568080"/>
           </a:xfrm>
           <a:prstGeom prst="rect">
             <a:avLst/>
@@ -2659,14 +2660,14 @@
       </p:sp>
       <p:sp>
         <p:nvSpPr>
-          <p:cNvPr id="51" name=""/>
+          <p:cNvPr id="50" name=""/>
           <p:cNvSpPr/>
           <p:nvPr/>
         </p:nvSpPr>
         <p:spPr>
           <a:xfrm>
             <a:off x="16200" y="914400"/>
-            <a:ext cx="8987760" cy="4137480"/>
+            <a:ext cx="8986680" cy="4136400"/>
           </a:xfrm>
           <a:prstGeom prst="rect">
             <a:avLst/>
@@ -3038,14 +3039,14 @@
       </p:sp>
       <p:sp>
         <p:nvSpPr>
-          <p:cNvPr id="52" name=""/>
+          <p:cNvPr id="51" name=""/>
           <p:cNvSpPr/>
           <p:nvPr/>
         </p:nvSpPr>
         <p:spPr>
           <a:xfrm>
             <a:off x="8503200" y="4645440"/>
-            <a:ext cx="639360" cy="540360"/>
+            <a:ext cx="638280" cy="539280"/>
           </a:xfrm>
           <a:prstGeom prst="rect">
             <a:avLst/>
@@ -3132,14 +3133,14 @@
       </p:grpSpPr>
       <p:sp>
         <p:nvSpPr>
-          <p:cNvPr id="53" name=""/>
+          <p:cNvPr id="52" name=""/>
           <p:cNvSpPr/>
           <p:nvPr/>
         </p:nvSpPr>
         <p:spPr>
           <a:xfrm>
             <a:off x="1080" y="685800"/>
-            <a:ext cx="9141120" cy="4227480"/>
+            <a:ext cx="9140040" cy="4226400"/>
           </a:xfrm>
           <a:prstGeom prst="rect">
             <a:avLst/>
@@ -3578,14 +3579,14 @@
       </p:sp>
       <p:sp>
         <p:nvSpPr>
-          <p:cNvPr id="54" name=""/>
+          <p:cNvPr id="53" name=""/>
           <p:cNvSpPr/>
           <p:nvPr/>
         </p:nvSpPr>
         <p:spPr>
           <a:xfrm>
             <a:off x="8478000" y="4695840"/>
-            <a:ext cx="639360" cy="540360"/>
+            <a:ext cx="638280" cy="539280"/>
           </a:xfrm>
           <a:prstGeom prst="rect">
             <a:avLst/>
@@ -3632,6 +3633,91 @@
               <a:t>12/12</a:t>
             </a:r>
             <a:endParaRPr b="0" lang="en-US" sz="1600" spc="-1" strike="noStrike">
+              <a:solidFill>
+                <a:srgbClr val="000000"/>
+              </a:solidFill>
+              <a:latin typeface="Arial"/>
+            </a:endParaRPr>
+          </a:p>
+        </p:txBody>
+      </p:sp>
+    </p:spTree>
+  </p:cSld>
+  <mc:AlternateContent>
+    <mc:Choice Requires="p14">
+      <p:transition spd="slow" p14:dur="2000"/>
+    </mc:Choice>
+    <mc:Fallback>
+      <p:transition spd="slow"/>
+    </mc:Fallback>
+  </mc:AlternateContent>
+</p:sld>
+</file>
+
+<file path=ppt/slides/slide12.xml><?xml version="1.0" encoding="utf-8"?>
+<p:sld xmlns:a="http://schemas.openxmlformats.org/drawingml/2006/main" xmlns:p="http://schemas.openxmlformats.org/presentationml/2006/main" xmlns:r="http://schemas.openxmlformats.org/officeDocument/2006/relationships" xmlns:p14="http://schemas.microsoft.com/office/powerpoint/2010/main" xmlns:p15="http://schemas.microsoft.com/office/powerpoint/2012/main" xmlns:mc="http://schemas.openxmlformats.org/markup-compatibility/2006">
+  <p:cSld>
+    <p:spTree>
+      <p:nvGrpSpPr>
+        <p:cNvPr id="1" name=""/>
+        <p:cNvGrpSpPr/>
+        <p:nvPr/>
+      </p:nvGrpSpPr>
+      <p:grpSpPr>
+        <a:xfrm>
+          <a:off x="0" y="0"/>
+          <a:ext cx="0" cy="0"/>
+          <a:chOff x="0" y="0"/>
+          <a:chExt cx="0" cy="0"/>
+        </a:xfrm>
+      </p:grpSpPr>
+      <p:sp>
+        <p:nvSpPr>
+          <p:cNvPr id="54" name="PlaceHolder 1"/>
+          <p:cNvSpPr>
+            <a:spLocks noGrp="1"/>
+          </p:cNvSpPr>
+          <p:nvPr>
+            <p:ph type="title"/>
+          </p:nvPr>
+        </p:nvSpPr>
+        <p:spPr>
+          <a:xfrm>
+            <a:off x="228600" y="2286000"/>
+            <a:ext cx="8515800" cy="624600"/>
+          </a:xfrm>
+          <a:prstGeom prst="rect">
+            <a:avLst/>
+          </a:prstGeom>
+          <a:noFill/>
+          <a:ln w="0">
+            <a:noFill/>
+          </a:ln>
+        </p:spPr>
+        <p:txBody>
+          <a:bodyPr lIns="0" rIns="0" tIns="0" bIns="0" anchor="ctr">
+            <a:noAutofit/>
+          </a:bodyPr>
+          <a:p>
+            <a:pPr indent="0" algn="ctr">
+              <a:lnSpc>
+                <a:spcPct val="100000"/>
+              </a:lnSpc>
+              <a:buNone/>
+              <a:tabLst>
+                <a:tab algn="l" pos="0"/>
+              </a:tabLst>
+            </a:pPr>
+            <a:r>
+              <a:rPr b="0" lang="en-US" sz="4400" spc="-1" strike="noStrike">
+                <a:solidFill>
+                  <a:srgbClr val="000000"/>
+                </a:solidFill>
+                <a:latin typeface="Arial"/>
+              </a:rPr>
+              <a:t>Thank You</a:t>
+            </a:r>
+            <a:endParaRPr b="0" lang="en-US" sz="4400" spc="-1" strike="noStrike">
               <a:solidFill>
                 <a:srgbClr val="000000"/>
               </a:solidFill>
@@ -3683,7 +3769,7 @@
         <p:spPr>
           <a:xfrm>
             <a:off x="2055600" y="72720"/>
-            <a:ext cx="4648320" cy="670680"/>
+            <a:ext cx="4647240" cy="669600"/>
           </a:xfrm>
           <a:prstGeom prst="rect">
             <a:avLst/>
@@ -3769,7 +3855,7 @@
         <p:spPr>
           <a:xfrm>
             <a:off x="263520" y="957960"/>
-            <a:ext cx="8516880" cy="3223800"/>
+            <a:ext cx="8515800" cy="3222720"/>
           </a:xfrm>
           <a:prstGeom prst="rect">
             <a:avLst/>
@@ -4014,7 +4100,7 @@
         <p:spPr>
           <a:xfrm>
             <a:off x="8458200" y="4827240"/>
-            <a:ext cx="684360" cy="315000"/>
+            <a:ext cx="683280" cy="313920"/>
           </a:xfrm>
           <a:prstGeom prst="rect">
             <a:avLst/>
@@ -4098,7 +4184,7 @@
         <p:spPr>
           <a:xfrm>
             <a:off x="2055600" y="72720"/>
-            <a:ext cx="4648320" cy="670680"/>
+            <a:ext cx="4647240" cy="669600"/>
           </a:xfrm>
           <a:prstGeom prst="rect">
             <a:avLst/>
@@ -4158,8 +4244,8 @@
         </p:blipFill>
         <p:spPr>
           <a:xfrm>
-            <a:off x="6629400" y="2409840"/>
-            <a:ext cx="2072880" cy="2162160"/>
+            <a:off x="5928840" y="1143000"/>
+            <a:ext cx="2986200" cy="3427920"/>
           </a:xfrm>
           <a:prstGeom prst="rect">
             <a:avLst/>
@@ -4178,7 +4264,7 @@
         <p:spPr>
           <a:xfrm>
             <a:off x="457200" y="914400"/>
-            <a:ext cx="5254560" cy="3931200"/>
+            <a:ext cx="5253480" cy="3930120"/>
           </a:xfrm>
           <a:prstGeom prst="rect">
             <a:avLst/>
@@ -4473,7 +4559,7 @@
         <p:spPr>
           <a:xfrm>
             <a:off x="8458200" y="4800600"/>
-            <a:ext cx="684360" cy="315000"/>
+            <a:ext cx="683280" cy="313920"/>
           </a:xfrm>
           <a:prstGeom prst="rect">
             <a:avLst/>
@@ -4518,29 +4604,6 @@
           </a:p>
         </p:txBody>
       </p:sp>
-      <p:pic>
-        <p:nvPicPr>
-          <p:cNvPr id="29" name="" descr=""/>
-          <p:cNvPicPr/>
-          <p:nvPr/>
-        </p:nvPicPr>
-        <p:blipFill>
-          <a:blip r:embed="rId2"/>
-          <a:stretch/>
-        </p:blipFill>
-        <p:spPr>
-          <a:xfrm>
-            <a:off x="6172560" y="685800"/>
-            <a:ext cx="2742840" cy="1600200"/>
-          </a:xfrm>
-          <a:prstGeom prst="rect">
-            <a:avLst/>
-          </a:prstGeom>
-          <a:ln w="0">
-            <a:noFill/>
-          </a:ln>
-        </p:spPr>
-      </p:pic>
     </p:spTree>
   </p:cSld>
   <mc:AlternateContent>
@@ -4573,14 +4636,14 @@
       </p:grpSpPr>
       <p:sp>
         <p:nvSpPr>
-          <p:cNvPr id="30" name="Google Shape;44;p4"/>
+          <p:cNvPr id="29" name="Google Shape;44;p4"/>
           <p:cNvSpPr/>
           <p:nvPr/>
         </p:nvSpPr>
         <p:spPr>
           <a:xfrm>
             <a:off x="2055600" y="72720"/>
-            <a:ext cx="4648320" cy="670680"/>
+            <a:ext cx="4647240" cy="669600"/>
           </a:xfrm>
           <a:prstGeom prst="rect">
             <a:avLst/>
@@ -4630,7 +4693,7 @@
       </p:sp>
       <p:graphicFrame>
         <p:nvGraphicFramePr>
-          <p:cNvPr id="31" name="Google Shape;45;p4"/>
+          <p:cNvPr id="30" name="Google Shape;45;p4"/>
           <p:cNvGraphicFramePr/>
           <p:nvPr/>
         </p:nvGraphicFramePr>
@@ -6115,14 +6178,14 @@
       </p:graphicFrame>
       <p:sp>
         <p:nvSpPr>
-          <p:cNvPr id="32" name=""/>
+          <p:cNvPr id="31" name=""/>
           <p:cNvSpPr/>
           <p:nvPr/>
         </p:nvSpPr>
         <p:spPr>
           <a:xfrm>
             <a:off x="8458200" y="4827240"/>
-            <a:ext cx="684360" cy="315000"/>
+            <a:ext cx="683280" cy="313920"/>
           </a:xfrm>
           <a:prstGeom prst="rect">
             <a:avLst/>
@@ -6199,7 +6262,7 @@
       </p:grpSpPr>
       <p:graphicFrame>
         <p:nvGraphicFramePr>
-          <p:cNvPr id="33" name="Google Shape;45;p 1"/>
+          <p:cNvPr id="32" name="Google Shape;45;p 1"/>
           <p:cNvGraphicFramePr/>
           <p:nvPr/>
         </p:nvGraphicFramePr>
@@ -7658,14 +7721,14 @@
       </p:graphicFrame>
       <p:sp>
         <p:nvSpPr>
-          <p:cNvPr id="34" name=""/>
+          <p:cNvPr id="33" name=""/>
           <p:cNvSpPr/>
           <p:nvPr/>
         </p:nvSpPr>
         <p:spPr>
           <a:xfrm>
             <a:off x="8458200" y="4800240"/>
-            <a:ext cx="684360" cy="315000"/>
+            <a:ext cx="683280" cy="313920"/>
           </a:xfrm>
           <a:prstGeom prst="rect">
             <a:avLst/>
@@ -7742,7 +7805,7 @@
       </p:grpSpPr>
       <p:sp>
         <p:nvSpPr>
-          <p:cNvPr id="35" name="PlaceHolder 1"/>
+          <p:cNvPr id="34" name="PlaceHolder 1"/>
           <p:cNvSpPr>
             <a:spLocks noGrp="1"/>
           </p:cNvSpPr>
@@ -7753,7 +7816,7 @@
         <p:spPr>
           <a:xfrm>
             <a:off x="1917000" y="176760"/>
-            <a:ext cx="6918840" cy="613800"/>
+            <a:ext cx="6917760" cy="612720"/>
           </a:xfrm>
           <a:prstGeom prst="rect">
             <a:avLst/>
@@ -7785,7 +7848,7 @@
                 <a:latin typeface="Times New Roman"/>
                 <a:ea typeface="Times New Roman"/>
               </a:rPr>
-              <a:t>S</a:t>
+              <a:t>Summary of the literature </a:t>
             </a:r>
             <a:r>
               <a:rPr b="0" lang="en-IN" sz="3600" spc="-1" strike="noStrike">
@@ -7795,157 +7858,7 @@
                 <a:latin typeface="Times New Roman"/>
                 <a:ea typeface="Times New Roman"/>
               </a:rPr>
-              <a:t>u</a:t>
-            </a:r>
-            <a:r>
-              <a:rPr b="0" lang="en-IN" sz="3600" spc="-1" strike="noStrike">
-                <a:solidFill>
-                  <a:schemeClr val="dk1"/>
-                </a:solidFill>
-                <a:latin typeface="Times New Roman"/>
-                <a:ea typeface="Times New Roman"/>
-              </a:rPr>
-              <a:t>m</a:t>
-            </a:r>
-            <a:r>
-              <a:rPr b="0" lang="en-IN" sz="3600" spc="-1" strike="noStrike">
-                <a:solidFill>
-                  <a:schemeClr val="dk1"/>
-                </a:solidFill>
-                <a:latin typeface="Times New Roman"/>
-                <a:ea typeface="Times New Roman"/>
-              </a:rPr>
-              <a:t>m</a:t>
-            </a:r>
-            <a:r>
-              <a:rPr b="0" lang="en-IN" sz="3600" spc="-1" strike="noStrike">
-                <a:solidFill>
-                  <a:schemeClr val="dk1"/>
-                </a:solidFill>
-                <a:latin typeface="Times New Roman"/>
-                <a:ea typeface="Times New Roman"/>
-              </a:rPr>
-              <a:t>ar</a:t>
-            </a:r>
-            <a:r>
-              <a:rPr b="0" lang="en-IN" sz="3600" spc="-1" strike="noStrike">
-                <a:solidFill>
-                  <a:schemeClr val="dk1"/>
-                </a:solidFill>
-                <a:latin typeface="Times New Roman"/>
-                <a:ea typeface="Times New Roman"/>
-              </a:rPr>
-              <a:t>y </a:t>
-            </a:r>
-            <a:r>
-              <a:rPr b="0" lang="en-IN" sz="3600" spc="-1" strike="noStrike">
-                <a:solidFill>
-                  <a:schemeClr val="dk1"/>
-                </a:solidFill>
-                <a:latin typeface="Times New Roman"/>
-                <a:ea typeface="Times New Roman"/>
-              </a:rPr>
-              <a:t>of </a:t>
-            </a:r>
-            <a:r>
-              <a:rPr b="0" lang="en-IN" sz="3600" spc="-1" strike="noStrike">
-                <a:solidFill>
-                  <a:schemeClr val="dk1"/>
-                </a:solidFill>
-                <a:latin typeface="Times New Roman"/>
-                <a:ea typeface="Times New Roman"/>
-              </a:rPr>
-              <a:t>th</a:t>
-            </a:r>
-            <a:r>
-              <a:rPr b="0" lang="en-IN" sz="3600" spc="-1" strike="noStrike">
-                <a:solidFill>
-                  <a:schemeClr val="dk1"/>
-                </a:solidFill>
-                <a:latin typeface="Times New Roman"/>
-                <a:ea typeface="Times New Roman"/>
-              </a:rPr>
-              <a:t>e </a:t>
-            </a:r>
-            <a:r>
-              <a:rPr b="0" lang="en-IN" sz="3600" spc="-1" strike="noStrike">
-                <a:solidFill>
-                  <a:schemeClr val="dk1"/>
-                </a:solidFill>
-                <a:latin typeface="Times New Roman"/>
-                <a:ea typeface="Times New Roman"/>
-              </a:rPr>
-              <a:t>lit</a:t>
-            </a:r>
-            <a:r>
-              <a:rPr b="0" lang="en-IN" sz="3600" spc="-1" strike="noStrike">
-                <a:solidFill>
-                  <a:schemeClr val="dk1"/>
-                </a:solidFill>
-                <a:latin typeface="Times New Roman"/>
-                <a:ea typeface="Times New Roman"/>
-              </a:rPr>
-              <a:t>er</a:t>
-            </a:r>
-            <a:r>
-              <a:rPr b="0" lang="en-IN" sz="3600" spc="-1" strike="noStrike">
-                <a:solidFill>
-                  <a:schemeClr val="dk1"/>
-                </a:solidFill>
-                <a:latin typeface="Times New Roman"/>
-                <a:ea typeface="Times New Roman"/>
-              </a:rPr>
-              <a:t>at</a:t>
-            </a:r>
-            <a:r>
-              <a:rPr b="0" lang="en-IN" sz="3600" spc="-1" strike="noStrike">
-                <a:solidFill>
-                  <a:schemeClr val="dk1"/>
-                </a:solidFill>
-                <a:latin typeface="Times New Roman"/>
-                <a:ea typeface="Times New Roman"/>
-              </a:rPr>
-              <a:t>ur</a:t>
-            </a:r>
-            <a:r>
-              <a:rPr b="0" lang="en-IN" sz="3600" spc="-1" strike="noStrike">
-                <a:solidFill>
-                  <a:schemeClr val="dk1"/>
-                </a:solidFill>
-                <a:latin typeface="Times New Roman"/>
-                <a:ea typeface="Times New Roman"/>
-              </a:rPr>
-              <a:t>e </a:t>
-            </a:r>
-            <a:r>
-              <a:rPr b="0" lang="en-IN" sz="3600" spc="-1" strike="noStrike">
-                <a:solidFill>
-                  <a:schemeClr val="dk1"/>
-                </a:solidFill>
-                <a:latin typeface="Times New Roman"/>
-                <a:ea typeface="Times New Roman"/>
-              </a:rPr>
-              <a:t>su</a:t>
-            </a:r>
-            <a:r>
-              <a:rPr b="0" lang="en-IN" sz="3600" spc="-1" strike="noStrike">
-                <a:solidFill>
-                  <a:schemeClr val="dk1"/>
-                </a:solidFill>
-                <a:latin typeface="Times New Roman"/>
-                <a:ea typeface="Times New Roman"/>
-              </a:rPr>
-              <a:t>rv</a:t>
-            </a:r>
-            <a:r>
-              <a:rPr b="0" lang="en-IN" sz="3600" spc="-1" strike="noStrike">
-                <a:solidFill>
-                  <a:schemeClr val="dk1"/>
-                </a:solidFill>
-                <a:latin typeface="Times New Roman"/>
-                <a:ea typeface="Times New Roman"/>
-              </a:rPr>
-              <a:t>ey</a:t>
+              <a:t>survey</a:t>
             </a:r>
             <a:endParaRPr b="0" lang="en-US" sz="3600" spc="-1" strike="noStrike">
               <a:solidFill>
@@ -7958,14 +7871,14 @@
       </p:sp>
       <p:sp>
         <p:nvSpPr>
-          <p:cNvPr id="36" name="Google Shape;53;p5"/>
+          <p:cNvPr id="35" name="Google Shape;53;p5"/>
           <p:cNvSpPr/>
           <p:nvPr/>
         </p:nvSpPr>
         <p:spPr>
           <a:xfrm>
             <a:off x="311760" y="1340640"/>
-            <a:ext cx="8516880" cy="3108600"/>
+            <a:ext cx="8515800" cy="3107520"/>
           </a:xfrm>
           <a:prstGeom prst="rect">
             <a:avLst/>
@@ -8015,14 +7928,14 @@
       </p:sp>
       <p:sp>
         <p:nvSpPr>
-          <p:cNvPr id="37" name=""/>
+          <p:cNvPr id="36" name=""/>
           <p:cNvSpPr/>
           <p:nvPr/>
         </p:nvSpPr>
         <p:spPr>
           <a:xfrm>
             <a:off x="8458200" y="4833000"/>
-            <a:ext cx="684360" cy="315000"/>
+            <a:ext cx="683280" cy="313920"/>
           </a:xfrm>
           <a:prstGeom prst="rect">
             <a:avLst/>
@@ -8069,14 +7982,14 @@
       </p:sp>
       <p:sp>
         <p:nvSpPr>
-          <p:cNvPr id="38" name=""/>
+          <p:cNvPr id="37" name=""/>
           <p:cNvSpPr/>
           <p:nvPr/>
         </p:nvSpPr>
         <p:spPr>
           <a:xfrm>
             <a:off x="457200" y="1414440"/>
-            <a:ext cx="7771680" cy="2471040"/>
+            <a:ext cx="7770600" cy="2469960"/>
           </a:xfrm>
           <a:prstGeom prst="rect">
             <a:avLst/>
@@ -8153,14 +8066,14 @@
       </p:grpSpPr>
       <p:sp>
         <p:nvSpPr>
-          <p:cNvPr id="39" name="Google Shape;59;p6"/>
+          <p:cNvPr id="38" name="Google Shape;59;p6"/>
           <p:cNvSpPr/>
           <p:nvPr/>
         </p:nvSpPr>
         <p:spPr>
           <a:xfrm>
             <a:off x="279000" y="2457360"/>
-            <a:ext cx="360" cy="438840"/>
+            <a:ext cx="360" cy="437760"/>
           </a:xfrm>
           <a:prstGeom prst="rect">
             <a:avLst/>
@@ -8200,14 +8113,14 @@
       </p:sp>
       <p:sp>
         <p:nvSpPr>
-          <p:cNvPr id="40" name="Google Shape;60;p6"/>
+          <p:cNvPr id="39" name="Google Shape;60;p6"/>
           <p:cNvSpPr/>
           <p:nvPr/>
         </p:nvSpPr>
         <p:spPr>
           <a:xfrm>
             <a:off x="1911240" y="136800"/>
-            <a:ext cx="6102360" cy="636120"/>
+            <a:ext cx="6101280" cy="635040"/>
           </a:xfrm>
           <a:prstGeom prst="rect">
             <a:avLst/>
@@ -8267,14 +8180,14 @@
       </p:sp>
       <p:sp>
         <p:nvSpPr>
-          <p:cNvPr id="41" name=""/>
+          <p:cNvPr id="40" name=""/>
           <p:cNvSpPr/>
           <p:nvPr/>
         </p:nvSpPr>
         <p:spPr>
           <a:xfrm>
             <a:off x="45000" y="1089000"/>
-            <a:ext cx="8867160" cy="3936960"/>
+            <a:ext cx="8866080" cy="3935880"/>
           </a:xfrm>
           <a:prstGeom prst="rect">
             <a:avLst/>
@@ -8479,14 +8392,14 @@
       </p:sp>
       <p:sp>
         <p:nvSpPr>
-          <p:cNvPr id="42" name=""/>
+          <p:cNvPr id="41" name=""/>
           <p:cNvSpPr/>
           <p:nvPr/>
         </p:nvSpPr>
         <p:spPr>
           <a:xfrm>
             <a:off x="8553240" y="4827240"/>
-            <a:ext cx="589320" cy="315000"/>
+            <a:ext cx="588240" cy="313920"/>
           </a:xfrm>
           <a:prstGeom prst="rect">
             <a:avLst/>
@@ -8573,14 +8486,14 @@
       </p:grpSpPr>
       <p:sp>
         <p:nvSpPr>
-          <p:cNvPr id="43" name="Google Shape;60;p6"/>
+          <p:cNvPr id="42" name="Google Shape;60;p6"/>
           <p:cNvSpPr/>
           <p:nvPr/>
         </p:nvSpPr>
         <p:spPr>
           <a:xfrm>
             <a:off x="1911240" y="136800"/>
-            <a:ext cx="6102360" cy="636120"/>
+            <a:ext cx="6101280" cy="635040"/>
           </a:xfrm>
           <a:prstGeom prst="rect">
             <a:avLst/>
@@ -8640,14 +8553,14 @@
       </p:sp>
       <p:sp>
         <p:nvSpPr>
-          <p:cNvPr id="44" name=""/>
+          <p:cNvPr id="43" name=""/>
           <p:cNvSpPr/>
           <p:nvPr/>
         </p:nvSpPr>
         <p:spPr>
           <a:xfrm>
             <a:off x="230040" y="914400"/>
-            <a:ext cx="8683920" cy="3715920"/>
+            <a:ext cx="8682840" cy="3714840"/>
           </a:xfrm>
           <a:prstGeom prst="rect">
             <a:avLst/>
@@ -8991,16 +8904,6 @@
               <a:buFont typeface="Wingdings" charset="2"/>
               <a:buChar char=""/>
             </a:pPr>
-            <a:r>
-              <a:rPr b="0" lang="en-US" sz="1500" spc="-1" strike="noStrike">
-                <a:solidFill>
-                  <a:srgbClr val="000000"/>
-                </a:solidFill>
-                <a:latin typeface="times new roman"/>
-                <a:ea typeface="Noto Sans CJK SC"/>
-              </a:rPr>
-              <a:t>Volumetric display: Projects visuals into free space.</a:t>
-            </a:r>
             <a:endParaRPr b="0" lang="en-US" sz="1500" spc="-1" strike="noStrike">
               <a:solidFill>
                 <a:srgbClr val="000000"/>
@@ -9069,14 +8972,14 @@
       </p:sp>
       <p:sp>
         <p:nvSpPr>
-          <p:cNvPr id="45" name=""/>
+          <p:cNvPr id="44" name=""/>
           <p:cNvSpPr/>
           <p:nvPr/>
         </p:nvSpPr>
         <p:spPr>
           <a:xfrm>
             <a:off x="8458200" y="4800600"/>
-            <a:ext cx="603360" cy="315000"/>
+            <a:ext cx="602280" cy="313920"/>
           </a:xfrm>
           <a:prstGeom prst="rect">
             <a:avLst/>
@@ -9163,14 +9066,14 @@
       </p:grpSpPr>
       <p:sp>
         <p:nvSpPr>
-          <p:cNvPr id="46" name=""/>
+          <p:cNvPr id="45" name=""/>
           <p:cNvSpPr/>
           <p:nvPr/>
         </p:nvSpPr>
         <p:spPr>
           <a:xfrm>
             <a:off x="2743200" y="457200"/>
-            <a:ext cx="2283480" cy="822600"/>
+            <a:ext cx="2282400" cy="821520"/>
           </a:xfrm>
           <a:prstGeom prst="rect">
             <a:avLst/>
@@ -9220,14 +9123,14 @@
       </p:sp>
       <p:sp>
         <p:nvSpPr>
-          <p:cNvPr id="47" name=""/>
+          <p:cNvPr id="46" name=""/>
           <p:cNvSpPr/>
           <p:nvPr/>
         </p:nvSpPr>
         <p:spPr>
           <a:xfrm>
             <a:off x="8458200" y="4572000"/>
-            <a:ext cx="684360" cy="768960"/>
+            <a:ext cx="683280" cy="767880"/>
           </a:xfrm>
           <a:prstGeom prst="rect">
             <a:avLst/>
@@ -9284,7 +9187,7 @@
       </p:sp>
       <p:pic>
         <p:nvPicPr>
-          <p:cNvPr id="48" name="" descr=""/>
+          <p:cNvPr id="47" name="" descr=""/>
           <p:cNvPicPr/>
           <p:nvPr/>
         </p:nvPicPr>
@@ -9295,7 +9198,7 @@
         <p:spPr>
           <a:xfrm>
             <a:off x="914400" y="1371600"/>
-            <a:ext cx="6863760" cy="2901600"/>
+            <a:ext cx="6862680" cy="2900520"/>
           </a:xfrm>
           <a:prstGeom prst="rect">
             <a:avLst/>
